--- a/assets/investor-deck/Tecnotitan-Investor-Deck-KO.pptx
+++ b/assets/investor-deck/Tecnotitan-Investor-Deck-KO.pptx
@@ -2,24 +2,24 @@
 <file path=ppt/presentation.xml><?xml version="1.0" encoding="utf-8"?>
 <p:presentation xmlns:p="http://schemas.openxmlformats.org/presentationml/2006/main">
   <p:sldMasterIdLst>
-    <p:sldMasterId xmlns:r="http://schemas.openxmlformats.org/officeDocument/2006/relationships" id="2147483648" r:id="R374e4ddbc80a40ec"/>
+    <p:sldMasterId xmlns:r="http://schemas.openxmlformats.org/officeDocument/2006/relationships" id="2147483648" r:id="R57194d2c74b14d2c"/>
   </p:sldMasterIdLst>
   <p:notesMasterIdLst>
-    <p:notesMasterId xmlns:r="http://schemas.openxmlformats.org/officeDocument/2006/relationships" r:id="R8cd631afc27a462e"/>
+    <p:notesMasterId xmlns:r="http://schemas.openxmlformats.org/officeDocument/2006/relationships" r:id="R382de55a28fc4637"/>
   </p:notesMasterIdLst>
   <p:sldIdLst>
-    <p:sldId xmlns:r="http://schemas.openxmlformats.org/officeDocument/2006/relationships" id="256" r:id="R4280441550394a34"/>
-    <p:sldId xmlns:r="http://schemas.openxmlformats.org/officeDocument/2006/relationships" id="257" r:id="Rea49e9e4a01f4e7b"/>
-    <p:sldId xmlns:r="http://schemas.openxmlformats.org/officeDocument/2006/relationships" id="258" r:id="Raed34d2d561c4229"/>
-    <p:sldId xmlns:r="http://schemas.openxmlformats.org/officeDocument/2006/relationships" id="259" r:id="Rb9f012d95d424859"/>
-    <p:sldId xmlns:r="http://schemas.openxmlformats.org/officeDocument/2006/relationships" id="260" r:id="R7beeb890904341e0"/>
-    <p:sldId xmlns:r="http://schemas.openxmlformats.org/officeDocument/2006/relationships" id="261" r:id="R4979451ea83a480c"/>
-    <p:sldId xmlns:r="http://schemas.openxmlformats.org/officeDocument/2006/relationships" id="262" r:id="Rfaf96bfac36a4957"/>
-    <p:sldId xmlns:r="http://schemas.openxmlformats.org/officeDocument/2006/relationships" id="263" r:id="R2c64340853c84a92"/>
-    <p:sldId xmlns:r="http://schemas.openxmlformats.org/officeDocument/2006/relationships" id="264" r:id="R3b60c1d94bd448e3"/>
-    <p:sldId xmlns:r="http://schemas.openxmlformats.org/officeDocument/2006/relationships" id="265" r:id="R87da0c23acbe46d8"/>
-    <p:sldId xmlns:r="http://schemas.openxmlformats.org/officeDocument/2006/relationships" id="266" r:id="R9ab05579aa2a4d1a"/>
-    <p:sldId xmlns:r="http://schemas.openxmlformats.org/officeDocument/2006/relationships" id="267" r:id="R87fe9f609c664da9"/>
+    <p:sldId xmlns:r="http://schemas.openxmlformats.org/officeDocument/2006/relationships" id="256" r:id="Rbda48e98b8274edd"/>
+    <p:sldId xmlns:r="http://schemas.openxmlformats.org/officeDocument/2006/relationships" id="257" r:id="Rcb022141d8484572"/>
+    <p:sldId xmlns:r="http://schemas.openxmlformats.org/officeDocument/2006/relationships" id="258" r:id="Rfe0fc431e6264a77"/>
+    <p:sldId xmlns:r="http://schemas.openxmlformats.org/officeDocument/2006/relationships" id="259" r:id="R7779df00ab8e4d5d"/>
+    <p:sldId xmlns:r="http://schemas.openxmlformats.org/officeDocument/2006/relationships" id="260" r:id="R527a5b8dec6e4bd3"/>
+    <p:sldId xmlns:r="http://schemas.openxmlformats.org/officeDocument/2006/relationships" id="261" r:id="Rca5f8b0c500c4d1a"/>
+    <p:sldId xmlns:r="http://schemas.openxmlformats.org/officeDocument/2006/relationships" id="262" r:id="R739abc7e13e14c91"/>
+    <p:sldId xmlns:r="http://schemas.openxmlformats.org/officeDocument/2006/relationships" id="263" r:id="R9bfdca5f6bd54429"/>
+    <p:sldId xmlns:r="http://schemas.openxmlformats.org/officeDocument/2006/relationships" id="264" r:id="Rb49bc0eec67248dc"/>
+    <p:sldId xmlns:r="http://schemas.openxmlformats.org/officeDocument/2006/relationships" id="265" r:id="R15bd298a0647416d"/>
+    <p:sldId xmlns:r="http://schemas.openxmlformats.org/officeDocument/2006/relationships" id="266" r:id="R5b0e57856e1c4592"/>
+    <p:sldId xmlns:r="http://schemas.openxmlformats.org/officeDocument/2006/relationships" id="267" r:id="R6115c25de6e24548"/>
   </p:sldIdLst>
   <p:sldSz cx="12192000" cy="6858000"/>
   <p:notesSz cx="6858000" cy="9144000"/>
@@ -1292,7 +1292,7 @@
   </p:cSld>
   <p:clrMap bg1="lt1" tx1="dk1" bg2="lt2" tx2="dk2" accent1="accent1" accent2="accent2" accent3="accent3" accent4="accent4" accent5="accent5" accent6="accent6" hlink="hlink" folHlink="folHlink"/>
   <p:sldLayoutIdLst>
-    <p:sldLayoutId xmlns:r="http://schemas.openxmlformats.org/officeDocument/2006/relationships" id="2147483649" r:id="R72f6708491204c42"/>
+    <p:sldLayoutId xmlns:r="http://schemas.openxmlformats.org/officeDocument/2006/relationships" id="2147483649" r:id="R87aa025d33cc4798"/>
   </p:sldLayoutIdLst>
   <p:txStyles>
     <p:titleStyle>
@@ -1794,7 +1794,7 @@
           <p:nvPr/>
         </p:nvPicPr>
         <p:blipFill>
-          <a:blip xmlns:r="http://schemas.openxmlformats.org/officeDocument/2006/relationships" xmlns:a="http://schemas.openxmlformats.org/drawingml/2006/main" r:embed="R560c5eb4ae6f48aa"/>
+          <a:blip xmlns:r="http://schemas.openxmlformats.org/officeDocument/2006/relationships" xmlns:a="http://schemas.openxmlformats.org/drawingml/2006/main" r:embed="Re781060f9c6547d5"/>
           <a:srcRect xmlns:a="http://schemas.openxmlformats.org/drawingml/2006/main" l="0" t="7813" r="0" b="7813"/>
           <a:stretch xmlns:a="http://schemas.openxmlformats.org/drawingml/2006/main">
             <a:fillRect l="0" t="0" r="0" b="0"/>
@@ -1815,7 +1815,7 @@
           <p:cNvPr id="2" name="">
             <a:extLst xmlns:a="http://schemas.openxmlformats.org/drawingml/2006/main">
               <a:ext uri="{FF2B5EF4-FFF2-40B4-BE49-F238E27FC236}">
-                <a16:creationId xmlns:a16="http://schemas.microsoft.com/office/drawing/2014/main" id="{5D395B88-A7E8-4C7E-9A40-9816B0E4291A}"/>
+                <a16:creationId xmlns:a16="http://schemas.microsoft.com/office/drawing/2014/main" id="{C1F1040F-6B93-4A38-AC1D-CB15FB9DA4E5}"/>
               </a:ext>
             </a:extLst>
           </p:cNvPr>
@@ -1852,7 +1852,7 @@
           <p:cNvPr id="3" name="">
             <a:extLst xmlns:a="http://schemas.openxmlformats.org/drawingml/2006/main">
               <a:ext uri="{FF2B5EF4-FFF2-40B4-BE49-F238E27FC236}">
-                <a16:creationId xmlns:a16="http://schemas.microsoft.com/office/drawing/2014/main" id="{A3532B92-8B68-4EFB-A81A-0D0800B90487}"/>
+                <a16:creationId xmlns:a16="http://schemas.microsoft.com/office/drawing/2014/main" id="{DAA46EF3-6A90-499C-8A10-0346F902C579}"/>
               </a:ext>
             </a:extLst>
           </p:cNvPr>
@@ -1889,7 +1889,7 @@
           <p:cNvPr id="4" name="">
             <a:extLst xmlns:a="http://schemas.openxmlformats.org/drawingml/2006/main">
               <a:ext uri="{FF2B5EF4-FFF2-40B4-BE49-F238E27FC236}">
-                <a16:creationId xmlns:a16="http://schemas.microsoft.com/office/drawing/2014/main" id="{13971BA0-85DB-418A-B153-F8200EDCBBCC}"/>
+                <a16:creationId xmlns:a16="http://schemas.microsoft.com/office/drawing/2014/main" id="{E7341719-5252-44EE-9521-C3476DCE15A6}"/>
               </a:ext>
             </a:extLst>
           </p:cNvPr>
@@ -1953,7 +1953,7 @@
           <p:cNvPr id="5" name="">
             <a:extLst xmlns:a="http://schemas.openxmlformats.org/drawingml/2006/main">
               <a:ext uri="{FF2B5EF4-FFF2-40B4-BE49-F238E27FC236}">
-                <a16:creationId xmlns:a16="http://schemas.microsoft.com/office/drawing/2014/main" id="{2971611B-C5F1-421F-A2B1-0FF65AC36C01}"/>
+                <a16:creationId xmlns:a16="http://schemas.microsoft.com/office/drawing/2014/main" id="{8F7B46D7-52BA-4296-A843-6DB783EED748}"/>
               </a:ext>
             </a:extLst>
           </p:cNvPr>
@@ -2017,7 +2017,7 @@
           <p:cNvPr id="6" name="">
             <a:extLst xmlns:a="http://schemas.openxmlformats.org/drawingml/2006/main">
               <a:ext uri="{FF2B5EF4-FFF2-40B4-BE49-F238E27FC236}">
-                <a16:creationId xmlns:a16="http://schemas.microsoft.com/office/drawing/2014/main" id="{441BB7DF-FDA9-4451-AB3A-839AE5AFA5F3}"/>
+                <a16:creationId xmlns:a16="http://schemas.microsoft.com/office/drawing/2014/main" id="{D096429B-EF73-4FB5-88EA-E9D8986636AC}"/>
               </a:ext>
             </a:extLst>
           </p:cNvPr>
@@ -2050,7 +2050,7 @@
           <p:cNvPr id="7" name="">
             <a:extLst xmlns:a="http://schemas.openxmlformats.org/drawingml/2006/main">
               <a:ext uri="{FF2B5EF4-FFF2-40B4-BE49-F238E27FC236}">
-                <a16:creationId xmlns:a16="http://schemas.microsoft.com/office/drawing/2014/main" id="{08F9BB63-53B4-4945-9011-B881F4C115C8}"/>
+                <a16:creationId xmlns:a16="http://schemas.microsoft.com/office/drawing/2014/main" id="{9C0D5E9B-94A3-4FD6-A554-AA6686CF67E1}"/>
               </a:ext>
             </a:extLst>
           </p:cNvPr>
@@ -2114,7 +2114,7 @@
           <p:cNvPr id="8" name="">
             <a:extLst xmlns:a="http://schemas.openxmlformats.org/drawingml/2006/main">
               <a:ext uri="{FF2B5EF4-FFF2-40B4-BE49-F238E27FC236}">
-                <a16:creationId xmlns:a16="http://schemas.microsoft.com/office/drawing/2014/main" id="{FE459229-6EAF-4205-8297-2974453DC0AB}"/>
+                <a16:creationId xmlns:a16="http://schemas.microsoft.com/office/drawing/2014/main" id="{80C1F4FA-C7DE-44E3-BEA9-45AC78E8D130}"/>
               </a:ext>
             </a:extLst>
           </p:cNvPr>
@@ -2178,7 +2178,7 @@
           <p:cNvPr id="9" name="">
             <a:extLst xmlns:a="http://schemas.openxmlformats.org/drawingml/2006/main">
               <a:ext uri="{FF2B5EF4-FFF2-40B4-BE49-F238E27FC236}">
-                <a16:creationId xmlns:a16="http://schemas.microsoft.com/office/drawing/2014/main" id="{75BC1A1B-CA48-4551-89D5-81BC522C2027}"/>
+                <a16:creationId xmlns:a16="http://schemas.microsoft.com/office/drawing/2014/main" id="{AA6ACDC6-ADB7-49BB-934F-86FC2E3E5010}"/>
               </a:ext>
             </a:extLst>
           </p:cNvPr>
@@ -2213,7 +2213,7 @@
           <p:cNvPr id="10" name="">
             <a:extLst xmlns:a="http://schemas.openxmlformats.org/drawingml/2006/main">
               <a:ext uri="{FF2B5EF4-FFF2-40B4-BE49-F238E27FC236}">
-                <a16:creationId xmlns:a16="http://schemas.microsoft.com/office/drawing/2014/main" id="{FA68CF1D-10E2-40D5-A742-FAA47384B1AE}"/>
+                <a16:creationId xmlns:a16="http://schemas.microsoft.com/office/drawing/2014/main" id="{1D24086B-9227-4118-9D5D-AE6296551443}"/>
               </a:ext>
             </a:extLst>
           </p:cNvPr>
@@ -2277,7 +2277,7 @@
           <p:cNvPr id="11" name="">
             <a:extLst xmlns:a="http://schemas.openxmlformats.org/drawingml/2006/main">
               <a:ext uri="{FF2B5EF4-FFF2-40B4-BE49-F238E27FC236}">
-                <a16:creationId xmlns:a16="http://schemas.microsoft.com/office/drawing/2014/main" id="{C03E555C-EABC-4DBF-B5CD-FBF054775473}"/>
+                <a16:creationId xmlns:a16="http://schemas.microsoft.com/office/drawing/2014/main" id="{AF4B0665-DA9C-42F5-8A9C-BD7250403DDC}"/>
               </a:ext>
             </a:extLst>
           </p:cNvPr>
@@ -2312,7 +2312,7 @@
           <p:cNvPr id="12" name="">
             <a:extLst xmlns:a="http://schemas.openxmlformats.org/drawingml/2006/main">
               <a:ext uri="{FF2B5EF4-FFF2-40B4-BE49-F238E27FC236}">
-                <a16:creationId xmlns:a16="http://schemas.microsoft.com/office/drawing/2014/main" id="{270EE141-D95E-43CA-A00A-C69582AFBDBA}"/>
+                <a16:creationId xmlns:a16="http://schemas.microsoft.com/office/drawing/2014/main" id="{1D01634C-CFCA-4DD8-85FB-DDFFAF9F1ECA}"/>
               </a:ext>
             </a:extLst>
           </p:cNvPr>
@@ -2376,7 +2376,7 @@
           <p:cNvPr id="13" name="">
             <a:extLst xmlns:a="http://schemas.openxmlformats.org/drawingml/2006/main">
               <a:ext uri="{FF2B5EF4-FFF2-40B4-BE49-F238E27FC236}">
-                <a16:creationId xmlns:a16="http://schemas.microsoft.com/office/drawing/2014/main" id="{E777ADAC-D1EC-41D9-B0E6-6C61B51249CA}"/>
+                <a16:creationId xmlns:a16="http://schemas.microsoft.com/office/drawing/2014/main" id="{672F298F-17E9-4DD8-871B-891AB9420609}"/>
               </a:ext>
             </a:extLst>
           </p:cNvPr>
@@ -2411,7 +2411,7 @@
           <p:cNvPr id="14" name="">
             <a:extLst xmlns:a="http://schemas.openxmlformats.org/drawingml/2006/main">
               <a:ext uri="{FF2B5EF4-FFF2-40B4-BE49-F238E27FC236}">
-                <a16:creationId xmlns:a16="http://schemas.microsoft.com/office/drawing/2014/main" id="{8C61F668-2901-41ED-BB3E-EE5B1FDC0359}"/>
+                <a16:creationId xmlns:a16="http://schemas.microsoft.com/office/drawing/2014/main" id="{97DDFD91-DC42-4839-A89F-6DAE86B082D5}"/>
               </a:ext>
             </a:extLst>
           </p:cNvPr>
@@ -2475,7 +2475,7 @@
           <p:cNvPr id="15" name="">
             <a:extLst xmlns:a="http://schemas.openxmlformats.org/drawingml/2006/main">
               <a:ext uri="{FF2B5EF4-FFF2-40B4-BE49-F238E27FC236}">
-                <a16:creationId xmlns:a16="http://schemas.microsoft.com/office/drawing/2014/main" id="{5CE7D06B-11B0-4165-B3E1-E372AF9A5503}"/>
+                <a16:creationId xmlns:a16="http://schemas.microsoft.com/office/drawing/2014/main" id="{15FBA796-F7B6-4FAC-84B0-706F9DE65B28}"/>
               </a:ext>
             </a:extLst>
           </p:cNvPr>
@@ -2539,7 +2539,7 @@
           <p:cNvPr id="16" name="">
             <a:extLst xmlns:a="http://schemas.openxmlformats.org/drawingml/2006/main">
               <a:ext uri="{FF2B5EF4-FFF2-40B4-BE49-F238E27FC236}">
-                <a16:creationId xmlns:a16="http://schemas.microsoft.com/office/drawing/2014/main" id="{C545C154-54FA-40CA-A468-65C96D7470B0}"/>
+                <a16:creationId xmlns:a16="http://schemas.microsoft.com/office/drawing/2014/main" id="{EEFE7257-3DD7-4866-9673-F34544B85CB8}"/>
               </a:ext>
             </a:extLst>
           </p:cNvPr>
@@ -2574,7 +2574,7 @@
           <p:cNvPr id="17" name="">
             <a:extLst xmlns:a="http://schemas.openxmlformats.org/drawingml/2006/main">
               <a:ext uri="{FF2B5EF4-FFF2-40B4-BE49-F238E27FC236}">
-                <a16:creationId xmlns:a16="http://schemas.microsoft.com/office/drawing/2014/main" id="{777D6D9C-95AD-4226-B2A3-AB92A9F11A10}"/>
+                <a16:creationId xmlns:a16="http://schemas.microsoft.com/office/drawing/2014/main" id="{97B02433-02D7-4D27-8A7B-82D9EE0C3106}"/>
               </a:ext>
             </a:extLst>
           </p:cNvPr>
@@ -2638,7 +2638,7 @@
           <p:cNvPr id="18" name="">
             <a:extLst xmlns:a="http://schemas.openxmlformats.org/drawingml/2006/main">
               <a:ext uri="{FF2B5EF4-FFF2-40B4-BE49-F238E27FC236}">
-                <a16:creationId xmlns:a16="http://schemas.microsoft.com/office/drawing/2014/main" id="{E4C018F7-EE49-41DD-8718-F02E22FE97C7}"/>
+                <a16:creationId xmlns:a16="http://schemas.microsoft.com/office/drawing/2014/main" id="{46C14E76-BED6-4765-AFC6-78AF0ABFB726}"/>
               </a:ext>
             </a:extLst>
           </p:cNvPr>
@@ -2702,7 +2702,7 @@
           <p:cNvPr id="19" name="">
             <a:extLst xmlns:a="http://schemas.openxmlformats.org/drawingml/2006/main">
               <a:ext uri="{FF2B5EF4-FFF2-40B4-BE49-F238E27FC236}">
-                <a16:creationId xmlns:a16="http://schemas.microsoft.com/office/drawing/2014/main" id="{DF416C23-C8C1-4C19-9B17-E3E3350850C0}"/>
+                <a16:creationId xmlns:a16="http://schemas.microsoft.com/office/drawing/2014/main" id="{49CF23C2-A890-4E1F-992D-44FC166EE7F1}"/>
               </a:ext>
             </a:extLst>
           </p:cNvPr>
@@ -2737,7 +2737,7 @@
           <p:cNvPr id="20" name="">
             <a:extLst xmlns:a="http://schemas.openxmlformats.org/drawingml/2006/main">
               <a:ext uri="{FF2B5EF4-FFF2-40B4-BE49-F238E27FC236}">
-                <a16:creationId xmlns:a16="http://schemas.microsoft.com/office/drawing/2014/main" id="{B82B04CC-B596-4021-B7C4-1ACAD6916CB3}"/>
+                <a16:creationId xmlns:a16="http://schemas.microsoft.com/office/drawing/2014/main" id="{292D8794-789C-40D3-8D7E-68D05D7B8848}"/>
               </a:ext>
             </a:extLst>
           </p:cNvPr>
@@ -2801,7 +2801,7 @@
           <p:cNvPr id="21" name="">
             <a:extLst xmlns:a="http://schemas.openxmlformats.org/drawingml/2006/main">
               <a:ext uri="{FF2B5EF4-FFF2-40B4-BE49-F238E27FC236}">
-                <a16:creationId xmlns:a16="http://schemas.microsoft.com/office/drawing/2014/main" id="{04BB34D8-0BBD-4159-8001-B7540F0E15E0}"/>
+                <a16:creationId xmlns:a16="http://schemas.microsoft.com/office/drawing/2014/main" id="{4AA42439-B1B9-45A1-9FDA-370CCDC08C2C}"/>
               </a:ext>
             </a:extLst>
           </p:cNvPr>
@@ -2865,7 +2865,7 @@
           <p:cNvPr id="22" name="">
             <a:extLst xmlns:a="http://schemas.openxmlformats.org/drawingml/2006/main">
               <a:ext uri="{FF2B5EF4-FFF2-40B4-BE49-F238E27FC236}">
-                <a16:creationId xmlns:a16="http://schemas.microsoft.com/office/drawing/2014/main" id="{C5278E81-48C1-4B9A-B101-DF0BE8E34AC9}"/>
+                <a16:creationId xmlns:a16="http://schemas.microsoft.com/office/drawing/2014/main" id="{CA4DDEFC-A31B-46B3-A3C7-F607673AC9A8}"/>
               </a:ext>
             </a:extLst>
           </p:cNvPr>
@@ -2929,7 +2929,7 @@
           <p:cNvPr id="23" name="">
             <a:extLst xmlns:a="http://schemas.openxmlformats.org/drawingml/2006/main">
               <a:ext uri="{FF2B5EF4-FFF2-40B4-BE49-F238E27FC236}">
-                <a16:creationId xmlns:a16="http://schemas.microsoft.com/office/drawing/2014/main" id="{FDD4780D-3C7F-4500-A8B6-23B340F01117}"/>
+                <a16:creationId xmlns:a16="http://schemas.microsoft.com/office/drawing/2014/main" id="{2C770E10-6119-4F11-B233-589D85E0CB9B}"/>
               </a:ext>
             </a:extLst>
           </p:cNvPr>
@@ -2962,7 +2962,7 @@
           <p:cNvPr id="24" name="">
             <a:extLst xmlns:a="http://schemas.openxmlformats.org/drawingml/2006/main">
               <a:ext uri="{FF2B5EF4-FFF2-40B4-BE49-F238E27FC236}">
-                <a16:creationId xmlns:a16="http://schemas.microsoft.com/office/drawing/2014/main" id="{412CCEA5-1299-435C-AF18-5C8B65A8C37E}"/>
+                <a16:creationId xmlns:a16="http://schemas.microsoft.com/office/drawing/2014/main" id="{A859CBAF-32E7-4657-A697-FDB399CB7006}"/>
               </a:ext>
             </a:extLst>
           </p:cNvPr>
@@ -3026,7 +3026,7 @@
           <p:cNvPr id="25" name="">
             <a:extLst xmlns:a="http://schemas.openxmlformats.org/drawingml/2006/main">
               <a:ext uri="{FF2B5EF4-FFF2-40B4-BE49-F238E27FC236}">
-                <a16:creationId xmlns:a16="http://schemas.microsoft.com/office/drawing/2014/main" id="{363F13A4-EC33-4D3C-B7E7-ED32AC83E59B}"/>
+                <a16:creationId xmlns:a16="http://schemas.microsoft.com/office/drawing/2014/main" id="{60A6430F-95D2-4143-A10A-9EFF889ED95E}"/>
               </a:ext>
             </a:extLst>
           </p:cNvPr>
@@ -3088,7 +3088,7 @@
     </p:spTree>
     <p:extLst>
       <p:ext uri="{BB962C8B-B14F-4D97-AF65-F5344CB8AC3E}">
-        <p14:creationId xmlns:p14="http://schemas.microsoft.com/office/powerpoint/2010/main" val="1453624673"/>
+        <p14:creationId xmlns:p14="http://schemas.microsoft.com/office/powerpoint/2010/main" val="822855240"/>
       </p:ext>
     </p:extLst>
   </p:cSld>
@@ -3116,7 +3116,7 @@
           <p:nvPr/>
         </p:nvPicPr>
         <p:blipFill>
-          <a:blip xmlns:r="http://schemas.openxmlformats.org/officeDocument/2006/relationships" xmlns:a="http://schemas.openxmlformats.org/drawingml/2006/main" r:embed="Rc9b43f092d814efc"/>
+          <a:blip xmlns:r="http://schemas.openxmlformats.org/officeDocument/2006/relationships" xmlns:a="http://schemas.openxmlformats.org/drawingml/2006/main" r:embed="R43eca5abdf784205"/>
           <a:srcRect xmlns:a="http://schemas.openxmlformats.org/drawingml/2006/main" l="0" t="27" r="0" b="27"/>
           <a:stretch xmlns:a="http://schemas.openxmlformats.org/drawingml/2006/main">
             <a:fillRect l="0" t="0" r="0" b="0"/>
@@ -3137,7 +3137,7 @@
           <p:cNvPr id="2" name="">
             <a:extLst xmlns:a="http://schemas.openxmlformats.org/drawingml/2006/main">
               <a:ext uri="{FF2B5EF4-FFF2-40B4-BE49-F238E27FC236}">
-                <a16:creationId xmlns:a16="http://schemas.microsoft.com/office/drawing/2014/main" id="{F4AA1DBE-4F51-4951-A2C7-0B897DD1F887}"/>
+                <a16:creationId xmlns:a16="http://schemas.microsoft.com/office/drawing/2014/main" id="{AE8A6102-C664-408E-BBE2-B7D7114F9CB1}"/>
               </a:ext>
             </a:extLst>
           </p:cNvPr>
@@ -3174,7 +3174,7 @@
           <p:cNvPr id="3" name="">
             <a:extLst xmlns:a="http://schemas.openxmlformats.org/drawingml/2006/main">
               <a:ext uri="{FF2B5EF4-FFF2-40B4-BE49-F238E27FC236}">
-                <a16:creationId xmlns:a16="http://schemas.microsoft.com/office/drawing/2014/main" id="{CF8EDE5A-3396-4F7A-B2C9-2DBF6A1ED046}"/>
+                <a16:creationId xmlns:a16="http://schemas.microsoft.com/office/drawing/2014/main" id="{8C46F12D-8C9B-48CF-979D-BFA5EE81F987}"/>
               </a:ext>
             </a:extLst>
           </p:cNvPr>
@@ -3211,7 +3211,7 @@
           <p:cNvPr id="4" name="">
             <a:extLst xmlns:a="http://schemas.openxmlformats.org/drawingml/2006/main">
               <a:ext uri="{FF2B5EF4-FFF2-40B4-BE49-F238E27FC236}">
-                <a16:creationId xmlns:a16="http://schemas.microsoft.com/office/drawing/2014/main" id="{BF28113B-7D0F-45A6-923D-603605E1984F}"/>
+                <a16:creationId xmlns:a16="http://schemas.microsoft.com/office/drawing/2014/main" id="{1C1D7F00-9D92-4C06-992C-643A1FC72589}"/>
               </a:ext>
             </a:extLst>
           </p:cNvPr>
@@ -3275,7 +3275,7 @@
           <p:cNvPr id="5" name="">
             <a:extLst xmlns:a="http://schemas.openxmlformats.org/drawingml/2006/main">
               <a:ext uri="{FF2B5EF4-FFF2-40B4-BE49-F238E27FC236}">
-                <a16:creationId xmlns:a16="http://schemas.microsoft.com/office/drawing/2014/main" id="{06DF821E-683C-4870-A850-83B1CFE3115E}"/>
+                <a16:creationId xmlns:a16="http://schemas.microsoft.com/office/drawing/2014/main" id="{F0A5BF7D-DE2C-4485-AE00-E0367E24EE8A}"/>
               </a:ext>
             </a:extLst>
           </p:cNvPr>
@@ -3339,7 +3339,7 @@
           <p:cNvPr id="6" name="">
             <a:extLst xmlns:a="http://schemas.openxmlformats.org/drawingml/2006/main">
               <a:ext uri="{FF2B5EF4-FFF2-40B4-BE49-F238E27FC236}">
-                <a16:creationId xmlns:a16="http://schemas.microsoft.com/office/drawing/2014/main" id="{61E5AB40-AA3F-4C55-9957-2D34D74E3F1B}"/>
+                <a16:creationId xmlns:a16="http://schemas.microsoft.com/office/drawing/2014/main" id="{D33F9CB9-A9DE-49AF-8102-666D69C9B731}"/>
               </a:ext>
             </a:extLst>
           </p:cNvPr>
@@ -3403,7 +3403,7 @@
           <p:cNvPr id="7" name="">
             <a:extLst xmlns:a="http://schemas.openxmlformats.org/drawingml/2006/main">
               <a:ext uri="{FF2B5EF4-FFF2-40B4-BE49-F238E27FC236}">
-                <a16:creationId xmlns:a16="http://schemas.microsoft.com/office/drawing/2014/main" id="{005B491E-3315-4387-AAD0-EB3F52E34765}"/>
+                <a16:creationId xmlns:a16="http://schemas.microsoft.com/office/drawing/2014/main" id="{DE8ADFFA-B0FE-40C7-9E7B-B3AEB1E5046B}"/>
               </a:ext>
             </a:extLst>
           </p:cNvPr>
@@ -3438,7 +3438,7 @@
           <p:cNvPr id="8" name="">
             <a:extLst xmlns:a="http://schemas.openxmlformats.org/drawingml/2006/main">
               <a:ext uri="{FF2B5EF4-FFF2-40B4-BE49-F238E27FC236}">
-                <a16:creationId xmlns:a16="http://schemas.microsoft.com/office/drawing/2014/main" id="{75682FE0-1A0F-4B73-A877-E8D67DCECDB2}"/>
+                <a16:creationId xmlns:a16="http://schemas.microsoft.com/office/drawing/2014/main" id="{4FBBF85F-41A1-4D17-8D9B-17A5DAA07CE0}"/>
               </a:ext>
             </a:extLst>
           </p:cNvPr>
@@ -3502,7 +3502,7 @@
           <p:cNvPr id="9" name="">
             <a:extLst xmlns:a="http://schemas.openxmlformats.org/drawingml/2006/main">
               <a:ext uri="{FF2B5EF4-FFF2-40B4-BE49-F238E27FC236}">
-                <a16:creationId xmlns:a16="http://schemas.microsoft.com/office/drawing/2014/main" id="{85C402E4-6223-47F2-BC71-9F3040B36A53}"/>
+                <a16:creationId xmlns:a16="http://schemas.microsoft.com/office/drawing/2014/main" id="{3DD563DE-AE21-4563-9FBE-1C89758DB6FA}"/>
               </a:ext>
             </a:extLst>
           </p:cNvPr>
@@ -3537,7 +3537,7 @@
           <p:cNvPr id="10" name="">
             <a:extLst xmlns:a="http://schemas.openxmlformats.org/drawingml/2006/main">
               <a:ext uri="{FF2B5EF4-FFF2-40B4-BE49-F238E27FC236}">
-                <a16:creationId xmlns:a16="http://schemas.microsoft.com/office/drawing/2014/main" id="{10D5C6C7-6A09-4C43-BB39-EE4DB65229A0}"/>
+                <a16:creationId xmlns:a16="http://schemas.microsoft.com/office/drawing/2014/main" id="{951D05DD-3FA6-4BB3-A493-5EEB262667BA}"/>
               </a:ext>
             </a:extLst>
           </p:cNvPr>
@@ -3601,7 +3601,7 @@
           <p:cNvPr id="11" name="">
             <a:extLst xmlns:a="http://schemas.openxmlformats.org/drawingml/2006/main">
               <a:ext uri="{FF2B5EF4-FFF2-40B4-BE49-F238E27FC236}">
-                <a16:creationId xmlns:a16="http://schemas.microsoft.com/office/drawing/2014/main" id="{B882E7FA-5CF6-4640-9104-CB7692EC4B8A}"/>
+                <a16:creationId xmlns:a16="http://schemas.microsoft.com/office/drawing/2014/main" id="{F106D484-4A60-408E-AF57-8B7589AE5015}"/>
               </a:ext>
             </a:extLst>
           </p:cNvPr>
@@ -3636,7 +3636,7 @@
           <p:cNvPr id="12" name="">
             <a:extLst xmlns:a="http://schemas.openxmlformats.org/drawingml/2006/main">
               <a:ext uri="{FF2B5EF4-FFF2-40B4-BE49-F238E27FC236}">
-                <a16:creationId xmlns:a16="http://schemas.microsoft.com/office/drawing/2014/main" id="{B92A081C-3A6C-4E4B-BDEA-2938F1883FE2}"/>
+                <a16:creationId xmlns:a16="http://schemas.microsoft.com/office/drawing/2014/main" id="{DAE70E7A-AEA7-41D5-810E-F3C4FA8C3E23}"/>
               </a:ext>
             </a:extLst>
           </p:cNvPr>
@@ -3700,7 +3700,7 @@
           <p:cNvPr id="13" name="">
             <a:extLst xmlns:a="http://schemas.openxmlformats.org/drawingml/2006/main">
               <a:ext uri="{FF2B5EF4-FFF2-40B4-BE49-F238E27FC236}">
-                <a16:creationId xmlns:a16="http://schemas.microsoft.com/office/drawing/2014/main" id="{3A6394ED-F16F-4750-95E8-82D5A2A3C40F}"/>
+                <a16:creationId xmlns:a16="http://schemas.microsoft.com/office/drawing/2014/main" id="{E84E0CE9-2160-44E8-BDAA-E58A61722349}"/>
               </a:ext>
             </a:extLst>
           </p:cNvPr>
@@ -3735,7 +3735,7 @@
           <p:cNvPr id="14" name="">
             <a:extLst xmlns:a="http://schemas.openxmlformats.org/drawingml/2006/main">
               <a:ext uri="{FF2B5EF4-FFF2-40B4-BE49-F238E27FC236}">
-                <a16:creationId xmlns:a16="http://schemas.microsoft.com/office/drawing/2014/main" id="{A1D0F380-938A-45E7-9BDA-CE0957B424D7}"/>
+                <a16:creationId xmlns:a16="http://schemas.microsoft.com/office/drawing/2014/main" id="{1A98FD97-D5A6-4466-B578-D215526C432A}"/>
               </a:ext>
             </a:extLst>
           </p:cNvPr>
@@ -3799,7 +3799,7 @@
           <p:cNvPr id="15" name="">
             <a:extLst xmlns:a="http://schemas.openxmlformats.org/drawingml/2006/main">
               <a:ext uri="{FF2B5EF4-FFF2-40B4-BE49-F238E27FC236}">
-                <a16:creationId xmlns:a16="http://schemas.microsoft.com/office/drawing/2014/main" id="{F38423B7-37B5-435B-98CA-24912FCE370A}"/>
+                <a16:creationId xmlns:a16="http://schemas.microsoft.com/office/drawing/2014/main" id="{79D3C85B-7236-4800-BF15-428D0FD335DD}"/>
               </a:ext>
             </a:extLst>
           </p:cNvPr>
@@ -3863,7 +3863,7 @@
           <p:cNvPr id="16" name="">
             <a:extLst xmlns:a="http://schemas.openxmlformats.org/drawingml/2006/main">
               <a:ext uri="{FF2B5EF4-FFF2-40B4-BE49-F238E27FC236}">
-                <a16:creationId xmlns:a16="http://schemas.microsoft.com/office/drawing/2014/main" id="{AD77936A-4D63-4B50-9B89-2232B4CE2918}"/>
+                <a16:creationId xmlns:a16="http://schemas.microsoft.com/office/drawing/2014/main" id="{736DC0FD-0B4B-4E12-9BEB-E40B5EFB059F}"/>
               </a:ext>
             </a:extLst>
           </p:cNvPr>
@@ -3927,7 +3927,7 @@
           <p:cNvPr id="17" name="">
             <a:extLst xmlns:a="http://schemas.openxmlformats.org/drawingml/2006/main">
               <a:ext uri="{FF2B5EF4-FFF2-40B4-BE49-F238E27FC236}">
-                <a16:creationId xmlns:a16="http://schemas.microsoft.com/office/drawing/2014/main" id="{CF21AEA7-5F6F-4937-8FF8-FDB0E668180F}"/>
+                <a16:creationId xmlns:a16="http://schemas.microsoft.com/office/drawing/2014/main" id="{3E791F7C-7FE9-489F-89C6-DADF77F8D3A1}"/>
               </a:ext>
             </a:extLst>
           </p:cNvPr>
@@ -3960,7 +3960,7 @@
           <p:cNvPr id="18" name="">
             <a:extLst xmlns:a="http://schemas.openxmlformats.org/drawingml/2006/main">
               <a:ext uri="{FF2B5EF4-FFF2-40B4-BE49-F238E27FC236}">
-                <a16:creationId xmlns:a16="http://schemas.microsoft.com/office/drawing/2014/main" id="{5F7EB486-13FC-4B42-9501-17109D0ECC79}"/>
+                <a16:creationId xmlns:a16="http://schemas.microsoft.com/office/drawing/2014/main" id="{F050FB92-20EF-4C02-8E31-3E4847A17425}"/>
               </a:ext>
             </a:extLst>
           </p:cNvPr>
@@ -4024,7 +4024,7 @@
           <p:cNvPr id="19" name="">
             <a:extLst xmlns:a="http://schemas.openxmlformats.org/drawingml/2006/main">
               <a:ext uri="{FF2B5EF4-FFF2-40B4-BE49-F238E27FC236}">
-                <a16:creationId xmlns:a16="http://schemas.microsoft.com/office/drawing/2014/main" id="{4F051F73-5D80-4E5C-9FC7-0387E73DB085}"/>
+                <a16:creationId xmlns:a16="http://schemas.microsoft.com/office/drawing/2014/main" id="{F130AD55-C487-4C0C-A21A-9334007F3DC7}"/>
               </a:ext>
             </a:extLst>
           </p:cNvPr>
@@ -4086,7 +4086,7 @@
     </p:spTree>
     <p:extLst>
       <p:ext uri="{BB962C8B-B14F-4D97-AF65-F5344CB8AC3E}">
-        <p14:creationId xmlns:p14="http://schemas.microsoft.com/office/powerpoint/2010/main" val="806473322"/>
+        <p14:creationId xmlns:p14="http://schemas.microsoft.com/office/powerpoint/2010/main" val="1205603436"/>
       </p:ext>
     </p:extLst>
   </p:cSld>
@@ -4114,7 +4114,7 @@
           <p:nvPr/>
         </p:nvPicPr>
         <p:blipFill>
-          <a:blip xmlns:r="http://schemas.openxmlformats.org/officeDocument/2006/relationships" xmlns:a="http://schemas.openxmlformats.org/drawingml/2006/main" r:embed="R257f461b44d4416c"/>
+          <a:blip xmlns:r="http://schemas.openxmlformats.org/officeDocument/2006/relationships" xmlns:a="http://schemas.openxmlformats.org/drawingml/2006/main" r:embed="R7a27a1f8a67f4fde"/>
           <a:srcRect xmlns:a="http://schemas.openxmlformats.org/drawingml/2006/main" l="0" t="27" r="0" b="27"/>
           <a:stretch xmlns:a="http://schemas.openxmlformats.org/drawingml/2006/main">
             <a:fillRect l="0" t="0" r="0" b="0"/>
@@ -4135,7 +4135,7 @@
           <p:cNvPr id="2" name="">
             <a:extLst xmlns:a="http://schemas.openxmlformats.org/drawingml/2006/main">
               <a:ext uri="{FF2B5EF4-FFF2-40B4-BE49-F238E27FC236}">
-                <a16:creationId xmlns:a16="http://schemas.microsoft.com/office/drawing/2014/main" id="{DB89BFFE-8F20-4940-BAC9-AD6D954A6AA8}"/>
+                <a16:creationId xmlns:a16="http://schemas.microsoft.com/office/drawing/2014/main" id="{74B1A716-50D1-48D5-8DBB-8E925EBA8715}"/>
               </a:ext>
             </a:extLst>
           </p:cNvPr>
@@ -4172,7 +4172,7 @@
           <p:cNvPr id="3" name="">
             <a:extLst xmlns:a="http://schemas.openxmlformats.org/drawingml/2006/main">
               <a:ext uri="{FF2B5EF4-FFF2-40B4-BE49-F238E27FC236}">
-                <a16:creationId xmlns:a16="http://schemas.microsoft.com/office/drawing/2014/main" id="{1EC56550-77CE-48C8-A9D4-A87549166AFD}"/>
+                <a16:creationId xmlns:a16="http://schemas.microsoft.com/office/drawing/2014/main" id="{2981D107-4D84-4751-A203-773C5F0F005D}"/>
               </a:ext>
             </a:extLst>
           </p:cNvPr>
@@ -4209,7 +4209,7 @@
           <p:cNvPr id="4" name="">
             <a:extLst xmlns:a="http://schemas.openxmlformats.org/drawingml/2006/main">
               <a:ext uri="{FF2B5EF4-FFF2-40B4-BE49-F238E27FC236}">
-                <a16:creationId xmlns:a16="http://schemas.microsoft.com/office/drawing/2014/main" id="{60327B61-73F3-4214-A889-F54684792C6D}"/>
+                <a16:creationId xmlns:a16="http://schemas.microsoft.com/office/drawing/2014/main" id="{F75059DF-F908-49C6-90AF-39887EB9B008}"/>
               </a:ext>
             </a:extLst>
           </p:cNvPr>
@@ -4273,7 +4273,7 @@
           <p:cNvPr id="5" name="">
             <a:extLst xmlns:a="http://schemas.openxmlformats.org/drawingml/2006/main">
               <a:ext uri="{FF2B5EF4-FFF2-40B4-BE49-F238E27FC236}">
-                <a16:creationId xmlns:a16="http://schemas.microsoft.com/office/drawing/2014/main" id="{04F67DAF-36B6-41BA-84A1-FB45EE65E797}"/>
+                <a16:creationId xmlns:a16="http://schemas.microsoft.com/office/drawing/2014/main" id="{0DE67CDF-983F-41DC-8C2D-9FAA5939C41A}"/>
               </a:ext>
             </a:extLst>
           </p:cNvPr>
@@ -4337,7 +4337,7 @@
           <p:cNvPr id="6" name="">
             <a:extLst xmlns:a="http://schemas.openxmlformats.org/drawingml/2006/main">
               <a:ext uri="{FF2B5EF4-FFF2-40B4-BE49-F238E27FC236}">
-                <a16:creationId xmlns:a16="http://schemas.microsoft.com/office/drawing/2014/main" id="{4CD301E1-2606-4C88-B331-67F5A1022A57}"/>
+                <a16:creationId xmlns:a16="http://schemas.microsoft.com/office/drawing/2014/main" id="{06C74B0D-D87E-40DE-8847-042ECF852416}"/>
               </a:ext>
             </a:extLst>
           </p:cNvPr>
@@ -4401,7 +4401,7 @@
           <p:cNvPr id="7" name="">
             <a:extLst xmlns:a="http://schemas.openxmlformats.org/drawingml/2006/main">
               <a:ext uri="{FF2B5EF4-FFF2-40B4-BE49-F238E27FC236}">
-                <a16:creationId xmlns:a16="http://schemas.microsoft.com/office/drawing/2014/main" id="{1C9C9A44-8758-4AE3-B3B4-B30A16EC8F5E}"/>
+                <a16:creationId xmlns:a16="http://schemas.microsoft.com/office/drawing/2014/main" id="{EC044A92-1064-4A36-8C35-BF755A9D5AFB}"/>
               </a:ext>
             </a:extLst>
           </p:cNvPr>
@@ -4436,7 +4436,7 @@
           <p:cNvPr id="8" name="">
             <a:extLst xmlns:a="http://schemas.openxmlformats.org/drawingml/2006/main">
               <a:ext uri="{FF2B5EF4-FFF2-40B4-BE49-F238E27FC236}">
-                <a16:creationId xmlns:a16="http://schemas.microsoft.com/office/drawing/2014/main" id="{397A3763-CA89-441D-B2C6-26458F3390A0}"/>
+                <a16:creationId xmlns:a16="http://schemas.microsoft.com/office/drawing/2014/main" id="{4218CB67-FD0B-439A-B862-192CD9E7DED3}"/>
               </a:ext>
             </a:extLst>
           </p:cNvPr>
@@ -4500,7 +4500,7 @@
           <p:cNvPr id="9" name="">
             <a:extLst xmlns:a="http://schemas.openxmlformats.org/drawingml/2006/main">
               <a:ext uri="{FF2B5EF4-FFF2-40B4-BE49-F238E27FC236}">
-                <a16:creationId xmlns:a16="http://schemas.microsoft.com/office/drawing/2014/main" id="{5A63C12F-2933-4621-BF0C-FB8568828BCD}"/>
+                <a16:creationId xmlns:a16="http://schemas.microsoft.com/office/drawing/2014/main" id="{013F095A-625A-449D-86FC-82BA2A55DA0E}"/>
               </a:ext>
             </a:extLst>
           </p:cNvPr>
@@ -4564,7 +4564,7 @@
           <p:cNvPr id="10" name="">
             <a:extLst xmlns:a="http://schemas.openxmlformats.org/drawingml/2006/main">
               <a:ext uri="{FF2B5EF4-FFF2-40B4-BE49-F238E27FC236}">
-                <a16:creationId xmlns:a16="http://schemas.microsoft.com/office/drawing/2014/main" id="{C5CF2B31-9380-4773-B8C5-B9862532C932}"/>
+                <a16:creationId xmlns:a16="http://schemas.microsoft.com/office/drawing/2014/main" id="{27ADFEC2-DF38-47F3-BBBB-82375D2C036A}"/>
               </a:ext>
             </a:extLst>
           </p:cNvPr>
@@ -4597,7 +4597,7 @@
           <p:cNvPr id="11" name="">
             <a:extLst xmlns:a="http://schemas.openxmlformats.org/drawingml/2006/main">
               <a:ext uri="{FF2B5EF4-FFF2-40B4-BE49-F238E27FC236}">
-                <a16:creationId xmlns:a16="http://schemas.microsoft.com/office/drawing/2014/main" id="{930B4219-4FDE-4B5E-8E8F-DF29377968A9}"/>
+                <a16:creationId xmlns:a16="http://schemas.microsoft.com/office/drawing/2014/main" id="{34653E7A-1FDC-4A34-9598-8E33CC9E9E1E}"/>
               </a:ext>
             </a:extLst>
           </p:cNvPr>
@@ -4632,7 +4632,7 @@
           <p:cNvPr id="12" name="">
             <a:extLst xmlns:a="http://schemas.openxmlformats.org/drawingml/2006/main">
               <a:ext uri="{FF2B5EF4-FFF2-40B4-BE49-F238E27FC236}">
-                <a16:creationId xmlns:a16="http://schemas.microsoft.com/office/drawing/2014/main" id="{76988612-C9D5-47BA-AAC8-1F6358C30658}"/>
+                <a16:creationId xmlns:a16="http://schemas.microsoft.com/office/drawing/2014/main" id="{7C1DE0C9-317B-446C-9D8E-999D6EAA4B4D}"/>
               </a:ext>
             </a:extLst>
           </p:cNvPr>
@@ -4696,7 +4696,7 @@
           <p:cNvPr id="13" name="">
             <a:extLst xmlns:a="http://schemas.openxmlformats.org/drawingml/2006/main">
               <a:ext uri="{FF2B5EF4-FFF2-40B4-BE49-F238E27FC236}">
-                <a16:creationId xmlns:a16="http://schemas.microsoft.com/office/drawing/2014/main" id="{1E9878D2-27AE-4960-BD3C-E0D6038F8836}"/>
+                <a16:creationId xmlns:a16="http://schemas.microsoft.com/office/drawing/2014/main" id="{3395E585-5B9F-4C09-8936-0A5986167CD8}"/>
               </a:ext>
             </a:extLst>
           </p:cNvPr>
@@ -4760,7 +4760,7 @@
           <p:cNvPr id="14" name="">
             <a:extLst xmlns:a="http://schemas.openxmlformats.org/drawingml/2006/main">
               <a:ext uri="{FF2B5EF4-FFF2-40B4-BE49-F238E27FC236}">
-                <a16:creationId xmlns:a16="http://schemas.microsoft.com/office/drawing/2014/main" id="{B4F7863B-849A-425C-A153-04DA22C4039D}"/>
+                <a16:creationId xmlns:a16="http://schemas.microsoft.com/office/drawing/2014/main" id="{9940E13C-0EEE-4650-913E-188B744B1A55}"/>
               </a:ext>
             </a:extLst>
           </p:cNvPr>
@@ -4793,7 +4793,7 @@
           <p:cNvPr id="15" name="">
             <a:extLst xmlns:a="http://schemas.openxmlformats.org/drawingml/2006/main">
               <a:ext uri="{FF2B5EF4-FFF2-40B4-BE49-F238E27FC236}">
-                <a16:creationId xmlns:a16="http://schemas.microsoft.com/office/drawing/2014/main" id="{4B67C651-89AB-4A73-BD2A-D602D9734C5B}"/>
+                <a16:creationId xmlns:a16="http://schemas.microsoft.com/office/drawing/2014/main" id="{F6D2767A-23D9-41FD-AAFB-18119955B00B}"/>
               </a:ext>
             </a:extLst>
           </p:cNvPr>
@@ -4828,7 +4828,7 @@
           <p:cNvPr id="16" name="">
             <a:extLst xmlns:a="http://schemas.openxmlformats.org/drawingml/2006/main">
               <a:ext uri="{FF2B5EF4-FFF2-40B4-BE49-F238E27FC236}">
-                <a16:creationId xmlns:a16="http://schemas.microsoft.com/office/drawing/2014/main" id="{27C19546-8FD2-47C2-BD5C-BAF44CFF8A36}"/>
+                <a16:creationId xmlns:a16="http://schemas.microsoft.com/office/drawing/2014/main" id="{1605560A-DAC5-4F62-ACE9-A30FB6FF7697}"/>
               </a:ext>
             </a:extLst>
           </p:cNvPr>
@@ -4892,7 +4892,7 @@
           <p:cNvPr id="17" name="">
             <a:extLst xmlns:a="http://schemas.openxmlformats.org/drawingml/2006/main">
               <a:ext uri="{FF2B5EF4-FFF2-40B4-BE49-F238E27FC236}">
-                <a16:creationId xmlns:a16="http://schemas.microsoft.com/office/drawing/2014/main" id="{4431DE8E-233F-44BB-85EF-AE5D9A0706E7}"/>
+                <a16:creationId xmlns:a16="http://schemas.microsoft.com/office/drawing/2014/main" id="{8869640F-DD1C-4F7E-963F-7648DE5E924A}"/>
               </a:ext>
             </a:extLst>
           </p:cNvPr>
@@ -4956,7 +4956,7 @@
           <p:cNvPr id="18" name="">
             <a:extLst xmlns:a="http://schemas.openxmlformats.org/drawingml/2006/main">
               <a:ext uri="{FF2B5EF4-FFF2-40B4-BE49-F238E27FC236}">
-                <a16:creationId xmlns:a16="http://schemas.microsoft.com/office/drawing/2014/main" id="{2BB90C06-0D30-4D8C-B358-FB3E22A24962}"/>
+                <a16:creationId xmlns:a16="http://schemas.microsoft.com/office/drawing/2014/main" id="{17344DDD-5B86-4B68-8D8F-09E56A96E5A3}"/>
               </a:ext>
             </a:extLst>
           </p:cNvPr>
@@ -5020,7 +5020,7 @@
           <p:cNvPr id="19" name="">
             <a:extLst xmlns:a="http://schemas.openxmlformats.org/drawingml/2006/main">
               <a:ext uri="{FF2B5EF4-FFF2-40B4-BE49-F238E27FC236}">
-                <a16:creationId xmlns:a16="http://schemas.microsoft.com/office/drawing/2014/main" id="{8621CB93-7ADB-42A7-BE7F-4B159A1B20F7}"/>
+                <a16:creationId xmlns:a16="http://schemas.microsoft.com/office/drawing/2014/main" id="{03A9DE4D-17EB-4B30-96EB-DD5F3678977C}"/>
               </a:ext>
             </a:extLst>
           </p:cNvPr>
@@ -5053,7 +5053,7 @@
           <p:cNvPr id="20" name="">
             <a:extLst xmlns:a="http://schemas.openxmlformats.org/drawingml/2006/main">
               <a:ext uri="{FF2B5EF4-FFF2-40B4-BE49-F238E27FC236}">
-                <a16:creationId xmlns:a16="http://schemas.microsoft.com/office/drawing/2014/main" id="{F57BAC9B-2E8B-4021-988C-786E50D898ED}"/>
+                <a16:creationId xmlns:a16="http://schemas.microsoft.com/office/drawing/2014/main" id="{535D6D51-5C23-4494-AA44-79E50D648941}"/>
               </a:ext>
             </a:extLst>
           </p:cNvPr>
@@ -5117,7 +5117,7 @@
           <p:cNvPr id="21" name="">
             <a:extLst xmlns:a="http://schemas.openxmlformats.org/drawingml/2006/main">
               <a:ext uri="{FF2B5EF4-FFF2-40B4-BE49-F238E27FC236}">
-                <a16:creationId xmlns:a16="http://schemas.microsoft.com/office/drawing/2014/main" id="{7D0C57DE-6B08-44CB-AED8-553BF94EE245}"/>
+                <a16:creationId xmlns:a16="http://schemas.microsoft.com/office/drawing/2014/main" id="{712B32F7-98A4-475A-B013-C399A1EF6E6F}"/>
               </a:ext>
             </a:extLst>
           </p:cNvPr>
@@ -5179,7 +5179,7 @@
     </p:spTree>
     <p:extLst>
       <p:ext uri="{BB962C8B-B14F-4D97-AF65-F5344CB8AC3E}">
-        <p14:creationId xmlns:p14="http://schemas.microsoft.com/office/powerpoint/2010/main" val="1776325011"/>
+        <p14:creationId xmlns:p14="http://schemas.microsoft.com/office/powerpoint/2010/main" val="2031153726"/>
       </p:ext>
     </p:extLst>
   </p:cSld>
@@ -5207,7 +5207,7 @@
           <p:nvPr/>
         </p:nvPicPr>
         <p:blipFill>
-          <a:blip xmlns:r="http://schemas.openxmlformats.org/officeDocument/2006/relationships" xmlns:a="http://schemas.openxmlformats.org/drawingml/2006/main" r:embed="R08895c1ee7fd4389"/>
+          <a:blip xmlns:r="http://schemas.openxmlformats.org/officeDocument/2006/relationships" xmlns:a="http://schemas.openxmlformats.org/drawingml/2006/main" r:embed="R7dde0bb1ed9647f6"/>
           <a:srcRect xmlns:a="http://schemas.openxmlformats.org/drawingml/2006/main" l="0" t="27" r="0" b="27"/>
           <a:stretch xmlns:a="http://schemas.openxmlformats.org/drawingml/2006/main">
             <a:fillRect l="0" t="0" r="0" b="0"/>
@@ -5228,7 +5228,7 @@
           <p:cNvPr id="2" name="">
             <a:extLst xmlns:a="http://schemas.openxmlformats.org/drawingml/2006/main">
               <a:ext uri="{FF2B5EF4-FFF2-40B4-BE49-F238E27FC236}">
-                <a16:creationId xmlns:a16="http://schemas.microsoft.com/office/drawing/2014/main" id="{06957B14-6808-4049-BC91-0D3013FCFB12}"/>
+                <a16:creationId xmlns:a16="http://schemas.microsoft.com/office/drawing/2014/main" id="{7D43B1D3-E178-4009-A4FF-A09801C60A2E}"/>
               </a:ext>
             </a:extLst>
           </p:cNvPr>
@@ -5265,7 +5265,7 @@
           <p:cNvPr id="3" name="">
             <a:extLst xmlns:a="http://schemas.openxmlformats.org/drawingml/2006/main">
               <a:ext uri="{FF2B5EF4-FFF2-40B4-BE49-F238E27FC236}">
-                <a16:creationId xmlns:a16="http://schemas.microsoft.com/office/drawing/2014/main" id="{CF557F86-3226-4FD0-89E8-01743F324877}"/>
+                <a16:creationId xmlns:a16="http://schemas.microsoft.com/office/drawing/2014/main" id="{4F8F2DFA-5C11-4EA7-93F3-E7DFFD23D8DF}"/>
               </a:ext>
             </a:extLst>
           </p:cNvPr>
@@ -5302,7 +5302,7 @@
           <p:cNvPr id="4" name="">
             <a:extLst xmlns:a="http://schemas.openxmlformats.org/drawingml/2006/main">
               <a:ext uri="{FF2B5EF4-FFF2-40B4-BE49-F238E27FC236}">
-                <a16:creationId xmlns:a16="http://schemas.microsoft.com/office/drawing/2014/main" id="{96C89028-A65A-47AB-848F-F94A0A3524AB}"/>
+                <a16:creationId xmlns:a16="http://schemas.microsoft.com/office/drawing/2014/main" id="{3EC2DC85-E860-4119-80CA-03491FA364C8}"/>
               </a:ext>
             </a:extLst>
           </p:cNvPr>
@@ -5366,7 +5366,7 @@
           <p:cNvPr id="5" name="">
             <a:extLst xmlns:a="http://schemas.openxmlformats.org/drawingml/2006/main">
               <a:ext uri="{FF2B5EF4-FFF2-40B4-BE49-F238E27FC236}">
-                <a16:creationId xmlns:a16="http://schemas.microsoft.com/office/drawing/2014/main" id="{2322A301-E353-4BA0-BAF7-3432D8AA8DA0}"/>
+                <a16:creationId xmlns:a16="http://schemas.microsoft.com/office/drawing/2014/main" id="{223B19C8-2024-4D21-ABFC-C0D2659DD005}"/>
               </a:ext>
             </a:extLst>
           </p:cNvPr>
@@ -5430,7 +5430,7 @@
           <p:cNvPr id="6" name="">
             <a:extLst xmlns:a="http://schemas.openxmlformats.org/drawingml/2006/main">
               <a:ext uri="{FF2B5EF4-FFF2-40B4-BE49-F238E27FC236}">
-                <a16:creationId xmlns:a16="http://schemas.microsoft.com/office/drawing/2014/main" id="{23962423-2665-4F87-AE44-594EA01881E8}"/>
+                <a16:creationId xmlns:a16="http://schemas.microsoft.com/office/drawing/2014/main" id="{E3591135-B3DC-4C66-9969-3F084B59B1D7}"/>
               </a:ext>
             </a:extLst>
           </p:cNvPr>
@@ -5494,7 +5494,7 @@
           <p:cNvPr id="7" name="">
             <a:extLst xmlns:a="http://schemas.openxmlformats.org/drawingml/2006/main">
               <a:ext uri="{FF2B5EF4-FFF2-40B4-BE49-F238E27FC236}">
-                <a16:creationId xmlns:a16="http://schemas.microsoft.com/office/drawing/2014/main" id="{895B4B5E-80BB-473A-8C21-FD396F879E27}"/>
+                <a16:creationId xmlns:a16="http://schemas.microsoft.com/office/drawing/2014/main" id="{7D57C7E2-141A-478C-A9EC-992F9EA07655}"/>
               </a:ext>
             </a:extLst>
           </p:cNvPr>
@@ -5529,7 +5529,7 @@
           <p:cNvPr id="8" name="">
             <a:extLst xmlns:a="http://schemas.openxmlformats.org/drawingml/2006/main">
               <a:ext uri="{FF2B5EF4-FFF2-40B4-BE49-F238E27FC236}">
-                <a16:creationId xmlns:a16="http://schemas.microsoft.com/office/drawing/2014/main" id="{6F1A54F5-E1FA-4495-8A57-C10BD7649B77}"/>
+                <a16:creationId xmlns:a16="http://schemas.microsoft.com/office/drawing/2014/main" id="{0CE0EF8F-41B6-4AE9-82B3-1100C5EA0008}"/>
               </a:ext>
             </a:extLst>
           </p:cNvPr>
@@ -5593,7 +5593,7 @@
           <p:cNvPr id="9" name="">
             <a:extLst xmlns:a="http://schemas.openxmlformats.org/drawingml/2006/main">
               <a:ext uri="{FF2B5EF4-FFF2-40B4-BE49-F238E27FC236}">
-                <a16:creationId xmlns:a16="http://schemas.microsoft.com/office/drawing/2014/main" id="{EAF801A3-41F7-49BB-946D-BCAE5930B306}"/>
+                <a16:creationId xmlns:a16="http://schemas.microsoft.com/office/drawing/2014/main" id="{79EF5FB3-AC65-4032-969C-CB5CA861A82B}"/>
               </a:ext>
             </a:extLst>
           </p:cNvPr>
@@ -5657,7 +5657,7 @@
           <p:cNvPr id="10" name="">
             <a:extLst xmlns:a="http://schemas.openxmlformats.org/drawingml/2006/main">
               <a:ext uri="{FF2B5EF4-FFF2-40B4-BE49-F238E27FC236}">
-                <a16:creationId xmlns:a16="http://schemas.microsoft.com/office/drawing/2014/main" id="{66A51F9E-FABD-4F85-8724-66585CED9F50}"/>
+                <a16:creationId xmlns:a16="http://schemas.microsoft.com/office/drawing/2014/main" id="{3E16DF1B-148F-4E46-BCBD-076E8643F0C6}"/>
               </a:ext>
             </a:extLst>
           </p:cNvPr>
@@ -5692,7 +5692,7 @@
           <p:cNvPr id="11" name="">
             <a:extLst xmlns:a="http://schemas.openxmlformats.org/drawingml/2006/main">
               <a:ext uri="{FF2B5EF4-FFF2-40B4-BE49-F238E27FC236}">
-                <a16:creationId xmlns:a16="http://schemas.microsoft.com/office/drawing/2014/main" id="{5C0FD73B-EB84-4106-9F68-26CE3622DB67}"/>
+                <a16:creationId xmlns:a16="http://schemas.microsoft.com/office/drawing/2014/main" id="{379BE221-505F-46DC-8996-0B9DF4E353BA}"/>
               </a:ext>
             </a:extLst>
           </p:cNvPr>
@@ -5756,7 +5756,7 @@
           <p:cNvPr id="12" name="">
             <a:extLst xmlns:a="http://schemas.openxmlformats.org/drawingml/2006/main">
               <a:ext uri="{FF2B5EF4-FFF2-40B4-BE49-F238E27FC236}">
-                <a16:creationId xmlns:a16="http://schemas.microsoft.com/office/drawing/2014/main" id="{B2C60070-9672-49B7-A846-BA2CBD681E1C}"/>
+                <a16:creationId xmlns:a16="http://schemas.microsoft.com/office/drawing/2014/main" id="{BE2465C2-987A-4D75-8FD1-5F07B0BE3AE2}"/>
               </a:ext>
             </a:extLst>
           </p:cNvPr>
@@ -5820,7 +5820,7 @@
           <p:cNvPr id="13" name="">
             <a:extLst xmlns:a="http://schemas.openxmlformats.org/drawingml/2006/main">
               <a:ext uri="{FF2B5EF4-FFF2-40B4-BE49-F238E27FC236}">
-                <a16:creationId xmlns:a16="http://schemas.microsoft.com/office/drawing/2014/main" id="{9F078024-809B-4318-99FF-0BFEBF88E89F}"/>
+                <a16:creationId xmlns:a16="http://schemas.microsoft.com/office/drawing/2014/main" id="{44FDDCC3-DF77-4C32-9F74-C65F99FF4818}"/>
               </a:ext>
             </a:extLst>
           </p:cNvPr>
@@ -5855,7 +5855,7 @@
           <p:cNvPr id="14" name="">
             <a:extLst xmlns:a="http://schemas.openxmlformats.org/drawingml/2006/main">
               <a:ext uri="{FF2B5EF4-FFF2-40B4-BE49-F238E27FC236}">
-                <a16:creationId xmlns:a16="http://schemas.microsoft.com/office/drawing/2014/main" id="{4AC5F066-1BA0-4BDE-B109-0DB4BCE9E591}"/>
+                <a16:creationId xmlns:a16="http://schemas.microsoft.com/office/drawing/2014/main" id="{A247E187-CE48-4D46-AB4E-2B3941415798}"/>
               </a:ext>
             </a:extLst>
           </p:cNvPr>
@@ -5919,7 +5919,7 @@
           <p:cNvPr id="15" name="">
             <a:extLst xmlns:a="http://schemas.openxmlformats.org/drawingml/2006/main">
               <a:ext uri="{FF2B5EF4-FFF2-40B4-BE49-F238E27FC236}">
-                <a16:creationId xmlns:a16="http://schemas.microsoft.com/office/drawing/2014/main" id="{3529C40B-8869-4317-B504-54C86523E058}"/>
+                <a16:creationId xmlns:a16="http://schemas.microsoft.com/office/drawing/2014/main" id="{F5175D91-8AB6-4DB1-BAA3-20D20F5C568E}"/>
               </a:ext>
             </a:extLst>
           </p:cNvPr>
@@ -5983,7 +5983,7 @@
           <p:cNvPr id="16" name="">
             <a:extLst xmlns:a="http://schemas.openxmlformats.org/drawingml/2006/main">
               <a:ext uri="{FF2B5EF4-FFF2-40B4-BE49-F238E27FC236}">
-                <a16:creationId xmlns:a16="http://schemas.microsoft.com/office/drawing/2014/main" id="{FA12EC8D-4856-4D96-BB3E-453B9A972BDA}"/>
+                <a16:creationId xmlns:a16="http://schemas.microsoft.com/office/drawing/2014/main" id="{095CBC52-656F-4811-9CC7-083AB5C8EF48}"/>
               </a:ext>
             </a:extLst>
           </p:cNvPr>
@@ -6018,7 +6018,7 @@
           <p:cNvPr id="17" name="">
             <a:extLst xmlns:a="http://schemas.openxmlformats.org/drawingml/2006/main">
               <a:ext uri="{FF2B5EF4-FFF2-40B4-BE49-F238E27FC236}">
-                <a16:creationId xmlns:a16="http://schemas.microsoft.com/office/drawing/2014/main" id="{B114BCCB-F680-4335-AD5C-F4947F8957DE}"/>
+                <a16:creationId xmlns:a16="http://schemas.microsoft.com/office/drawing/2014/main" id="{38DAC104-F785-4164-980B-21880BCF6F1B}"/>
               </a:ext>
             </a:extLst>
           </p:cNvPr>
@@ -6082,7 +6082,7 @@
           <p:cNvPr id="18" name="">
             <a:extLst xmlns:a="http://schemas.openxmlformats.org/drawingml/2006/main">
               <a:ext uri="{FF2B5EF4-FFF2-40B4-BE49-F238E27FC236}">
-                <a16:creationId xmlns:a16="http://schemas.microsoft.com/office/drawing/2014/main" id="{124041E7-8E8B-4D3F-A2BF-EF557FAC9107}"/>
+                <a16:creationId xmlns:a16="http://schemas.microsoft.com/office/drawing/2014/main" id="{A890D14C-D017-4C11-B789-76BCA72F136E}"/>
               </a:ext>
             </a:extLst>
           </p:cNvPr>
@@ -6146,7 +6146,7 @@
           <p:cNvPr id="19" name="">
             <a:extLst xmlns:a="http://schemas.openxmlformats.org/drawingml/2006/main">
               <a:ext uri="{FF2B5EF4-FFF2-40B4-BE49-F238E27FC236}">
-                <a16:creationId xmlns:a16="http://schemas.microsoft.com/office/drawing/2014/main" id="{CE159F16-AF8D-40E1-B83B-B0720C8A857C}"/>
+                <a16:creationId xmlns:a16="http://schemas.microsoft.com/office/drawing/2014/main" id="{35784157-182C-47A1-B8AF-DB8022DD9D56}"/>
               </a:ext>
             </a:extLst>
           </p:cNvPr>
@@ -6181,7 +6181,7 @@
           <p:cNvPr id="20" name="">
             <a:extLst xmlns:a="http://schemas.openxmlformats.org/drawingml/2006/main">
               <a:ext uri="{FF2B5EF4-FFF2-40B4-BE49-F238E27FC236}">
-                <a16:creationId xmlns:a16="http://schemas.microsoft.com/office/drawing/2014/main" id="{71256513-DB4E-4EA5-BE5F-7149A9EF4BC5}"/>
+                <a16:creationId xmlns:a16="http://schemas.microsoft.com/office/drawing/2014/main" id="{88E2C2E8-9E17-4346-BBC2-56AECABA4FC9}"/>
               </a:ext>
             </a:extLst>
           </p:cNvPr>
@@ -6245,7 +6245,7 @@
           <p:cNvPr id="21" name="">
             <a:extLst xmlns:a="http://schemas.openxmlformats.org/drawingml/2006/main">
               <a:ext uri="{FF2B5EF4-FFF2-40B4-BE49-F238E27FC236}">
-                <a16:creationId xmlns:a16="http://schemas.microsoft.com/office/drawing/2014/main" id="{85D7BBFA-96C7-4D22-954A-C1974BD05618}"/>
+                <a16:creationId xmlns:a16="http://schemas.microsoft.com/office/drawing/2014/main" id="{DD9FA78B-FD26-4042-8C8F-E109CCCBFD74}"/>
               </a:ext>
             </a:extLst>
           </p:cNvPr>
@@ -6309,7 +6309,7 @@
           <p:cNvPr id="22" name="">
             <a:extLst xmlns:a="http://schemas.openxmlformats.org/drawingml/2006/main">
               <a:ext uri="{FF2B5EF4-FFF2-40B4-BE49-F238E27FC236}">
-                <a16:creationId xmlns:a16="http://schemas.microsoft.com/office/drawing/2014/main" id="{ECA15670-EA18-4B56-B4D8-9E79E67EABD7}"/>
+                <a16:creationId xmlns:a16="http://schemas.microsoft.com/office/drawing/2014/main" id="{A8ACC3C6-718A-4D09-907F-1B1BD8153E87}"/>
               </a:ext>
             </a:extLst>
           </p:cNvPr>
@@ -6342,7 +6342,7 @@
           <p:cNvPr id="23" name="">
             <a:extLst xmlns:a="http://schemas.openxmlformats.org/drawingml/2006/main">
               <a:ext uri="{FF2B5EF4-FFF2-40B4-BE49-F238E27FC236}">
-                <a16:creationId xmlns:a16="http://schemas.microsoft.com/office/drawing/2014/main" id="{364AB301-C936-4FBF-A8A4-EBE698884D40}"/>
+                <a16:creationId xmlns:a16="http://schemas.microsoft.com/office/drawing/2014/main" id="{4A59E9E0-5401-440B-B2D2-9E89EE2A567A}"/>
               </a:ext>
             </a:extLst>
           </p:cNvPr>
@@ -6406,7 +6406,7 @@
           <p:cNvPr id="24" name="">
             <a:extLst xmlns:a="http://schemas.openxmlformats.org/drawingml/2006/main">
               <a:ext uri="{FF2B5EF4-FFF2-40B4-BE49-F238E27FC236}">
-                <a16:creationId xmlns:a16="http://schemas.microsoft.com/office/drawing/2014/main" id="{9B7E8DD2-E1F9-42DC-977F-8E21252B1E62}"/>
+                <a16:creationId xmlns:a16="http://schemas.microsoft.com/office/drawing/2014/main" id="{0270EBA2-E1E2-4C1A-91E4-8369944DA9AA}"/>
               </a:ext>
             </a:extLst>
           </p:cNvPr>
@@ -6468,7 +6468,7 @@
     </p:spTree>
     <p:extLst>
       <p:ext uri="{BB962C8B-B14F-4D97-AF65-F5344CB8AC3E}">
-        <p14:creationId xmlns:p14="http://schemas.microsoft.com/office/powerpoint/2010/main" val="1530153476"/>
+        <p14:creationId xmlns:p14="http://schemas.microsoft.com/office/powerpoint/2010/main" val="1142707189"/>
       </p:ext>
     </p:extLst>
   </p:cSld>
@@ -6496,7 +6496,7 @@
           <p:nvPr/>
         </p:nvPicPr>
         <p:blipFill>
-          <a:blip xmlns:r="http://schemas.openxmlformats.org/officeDocument/2006/relationships" xmlns:a="http://schemas.openxmlformats.org/drawingml/2006/main" r:embed="R573f80641a774174"/>
+          <a:blip xmlns:r="http://schemas.openxmlformats.org/officeDocument/2006/relationships" xmlns:a="http://schemas.openxmlformats.org/drawingml/2006/main" r:embed="R8bd40933d80a4861"/>
           <a:srcRect xmlns:a="http://schemas.openxmlformats.org/drawingml/2006/main" l="0" t="27" r="0" b="27"/>
           <a:stretch xmlns:a="http://schemas.openxmlformats.org/drawingml/2006/main">
             <a:fillRect l="0" t="0" r="0" b="0"/>
@@ -6517,7 +6517,7 @@
           <p:cNvPr id="2" name="">
             <a:extLst xmlns:a="http://schemas.openxmlformats.org/drawingml/2006/main">
               <a:ext uri="{FF2B5EF4-FFF2-40B4-BE49-F238E27FC236}">
-                <a16:creationId xmlns:a16="http://schemas.microsoft.com/office/drawing/2014/main" id="{40374CE7-6F7A-4325-BD10-45A2F69F39FB}"/>
+                <a16:creationId xmlns:a16="http://schemas.microsoft.com/office/drawing/2014/main" id="{9309C574-6BF0-4FEF-8B13-36D1CB1B8C1A}"/>
               </a:ext>
             </a:extLst>
           </p:cNvPr>
@@ -6554,7 +6554,7 @@
           <p:cNvPr id="3" name="">
             <a:extLst xmlns:a="http://schemas.openxmlformats.org/drawingml/2006/main">
               <a:ext uri="{FF2B5EF4-FFF2-40B4-BE49-F238E27FC236}">
-                <a16:creationId xmlns:a16="http://schemas.microsoft.com/office/drawing/2014/main" id="{D6DE0729-1699-4D09-8D18-8B19521A99CF}"/>
+                <a16:creationId xmlns:a16="http://schemas.microsoft.com/office/drawing/2014/main" id="{7DDC1ABD-B9B0-436D-A5AF-53EAB3CF6D58}"/>
               </a:ext>
             </a:extLst>
           </p:cNvPr>
@@ -6591,7 +6591,7 @@
           <p:cNvPr id="4" name="">
             <a:extLst xmlns:a="http://schemas.openxmlformats.org/drawingml/2006/main">
               <a:ext uri="{FF2B5EF4-FFF2-40B4-BE49-F238E27FC236}">
-                <a16:creationId xmlns:a16="http://schemas.microsoft.com/office/drawing/2014/main" id="{790B65E0-F8EE-4F6E-B1D6-D3A95F091DCE}"/>
+                <a16:creationId xmlns:a16="http://schemas.microsoft.com/office/drawing/2014/main" id="{EAD5E305-0767-41B4-8552-8E7E2A2D4E55}"/>
               </a:ext>
             </a:extLst>
           </p:cNvPr>
@@ -6655,7 +6655,7 @@
           <p:cNvPr id="5" name="">
             <a:extLst xmlns:a="http://schemas.openxmlformats.org/drawingml/2006/main">
               <a:ext uri="{FF2B5EF4-FFF2-40B4-BE49-F238E27FC236}">
-                <a16:creationId xmlns:a16="http://schemas.microsoft.com/office/drawing/2014/main" id="{D1B2BA03-3F81-4F2C-A89B-29632DB2382D}"/>
+                <a16:creationId xmlns:a16="http://schemas.microsoft.com/office/drawing/2014/main" id="{C828E927-162A-4735-B2A2-1586A4C9080C}"/>
               </a:ext>
             </a:extLst>
           </p:cNvPr>
@@ -6719,7 +6719,7 @@
           <p:cNvPr id="6" name="">
             <a:extLst xmlns:a="http://schemas.openxmlformats.org/drawingml/2006/main">
               <a:ext uri="{FF2B5EF4-FFF2-40B4-BE49-F238E27FC236}">
-                <a16:creationId xmlns:a16="http://schemas.microsoft.com/office/drawing/2014/main" id="{C32FF21F-166D-4552-B06E-C2BF0F24976C}"/>
+                <a16:creationId xmlns:a16="http://schemas.microsoft.com/office/drawing/2014/main" id="{0847FBAA-6E7F-45DE-BEA0-1A105A6DC4F4}"/>
               </a:ext>
             </a:extLst>
           </p:cNvPr>
@@ -6783,7 +6783,7 @@
           <p:cNvPr id="7" name="">
             <a:extLst xmlns:a="http://schemas.openxmlformats.org/drawingml/2006/main">
               <a:ext uri="{FF2B5EF4-FFF2-40B4-BE49-F238E27FC236}">
-                <a16:creationId xmlns:a16="http://schemas.microsoft.com/office/drawing/2014/main" id="{703CDC94-0EBA-4206-B56C-FEF2CCBA5ECC}"/>
+                <a16:creationId xmlns:a16="http://schemas.microsoft.com/office/drawing/2014/main" id="{6F661340-9655-4A09-B0A3-08F7F6FD46A0}"/>
               </a:ext>
             </a:extLst>
           </p:cNvPr>
@@ -6818,7 +6818,7 @@
           <p:cNvPr id="8" name="">
             <a:extLst xmlns:a="http://schemas.openxmlformats.org/drawingml/2006/main">
               <a:ext uri="{FF2B5EF4-FFF2-40B4-BE49-F238E27FC236}">
-                <a16:creationId xmlns:a16="http://schemas.microsoft.com/office/drawing/2014/main" id="{DCA0304E-D006-4185-96EC-CDD5FF18CE4C}"/>
+                <a16:creationId xmlns:a16="http://schemas.microsoft.com/office/drawing/2014/main" id="{2105EEE3-CD22-4C96-91BF-33FC6D1C0E12}"/>
               </a:ext>
             </a:extLst>
           </p:cNvPr>
@@ -6882,7 +6882,7 @@
           <p:cNvPr id="9" name="">
             <a:extLst xmlns:a="http://schemas.openxmlformats.org/drawingml/2006/main">
               <a:ext uri="{FF2B5EF4-FFF2-40B4-BE49-F238E27FC236}">
-                <a16:creationId xmlns:a16="http://schemas.microsoft.com/office/drawing/2014/main" id="{D1095323-1845-46F6-8475-146CF4ED5BB8}"/>
+                <a16:creationId xmlns:a16="http://schemas.microsoft.com/office/drawing/2014/main" id="{D94409B1-9D19-468F-8722-4B2F564F0B7B}"/>
               </a:ext>
             </a:extLst>
           </p:cNvPr>
@@ -6946,7 +6946,7 @@
           <p:cNvPr id="10" name="">
             <a:extLst xmlns:a="http://schemas.openxmlformats.org/drawingml/2006/main">
               <a:ext uri="{FF2B5EF4-FFF2-40B4-BE49-F238E27FC236}">
-                <a16:creationId xmlns:a16="http://schemas.microsoft.com/office/drawing/2014/main" id="{6CDC3708-784F-4EA2-B70D-E3413A12CA08}"/>
+                <a16:creationId xmlns:a16="http://schemas.microsoft.com/office/drawing/2014/main" id="{EC3EFE05-6821-496B-84BE-47835551026C}"/>
               </a:ext>
             </a:extLst>
           </p:cNvPr>
@@ -6979,7 +6979,7 @@
           <p:cNvPr id="11" name="">
             <a:extLst xmlns:a="http://schemas.openxmlformats.org/drawingml/2006/main">
               <a:ext uri="{FF2B5EF4-FFF2-40B4-BE49-F238E27FC236}">
-                <a16:creationId xmlns:a16="http://schemas.microsoft.com/office/drawing/2014/main" id="{C0B4F57E-0883-4807-B099-4CD97B58615F}"/>
+                <a16:creationId xmlns:a16="http://schemas.microsoft.com/office/drawing/2014/main" id="{C1C44F65-43D0-413B-BDEB-98F61E25CC88}"/>
               </a:ext>
             </a:extLst>
           </p:cNvPr>
@@ -7014,7 +7014,7 @@
           <p:cNvPr id="12" name="">
             <a:extLst xmlns:a="http://schemas.openxmlformats.org/drawingml/2006/main">
               <a:ext uri="{FF2B5EF4-FFF2-40B4-BE49-F238E27FC236}">
-                <a16:creationId xmlns:a16="http://schemas.microsoft.com/office/drawing/2014/main" id="{C732B718-B51D-4149-B76E-2E37DC4EE9B9}"/>
+                <a16:creationId xmlns:a16="http://schemas.microsoft.com/office/drawing/2014/main" id="{329B7963-9A50-4153-9DAB-86FB0930344E}"/>
               </a:ext>
             </a:extLst>
           </p:cNvPr>
@@ -7078,7 +7078,7 @@
           <p:cNvPr id="13" name="">
             <a:extLst xmlns:a="http://schemas.openxmlformats.org/drawingml/2006/main">
               <a:ext uri="{FF2B5EF4-FFF2-40B4-BE49-F238E27FC236}">
-                <a16:creationId xmlns:a16="http://schemas.microsoft.com/office/drawing/2014/main" id="{A77751A4-2961-4C49-8B9D-1DC5FDED6AE5}"/>
+                <a16:creationId xmlns:a16="http://schemas.microsoft.com/office/drawing/2014/main" id="{7B17F26A-DA68-4C40-B029-C7D8AC5A82E0}"/>
               </a:ext>
             </a:extLst>
           </p:cNvPr>
@@ -7142,7 +7142,7 @@
           <p:cNvPr id="14" name="">
             <a:extLst xmlns:a="http://schemas.openxmlformats.org/drawingml/2006/main">
               <a:ext uri="{FF2B5EF4-FFF2-40B4-BE49-F238E27FC236}">
-                <a16:creationId xmlns:a16="http://schemas.microsoft.com/office/drawing/2014/main" id="{27A35661-F52E-485D-B61D-51AA5BCB7CFD}"/>
+                <a16:creationId xmlns:a16="http://schemas.microsoft.com/office/drawing/2014/main" id="{66C65AF8-015B-452D-AB47-C8F89DAF7C16}"/>
               </a:ext>
             </a:extLst>
           </p:cNvPr>
@@ -7175,7 +7175,7 @@
           <p:cNvPr id="15" name="">
             <a:extLst xmlns:a="http://schemas.openxmlformats.org/drawingml/2006/main">
               <a:ext uri="{FF2B5EF4-FFF2-40B4-BE49-F238E27FC236}">
-                <a16:creationId xmlns:a16="http://schemas.microsoft.com/office/drawing/2014/main" id="{DDBC40FE-3450-45B3-9178-175EBA066A13}"/>
+                <a16:creationId xmlns:a16="http://schemas.microsoft.com/office/drawing/2014/main" id="{A04B9DAF-9121-4373-9161-3C0B6E34E4E7}"/>
               </a:ext>
             </a:extLst>
           </p:cNvPr>
@@ -7210,7 +7210,7 @@
           <p:cNvPr id="16" name="">
             <a:extLst xmlns:a="http://schemas.openxmlformats.org/drawingml/2006/main">
               <a:ext uri="{FF2B5EF4-FFF2-40B4-BE49-F238E27FC236}">
-                <a16:creationId xmlns:a16="http://schemas.microsoft.com/office/drawing/2014/main" id="{BDC7B8E4-E1E4-4A25-9E8A-D8337F52BFE7}"/>
+                <a16:creationId xmlns:a16="http://schemas.microsoft.com/office/drawing/2014/main" id="{F2FFC2C1-8C07-4A09-B5E1-2EBD281FC75D}"/>
               </a:ext>
             </a:extLst>
           </p:cNvPr>
@@ -7274,7 +7274,7 @@
           <p:cNvPr id="17" name="">
             <a:extLst xmlns:a="http://schemas.openxmlformats.org/drawingml/2006/main">
               <a:ext uri="{FF2B5EF4-FFF2-40B4-BE49-F238E27FC236}">
-                <a16:creationId xmlns:a16="http://schemas.microsoft.com/office/drawing/2014/main" id="{CEBF05B1-6CE7-4BF4-AD61-BF7589890EEA}"/>
+                <a16:creationId xmlns:a16="http://schemas.microsoft.com/office/drawing/2014/main" id="{F03B68ED-49F3-4819-BB72-D8A49A442134}"/>
               </a:ext>
             </a:extLst>
           </p:cNvPr>
@@ -7338,7 +7338,7 @@
           <p:cNvPr id="18" name="">
             <a:extLst xmlns:a="http://schemas.openxmlformats.org/drawingml/2006/main">
               <a:ext uri="{FF2B5EF4-FFF2-40B4-BE49-F238E27FC236}">
-                <a16:creationId xmlns:a16="http://schemas.microsoft.com/office/drawing/2014/main" id="{8C7154D4-7CBC-465E-B880-0CD80E4ED10C}"/>
+                <a16:creationId xmlns:a16="http://schemas.microsoft.com/office/drawing/2014/main" id="{430FFE4C-B371-474C-99B0-4EA2BFF32D02}"/>
               </a:ext>
             </a:extLst>
           </p:cNvPr>
@@ -7402,7 +7402,7 @@
           <p:cNvPr id="19" name="">
             <a:extLst xmlns:a="http://schemas.openxmlformats.org/drawingml/2006/main">
               <a:ext uri="{FF2B5EF4-FFF2-40B4-BE49-F238E27FC236}">
-                <a16:creationId xmlns:a16="http://schemas.microsoft.com/office/drawing/2014/main" id="{8853C43D-363A-4901-84CC-92643DFC1524}"/>
+                <a16:creationId xmlns:a16="http://schemas.microsoft.com/office/drawing/2014/main" id="{60E97B7B-3070-452F-9022-66FDA06D2EA7}"/>
               </a:ext>
             </a:extLst>
           </p:cNvPr>
@@ -7435,7 +7435,7 @@
           <p:cNvPr id="20" name="">
             <a:extLst xmlns:a="http://schemas.openxmlformats.org/drawingml/2006/main">
               <a:ext uri="{FF2B5EF4-FFF2-40B4-BE49-F238E27FC236}">
-                <a16:creationId xmlns:a16="http://schemas.microsoft.com/office/drawing/2014/main" id="{0068D9BD-9820-4883-B2DE-2B51CA2AA9F9}"/>
+                <a16:creationId xmlns:a16="http://schemas.microsoft.com/office/drawing/2014/main" id="{B462C927-7F46-4742-ADB9-48ECF6FCE6FE}"/>
               </a:ext>
             </a:extLst>
           </p:cNvPr>
@@ -7499,7 +7499,7 @@
           <p:cNvPr id="21" name="">
             <a:extLst xmlns:a="http://schemas.openxmlformats.org/drawingml/2006/main">
               <a:ext uri="{FF2B5EF4-FFF2-40B4-BE49-F238E27FC236}">
-                <a16:creationId xmlns:a16="http://schemas.microsoft.com/office/drawing/2014/main" id="{ABA7A3C9-FF40-4462-B76D-91AACFB3E49A}"/>
+                <a16:creationId xmlns:a16="http://schemas.microsoft.com/office/drawing/2014/main" id="{DF518B35-455D-4748-A6DD-0DCF9891910E}"/>
               </a:ext>
             </a:extLst>
           </p:cNvPr>
@@ -7561,7 +7561,7 @@
     </p:spTree>
     <p:extLst>
       <p:ext uri="{BB962C8B-B14F-4D97-AF65-F5344CB8AC3E}">
-        <p14:creationId xmlns:p14="http://schemas.microsoft.com/office/powerpoint/2010/main" val="583839058"/>
+        <p14:creationId xmlns:p14="http://schemas.microsoft.com/office/powerpoint/2010/main" val="1730942621"/>
       </p:ext>
     </p:extLst>
   </p:cSld>
@@ -7589,7 +7589,7 @@
           <p:nvPr/>
         </p:nvPicPr>
         <p:blipFill>
-          <a:blip xmlns:r="http://schemas.openxmlformats.org/officeDocument/2006/relationships" xmlns:a="http://schemas.openxmlformats.org/drawingml/2006/main" r:embed="R493e4913ddc947c3"/>
+          <a:blip xmlns:r="http://schemas.openxmlformats.org/officeDocument/2006/relationships" xmlns:a="http://schemas.openxmlformats.org/drawingml/2006/main" r:embed="R443a93137d664ac2"/>
           <a:srcRect xmlns:a="http://schemas.openxmlformats.org/drawingml/2006/main" l="0" t="27" r="0" b="27"/>
           <a:stretch xmlns:a="http://schemas.openxmlformats.org/drawingml/2006/main">
             <a:fillRect l="0" t="0" r="0" b="0"/>
@@ -7610,7 +7610,7 @@
           <p:cNvPr id="2" name="">
             <a:extLst xmlns:a="http://schemas.openxmlformats.org/drawingml/2006/main">
               <a:ext uri="{FF2B5EF4-FFF2-40B4-BE49-F238E27FC236}">
-                <a16:creationId xmlns:a16="http://schemas.microsoft.com/office/drawing/2014/main" id="{01B0C287-3F41-4883-904F-AFDFC13A04D1}"/>
+                <a16:creationId xmlns:a16="http://schemas.microsoft.com/office/drawing/2014/main" id="{DCE5FEB4-7DE7-47D7-963F-80BCC7706AC0}"/>
               </a:ext>
             </a:extLst>
           </p:cNvPr>
@@ -7647,7 +7647,7 @@
           <p:cNvPr id="3" name="">
             <a:extLst xmlns:a="http://schemas.openxmlformats.org/drawingml/2006/main">
               <a:ext uri="{FF2B5EF4-FFF2-40B4-BE49-F238E27FC236}">
-                <a16:creationId xmlns:a16="http://schemas.microsoft.com/office/drawing/2014/main" id="{23577728-3DC5-48B1-92C0-22E2520B7A94}"/>
+                <a16:creationId xmlns:a16="http://schemas.microsoft.com/office/drawing/2014/main" id="{2F49331D-D7E9-462E-88BB-9B106837ACF8}"/>
               </a:ext>
             </a:extLst>
           </p:cNvPr>
@@ -7684,7 +7684,7 @@
           <p:cNvPr id="4" name="">
             <a:extLst xmlns:a="http://schemas.openxmlformats.org/drawingml/2006/main">
               <a:ext uri="{FF2B5EF4-FFF2-40B4-BE49-F238E27FC236}">
-                <a16:creationId xmlns:a16="http://schemas.microsoft.com/office/drawing/2014/main" id="{1544A4FE-D6D6-4EF1-BCA6-6097E6CF1386}"/>
+                <a16:creationId xmlns:a16="http://schemas.microsoft.com/office/drawing/2014/main" id="{2B3AA68A-BA53-422C-9EC3-52E36836CA69}"/>
               </a:ext>
             </a:extLst>
           </p:cNvPr>
@@ -7748,7 +7748,7 @@
           <p:cNvPr id="5" name="">
             <a:extLst xmlns:a="http://schemas.openxmlformats.org/drawingml/2006/main">
               <a:ext uri="{FF2B5EF4-FFF2-40B4-BE49-F238E27FC236}">
-                <a16:creationId xmlns:a16="http://schemas.microsoft.com/office/drawing/2014/main" id="{E2E6031E-CD24-4CFB-BDF0-C813B22DEE77}"/>
+                <a16:creationId xmlns:a16="http://schemas.microsoft.com/office/drawing/2014/main" id="{7959553B-CE3C-4969-843B-C7B055FF0CB0}"/>
               </a:ext>
             </a:extLst>
           </p:cNvPr>
@@ -7812,7 +7812,7 @@
           <p:cNvPr id="6" name="">
             <a:extLst xmlns:a="http://schemas.openxmlformats.org/drawingml/2006/main">
               <a:ext uri="{FF2B5EF4-FFF2-40B4-BE49-F238E27FC236}">
-                <a16:creationId xmlns:a16="http://schemas.microsoft.com/office/drawing/2014/main" id="{E4E3439C-2B90-4D12-A726-4C052FFEB8F6}"/>
+                <a16:creationId xmlns:a16="http://schemas.microsoft.com/office/drawing/2014/main" id="{F6651440-DDE8-4600-9E53-D895AFE3CEE0}"/>
               </a:ext>
             </a:extLst>
           </p:cNvPr>
@@ -7876,7 +7876,7 @@
           <p:cNvPr id="7" name="">
             <a:extLst xmlns:a="http://schemas.openxmlformats.org/drawingml/2006/main">
               <a:ext uri="{FF2B5EF4-FFF2-40B4-BE49-F238E27FC236}">
-                <a16:creationId xmlns:a16="http://schemas.microsoft.com/office/drawing/2014/main" id="{E4A902FD-9F91-4AD6-80CA-9B3EADB7F766}"/>
+                <a16:creationId xmlns:a16="http://schemas.microsoft.com/office/drawing/2014/main" id="{814C014D-BF8A-4F1C-8267-9475DDCCA0D3}"/>
               </a:ext>
             </a:extLst>
           </p:cNvPr>
@@ -7911,7 +7911,7 @@
           <p:cNvPr id="8" name="">
             <a:extLst xmlns:a="http://schemas.openxmlformats.org/drawingml/2006/main">
               <a:ext uri="{FF2B5EF4-FFF2-40B4-BE49-F238E27FC236}">
-                <a16:creationId xmlns:a16="http://schemas.microsoft.com/office/drawing/2014/main" id="{300BCB5C-8BE7-4225-B4ED-D66A8161F7BA}"/>
+                <a16:creationId xmlns:a16="http://schemas.microsoft.com/office/drawing/2014/main" id="{AEDFAC74-11FD-4400-8C10-07DD345F4D26}"/>
               </a:ext>
             </a:extLst>
           </p:cNvPr>
@@ -7975,7 +7975,7 @@
           <p:cNvPr id="9" name="">
             <a:extLst xmlns:a="http://schemas.openxmlformats.org/drawingml/2006/main">
               <a:ext uri="{FF2B5EF4-FFF2-40B4-BE49-F238E27FC236}">
-                <a16:creationId xmlns:a16="http://schemas.microsoft.com/office/drawing/2014/main" id="{AA262C13-FE5D-4D92-B7AF-8E16853C2D0E}"/>
+                <a16:creationId xmlns:a16="http://schemas.microsoft.com/office/drawing/2014/main" id="{FDB1AE67-89D5-4374-9855-D7AC2A5D8B57}"/>
               </a:ext>
             </a:extLst>
           </p:cNvPr>
@@ -8039,7 +8039,7 @@
           <p:cNvPr id="10" name="">
             <a:extLst xmlns:a="http://schemas.openxmlformats.org/drawingml/2006/main">
               <a:ext uri="{FF2B5EF4-FFF2-40B4-BE49-F238E27FC236}">
-                <a16:creationId xmlns:a16="http://schemas.microsoft.com/office/drawing/2014/main" id="{93DF69EC-8243-47DD-80A3-3CA9C4959D93}"/>
+                <a16:creationId xmlns:a16="http://schemas.microsoft.com/office/drawing/2014/main" id="{DA262152-B6CD-4EAC-9E60-CAA198CEB725}"/>
               </a:ext>
             </a:extLst>
           </p:cNvPr>
@@ -8074,7 +8074,7 @@
           <p:cNvPr id="11" name="">
             <a:extLst xmlns:a="http://schemas.openxmlformats.org/drawingml/2006/main">
               <a:ext uri="{FF2B5EF4-FFF2-40B4-BE49-F238E27FC236}">
-                <a16:creationId xmlns:a16="http://schemas.microsoft.com/office/drawing/2014/main" id="{07D81F43-68DA-4687-A142-CA784DD30BF4}"/>
+                <a16:creationId xmlns:a16="http://schemas.microsoft.com/office/drawing/2014/main" id="{BC6D893E-ED70-4A07-BF6C-2A2ACB49E10F}"/>
               </a:ext>
             </a:extLst>
           </p:cNvPr>
@@ -8138,7 +8138,7 @@
           <p:cNvPr id="12" name="">
             <a:extLst xmlns:a="http://schemas.openxmlformats.org/drawingml/2006/main">
               <a:ext uri="{FF2B5EF4-FFF2-40B4-BE49-F238E27FC236}">
-                <a16:creationId xmlns:a16="http://schemas.microsoft.com/office/drawing/2014/main" id="{46874114-02FB-419C-A327-F9D56836BFC8}"/>
+                <a16:creationId xmlns:a16="http://schemas.microsoft.com/office/drawing/2014/main" id="{B017EDBC-FCBD-40D8-906C-D8E156C26F76}"/>
               </a:ext>
             </a:extLst>
           </p:cNvPr>
@@ -8202,7 +8202,7 @@
           <p:cNvPr id="13" name="">
             <a:extLst xmlns:a="http://schemas.openxmlformats.org/drawingml/2006/main">
               <a:ext uri="{FF2B5EF4-FFF2-40B4-BE49-F238E27FC236}">
-                <a16:creationId xmlns:a16="http://schemas.microsoft.com/office/drawing/2014/main" id="{AF695E84-780E-40AC-B8DF-673C6C9D52F9}"/>
+                <a16:creationId xmlns:a16="http://schemas.microsoft.com/office/drawing/2014/main" id="{4D60ADEE-E364-4A5A-8247-14B3B9D1716B}"/>
               </a:ext>
             </a:extLst>
           </p:cNvPr>
@@ -8237,7 +8237,7 @@
           <p:cNvPr id="14" name="">
             <a:extLst xmlns:a="http://schemas.openxmlformats.org/drawingml/2006/main">
               <a:ext uri="{FF2B5EF4-FFF2-40B4-BE49-F238E27FC236}">
-                <a16:creationId xmlns:a16="http://schemas.microsoft.com/office/drawing/2014/main" id="{80406BC3-3E8F-4716-80A0-F0432775EA00}"/>
+                <a16:creationId xmlns:a16="http://schemas.microsoft.com/office/drawing/2014/main" id="{2B7DA5D6-8ECC-4077-A7DC-AA9E2C2B529A}"/>
               </a:ext>
             </a:extLst>
           </p:cNvPr>
@@ -8301,7 +8301,7 @@
           <p:cNvPr id="15" name="">
             <a:extLst xmlns:a="http://schemas.openxmlformats.org/drawingml/2006/main">
               <a:ext uri="{FF2B5EF4-FFF2-40B4-BE49-F238E27FC236}">
-                <a16:creationId xmlns:a16="http://schemas.microsoft.com/office/drawing/2014/main" id="{F4243409-D714-41B8-84AF-848D3F935AFD}"/>
+                <a16:creationId xmlns:a16="http://schemas.microsoft.com/office/drawing/2014/main" id="{43750D0A-A274-4532-84B4-55B2AB8462A1}"/>
               </a:ext>
             </a:extLst>
           </p:cNvPr>
@@ -8365,7 +8365,7 @@
           <p:cNvPr id="16" name="">
             <a:extLst xmlns:a="http://schemas.openxmlformats.org/drawingml/2006/main">
               <a:ext uri="{FF2B5EF4-FFF2-40B4-BE49-F238E27FC236}">
-                <a16:creationId xmlns:a16="http://schemas.microsoft.com/office/drawing/2014/main" id="{0B8F4A1C-63DF-47B0-8D1F-7BA103070F00}"/>
+                <a16:creationId xmlns:a16="http://schemas.microsoft.com/office/drawing/2014/main" id="{8D593CFA-0084-4DBA-A9C2-11F8DE90531B}"/>
               </a:ext>
             </a:extLst>
           </p:cNvPr>
@@ -8400,7 +8400,7 @@
           <p:cNvPr id="17" name="">
             <a:extLst xmlns:a="http://schemas.openxmlformats.org/drawingml/2006/main">
               <a:ext uri="{FF2B5EF4-FFF2-40B4-BE49-F238E27FC236}">
-                <a16:creationId xmlns:a16="http://schemas.microsoft.com/office/drawing/2014/main" id="{83178575-816B-455A-B40F-04B895D780C6}"/>
+                <a16:creationId xmlns:a16="http://schemas.microsoft.com/office/drawing/2014/main" id="{D8ED39F3-D70F-469D-8EA2-D9A7DF8F6D0A}"/>
               </a:ext>
             </a:extLst>
           </p:cNvPr>
@@ -8464,7 +8464,7 @@
           <p:cNvPr id="18" name="">
             <a:extLst xmlns:a="http://schemas.openxmlformats.org/drawingml/2006/main">
               <a:ext uri="{FF2B5EF4-FFF2-40B4-BE49-F238E27FC236}">
-                <a16:creationId xmlns:a16="http://schemas.microsoft.com/office/drawing/2014/main" id="{6EA34316-C556-4053-8502-AA63024468B6}"/>
+                <a16:creationId xmlns:a16="http://schemas.microsoft.com/office/drawing/2014/main" id="{3AF509D9-87B4-40B7-A5C2-DC1140A6105A}"/>
               </a:ext>
             </a:extLst>
           </p:cNvPr>
@@ -8528,7 +8528,7 @@
           <p:cNvPr id="19" name="">
             <a:extLst xmlns:a="http://schemas.openxmlformats.org/drawingml/2006/main">
               <a:ext uri="{FF2B5EF4-FFF2-40B4-BE49-F238E27FC236}">
-                <a16:creationId xmlns:a16="http://schemas.microsoft.com/office/drawing/2014/main" id="{55696521-A3A9-44E0-8A0E-CEF181E8DF28}"/>
+                <a16:creationId xmlns:a16="http://schemas.microsoft.com/office/drawing/2014/main" id="{A0A6910F-B275-4A3E-B987-6D694232DF9F}"/>
               </a:ext>
             </a:extLst>
           </p:cNvPr>
@@ -8592,7 +8592,7 @@
           <p:cNvPr id="20" name="">
             <a:extLst xmlns:a="http://schemas.openxmlformats.org/drawingml/2006/main">
               <a:ext uri="{FF2B5EF4-FFF2-40B4-BE49-F238E27FC236}">
-                <a16:creationId xmlns:a16="http://schemas.microsoft.com/office/drawing/2014/main" id="{82B7AF47-8B77-4062-A872-8DE748CAC162}"/>
+                <a16:creationId xmlns:a16="http://schemas.microsoft.com/office/drawing/2014/main" id="{36959628-0B4D-400A-A16D-4A8A121D8186}"/>
               </a:ext>
             </a:extLst>
           </p:cNvPr>
@@ -8625,7 +8625,7 @@
           <p:cNvPr id="21" name="">
             <a:extLst xmlns:a="http://schemas.openxmlformats.org/drawingml/2006/main">
               <a:ext uri="{FF2B5EF4-FFF2-40B4-BE49-F238E27FC236}">
-                <a16:creationId xmlns:a16="http://schemas.microsoft.com/office/drawing/2014/main" id="{99AC47D2-A727-4DD3-B180-D05EA9A16FE4}"/>
+                <a16:creationId xmlns:a16="http://schemas.microsoft.com/office/drawing/2014/main" id="{E438304D-704C-4AEB-87C9-F37EB13B830A}"/>
               </a:ext>
             </a:extLst>
           </p:cNvPr>
@@ -8658,7 +8658,7 @@
           <p:cNvPr id="22" name="">
             <a:extLst xmlns:a="http://schemas.openxmlformats.org/drawingml/2006/main">
               <a:ext uri="{FF2B5EF4-FFF2-40B4-BE49-F238E27FC236}">
-                <a16:creationId xmlns:a16="http://schemas.microsoft.com/office/drawing/2014/main" id="{916F5767-7A9E-4E34-8C54-50F2E332BFBD}"/>
+                <a16:creationId xmlns:a16="http://schemas.microsoft.com/office/drawing/2014/main" id="{14B08C7D-DE97-4A39-91CE-1CEA007D14F2}"/>
               </a:ext>
             </a:extLst>
           </p:cNvPr>
@@ -8722,7 +8722,7 @@
           <p:cNvPr id="23" name="">
             <a:extLst xmlns:a="http://schemas.openxmlformats.org/drawingml/2006/main">
               <a:ext uri="{FF2B5EF4-FFF2-40B4-BE49-F238E27FC236}">
-                <a16:creationId xmlns:a16="http://schemas.microsoft.com/office/drawing/2014/main" id="{C84E55D4-96FE-4AE1-8D60-7CD64186607A}"/>
+                <a16:creationId xmlns:a16="http://schemas.microsoft.com/office/drawing/2014/main" id="{B51EFD9E-1F22-4EEC-99F2-35E875B3B5D6}"/>
               </a:ext>
             </a:extLst>
           </p:cNvPr>
@@ -8755,7 +8755,7 @@
           <p:cNvPr id="24" name="">
             <a:extLst xmlns:a="http://schemas.openxmlformats.org/drawingml/2006/main">
               <a:ext uri="{FF2B5EF4-FFF2-40B4-BE49-F238E27FC236}">
-                <a16:creationId xmlns:a16="http://schemas.microsoft.com/office/drawing/2014/main" id="{73EE3AEB-F26B-4551-A71F-D8C504A2DC0B}"/>
+                <a16:creationId xmlns:a16="http://schemas.microsoft.com/office/drawing/2014/main" id="{433B741C-929D-4F64-98E3-42FC9CE2404F}"/>
               </a:ext>
             </a:extLst>
           </p:cNvPr>
@@ -8788,7 +8788,7 @@
           <p:cNvPr id="25" name="">
             <a:extLst xmlns:a="http://schemas.openxmlformats.org/drawingml/2006/main">
               <a:ext uri="{FF2B5EF4-FFF2-40B4-BE49-F238E27FC236}">
-                <a16:creationId xmlns:a16="http://schemas.microsoft.com/office/drawing/2014/main" id="{3AA699CF-2CAB-4497-BA3E-D029CDC4D769}"/>
+                <a16:creationId xmlns:a16="http://schemas.microsoft.com/office/drawing/2014/main" id="{C0E72C21-C180-468C-94EB-F94EB625A863}"/>
               </a:ext>
             </a:extLst>
           </p:cNvPr>
@@ -8852,7 +8852,7 @@
           <p:cNvPr id="26" name="">
             <a:extLst xmlns:a="http://schemas.openxmlformats.org/drawingml/2006/main">
               <a:ext uri="{FF2B5EF4-FFF2-40B4-BE49-F238E27FC236}">
-                <a16:creationId xmlns:a16="http://schemas.microsoft.com/office/drawing/2014/main" id="{EB365F80-D440-40D4-A1C9-4EEB020915EA}"/>
+                <a16:creationId xmlns:a16="http://schemas.microsoft.com/office/drawing/2014/main" id="{E4E99C4F-D8C9-49FE-81F1-A604F516BA12}"/>
               </a:ext>
             </a:extLst>
           </p:cNvPr>
@@ -8885,7 +8885,7 @@
           <p:cNvPr id="27" name="">
             <a:extLst xmlns:a="http://schemas.openxmlformats.org/drawingml/2006/main">
               <a:ext uri="{FF2B5EF4-FFF2-40B4-BE49-F238E27FC236}">
-                <a16:creationId xmlns:a16="http://schemas.microsoft.com/office/drawing/2014/main" id="{B203D1B1-B787-420A-B2D2-459201A750C3}"/>
+                <a16:creationId xmlns:a16="http://schemas.microsoft.com/office/drawing/2014/main" id="{F077DEB8-CC97-4AE5-9E86-E351006D3BD0}"/>
               </a:ext>
             </a:extLst>
           </p:cNvPr>
@@ -8918,7 +8918,7 @@
           <p:cNvPr id="28" name="">
             <a:extLst xmlns:a="http://schemas.openxmlformats.org/drawingml/2006/main">
               <a:ext uri="{FF2B5EF4-FFF2-40B4-BE49-F238E27FC236}">
-                <a16:creationId xmlns:a16="http://schemas.microsoft.com/office/drawing/2014/main" id="{2F3CC37A-FB33-4ECD-B3A1-34C7AAB25D0E}"/>
+                <a16:creationId xmlns:a16="http://schemas.microsoft.com/office/drawing/2014/main" id="{C068473C-2418-4752-A51B-68EA98FE911F}"/>
               </a:ext>
             </a:extLst>
           </p:cNvPr>
@@ -8982,7 +8982,7 @@
           <p:cNvPr id="29" name="">
             <a:extLst xmlns:a="http://schemas.openxmlformats.org/drawingml/2006/main">
               <a:ext uri="{FF2B5EF4-FFF2-40B4-BE49-F238E27FC236}">
-                <a16:creationId xmlns:a16="http://schemas.microsoft.com/office/drawing/2014/main" id="{F4019724-4A86-4C6D-8537-5C1C48B5131D}"/>
+                <a16:creationId xmlns:a16="http://schemas.microsoft.com/office/drawing/2014/main" id="{3FD54CA7-BF89-4617-9DAE-3D8FDCD6C27F}"/>
               </a:ext>
             </a:extLst>
           </p:cNvPr>
@@ -9015,7 +9015,7 @@
           <p:cNvPr id="30" name="">
             <a:extLst xmlns:a="http://schemas.openxmlformats.org/drawingml/2006/main">
               <a:ext uri="{FF2B5EF4-FFF2-40B4-BE49-F238E27FC236}">
-                <a16:creationId xmlns:a16="http://schemas.microsoft.com/office/drawing/2014/main" id="{F520934D-0360-47E1-967E-A6E9AADEEE70}"/>
+                <a16:creationId xmlns:a16="http://schemas.microsoft.com/office/drawing/2014/main" id="{D09DDD23-ACDE-4220-ACD0-C87447DDC1AE}"/>
               </a:ext>
             </a:extLst>
           </p:cNvPr>
@@ -9079,7 +9079,7 @@
           <p:cNvPr id="31" name="">
             <a:extLst xmlns:a="http://schemas.openxmlformats.org/drawingml/2006/main">
               <a:ext uri="{FF2B5EF4-FFF2-40B4-BE49-F238E27FC236}">
-                <a16:creationId xmlns:a16="http://schemas.microsoft.com/office/drawing/2014/main" id="{8EED4AF7-64BF-406E-9B01-179A298ECFF3}"/>
+                <a16:creationId xmlns:a16="http://schemas.microsoft.com/office/drawing/2014/main" id="{62922320-9CBA-478B-8177-987A3E230ED6}"/>
               </a:ext>
             </a:extLst>
           </p:cNvPr>
@@ -9141,7 +9141,7 @@
     </p:spTree>
     <p:extLst>
       <p:ext uri="{BB962C8B-B14F-4D97-AF65-F5344CB8AC3E}">
-        <p14:creationId xmlns:p14="http://schemas.microsoft.com/office/powerpoint/2010/main" val="1702381345"/>
+        <p14:creationId xmlns:p14="http://schemas.microsoft.com/office/powerpoint/2010/main" val="312912776"/>
       </p:ext>
     </p:extLst>
   </p:cSld>
@@ -9169,7 +9169,7 @@
           <p:nvPr/>
         </p:nvPicPr>
         <p:blipFill>
-          <a:blip xmlns:r="http://schemas.openxmlformats.org/officeDocument/2006/relationships" xmlns:a="http://schemas.openxmlformats.org/drawingml/2006/main" r:embed="R7666c354c38d4702"/>
+          <a:blip xmlns:r="http://schemas.openxmlformats.org/officeDocument/2006/relationships" xmlns:a="http://schemas.openxmlformats.org/drawingml/2006/main" r:embed="R3e6d65ba984a41ec"/>
           <a:srcRect xmlns:a="http://schemas.openxmlformats.org/drawingml/2006/main" l="0" t="7813" r="0" b="7813"/>
           <a:stretch xmlns:a="http://schemas.openxmlformats.org/drawingml/2006/main">
             <a:fillRect l="0" t="0" r="0" b="0"/>
@@ -9190,7 +9190,7 @@
           <p:cNvPr id="2" name="">
             <a:extLst xmlns:a="http://schemas.openxmlformats.org/drawingml/2006/main">
               <a:ext uri="{FF2B5EF4-FFF2-40B4-BE49-F238E27FC236}">
-                <a16:creationId xmlns:a16="http://schemas.microsoft.com/office/drawing/2014/main" id="{C6EB7B0D-8B64-45E1-BB01-79C702AD8A92}"/>
+                <a16:creationId xmlns:a16="http://schemas.microsoft.com/office/drawing/2014/main" id="{410344F9-F97D-4301-9288-A8743DE598CF}"/>
               </a:ext>
             </a:extLst>
           </p:cNvPr>
@@ -9227,7 +9227,7 @@
           <p:cNvPr id="3" name="">
             <a:extLst xmlns:a="http://schemas.openxmlformats.org/drawingml/2006/main">
               <a:ext uri="{FF2B5EF4-FFF2-40B4-BE49-F238E27FC236}">
-                <a16:creationId xmlns:a16="http://schemas.microsoft.com/office/drawing/2014/main" id="{B1C8ABA9-6C9E-4657-A6C2-2514FD001461}"/>
+                <a16:creationId xmlns:a16="http://schemas.microsoft.com/office/drawing/2014/main" id="{7427B706-00A2-4346-8068-A43DE32F55C3}"/>
               </a:ext>
             </a:extLst>
           </p:cNvPr>
@@ -9264,7 +9264,7 @@
           <p:cNvPr id="4" name="">
             <a:extLst xmlns:a="http://schemas.openxmlformats.org/drawingml/2006/main">
               <a:ext uri="{FF2B5EF4-FFF2-40B4-BE49-F238E27FC236}">
-                <a16:creationId xmlns:a16="http://schemas.microsoft.com/office/drawing/2014/main" id="{D4014995-4606-426B-A5B7-C917B947E7F0}"/>
+                <a16:creationId xmlns:a16="http://schemas.microsoft.com/office/drawing/2014/main" id="{D576F53C-E357-4FDE-8523-B8D164785F8D}"/>
               </a:ext>
             </a:extLst>
           </p:cNvPr>
@@ -9328,7 +9328,7 @@
           <p:cNvPr id="5" name="">
             <a:extLst xmlns:a="http://schemas.openxmlformats.org/drawingml/2006/main">
               <a:ext uri="{FF2B5EF4-FFF2-40B4-BE49-F238E27FC236}">
-                <a16:creationId xmlns:a16="http://schemas.microsoft.com/office/drawing/2014/main" id="{1CD06526-C974-4307-8F01-132B800F8AE3}"/>
+                <a16:creationId xmlns:a16="http://schemas.microsoft.com/office/drawing/2014/main" id="{0F3AB12D-2F98-45D9-8D22-4C697ECB0306}"/>
               </a:ext>
             </a:extLst>
           </p:cNvPr>
@@ -9392,7 +9392,7 @@
           <p:cNvPr id="6" name="">
             <a:extLst xmlns:a="http://schemas.openxmlformats.org/drawingml/2006/main">
               <a:ext uri="{FF2B5EF4-FFF2-40B4-BE49-F238E27FC236}">
-                <a16:creationId xmlns:a16="http://schemas.microsoft.com/office/drawing/2014/main" id="{5CF82DA9-1F74-4110-86FA-90FDC05FCEA5}"/>
+                <a16:creationId xmlns:a16="http://schemas.microsoft.com/office/drawing/2014/main" id="{D0A0FEB8-5FD1-4298-B0C2-89F1591B2715}"/>
               </a:ext>
             </a:extLst>
           </p:cNvPr>
@@ -9456,7 +9456,7 @@
           <p:cNvPr id="7" name="">
             <a:extLst xmlns:a="http://schemas.openxmlformats.org/drawingml/2006/main">
               <a:ext uri="{FF2B5EF4-FFF2-40B4-BE49-F238E27FC236}">
-                <a16:creationId xmlns:a16="http://schemas.microsoft.com/office/drawing/2014/main" id="{7CE80B2E-E52D-466A-95FD-3FAB9DC21951}"/>
+                <a16:creationId xmlns:a16="http://schemas.microsoft.com/office/drawing/2014/main" id="{7F624435-8A92-4759-9656-AE453DB222B7}"/>
               </a:ext>
             </a:extLst>
           </p:cNvPr>
@@ -9491,7 +9491,7 @@
           <p:cNvPr id="8" name="">
             <a:extLst xmlns:a="http://schemas.openxmlformats.org/drawingml/2006/main">
               <a:ext uri="{FF2B5EF4-FFF2-40B4-BE49-F238E27FC236}">
-                <a16:creationId xmlns:a16="http://schemas.microsoft.com/office/drawing/2014/main" id="{CD885347-2282-4A63-AAB4-0BD70302630E}"/>
+                <a16:creationId xmlns:a16="http://schemas.microsoft.com/office/drawing/2014/main" id="{4DF873FE-5862-4EB5-B3C2-2044C865D9E0}"/>
               </a:ext>
             </a:extLst>
           </p:cNvPr>
@@ -9555,7 +9555,7 @@
           <p:cNvPr id="9" name="">
             <a:extLst xmlns:a="http://schemas.openxmlformats.org/drawingml/2006/main">
               <a:ext uri="{FF2B5EF4-FFF2-40B4-BE49-F238E27FC236}">
-                <a16:creationId xmlns:a16="http://schemas.microsoft.com/office/drawing/2014/main" id="{3FFF8990-435B-4B3C-B512-4F6BDF615ED3}"/>
+                <a16:creationId xmlns:a16="http://schemas.microsoft.com/office/drawing/2014/main" id="{6208954F-4AA1-4C56-AFE3-94B6E0E904AA}"/>
               </a:ext>
             </a:extLst>
           </p:cNvPr>
@@ -9619,7 +9619,7 @@
           <p:cNvPr id="10" name="">
             <a:extLst xmlns:a="http://schemas.openxmlformats.org/drawingml/2006/main">
               <a:ext uri="{FF2B5EF4-FFF2-40B4-BE49-F238E27FC236}">
-                <a16:creationId xmlns:a16="http://schemas.microsoft.com/office/drawing/2014/main" id="{BA9F002B-0454-4CD2-B81E-36B5E7A10084}"/>
+                <a16:creationId xmlns:a16="http://schemas.microsoft.com/office/drawing/2014/main" id="{AEC8D1EB-E20A-41A5-B900-213EE2BFAF08}"/>
               </a:ext>
             </a:extLst>
           </p:cNvPr>
@@ -9652,7 +9652,7 @@
           <p:cNvPr id="11" name="">
             <a:extLst xmlns:a="http://schemas.openxmlformats.org/drawingml/2006/main">
               <a:ext uri="{FF2B5EF4-FFF2-40B4-BE49-F238E27FC236}">
-                <a16:creationId xmlns:a16="http://schemas.microsoft.com/office/drawing/2014/main" id="{67B813F9-1003-438C-8A96-66363B2A981F}"/>
+                <a16:creationId xmlns:a16="http://schemas.microsoft.com/office/drawing/2014/main" id="{2676325E-2906-4C4B-9475-F97BBA966F54}"/>
               </a:ext>
             </a:extLst>
           </p:cNvPr>
@@ -9687,7 +9687,7 @@
           <p:cNvPr id="12" name="">
             <a:extLst xmlns:a="http://schemas.openxmlformats.org/drawingml/2006/main">
               <a:ext uri="{FF2B5EF4-FFF2-40B4-BE49-F238E27FC236}">
-                <a16:creationId xmlns:a16="http://schemas.microsoft.com/office/drawing/2014/main" id="{A78EAAEF-23FF-4C33-9332-F256C86CCA36}"/>
+                <a16:creationId xmlns:a16="http://schemas.microsoft.com/office/drawing/2014/main" id="{29CD5686-6852-467A-A8BD-8ADFD734C540}"/>
               </a:ext>
             </a:extLst>
           </p:cNvPr>
@@ -9751,7 +9751,7 @@
           <p:cNvPr id="13" name="">
             <a:extLst xmlns:a="http://schemas.openxmlformats.org/drawingml/2006/main">
               <a:ext uri="{FF2B5EF4-FFF2-40B4-BE49-F238E27FC236}">
-                <a16:creationId xmlns:a16="http://schemas.microsoft.com/office/drawing/2014/main" id="{D7251C7C-64CC-4F92-8CE5-91BF63942CCA}"/>
+                <a16:creationId xmlns:a16="http://schemas.microsoft.com/office/drawing/2014/main" id="{1AB3DE5F-A8DB-497F-9D7A-180110E20297}"/>
               </a:ext>
             </a:extLst>
           </p:cNvPr>
@@ -9815,7 +9815,7 @@
           <p:cNvPr id="14" name="">
             <a:extLst xmlns:a="http://schemas.openxmlformats.org/drawingml/2006/main">
               <a:ext uri="{FF2B5EF4-FFF2-40B4-BE49-F238E27FC236}">
-                <a16:creationId xmlns:a16="http://schemas.microsoft.com/office/drawing/2014/main" id="{C25E3069-9376-4BFF-9D46-E402A7054939}"/>
+                <a16:creationId xmlns:a16="http://schemas.microsoft.com/office/drawing/2014/main" id="{6F837DCD-20E8-43C3-AF92-8472D8D200D4}"/>
               </a:ext>
             </a:extLst>
           </p:cNvPr>
@@ -9848,7 +9848,7 @@
           <p:cNvPr id="15" name="">
             <a:extLst xmlns:a="http://schemas.openxmlformats.org/drawingml/2006/main">
               <a:ext uri="{FF2B5EF4-FFF2-40B4-BE49-F238E27FC236}">
-                <a16:creationId xmlns:a16="http://schemas.microsoft.com/office/drawing/2014/main" id="{16F521F2-3AA1-4BFC-A96C-459AD52FC9FA}"/>
+                <a16:creationId xmlns:a16="http://schemas.microsoft.com/office/drawing/2014/main" id="{9C2B8A33-026E-41CF-AEF0-17376A8F8BD4}"/>
               </a:ext>
             </a:extLst>
           </p:cNvPr>
@@ -9883,7 +9883,7 @@
           <p:cNvPr id="16" name="">
             <a:extLst xmlns:a="http://schemas.openxmlformats.org/drawingml/2006/main">
               <a:ext uri="{FF2B5EF4-FFF2-40B4-BE49-F238E27FC236}">
-                <a16:creationId xmlns:a16="http://schemas.microsoft.com/office/drawing/2014/main" id="{CC941DD9-4BD2-4A54-81E5-340841F25D65}"/>
+                <a16:creationId xmlns:a16="http://schemas.microsoft.com/office/drawing/2014/main" id="{3583B78E-6969-42AA-8066-BD6B2568FDF8}"/>
               </a:ext>
             </a:extLst>
           </p:cNvPr>
@@ -9947,7 +9947,7 @@
           <p:cNvPr id="17" name="">
             <a:extLst xmlns:a="http://schemas.openxmlformats.org/drawingml/2006/main">
               <a:ext uri="{FF2B5EF4-FFF2-40B4-BE49-F238E27FC236}">
-                <a16:creationId xmlns:a16="http://schemas.microsoft.com/office/drawing/2014/main" id="{CB4EB812-EE10-47F5-BDB4-E7ADE947EB87}"/>
+                <a16:creationId xmlns:a16="http://schemas.microsoft.com/office/drawing/2014/main" id="{24C29628-9ECE-40EF-B4C6-3B4EF3D3214B}"/>
               </a:ext>
             </a:extLst>
           </p:cNvPr>
@@ -10011,7 +10011,7 @@
           <p:cNvPr id="18" name="">
             <a:extLst xmlns:a="http://schemas.openxmlformats.org/drawingml/2006/main">
               <a:ext uri="{FF2B5EF4-FFF2-40B4-BE49-F238E27FC236}">
-                <a16:creationId xmlns:a16="http://schemas.microsoft.com/office/drawing/2014/main" id="{03E055F5-9F60-4F77-BA7F-48C5C1881FA5}"/>
+                <a16:creationId xmlns:a16="http://schemas.microsoft.com/office/drawing/2014/main" id="{CADF65F2-2A92-4E66-8DE4-19667DAFA9D1}"/>
               </a:ext>
             </a:extLst>
           </p:cNvPr>
@@ -10044,7 +10044,7 @@
           <p:cNvPr id="19" name="">
             <a:extLst xmlns:a="http://schemas.openxmlformats.org/drawingml/2006/main">
               <a:ext uri="{FF2B5EF4-FFF2-40B4-BE49-F238E27FC236}">
-                <a16:creationId xmlns:a16="http://schemas.microsoft.com/office/drawing/2014/main" id="{1F745298-C109-4433-8A92-EB1B33C71CDF}"/>
+                <a16:creationId xmlns:a16="http://schemas.microsoft.com/office/drawing/2014/main" id="{631282B3-AD5E-4B20-9765-8E1420A919C1}"/>
               </a:ext>
             </a:extLst>
           </p:cNvPr>
@@ -10079,7 +10079,7 @@
           <p:cNvPr id="20" name="">
             <a:extLst xmlns:a="http://schemas.openxmlformats.org/drawingml/2006/main">
               <a:ext uri="{FF2B5EF4-FFF2-40B4-BE49-F238E27FC236}">
-                <a16:creationId xmlns:a16="http://schemas.microsoft.com/office/drawing/2014/main" id="{8AAB1A30-0E33-4BFE-B0C5-B8668B7C099A}"/>
+                <a16:creationId xmlns:a16="http://schemas.microsoft.com/office/drawing/2014/main" id="{5B3A178A-03FA-42F5-A888-F18B605B280E}"/>
               </a:ext>
             </a:extLst>
           </p:cNvPr>
@@ -10143,7 +10143,7 @@
           <p:cNvPr id="21" name="">
             <a:extLst xmlns:a="http://schemas.openxmlformats.org/drawingml/2006/main">
               <a:ext uri="{FF2B5EF4-FFF2-40B4-BE49-F238E27FC236}">
-                <a16:creationId xmlns:a16="http://schemas.microsoft.com/office/drawing/2014/main" id="{FE71E2FA-350D-474C-96C1-2ADAE3A38AC5}"/>
+                <a16:creationId xmlns:a16="http://schemas.microsoft.com/office/drawing/2014/main" id="{801451E1-0977-4948-A572-177B4BF9C137}"/>
               </a:ext>
             </a:extLst>
           </p:cNvPr>
@@ -10207,7 +10207,7 @@
           <p:cNvPr id="22" name="">
             <a:extLst xmlns:a="http://schemas.openxmlformats.org/drawingml/2006/main">
               <a:ext uri="{FF2B5EF4-FFF2-40B4-BE49-F238E27FC236}">
-                <a16:creationId xmlns:a16="http://schemas.microsoft.com/office/drawing/2014/main" id="{DA6A236B-8375-40F6-9FB0-AEFC9548CE68}"/>
+                <a16:creationId xmlns:a16="http://schemas.microsoft.com/office/drawing/2014/main" id="{0B64517C-0D9E-4A19-B0E1-762F1D64F351}"/>
               </a:ext>
             </a:extLst>
           </p:cNvPr>
@@ -10271,7 +10271,7 @@
           <p:cNvPr id="23" name="">
             <a:extLst xmlns:a="http://schemas.openxmlformats.org/drawingml/2006/main">
               <a:ext uri="{FF2B5EF4-FFF2-40B4-BE49-F238E27FC236}">
-                <a16:creationId xmlns:a16="http://schemas.microsoft.com/office/drawing/2014/main" id="{E972FAE8-D2D5-440D-AFDD-C9D1B56509CC}"/>
+                <a16:creationId xmlns:a16="http://schemas.microsoft.com/office/drawing/2014/main" id="{671BCF63-C942-45CB-B627-8E78D91EB64F}"/>
               </a:ext>
             </a:extLst>
           </p:cNvPr>
@@ -10335,7 +10335,7 @@
           <p:cNvPr id="24" name="">
             <a:extLst xmlns:a="http://schemas.openxmlformats.org/drawingml/2006/main">
               <a:ext uri="{FF2B5EF4-FFF2-40B4-BE49-F238E27FC236}">
-                <a16:creationId xmlns:a16="http://schemas.microsoft.com/office/drawing/2014/main" id="{FB0BB166-78FD-4B2D-BEC6-1857D7174BEA}"/>
+                <a16:creationId xmlns:a16="http://schemas.microsoft.com/office/drawing/2014/main" id="{6161B7B5-DF99-48CE-B959-F8B2AEED35D4}"/>
               </a:ext>
             </a:extLst>
           </p:cNvPr>
@@ -10368,7 +10368,7 @@
           <p:cNvPr id="25" name="">
             <a:extLst xmlns:a="http://schemas.openxmlformats.org/drawingml/2006/main">
               <a:ext uri="{FF2B5EF4-FFF2-40B4-BE49-F238E27FC236}">
-                <a16:creationId xmlns:a16="http://schemas.microsoft.com/office/drawing/2014/main" id="{6F7E7332-36DF-4C68-8849-02DE3AF5245E}"/>
+                <a16:creationId xmlns:a16="http://schemas.microsoft.com/office/drawing/2014/main" id="{E44125B6-ED5D-4CF1-AAA7-B752600627FF}"/>
               </a:ext>
             </a:extLst>
           </p:cNvPr>
@@ -10432,7 +10432,7 @@
           <p:cNvPr id="26" name="">
             <a:extLst xmlns:a="http://schemas.openxmlformats.org/drawingml/2006/main">
               <a:ext uri="{FF2B5EF4-FFF2-40B4-BE49-F238E27FC236}">
-                <a16:creationId xmlns:a16="http://schemas.microsoft.com/office/drawing/2014/main" id="{9EF7D72C-6434-4BEB-9FD9-49EDC273234C}"/>
+                <a16:creationId xmlns:a16="http://schemas.microsoft.com/office/drawing/2014/main" id="{21D13D8E-08D4-4EDC-B81F-6F27505599DD}"/>
               </a:ext>
             </a:extLst>
           </p:cNvPr>
@@ -10494,7 +10494,7 @@
     </p:spTree>
     <p:extLst>
       <p:ext uri="{BB962C8B-B14F-4D97-AF65-F5344CB8AC3E}">
-        <p14:creationId xmlns:p14="http://schemas.microsoft.com/office/powerpoint/2010/main" val="396429983"/>
+        <p14:creationId xmlns:p14="http://schemas.microsoft.com/office/powerpoint/2010/main" val="1934116876"/>
       </p:ext>
     </p:extLst>
   </p:cSld>
@@ -10522,7 +10522,7 @@
           <p:nvPr/>
         </p:nvPicPr>
         <p:blipFill>
-          <a:blip xmlns:r="http://schemas.openxmlformats.org/officeDocument/2006/relationships" xmlns:a="http://schemas.openxmlformats.org/drawingml/2006/main" r:embed="R23daaccea34e4993"/>
+          <a:blip xmlns:r="http://schemas.openxmlformats.org/officeDocument/2006/relationships" xmlns:a="http://schemas.openxmlformats.org/drawingml/2006/main" r:embed="R45298d8ee5e445f2"/>
           <a:srcRect xmlns:a="http://schemas.openxmlformats.org/drawingml/2006/main" l="0" t="7813" r="0" b="7813"/>
           <a:stretch xmlns:a="http://schemas.openxmlformats.org/drawingml/2006/main">
             <a:fillRect l="0" t="0" r="0" b="0"/>
@@ -10543,7 +10543,7 @@
           <p:cNvPr id="2" name="">
             <a:extLst xmlns:a="http://schemas.openxmlformats.org/drawingml/2006/main">
               <a:ext uri="{FF2B5EF4-FFF2-40B4-BE49-F238E27FC236}">
-                <a16:creationId xmlns:a16="http://schemas.microsoft.com/office/drawing/2014/main" id="{CD8C92AD-FAED-42DA-8811-32E984372DA0}"/>
+                <a16:creationId xmlns:a16="http://schemas.microsoft.com/office/drawing/2014/main" id="{34EC0C8E-CCF7-4A1D-81C6-CF4DE28D1D99}"/>
               </a:ext>
             </a:extLst>
           </p:cNvPr>
@@ -10580,7 +10580,7 @@
           <p:cNvPr id="3" name="">
             <a:extLst xmlns:a="http://schemas.openxmlformats.org/drawingml/2006/main">
               <a:ext uri="{FF2B5EF4-FFF2-40B4-BE49-F238E27FC236}">
-                <a16:creationId xmlns:a16="http://schemas.microsoft.com/office/drawing/2014/main" id="{75F99094-32A1-4375-959C-5C433083C968}"/>
+                <a16:creationId xmlns:a16="http://schemas.microsoft.com/office/drawing/2014/main" id="{C92EE8EE-6075-4F28-88C6-B5A22972E1BE}"/>
               </a:ext>
             </a:extLst>
           </p:cNvPr>
@@ -10617,7 +10617,7 @@
           <p:cNvPr id="4" name="">
             <a:extLst xmlns:a="http://schemas.openxmlformats.org/drawingml/2006/main">
               <a:ext uri="{FF2B5EF4-FFF2-40B4-BE49-F238E27FC236}">
-                <a16:creationId xmlns:a16="http://schemas.microsoft.com/office/drawing/2014/main" id="{861C50EE-21F1-4FAF-858D-945BD23470A0}"/>
+                <a16:creationId xmlns:a16="http://schemas.microsoft.com/office/drawing/2014/main" id="{C4C349A5-8540-48A9-99D5-1349753C7C5D}"/>
               </a:ext>
             </a:extLst>
           </p:cNvPr>
@@ -10681,7 +10681,7 @@
           <p:cNvPr id="5" name="">
             <a:extLst xmlns:a="http://schemas.openxmlformats.org/drawingml/2006/main">
               <a:ext uri="{FF2B5EF4-FFF2-40B4-BE49-F238E27FC236}">
-                <a16:creationId xmlns:a16="http://schemas.microsoft.com/office/drawing/2014/main" id="{ACB54B46-64ED-43FD-A426-1588B1C7AC52}"/>
+                <a16:creationId xmlns:a16="http://schemas.microsoft.com/office/drawing/2014/main" id="{E33255E5-788F-4C17-9448-7E83F3054A83}"/>
               </a:ext>
             </a:extLst>
           </p:cNvPr>
@@ -10745,7 +10745,7 @@
           <p:cNvPr id="6" name="">
             <a:extLst xmlns:a="http://schemas.openxmlformats.org/drawingml/2006/main">
               <a:ext uri="{FF2B5EF4-FFF2-40B4-BE49-F238E27FC236}">
-                <a16:creationId xmlns:a16="http://schemas.microsoft.com/office/drawing/2014/main" id="{CB9B480C-A351-48EB-9564-9F37A49C9D1E}"/>
+                <a16:creationId xmlns:a16="http://schemas.microsoft.com/office/drawing/2014/main" id="{FDD9B72E-1EB5-451D-AB82-8CEC9C4E46C1}"/>
               </a:ext>
             </a:extLst>
           </p:cNvPr>
@@ -10809,7 +10809,7 @@
           <p:cNvPr id="7" name="">
             <a:extLst xmlns:a="http://schemas.openxmlformats.org/drawingml/2006/main">
               <a:ext uri="{FF2B5EF4-FFF2-40B4-BE49-F238E27FC236}">
-                <a16:creationId xmlns:a16="http://schemas.microsoft.com/office/drawing/2014/main" id="{A97610B1-001D-44D8-A07C-7B59D5E6680A}"/>
+                <a16:creationId xmlns:a16="http://schemas.microsoft.com/office/drawing/2014/main" id="{7F828D7A-B08A-4C57-B312-BFC69569C5AE}"/>
               </a:ext>
             </a:extLst>
           </p:cNvPr>
@@ -10844,7 +10844,7 @@
           <p:cNvPr id="8" name="">
             <a:extLst xmlns:a="http://schemas.openxmlformats.org/drawingml/2006/main">
               <a:ext uri="{FF2B5EF4-FFF2-40B4-BE49-F238E27FC236}">
-                <a16:creationId xmlns:a16="http://schemas.microsoft.com/office/drawing/2014/main" id="{A742089E-FC4D-4A89-9D94-AF273B9E54B4}"/>
+                <a16:creationId xmlns:a16="http://schemas.microsoft.com/office/drawing/2014/main" id="{D304A04A-88B9-4BD4-972A-6655CE259CA6}"/>
               </a:ext>
             </a:extLst>
           </p:cNvPr>
@@ -10908,7 +10908,7 @@
           <p:cNvPr id="9" name="">
             <a:extLst xmlns:a="http://schemas.openxmlformats.org/drawingml/2006/main">
               <a:ext uri="{FF2B5EF4-FFF2-40B4-BE49-F238E27FC236}">
-                <a16:creationId xmlns:a16="http://schemas.microsoft.com/office/drawing/2014/main" id="{9EDB7FFA-C638-4DE4-9E03-2B817D08ED44}"/>
+                <a16:creationId xmlns:a16="http://schemas.microsoft.com/office/drawing/2014/main" id="{84A1D367-F9AA-45A8-8DAE-2861F1003C67}"/>
               </a:ext>
             </a:extLst>
           </p:cNvPr>
@@ -10943,7 +10943,7 @@
           <p:cNvPr id="10" name="">
             <a:extLst xmlns:a="http://schemas.openxmlformats.org/drawingml/2006/main">
               <a:ext uri="{FF2B5EF4-FFF2-40B4-BE49-F238E27FC236}">
-                <a16:creationId xmlns:a16="http://schemas.microsoft.com/office/drawing/2014/main" id="{7D133B2D-091E-426D-B8F7-FA45CDF7D716}"/>
+                <a16:creationId xmlns:a16="http://schemas.microsoft.com/office/drawing/2014/main" id="{C7153DEC-42D8-4625-8964-B01F5053E5B0}"/>
               </a:ext>
             </a:extLst>
           </p:cNvPr>
@@ -11007,7 +11007,7 @@
           <p:cNvPr id="11" name="">
             <a:extLst xmlns:a="http://schemas.openxmlformats.org/drawingml/2006/main">
               <a:ext uri="{FF2B5EF4-FFF2-40B4-BE49-F238E27FC236}">
-                <a16:creationId xmlns:a16="http://schemas.microsoft.com/office/drawing/2014/main" id="{9745CCD6-3B4B-4EA2-ACE4-A0C4A0E34C25}"/>
+                <a16:creationId xmlns:a16="http://schemas.microsoft.com/office/drawing/2014/main" id="{A7457599-B971-40FB-9997-00DD32C9BB9C}"/>
               </a:ext>
             </a:extLst>
           </p:cNvPr>
@@ -11042,7 +11042,7 @@
           <p:cNvPr id="12" name="">
             <a:extLst xmlns:a="http://schemas.openxmlformats.org/drawingml/2006/main">
               <a:ext uri="{FF2B5EF4-FFF2-40B4-BE49-F238E27FC236}">
-                <a16:creationId xmlns:a16="http://schemas.microsoft.com/office/drawing/2014/main" id="{2EDA1895-E1BC-4010-BC96-4E9DA23B64D9}"/>
+                <a16:creationId xmlns:a16="http://schemas.microsoft.com/office/drawing/2014/main" id="{4CA16517-4430-4930-A58F-48EE1C638A43}"/>
               </a:ext>
             </a:extLst>
           </p:cNvPr>
@@ -11106,7 +11106,7 @@
           <p:cNvPr id="13" name="">
             <a:extLst xmlns:a="http://schemas.openxmlformats.org/drawingml/2006/main">
               <a:ext uri="{FF2B5EF4-FFF2-40B4-BE49-F238E27FC236}">
-                <a16:creationId xmlns:a16="http://schemas.microsoft.com/office/drawing/2014/main" id="{19DA862B-24AC-4674-A971-829A97F19F5B}"/>
+                <a16:creationId xmlns:a16="http://schemas.microsoft.com/office/drawing/2014/main" id="{CB81DDE0-C7A3-486D-861E-92C03B398D2C}"/>
               </a:ext>
             </a:extLst>
           </p:cNvPr>
@@ -11141,7 +11141,7 @@
           <p:cNvPr id="14" name="">
             <a:extLst xmlns:a="http://schemas.openxmlformats.org/drawingml/2006/main">
               <a:ext uri="{FF2B5EF4-FFF2-40B4-BE49-F238E27FC236}">
-                <a16:creationId xmlns:a16="http://schemas.microsoft.com/office/drawing/2014/main" id="{5D996ACB-D395-41F0-AE13-3AD53B660265}"/>
+                <a16:creationId xmlns:a16="http://schemas.microsoft.com/office/drawing/2014/main" id="{F8ECFBBF-7309-4695-9F40-D3F1C5BC19CE}"/>
               </a:ext>
             </a:extLst>
           </p:cNvPr>
@@ -11205,7 +11205,7 @@
           <p:cNvPr id="15" name="">
             <a:extLst xmlns:a="http://schemas.openxmlformats.org/drawingml/2006/main">
               <a:ext uri="{FF2B5EF4-FFF2-40B4-BE49-F238E27FC236}">
-                <a16:creationId xmlns:a16="http://schemas.microsoft.com/office/drawing/2014/main" id="{BF5146D3-C089-4FD1-BD7D-2CD6EC247990}"/>
+                <a16:creationId xmlns:a16="http://schemas.microsoft.com/office/drawing/2014/main" id="{1BF094E0-F51C-4BBF-9C02-949A3C699DF7}"/>
               </a:ext>
             </a:extLst>
           </p:cNvPr>
@@ -11240,7 +11240,7 @@
           <p:cNvPr id="16" name="">
             <a:extLst xmlns:a="http://schemas.openxmlformats.org/drawingml/2006/main">
               <a:ext uri="{FF2B5EF4-FFF2-40B4-BE49-F238E27FC236}">
-                <a16:creationId xmlns:a16="http://schemas.microsoft.com/office/drawing/2014/main" id="{B82B06FB-26D0-4BB8-97F1-25F9DBF13001}"/>
+                <a16:creationId xmlns:a16="http://schemas.microsoft.com/office/drawing/2014/main" id="{A4C19524-360D-4702-B256-2219FCF0D41D}"/>
               </a:ext>
             </a:extLst>
           </p:cNvPr>
@@ -11304,7 +11304,7 @@
           <p:cNvPr id="17" name="">
             <a:extLst xmlns:a="http://schemas.openxmlformats.org/drawingml/2006/main">
               <a:ext uri="{FF2B5EF4-FFF2-40B4-BE49-F238E27FC236}">
-                <a16:creationId xmlns:a16="http://schemas.microsoft.com/office/drawing/2014/main" id="{022C547E-FAFA-4C05-B779-BEEA239B3D67}"/>
+                <a16:creationId xmlns:a16="http://schemas.microsoft.com/office/drawing/2014/main" id="{B92E85AC-5019-46FB-A05F-B36B7B6BA45E}"/>
               </a:ext>
             </a:extLst>
           </p:cNvPr>
@@ -11339,7 +11339,7 @@
           <p:cNvPr id="18" name="">
             <a:extLst xmlns:a="http://schemas.openxmlformats.org/drawingml/2006/main">
               <a:ext uri="{FF2B5EF4-FFF2-40B4-BE49-F238E27FC236}">
-                <a16:creationId xmlns:a16="http://schemas.microsoft.com/office/drawing/2014/main" id="{906DF1B0-3450-4AAE-9B32-D133A26DA3E1}"/>
+                <a16:creationId xmlns:a16="http://schemas.microsoft.com/office/drawing/2014/main" id="{E3CCFCA2-E040-4F1A-BCD8-A69D01FFCCDE}"/>
               </a:ext>
             </a:extLst>
           </p:cNvPr>
@@ -11403,7 +11403,7 @@
           <p:cNvPr id="19" name="">
             <a:extLst xmlns:a="http://schemas.openxmlformats.org/drawingml/2006/main">
               <a:ext uri="{FF2B5EF4-FFF2-40B4-BE49-F238E27FC236}">
-                <a16:creationId xmlns:a16="http://schemas.microsoft.com/office/drawing/2014/main" id="{B11B832C-18FA-4431-9D1F-13F26EF7305D}"/>
+                <a16:creationId xmlns:a16="http://schemas.microsoft.com/office/drawing/2014/main" id="{1F3229FC-3F79-4E37-AFFA-3EAE1062760A}"/>
               </a:ext>
             </a:extLst>
           </p:cNvPr>
@@ -11467,7 +11467,7 @@
           <p:cNvPr id="20" name="">
             <a:extLst xmlns:a="http://schemas.openxmlformats.org/drawingml/2006/main">
               <a:ext uri="{FF2B5EF4-FFF2-40B4-BE49-F238E27FC236}">
-                <a16:creationId xmlns:a16="http://schemas.microsoft.com/office/drawing/2014/main" id="{F4635D09-1C74-477E-9574-C7131F633294}"/>
+                <a16:creationId xmlns:a16="http://schemas.microsoft.com/office/drawing/2014/main" id="{8DF0EFE4-0CE5-4BB5-B7AA-158CE93805DC}"/>
               </a:ext>
             </a:extLst>
           </p:cNvPr>
@@ -11500,7 +11500,7 @@
           <p:cNvPr id="21" name="">
             <a:extLst xmlns:a="http://schemas.openxmlformats.org/drawingml/2006/main">
               <a:ext uri="{FF2B5EF4-FFF2-40B4-BE49-F238E27FC236}">
-                <a16:creationId xmlns:a16="http://schemas.microsoft.com/office/drawing/2014/main" id="{AABC9912-F6BA-4AB9-AD71-AA6E6A3FEB08}"/>
+                <a16:creationId xmlns:a16="http://schemas.microsoft.com/office/drawing/2014/main" id="{C250BBB4-2C09-41BB-843B-969309002B26}"/>
               </a:ext>
             </a:extLst>
           </p:cNvPr>
@@ -11564,7 +11564,7 @@
           <p:cNvPr id="22" name="">
             <a:extLst xmlns:a="http://schemas.openxmlformats.org/drawingml/2006/main">
               <a:ext uri="{FF2B5EF4-FFF2-40B4-BE49-F238E27FC236}">
-                <a16:creationId xmlns:a16="http://schemas.microsoft.com/office/drawing/2014/main" id="{C91F2B1E-2711-4902-A531-DA338AB120E0}"/>
+                <a16:creationId xmlns:a16="http://schemas.microsoft.com/office/drawing/2014/main" id="{9C0D4FF4-6A0B-4B3A-9DF4-4243EA59CED4}"/>
               </a:ext>
             </a:extLst>
           </p:cNvPr>
@@ -11626,7 +11626,7 @@
     </p:spTree>
     <p:extLst>
       <p:ext uri="{BB962C8B-B14F-4D97-AF65-F5344CB8AC3E}">
-        <p14:creationId xmlns:p14="http://schemas.microsoft.com/office/powerpoint/2010/main" val="1500803414"/>
+        <p14:creationId xmlns:p14="http://schemas.microsoft.com/office/powerpoint/2010/main" val="1983987246"/>
       </p:ext>
     </p:extLst>
   </p:cSld>
@@ -11654,7 +11654,7 @@
           <p:nvPr/>
         </p:nvPicPr>
         <p:blipFill>
-          <a:blip xmlns:r="http://schemas.openxmlformats.org/officeDocument/2006/relationships" xmlns:a="http://schemas.openxmlformats.org/drawingml/2006/main" r:embed="R421df22cde474b55"/>
+          <a:blip xmlns:r="http://schemas.openxmlformats.org/officeDocument/2006/relationships" xmlns:a="http://schemas.openxmlformats.org/drawingml/2006/main" r:embed="Ra4a2998cd66548db"/>
           <a:srcRect xmlns:a="http://schemas.openxmlformats.org/drawingml/2006/main" l="0" t="27" r="0" b="27"/>
           <a:stretch xmlns:a="http://schemas.openxmlformats.org/drawingml/2006/main">
             <a:fillRect l="0" t="0" r="0" b="0"/>
@@ -11675,7 +11675,7 @@
           <p:cNvPr id="2" name="">
             <a:extLst xmlns:a="http://schemas.openxmlformats.org/drawingml/2006/main">
               <a:ext uri="{FF2B5EF4-FFF2-40B4-BE49-F238E27FC236}">
-                <a16:creationId xmlns:a16="http://schemas.microsoft.com/office/drawing/2014/main" id="{D9B25D59-AA23-4C5C-8242-038E4895DD57}"/>
+                <a16:creationId xmlns:a16="http://schemas.microsoft.com/office/drawing/2014/main" id="{AD6DEBAD-034E-42A3-A278-2E9050F55DAE}"/>
               </a:ext>
             </a:extLst>
           </p:cNvPr>
@@ -11712,7 +11712,7 @@
           <p:cNvPr id="3" name="">
             <a:extLst xmlns:a="http://schemas.openxmlformats.org/drawingml/2006/main">
               <a:ext uri="{FF2B5EF4-FFF2-40B4-BE49-F238E27FC236}">
-                <a16:creationId xmlns:a16="http://schemas.microsoft.com/office/drawing/2014/main" id="{CCC4CB5C-753D-4397-BB0C-D0D7EB50BE61}"/>
+                <a16:creationId xmlns:a16="http://schemas.microsoft.com/office/drawing/2014/main" id="{5CDC1242-DE4C-4760-98D5-257E711F558A}"/>
               </a:ext>
             </a:extLst>
           </p:cNvPr>
@@ -11749,7 +11749,7 @@
           <p:cNvPr id="4" name="">
             <a:extLst xmlns:a="http://schemas.openxmlformats.org/drawingml/2006/main">
               <a:ext uri="{FF2B5EF4-FFF2-40B4-BE49-F238E27FC236}">
-                <a16:creationId xmlns:a16="http://schemas.microsoft.com/office/drawing/2014/main" id="{E43D402F-4F29-44A3-A3F4-738F27FDD05A}"/>
+                <a16:creationId xmlns:a16="http://schemas.microsoft.com/office/drawing/2014/main" id="{A0F82E30-AE6E-403E-B007-04BAA8554D59}"/>
               </a:ext>
             </a:extLst>
           </p:cNvPr>
@@ -11813,7 +11813,7 @@
           <p:cNvPr id="5" name="">
             <a:extLst xmlns:a="http://schemas.openxmlformats.org/drawingml/2006/main">
               <a:ext uri="{FF2B5EF4-FFF2-40B4-BE49-F238E27FC236}">
-                <a16:creationId xmlns:a16="http://schemas.microsoft.com/office/drawing/2014/main" id="{C6E4678C-A4A8-4E1A-8BF6-7E0F022EAEEE}"/>
+                <a16:creationId xmlns:a16="http://schemas.microsoft.com/office/drawing/2014/main" id="{4BA10F91-27A4-4A6C-821A-CF27F55BA6D7}"/>
               </a:ext>
             </a:extLst>
           </p:cNvPr>
@@ -11877,7 +11877,7 @@
           <p:cNvPr id="6" name="">
             <a:extLst xmlns:a="http://schemas.openxmlformats.org/drawingml/2006/main">
               <a:ext uri="{FF2B5EF4-FFF2-40B4-BE49-F238E27FC236}">
-                <a16:creationId xmlns:a16="http://schemas.microsoft.com/office/drawing/2014/main" id="{2F431D22-5504-44D6-98AA-CAE8CF550861}"/>
+                <a16:creationId xmlns:a16="http://schemas.microsoft.com/office/drawing/2014/main" id="{B3E31D2C-FF95-4BC1-9D60-899CEE2423C5}"/>
               </a:ext>
             </a:extLst>
           </p:cNvPr>
@@ -11941,7 +11941,7 @@
           <p:cNvPr id="7" name="">
             <a:extLst xmlns:a="http://schemas.openxmlformats.org/drawingml/2006/main">
               <a:ext uri="{FF2B5EF4-FFF2-40B4-BE49-F238E27FC236}">
-                <a16:creationId xmlns:a16="http://schemas.microsoft.com/office/drawing/2014/main" id="{15515017-56A4-4D87-9132-024E1BAA5783}"/>
+                <a16:creationId xmlns:a16="http://schemas.microsoft.com/office/drawing/2014/main" id="{8256F947-B58E-4DA8-9529-1411FD537226}"/>
               </a:ext>
             </a:extLst>
           </p:cNvPr>
@@ -11976,7 +11976,7 @@
           <p:cNvPr id="8" name="">
             <a:extLst xmlns:a="http://schemas.openxmlformats.org/drawingml/2006/main">
               <a:ext uri="{FF2B5EF4-FFF2-40B4-BE49-F238E27FC236}">
-                <a16:creationId xmlns:a16="http://schemas.microsoft.com/office/drawing/2014/main" id="{DAB7306B-385D-48FB-9550-1ED73C9E4964}"/>
+                <a16:creationId xmlns:a16="http://schemas.microsoft.com/office/drawing/2014/main" id="{B53360F3-A6FE-4C95-858A-FC2450124DA9}"/>
               </a:ext>
             </a:extLst>
           </p:cNvPr>
@@ -12040,7 +12040,7 @@
           <p:cNvPr id="9" name="">
             <a:extLst xmlns:a="http://schemas.openxmlformats.org/drawingml/2006/main">
               <a:ext uri="{FF2B5EF4-FFF2-40B4-BE49-F238E27FC236}">
-                <a16:creationId xmlns:a16="http://schemas.microsoft.com/office/drawing/2014/main" id="{94A4C848-B5B7-4071-86CF-961F8B7BAF71}"/>
+                <a16:creationId xmlns:a16="http://schemas.microsoft.com/office/drawing/2014/main" id="{11623A7F-92BB-49DB-A1BB-ADFB26092812}"/>
               </a:ext>
             </a:extLst>
           </p:cNvPr>
@@ -12104,7 +12104,7 @@
           <p:cNvPr id="10" name="">
             <a:extLst xmlns:a="http://schemas.openxmlformats.org/drawingml/2006/main">
               <a:ext uri="{FF2B5EF4-FFF2-40B4-BE49-F238E27FC236}">
-                <a16:creationId xmlns:a16="http://schemas.microsoft.com/office/drawing/2014/main" id="{BFF154F4-12C9-479D-91F3-FE9FD9FC2C19}"/>
+                <a16:creationId xmlns:a16="http://schemas.microsoft.com/office/drawing/2014/main" id="{D7E1798A-95A5-495E-B6DB-0F88503AEDCE}"/>
               </a:ext>
             </a:extLst>
           </p:cNvPr>
@@ -12137,7 +12137,7 @@
           <p:cNvPr id="11" name="">
             <a:extLst xmlns:a="http://schemas.openxmlformats.org/drawingml/2006/main">
               <a:ext uri="{FF2B5EF4-FFF2-40B4-BE49-F238E27FC236}">
-                <a16:creationId xmlns:a16="http://schemas.microsoft.com/office/drawing/2014/main" id="{7A949130-035D-4460-AE12-DDB3ABA6EAA9}"/>
+                <a16:creationId xmlns:a16="http://schemas.microsoft.com/office/drawing/2014/main" id="{58A951F5-5B74-4601-90FE-FF58F14D6757}"/>
               </a:ext>
             </a:extLst>
           </p:cNvPr>
@@ -12172,7 +12172,7 @@
           <p:cNvPr id="12" name="">
             <a:extLst xmlns:a="http://schemas.openxmlformats.org/drawingml/2006/main">
               <a:ext uri="{FF2B5EF4-FFF2-40B4-BE49-F238E27FC236}">
-                <a16:creationId xmlns:a16="http://schemas.microsoft.com/office/drawing/2014/main" id="{AEDD958A-1197-43C5-B3A6-311B29A581DE}"/>
+                <a16:creationId xmlns:a16="http://schemas.microsoft.com/office/drawing/2014/main" id="{4FCBA3BF-1F79-4D40-90B8-E5699CF6B36B}"/>
               </a:ext>
             </a:extLst>
           </p:cNvPr>
@@ -12236,7 +12236,7 @@
           <p:cNvPr id="13" name="">
             <a:extLst xmlns:a="http://schemas.openxmlformats.org/drawingml/2006/main">
               <a:ext uri="{FF2B5EF4-FFF2-40B4-BE49-F238E27FC236}">
-                <a16:creationId xmlns:a16="http://schemas.microsoft.com/office/drawing/2014/main" id="{5F239CD0-ED7D-4547-911A-26282D85B05D}"/>
+                <a16:creationId xmlns:a16="http://schemas.microsoft.com/office/drawing/2014/main" id="{E50688F1-3CD3-4711-99D8-5BCE71F6C3D0}"/>
               </a:ext>
             </a:extLst>
           </p:cNvPr>
@@ -12300,7 +12300,7 @@
           <p:cNvPr id="14" name="">
             <a:extLst xmlns:a="http://schemas.openxmlformats.org/drawingml/2006/main">
               <a:ext uri="{FF2B5EF4-FFF2-40B4-BE49-F238E27FC236}">
-                <a16:creationId xmlns:a16="http://schemas.microsoft.com/office/drawing/2014/main" id="{BE050B7B-452C-41CD-8502-7C88D838FE9E}"/>
+                <a16:creationId xmlns:a16="http://schemas.microsoft.com/office/drawing/2014/main" id="{AAB8D31D-67D1-4A68-A45A-EA9F05D06A30}"/>
               </a:ext>
             </a:extLst>
           </p:cNvPr>
@@ -12333,7 +12333,7 @@
           <p:cNvPr id="15" name="">
             <a:extLst xmlns:a="http://schemas.openxmlformats.org/drawingml/2006/main">
               <a:ext uri="{FF2B5EF4-FFF2-40B4-BE49-F238E27FC236}">
-                <a16:creationId xmlns:a16="http://schemas.microsoft.com/office/drawing/2014/main" id="{F72E1198-4708-43E8-83C3-5E51680CBC05}"/>
+                <a16:creationId xmlns:a16="http://schemas.microsoft.com/office/drawing/2014/main" id="{8226E710-BD82-4F25-9953-8B0B27D98874}"/>
               </a:ext>
             </a:extLst>
           </p:cNvPr>
@@ -12368,7 +12368,7 @@
           <p:cNvPr id="16" name="">
             <a:extLst xmlns:a="http://schemas.openxmlformats.org/drawingml/2006/main">
               <a:ext uri="{FF2B5EF4-FFF2-40B4-BE49-F238E27FC236}">
-                <a16:creationId xmlns:a16="http://schemas.microsoft.com/office/drawing/2014/main" id="{303DDC94-FC11-441F-961B-79B68ECFDF11}"/>
+                <a16:creationId xmlns:a16="http://schemas.microsoft.com/office/drawing/2014/main" id="{E712BE8D-6748-48A1-9C9B-3A712612338E}"/>
               </a:ext>
             </a:extLst>
           </p:cNvPr>
@@ -12432,7 +12432,7 @@
           <p:cNvPr id="17" name="">
             <a:extLst xmlns:a="http://schemas.openxmlformats.org/drawingml/2006/main">
               <a:ext uri="{FF2B5EF4-FFF2-40B4-BE49-F238E27FC236}">
-                <a16:creationId xmlns:a16="http://schemas.microsoft.com/office/drawing/2014/main" id="{2AF980F8-B99D-4C10-B1EB-55F408A51BCD}"/>
+                <a16:creationId xmlns:a16="http://schemas.microsoft.com/office/drawing/2014/main" id="{A40BE9C5-C8E7-4C51-A89B-0A53A90976C5}"/>
               </a:ext>
             </a:extLst>
           </p:cNvPr>
@@ -12496,7 +12496,7 @@
           <p:cNvPr id="18" name="">
             <a:extLst xmlns:a="http://schemas.openxmlformats.org/drawingml/2006/main">
               <a:ext uri="{FF2B5EF4-FFF2-40B4-BE49-F238E27FC236}">
-                <a16:creationId xmlns:a16="http://schemas.microsoft.com/office/drawing/2014/main" id="{E9DA407A-1576-4613-BF1F-1948EE7618CD}"/>
+                <a16:creationId xmlns:a16="http://schemas.microsoft.com/office/drawing/2014/main" id="{CA31063E-29E0-4A81-969B-7CA16C48F1AD}"/>
               </a:ext>
             </a:extLst>
           </p:cNvPr>
@@ -12529,7 +12529,7 @@
           <p:cNvPr id="19" name="">
             <a:extLst xmlns:a="http://schemas.openxmlformats.org/drawingml/2006/main">
               <a:ext uri="{FF2B5EF4-FFF2-40B4-BE49-F238E27FC236}">
-                <a16:creationId xmlns:a16="http://schemas.microsoft.com/office/drawing/2014/main" id="{6CB94263-5F56-4677-918E-B8974B0A003F}"/>
+                <a16:creationId xmlns:a16="http://schemas.microsoft.com/office/drawing/2014/main" id="{98341CAC-5793-4C96-90C8-65E75E7FC640}"/>
               </a:ext>
             </a:extLst>
           </p:cNvPr>
@@ -12564,7 +12564,7 @@
           <p:cNvPr id="20" name="">
             <a:extLst xmlns:a="http://schemas.openxmlformats.org/drawingml/2006/main">
               <a:ext uri="{FF2B5EF4-FFF2-40B4-BE49-F238E27FC236}">
-                <a16:creationId xmlns:a16="http://schemas.microsoft.com/office/drawing/2014/main" id="{9CFA2289-6E6B-40E3-AAAA-DCB9CE6ECD68}"/>
+                <a16:creationId xmlns:a16="http://schemas.microsoft.com/office/drawing/2014/main" id="{6E8764ED-AE16-4C22-989B-3813437478A8}"/>
               </a:ext>
             </a:extLst>
           </p:cNvPr>
@@ -12628,7 +12628,7 @@
           <p:cNvPr id="21" name="">
             <a:extLst xmlns:a="http://schemas.openxmlformats.org/drawingml/2006/main">
               <a:ext uri="{FF2B5EF4-FFF2-40B4-BE49-F238E27FC236}">
-                <a16:creationId xmlns:a16="http://schemas.microsoft.com/office/drawing/2014/main" id="{9A6318A8-ACC9-4242-8751-2360AD3BBCD5}"/>
+                <a16:creationId xmlns:a16="http://schemas.microsoft.com/office/drawing/2014/main" id="{A9EDFE51-309F-405A-8B95-71718915CC7C}"/>
               </a:ext>
             </a:extLst>
           </p:cNvPr>
@@ -12692,7 +12692,7 @@
           <p:cNvPr id="22" name="">
             <a:extLst xmlns:a="http://schemas.openxmlformats.org/drawingml/2006/main">
               <a:ext uri="{FF2B5EF4-FFF2-40B4-BE49-F238E27FC236}">
-                <a16:creationId xmlns:a16="http://schemas.microsoft.com/office/drawing/2014/main" id="{03DDCCDF-DF82-4A13-B3DC-897FD7716F9B}"/>
+                <a16:creationId xmlns:a16="http://schemas.microsoft.com/office/drawing/2014/main" id="{07D78254-C9CD-41D1-A22C-913F9D6994F3}"/>
               </a:ext>
             </a:extLst>
           </p:cNvPr>
@@ -12756,7 +12756,7 @@
           <p:cNvPr id="23" name="">
             <a:extLst xmlns:a="http://schemas.openxmlformats.org/drawingml/2006/main">
               <a:ext uri="{FF2B5EF4-FFF2-40B4-BE49-F238E27FC236}">
-                <a16:creationId xmlns:a16="http://schemas.microsoft.com/office/drawing/2014/main" id="{4F90BC64-5FEA-4A04-84D9-C99FB04BD2D3}"/>
+                <a16:creationId xmlns:a16="http://schemas.microsoft.com/office/drawing/2014/main" id="{27877B27-DD06-4E29-ADFD-DA6AE92CFE74}"/>
               </a:ext>
             </a:extLst>
           </p:cNvPr>
@@ -12820,7 +12820,7 @@
           <p:cNvPr id="24" name="">
             <a:extLst xmlns:a="http://schemas.openxmlformats.org/drawingml/2006/main">
               <a:ext uri="{FF2B5EF4-FFF2-40B4-BE49-F238E27FC236}">
-                <a16:creationId xmlns:a16="http://schemas.microsoft.com/office/drawing/2014/main" id="{9FC638BF-ED8A-4A26-BB93-750BBA416B0B}"/>
+                <a16:creationId xmlns:a16="http://schemas.microsoft.com/office/drawing/2014/main" id="{7122C913-1BCC-46A2-9B0E-DB8C13B80E1D}"/>
               </a:ext>
             </a:extLst>
           </p:cNvPr>
@@ -12853,7 +12853,7 @@
           <p:cNvPr id="25" name="">
             <a:extLst xmlns:a="http://schemas.openxmlformats.org/drawingml/2006/main">
               <a:ext uri="{FF2B5EF4-FFF2-40B4-BE49-F238E27FC236}">
-                <a16:creationId xmlns:a16="http://schemas.microsoft.com/office/drawing/2014/main" id="{D16CC77B-D4F0-43C7-A41B-A444A54BB02C}"/>
+                <a16:creationId xmlns:a16="http://schemas.microsoft.com/office/drawing/2014/main" id="{A8B4BA34-2392-485F-B9E8-8AA1F6E5C752}"/>
               </a:ext>
             </a:extLst>
           </p:cNvPr>
@@ -12917,7 +12917,7 @@
           <p:cNvPr id="26" name="">
             <a:extLst xmlns:a="http://schemas.openxmlformats.org/drawingml/2006/main">
               <a:ext uri="{FF2B5EF4-FFF2-40B4-BE49-F238E27FC236}">
-                <a16:creationId xmlns:a16="http://schemas.microsoft.com/office/drawing/2014/main" id="{26A020C2-B948-41DF-8D50-F4C60248D539}"/>
+                <a16:creationId xmlns:a16="http://schemas.microsoft.com/office/drawing/2014/main" id="{63C3D7E2-7043-412B-B291-61C2D2F13C32}"/>
               </a:ext>
             </a:extLst>
           </p:cNvPr>
@@ -12979,7 +12979,7 @@
     </p:spTree>
     <p:extLst>
       <p:ext uri="{BB962C8B-B14F-4D97-AF65-F5344CB8AC3E}">
-        <p14:creationId xmlns:p14="http://schemas.microsoft.com/office/powerpoint/2010/main" val="960394991"/>
+        <p14:creationId xmlns:p14="http://schemas.microsoft.com/office/powerpoint/2010/main" val="160120600"/>
       </p:ext>
     </p:extLst>
   </p:cSld>
@@ -13007,7 +13007,7 @@
           <p:nvPr/>
         </p:nvPicPr>
         <p:blipFill>
-          <a:blip xmlns:r="http://schemas.openxmlformats.org/officeDocument/2006/relationships" xmlns:a="http://schemas.openxmlformats.org/drawingml/2006/main" r:embed="Rf8dc0c05bdc74da5"/>
+          <a:blip xmlns:r="http://schemas.openxmlformats.org/officeDocument/2006/relationships" xmlns:a="http://schemas.openxmlformats.org/drawingml/2006/main" r:embed="R1ee988d6bdd84221"/>
           <a:srcRect xmlns:a="http://schemas.openxmlformats.org/drawingml/2006/main" l="0" t="27" r="0" b="27"/>
           <a:stretch xmlns:a="http://schemas.openxmlformats.org/drawingml/2006/main">
             <a:fillRect l="0" t="0" r="0" b="0"/>
@@ -13028,7 +13028,7 @@
           <p:cNvPr id="2" name="">
             <a:extLst xmlns:a="http://schemas.openxmlformats.org/drawingml/2006/main">
               <a:ext uri="{FF2B5EF4-FFF2-40B4-BE49-F238E27FC236}">
-                <a16:creationId xmlns:a16="http://schemas.microsoft.com/office/drawing/2014/main" id="{B27930EE-2768-4783-A4A6-40B750290782}"/>
+                <a16:creationId xmlns:a16="http://schemas.microsoft.com/office/drawing/2014/main" id="{CC92E1D2-265D-49CF-8399-EA5CFDD10DC0}"/>
               </a:ext>
             </a:extLst>
           </p:cNvPr>
@@ -13065,7 +13065,7 @@
           <p:cNvPr id="3" name="">
             <a:extLst xmlns:a="http://schemas.openxmlformats.org/drawingml/2006/main">
               <a:ext uri="{FF2B5EF4-FFF2-40B4-BE49-F238E27FC236}">
-                <a16:creationId xmlns:a16="http://schemas.microsoft.com/office/drawing/2014/main" id="{4A30F33B-6ED4-40B2-B79D-938BEB973373}"/>
+                <a16:creationId xmlns:a16="http://schemas.microsoft.com/office/drawing/2014/main" id="{1275CB8A-7DFA-4A8C-A88F-25A685891FD8}"/>
               </a:ext>
             </a:extLst>
           </p:cNvPr>
@@ -13102,7 +13102,7 @@
           <p:cNvPr id="4" name="">
             <a:extLst xmlns:a="http://schemas.openxmlformats.org/drawingml/2006/main">
               <a:ext uri="{FF2B5EF4-FFF2-40B4-BE49-F238E27FC236}">
-                <a16:creationId xmlns:a16="http://schemas.microsoft.com/office/drawing/2014/main" id="{A8DF8054-2902-49D7-A42E-E94FA6547DDC}"/>
+                <a16:creationId xmlns:a16="http://schemas.microsoft.com/office/drawing/2014/main" id="{8B4E3332-0D86-45C4-BE1F-C86CE0D7731E}"/>
               </a:ext>
             </a:extLst>
           </p:cNvPr>
@@ -13166,7 +13166,7 @@
           <p:cNvPr id="5" name="">
             <a:extLst xmlns:a="http://schemas.openxmlformats.org/drawingml/2006/main">
               <a:ext uri="{FF2B5EF4-FFF2-40B4-BE49-F238E27FC236}">
-                <a16:creationId xmlns:a16="http://schemas.microsoft.com/office/drawing/2014/main" id="{0BFDAC31-F49A-4D20-8183-003052C3B525}"/>
+                <a16:creationId xmlns:a16="http://schemas.microsoft.com/office/drawing/2014/main" id="{A50D116E-3805-48CB-93E2-FB9F29999868}"/>
               </a:ext>
             </a:extLst>
           </p:cNvPr>
@@ -13230,7 +13230,7 @@
           <p:cNvPr id="6" name="">
             <a:extLst xmlns:a="http://schemas.openxmlformats.org/drawingml/2006/main">
               <a:ext uri="{FF2B5EF4-FFF2-40B4-BE49-F238E27FC236}">
-                <a16:creationId xmlns:a16="http://schemas.microsoft.com/office/drawing/2014/main" id="{826562D7-BA0E-49C7-96B9-19A9D58CA25B}"/>
+                <a16:creationId xmlns:a16="http://schemas.microsoft.com/office/drawing/2014/main" id="{E831FD44-758C-49A6-884A-9EC9B2A67BB4}"/>
               </a:ext>
             </a:extLst>
           </p:cNvPr>
@@ -13294,19 +13294,19 @@
           <p:cNvPr id="7" name="">
             <a:extLst xmlns:a="http://schemas.openxmlformats.org/drawingml/2006/main">
               <a:ext uri="{FF2B5EF4-FFF2-40B4-BE49-F238E27FC236}">
-                <a16:creationId xmlns:a16="http://schemas.microsoft.com/office/drawing/2014/main" id="{567478E1-FDFF-45D3-B128-6FAB3DF6FCEB}"/>
-              </a:ext>
-            </a:extLst>
-          </p:cNvPr>
-          <p:cNvSpPr>
-            <a:spLocks xmlns:a="http://schemas.openxmlformats.org/drawingml/2006/main" noGrp="1"/>
-          </p:cNvSpPr>
-          <p:nvPr/>
-        </p:nvSpPr>
-        <p:spPr>
-          <a:xfrm xmlns:a="http://schemas.openxmlformats.org/drawingml/2006/main">
-            <a:off x="4705350" y="3505200"/>
-            <a:ext cx="2247900" cy="990600"/>
+                <a16:creationId xmlns:a16="http://schemas.microsoft.com/office/drawing/2014/main" id="{3E498E42-F666-42CE-8492-FB2CB00D7022}"/>
+              </a:ext>
+            </a:extLst>
+          </p:cNvPr>
+          <p:cNvSpPr>
+            <a:spLocks xmlns:a="http://schemas.openxmlformats.org/drawingml/2006/main" noGrp="1"/>
+          </p:cNvSpPr>
+          <p:nvPr/>
+        </p:nvSpPr>
+        <p:spPr>
+          <a:xfrm xmlns:a="http://schemas.openxmlformats.org/drawingml/2006/main">
+            <a:off x="4514850" y="3371850"/>
+            <a:ext cx="3143250" cy="876300"/>
           </a:xfrm>
           <a:prstGeom xmlns:a="http://schemas.openxmlformats.org/drawingml/2006/main" prst="rect">
             <a:avLst/>
@@ -13316,7 +13316,7 @@
               <a:alpha val="93333"/>
             </a:srgbClr>
           </a:solidFill>
-          <a:ln xmlns:a="http://schemas.openxmlformats.org/drawingml/2006/main" w="9525">
+          <a:ln xmlns:a="http://schemas.openxmlformats.org/drawingml/2006/main" w="19050">
             <a:solidFill>
               <a:srgbClr val="55E6FF"/>
             </a:solidFill>
@@ -13329,19 +13329,19 @@
           <p:cNvPr id="8" name="">
             <a:extLst xmlns:a="http://schemas.openxmlformats.org/drawingml/2006/main">
               <a:ext uri="{FF2B5EF4-FFF2-40B4-BE49-F238E27FC236}">
-                <a16:creationId xmlns:a16="http://schemas.microsoft.com/office/drawing/2014/main" id="{B8A4CC3D-4ECE-44E4-BB48-80BC6462459D}"/>
-              </a:ext>
-            </a:extLst>
-          </p:cNvPr>
-          <p:cNvSpPr>
-            <a:spLocks xmlns:a="http://schemas.openxmlformats.org/drawingml/2006/main" noGrp="1"/>
-          </p:cNvSpPr>
-          <p:nvPr/>
-        </p:nvSpPr>
-        <p:spPr>
-          <a:xfrm xmlns:a="http://schemas.openxmlformats.org/drawingml/2006/main">
-            <a:off x="4991100" y="3676650"/>
-            <a:ext cx="1676400" cy="647700"/>
+                <a16:creationId xmlns:a16="http://schemas.microsoft.com/office/drawing/2014/main" id="{674F588C-E1EB-473E-B85E-FF19CD0D5DC7}"/>
+              </a:ext>
+            </a:extLst>
+          </p:cNvPr>
+          <p:cNvSpPr>
+            <a:spLocks xmlns:a="http://schemas.openxmlformats.org/drawingml/2006/main" noGrp="1"/>
+          </p:cNvSpPr>
+          <p:nvPr/>
+        </p:nvSpPr>
+        <p:spPr>
+          <a:xfrm xmlns:a="http://schemas.openxmlformats.org/drawingml/2006/main">
+            <a:off x="4953000" y="3581400"/>
+            <a:ext cx="2266950" cy="514350"/>
           </a:xfrm>
           <a:prstGeom xmlns:a="http://schemas.openxmlformats.org/drawingml/2006/main" prst="rect">
             <a:avLst/>
@@ -13365,7 +13365,7 @@
           <a:lstStyle xmlns:a="http://schemas.openxmlformats.org/drawingml/2006/main"/>
           <a:p xmlns:a="http://schemas.openxmlformats.org/drawingml/2006/main">
             <a:pPr algn="ctr">
-              <a:defRPr sz="1650" b="1">
+              <a:defRPr sz="1800" b="1">
                 <a:solidFill>
                   <a:srgbClr val="EAF8FF"/>
                 </a:solidFill>
@@ -13375,7 +13375,7 @@
               </a:defRPr>
             </a:pPr>
             <a:r>
-              <a:rPr sz="1650" b="1">
+              <a:rPr sz="1800" b="1">
                 <a:solidFill>
                   <a:srgbClr val="EAF8FF"/>
                 </a:solidFill>
@@ -13388,7 +13388,7 @@
           </a:p>
           <a:p xmlns:a="http://schemas.openxmlformats.org/drawingml/2006/main">
             <a:pPr algn="ctr">
-              <a:defRPr sz="1650" b="1">
+              <a:defRPr sz="1800" b="1">
                 <a:solidFill>
                   <a:srgbClr val="EAF8FF"/>
                 </a:solidFill>
@@ -13398,7 +13398,7 @@
               </a:defRPr>
             </a:pPr>
             <a:r>
-              <a:rPr sz="1650" b="1">
+              <a:rPr sz="1800" b="1">
                 <a:solidFill>
                   <a:srgbClr val="EAF8FF"/>
                 </a:solidFill>
@@ -13416,19 +13416,83 @@
           <p:cNvPr id="9" name="">
             <a:extLst xmlns:a="http://schemas.openxmlformats.org/drawingml/2006/main">
               <a:ext uri="{FF2B5EF4-FFF2-40B4-BE49-F238E27FC236}">
-                <a16:creationId xmlns:a16="http://schemas.microsoft.com/office/drawing/2014/main" id="{C9C89B6D-A037-4C5A-B1C6-8E26271D44CB}"/>
-              </a:ext>
-            </a:extLst>
-          </p:cNvPr>
-          <p:cNvSpPr>
-            <a:spLocks xmlns:a="http://schemas.openxmlformats.org/drawingml/2006/main" noGrp="1"/>
-          </p:cNvSpPr>
-          <p:nvPr/>
-        </p:nvSpPr>
-        <p:spPr>
-          <a:xfrm xmlns:a="http://schemas.openxmlformats.org/drawingml/2006/main">
-            <a:off x="4781550" y="2133600"/>
-            <a:ext cx="2095500" cy="647700"/>
+                <a16:creationId xmlns:a16="http://schemas.microsoft.com/office/drawing/2014/main" id="{01718FE4-D996-4C5C-BD50-DE06DB1A762A}"/>
+              </a:ext>
+            </a:extLst>
+          </p:cNvPr>
+          <p:cNvSpPr>
+            <a:spLocks xmlns:a="http://schemas.openxmlformats.org/drawingml/2006/main" noGrp="1"/>
+          </p:cNvSpPr>
+          <p:nvPr/>
+        </p:nvSpPr>
+        <p:spPr>
+          <a:xfrm xmlns:a="http://schemas.openxmlformats.org/drawingml/2006/main">
+            <a:off x="4171950" y="4457700"/>
+            <a:ext cx="3848100" cy="228600"/>
+          </a:xfrm>
+          <a:prstGeom xmlns:a="http://schemas.openxmlformats.org/drawingml/2006/main" prst="rect">
+            <a:avLst/>
+          </a:prstGeom>
+          <a:solidFill xmlns:a="http://schemas.openxmlformats.org/drawingml/2006/main">
+            <a:srgbClr val="000000">
+              <a:alpha val="0"/>
+            </a:srgbClr>
+          </a:solidFill>
+          <a:ln xmlns:a="http://schemas.openxmlformats.org/drawingml/2006/main" w="0">
+            <a:solidFill>
+              <a:srgbClr val="000000">
+                <a:alpha val="0"/>
+              </a:srgbClr>
+            </a:solidFill>
+            <a:prstDash val="solid"/>
+          </a:ln>
+        </p:spPr>
+        <p:txBody>
+          <a:bodyPr xmlns:a="http://schemas.openxmlformats.org/drawingml/2006/main" lIns="0" tIns="0" rIns="0" bIns="0" anchor="t"/>
+          <a:lstStyle xmlns:a="http://schemas.openxmlformats.org/drawingml/2006/main"/>
+          <a:p xmlns:a="http://schemas.openxmlformats.org/drawingml/2006/main">
+            <a:pPr algn="ctr">
+              <a:defRPr sz="1125" b="1">
+                <a:solidFill>
+                  <a:srgbClr val="55E6FF"/>
+                </a:solidFill>
+                <a:latin typeface="Aptos"/>
+                <a:ea typeface="Aptos"/>
+                <a:cs typeface="Aptos"/>
+              </a:defRPr>
+            </a:pPr>
+            <a:r>
+              <a:rPr sz="1125" b="1">
+                <a:solidFill>
+                  <a:srgbClr val="55E6FF"/>
+                </a:solidFill>
+                <a:latin typeface="Aptos"/>
+                <a:ea typeface="Aptos"/>
+                <a:cs typeface="Aptos"/>
+              </a:rPr>
+              <a:t>Shared IP, data and reusable playbooks</a:t>
+            </a:r>
+          </a:p>
+        </p:txBody>
+      </p:sp>
+      <p:sp>
+        <p:nvSpPr>
+          <p:cNvPr id="10" name="">
+            <a:extLst xmlns:a="http://schemas.openxmlformats.org/drawingml/2006/main">
+              <a:ext uri="{FF2B5EF4-FFF2-40B4-BE49-F238E27FC236}">
+                <a16:creationId xmlns:a16="http://schemas.microsoft.com/office/drawing/2014/main" id="{D1470B9F-A057-41FB-8E92-C6025B7DB1E7}"/>
+              </a:ext>
+            </a:extLst>
+          </p:cNvPr>
+          <p:cNvSpPr>
+            <a:spLocks xmlns:a="http://schemas.openxmlformats.org/drawingml/2006/main" noGrp="1"/>
+          </p:cNvSpPr>
+          <p:nvPr/>
+        </p:nvSpPr>
+        <p:spPr>
+          <a:xfrm xmlns:a="http://schemas.openxmlformats.org/drawingml/2006/main">
+            <a:off x="723900" y="5143500"/>
+            <a:ext cx="2038350" cy="723900"/>
           </a:xfrm>
           <a:prstGeom xmlns:a="http://schemas.openxmlformats.org/drawingml/2006/main" prst="rect">
             <a:avLst/>
@@ -13448,22 +13512,22 @@
       </p:sp>
       <p:sp>
         <p:nvSpPr>
-          <p:cNvPr id="10" name="">
-            <a:extLst xmlns:a="http://schemas.openxmlformats.org/drawingml/2006/main">
-              <a:ext uri="{FF2B5EF4-FFF2-40B4-BE49-F238E27FC236}">
-                <a16:creationId xmlns:a16="http://schemas.microsoft.com/office/drawing/2014/main" id="{A4096E61-0381-4156-8913-5B92C9EEA08D}"/>
-              </a:ext>
-            </a:extLst>
-          </p:cNvPr>
-          <p:cNvSpPr>
-            <a:spLocks xmlns:a="http://schemas.openxmlformats.org/drawingml/2006/main" noGrp="1"/>
-          </p:cNvSpPr>
-          <p:nvPr/>
-        </p:nvSpPr>
-        <p:spPr>
-          <a:xfrm xmlns:a="http://schemas.openxmlformats.org/drawingml/2006/main">
-            <a:off x="4953000" y="2305050"/>
-            <a:ext cx="1752600" cy="247650"/>
+          <p:cNvPr id="11" name="">
+            <a:extLst xmlns:a="http://schemas.openxmlformats.org/drawingml/2006/main">
+              <a:ext uri="{FF2B5EF4-FFF2-40B4-BE49-F238E27FC236}">
+                <a16:creationId xmlns:a16="http://schemas.microsoft.com/office/drawing/2014/main" id="{92241EC6-3058-4340-965E-BFF232B7278C}"/>
+              </a:ext>
+            </a:extLst>
+          </p:cNvPr>
+          <p:cNvSpPr>
+            <a:spLocks xmlns:a="http://schemas.openxmlformats.org/drawingml/2006/main" noGrp="1"/>
+          </p:cNvSpPr>
+          <p:nvPr/>
+        </p:nvSpPr>
+        <p:spPr>
+          <a:xfrm xmlns:a="http://schemas.openxmlformats.org/drawingml/2006/main">
+            <a:off x="857250" y="5353050"/>
+            <a:ext cx="1771650" cy="266700"/>
           </a:xfrm>
           <a:prstGeom xmlns:a="http://schemas.openxmlformats.org/drawingml/2006/main" prst="rect">
             <a:avLst/>
@@ -13512,22 +13576,22 @@
       </p:sp>
       <p:sp>
         <p:nvSpPr>
-          <p:cNvPr id="11" name="">
-            <a:extLst xmlns:a="http://schemas.openxmlformats.org/drawingml/2006/main">
-              <a:ext uri="{FF2B5EF4-FFF2-40B4-BE49-F238E27FC236}">
-                <a16:creationId xmlns:a16="http://schemas.microsoft.com/office/drawing/2014/main" id="{0999A631-978F-4E2D-B53D-AF83E9FD0EE0}"/>
-              </a:ext>
-            </a:extLst>
-          </p:cNvPr>
-          <p:cNvSpPr>
-            <a:spLocks xmlns:a="http://schemas.openxmlformats.org/drawingml/2006/main" noGrp="1"/>
-          </p:cNvSpPr>
-          <p:nvPr/>
-        </p:nvSpPr>
-        <p:spPr>
-          <a:xfrm xmlns:a="http://schemas.openxmlformats.org/drawingml/2006/main">
-            <a:off x="5829300" y="2457450"/>
-            <a:ext cx="19050" cy="19050"/>
+          <p:cNvPr id="12" name="">
+            <a:extLst xmlns:a="http://schemas.openxmlformats.org/drawingml/2006/main">
+              <a:ext uri="{FF2B5EF4-FFF2-40B4-BE49-F238E27FC236}">
+                <a16:creationId xmlns:a16="http://schemas.microsoft.com/office/drawing/2014/main" id="{ED6D9CB9-65E6-4D99-8699-8F2D27FE683A}"/>
+              </a:ext>
+            </a:extLst>
+          </p:cNvPr>
+          <p:cNvSpPr>
+            <a:spLocks xmlns:a="http://schemas.openxmlformats.org/drawingml/2006/main" noGrp="1"/>
+          </p:cNvSpPr>
+          <p:nvPr/>
+        </p:nvSpPr>
+        <p:spPr>
+          <a:xfrm xmlns:a="http://schemas.openxmlformats.org/drawingml/2006/main">
+            <a:off x="1733550" y="4762500"/>
+            <a:ext cx="19050" cy="381000"/>
           </a:xfrm>
           <a:prstGeom xmlns:a="http://schemas.openxmlformats.org/drawingml/2006/main" prst="rect">
             <a:avLst/>
@@ -13545,22 +13609,22 @@
       </p:sp>
       <p:sp>
         <p:nvSpPr>
-          <p:cNvPr id="12" name="">
-            <a:extLst xmlns:a="http://schemas.openxmlformats.org/drawingml/2006/main">
-              <a:ext uri="{FF2B5EF4-FFF2-40B4-BE49-F238E27FC236}">
-                <a16:creationId xmlns:a16="http://schemas.microsoft.com/office/drawing/2014/main" id="{68E10A79-F6F8-440D-9741-B45E28937815}"/>
-              </a:ext>
-            </a:extLst>
-          </p:cNvPr>
-          <p:cNvSpPr>
-            <a:spLocks xmlns:a="http://schemas.openxmlformats.org/drawingml/2006/main" noGrp="1"/>
-          </p:cNvSpPr>
-          <p:nvPr/>
-        </p:nvSpPr>
-        <p:spPr>
-          <a:xfrm xmlns:a="http://schemas.openxmlformats.org/drawingml/2006/main">
-            <a:off x="7879664" y="3199821"/>
-            <a:ext cx="2095500" cy="647700"/>
+          <p:cNvPr id="13" name="">
+            <a:extLst xmlns:a="http://schemas.openxmlformats.org/drawingml/2006/main">
+              <a:ext uri="{FF2B5EF4-FFF2-40B4-BE49-F238E27FC236}">
+                <a16:creationId xmlns:a16="http://schemas.microsoft.com/office/drawing/2014/main" id="{29A2784C-6E92-487D-ADE3-9DD2C20DE9D1}"/>
+              </a:ext>
+            </a:extLst>
+          </p:cNvPr>
+          <p:cNvSpPr>
+            <a:spLocks xmlns:a="http://schemas.openxmlformats.org/drawingml/2006/main" noGrp="1"/>
+          </p:cNvSpPr>
+          <p:nvPr/>
+        </p:nvSpPr>
+        <p:spPr>
+          <a:xfrm xmlns:a="http://schemas.openxmlformats.org/drawingml/2006/main">
+            <a:off x="2895600" y="5143500"/>
+            <a:ext cx="2038350" cy="723900"/>
           </a:xfrm>
           <a:prstGeom xmlns:a="http://schemas.openxmlformats.org/drawingml/2006/main" prst="rect">
             <a:avLst/>
@@ -13580,22 +13644,22 @@
       </p:sp>
       <p:sp>
         <p:nvSpPr>
-          <p:cNvPr id="13" name="">
-            <a:extLst xmlns:a="http://schemas.openxmlformats.org/drawingml/2006/main">
-              <a:ext uri="{FF2B5EF4-FFF2-40B4-BE49-F238E27FC236}">
-                <a16:creationId xmlns:a16="http://schemas.microsoft.com/office/drawing/2014/main" id="{EA4961BB-D2AA-4FD4-8C25-06E03DA62CE8}"/>
-              </a:ext>
-            </a:extLst>
-          </p:cNvPr>
-          <p:cNvSpPr>
-            <a:spLocks xmlns:a="http://schemas.openxmlformats.org/drawingml/2006/main" noGrp="1"/>
-          </p:cNvSpPr>
-          <p:nvPr/>
-        </p:nvSpPr>
-        <p:spPr>
-          <a:xfrm xmlns:a="http://schemas.openxmlformats.org/drawingml/2006/main">
-            <a:off x="8051114" y="3371271"/>
-            <a:ext cx="1752600" cy="247650"/>
+          <p:cNvPr id="14" name="">
+            <a:extLst xmlns:a="http://schemas.openxmlformats.org/drawingml/2006/main">
+              <a:ext uri="{FF2B5EF4-FFF2-40B4-BE49-F238E27FC236}">
+                <a16:creationId xmlns:a16="http://schemas.microsoft.com/office/drawing/2014/main" id="{88F29DC1-C0CB-4ECB-B8AE-BD7472029AED}"/>
+              </a:ext>
+            </a:extLst>
+          </p:cNvPr>
+          <p:cNvSpPr>
+            <a:spLocks xmlns:a="http://schemas.openxmlformats.org/drawingml/2006/main" noGrp="1"/>
+          </p:cNvSpPr>
+          <p:nvPr/>
+        </p:nvSpPr>
+        <p:spPr>
+          <a:xfrm xmlns:a="http://schemas.openxmlformats.org/drawingml/2006/main">
+            <a:off x="3028950" y="5353050"/>
+            <a:ext cx="1771650" cy="266700"/>
           </a:xfrm>
           <a:prstGeom xmlns:a="http://schemas.openxmlformats.org/drawingml/2006/main" prst="rect">
             <a:avLst/>
@@ -13644,22 +13708,22 @@
       </p:sp>
       <p:sp>
         <p:nvSpPr>
-          <p:cNvPr id="14" name="">
-            <a:extLst xmlns:a="http://schemas.openxmlformats.org/drawingml/2006/main">
-              <a:ext uri="{FF2B5EF4-FFF2-40B4-BE49-F238E27FC236}">
-                <a16:creationId xmlns:a16="http://schemas.microsoft.com/office/drawing/2014/main" id="{DF3062CB-ECC5-4F01-BE63-DAB9DC40D4F2}"/>
-              </a:ext>
-            </a:extLst>
-          </p:cNvPr>
-          <p:cNvSpPr>
-            <a:spLocks xmlns:a="http://schemas.openxmlformats.org/drawingml/2006/main" noGrp="1"/>
-          </p:cNvSpPr>
-          <p:nvPr/>
-        </p:nvSpPr>
-        <p:spPr>
-          <a:xfrm xmlns:a="http://schemas.openxmlformats.org/drawingml/2006/main">
-            <a:off x="5829300" y="3523671"/>
-            <a:ext cx="3098114" cy="19050"/>
+          <p:cNvPr id="15" name="">
+            <a:extLst xmlns:a="http://schemas.openxmlformats.org/drawingml/2006/main">
+              <a:ext uri="{FF2B5EF4-FFF2-40B4-BE49-F238E27FC236}">
+                <a16:creationId xmlns:a16="http://schemas.microsoft.com/office/drawing/2014/main" id="{12E11ECA-A0F2-48F3-94CF-A0EE477409C0}"/>
+              </a:ext>
+            </a:extLst>
+          </p:cNvPr>
+          <p:cNvSpPr>
+            <a:spLocks xmlns:a="http://schemas.openxmlformats.org/drawingml/2006/main" noGrp="1"/>
+          </p:cNvSpPr>
+          <p:nvPr/>
+        </p:nvSpPr>
+        <p:spPr>
+          <a:xfrm xmlns:a="http://schemas.openxmlformats.org/drawingml/2006/main">
+            <a:off x="3905250" y="4762500"/>
+            <a:ext cx="19050" cy="381000"/>
           </a:xfrm>
           <a:prstGeom xmlns:a="http://schemas.openxmlformats.org/drawingml/2006/main" prst="rect">
             <a:avLst/>
@@ -13677,22 +13741,22 @@
       </p:sp>
       <p:sp>
         <p:nvSpPr>
-          <p:cNvPr id="15" name="">
-            <a:extLst xmlns:a="http://schemas.openxmlformats.org/drawingml/2006/main">
-              <a:ext uri="{FF2B5EF4-FFF2-40B4-BE49-F238E27FC236}">
-                <a16:creationId xmlns:a16="http://schemas.microsoft.com/office/drawing/2014/main" id="{CFD51932-AC58-440F-8CE3-CF81AD13F203}"/>
-              </a:ext>
-            </a:extLst>
-          </p:cNvPr>
-          <p:cNvSpPr>
-            <a:spLocks xmlns:a="http://schemas.openxmlformats.org/drawingml/2006/main" noGrp="1"/>
-          </p:cNvSpPr>
-          <p:nvPr/>
-        </p:nvSpPr>
-        <p:spPr>
-          <a:xfrm xmlns:a="http://schemas.openxmlformats.org/drawingml/2006/main">
-            <a:off x="6696290" y="4925004"/>
-            <a:ext cx="2095500" cy="647700"/>
+          <p:cNvPr id="16" name="">
+            <a:extLst xmlns:a="http://schemas.openxmlformats.org/drawingml/2006/main">
+              <a:ext uri="{FF2B5EF4-FFF2-40B4-BE49-F238E27FC236}">
+                <a16:creationId xmlns:a16="http://schemas.microsoft.com/office/drawing/2014/main" id="{28BA567A-553B-49DD-9339-4E19D019ED01}"/>
+              </a:ext>
+            </a:extLst>
+          </p:cNvPr>
+          <p:cNvSpPr>
+            <a:spLocks xmlns:a="http://schemas.openxmlformats.org/drawingml/2006/main" noGrp="1"/>
+          </p:cNvSpPr>
+          <p:nvPr/>
+        </p:nvSpPr>
+        <p:spPr>
+          <a:xfrm xmlns:a="http://schemas.openxmlformats.org/drawingml/2006/main">
+            <a:off x="5067300" y="5143500"/>
+            <a:ext cx="2038350" cy="723900"/>
           </a:xfrm>
           <a:prstGeom xmlns:a="http://schemas.openxmlformats.org/drawingml/2006/main" prst="rect">
             <a:avLst/>
@@ -13712,22 +13776,22 @@
       </p:sp>
       <p:sp>
         <p:nvSpPr>
-          <p:cNvPr id="16" name="">
-            <a:extLst xmlns:a="http://schemas.openxmlformats.org/drawingml/2006/main">
-              <a:ext uri="{FF2B5EF4-FFF2-40B4-BE49-F238E27FC236}">
-                <a16:creationId xmlns:a16="http://schemas.microsoft.com/office/drawing/2014/main" id="{1B2F69DC-7EAF-4D90-999F-769AAA783C7F}"/>
-              </a:ext>
-            </a:extLst>
-          </p:cNvPr>
-          <p:cNvSpPr>
-            <a:spLocks xmlns:a="http://schemas.openxmlformats.org/drawingml/2006/main" noGrp="1"/>
-          </p:cNvSpPr>
-          <p:nvPr/>
-        </p:nvSpPr>
-        <p:spPr>
-          <a:xfrm xmlns:a="http://schemas.openxmlformats.org/drawingml/2006/main">
-            <a:off x="6867740" y="5096454"/>
-            <a:ext cx="1752600" cy="247650"/>
+          <p:cNvPr id="17" name="">
+            <a:extLst xmlns:a="http://schemas.openxmlformats.org/drawingml/2006/main">
+              <a:ext uri="{FF2B5EF4-FFF2-40B4-BE49-F238E27FC236}">
+                <a16:creationId xmlns:a16="http://schemas.microsoft.com/office/drawing/2014/main" id="{E15358A0-3517-4992-BEF0-1B8333647975}"/>
+              </a:ext>
+            </a:extLst>
+          </p:cNvPr>
+          <p:cNvSpPr>
+            <a:spLocks xmlns:a="http://schemas.openxmlformats.org/drawingml/2006/main" noGrp="1"/>
+          </p:cNvSpPr>
+          <p:nvPr/>
+        </p:nvSpPr>
+        <p:spPr>
+          <a:xfrm xmlns:a="http://schemas.openxmlformats.org/drawingml/2006/main">
+            <a:off x="5200650" y="5353050"/>
+            <a:ext cx="1771650" cy="266700"/>
           </a:xfrm>
           <a:prstGeom xmlns:a="http://schemas.openxmlformats.org/drawingml/2006/main" prst="rect">
             <a:avLst/>
@@ -13776,22 +13840,22 @@
       </p:sp>
       <p:sp>
         <p:nvSpPr>
-          <p:cNvPr id="17" name="">
-            <a:extLst xmlns:a="http://schemas.openxmlformats.org/drawingml/2006/main">
-              <a:ext uri="{FF2B5EF4-FFF2-40B4-BE49-F238E27FC236}">
-                <a16:creationId xmlns:a16="http://schemas.microsoft.com/office/drawing/2014/main" id="{21916234-4634-4B47-AB84-76BBCFA86BE9}"/>
-              </a:ext>
-            </a:extLst>
-          </p:cNvPr>
-          <p:cNvSpPr>
-            <a:spLocks xmlns:a="http://schemas.openxmlformats.org/drawingml/2006/main" noGrp="1"/>
-          </p:cNvSpPr>
-          <p:nvPr/>
-        </p:nvSpPr>
-        <p:spPr>
-          <a:xfrm xmlns:a="http://schemas.openxmlformats.org/drawingml/2006/main">
-            <a:off x="5829300" y="4000500"/>
-            <a:ext cx="1914740" cy="19050"/>
+          <p:cNvPr id="18" name="">
+            <a:extLst xmlns:a="http://schemas.openxmlformats.org/drawingml/2006/main">
+              <a:ext uri="{FF2B5EF4-FFF2-40B4-BE49-F238E27FC236}">
+                <a16:creationId xmlns:a16="http://schemas.microsoft.com/office/drawing/2014/main" id="{D014F7DD-679B-4C40-ADD1-C99855E461A2}"/>
+              </a:ext>
+            </a:extLst>
+          </p:cNvPr>
+          <p:cNvSpPr>
+            <a:spLocks xmlns:a="http://schemas.openxmlformats.org/drawingml/2006/main" noGrp="1"/>
+          </p:cNvSpPr>
+          <p:nvPr/>
+        </p:nvSpPr>
+        <p:spPr>
+          <a:xfrm xmlns:a="http://schemas.openxmlformats.org/drawingml/2006/main">
+            <a:off x="6076950" y="4762500"/>
+            <a:ext cx="19050" cy="381000"/>
           </a:xfrm>
           <a:prstGeom xmlns:a="http://schemas.openxmlformats.org/drawingml/2006/main" prst="rect">
             <a:avLst/>
@@ -13809,22 +13873,22 @@
       </p:sp>
       <p:sp>
         <p:nvSpPr>
-          <p:cNvPr id="18" name="">
-            <a:extLst xmlns:a="http://schemas.openxmlformats.org/drawingml/2006/main">
-              <a:ext uri="{FF2B5EF4-FFF2-40B4-BE49-F238E27FC236}">
-                <a16:creationId xmlns:a16="http://schemas.microsoft.com/office/drawing/2014/main" id="{B80FD7D2-1B39-44A8-B3ED-B82EFCA5A43B}"/>
-              </a:ext>
-            </a:extLst>
-          </p:cNvPr>
-          <p:cNvSpPr>
-            <a:spLocks xmlns:a="http://schemas.openxmlformats.org/drawingml/2006/main" noGrp="1"/>
-          </p:cNvSpPr>
-          <p:nvPr/>
-        </p:nvSpPr>
-        <p:spPr>
-          <a:xfrm xmlns:a="http://schemas.openxmlformats.org/drawingml/2006/main">
-            <a:off x="2866810" y="4925004"/>
-            <a:ext cx="2095500" cy="647700"/>
+          <p:cNvPr id="19" name="">
+            <a:extLst xmlns:a="http://schemas.openxmlformats.org/drawingml/2006/main">
+              <a:ext uri="{FF2B5EF4-FFF2-40B4-BE49-F238E27FC236}">
+                <a16:creationId xmlns:a16="http://schemas.microsoft.com/office/drawing/2014/main" id="{09C0BF85-34A7-4FB0-BA4D-1FC57C512EE7}"/>
+              </a:ext>
+            </a:extLst>
+          </p:cNvPr>
+          <p:cNvSpPr>
+            <a:spLocks xmlns:a="http://schemas.openxmlformats.org/drawingml/2006/main" noGrp="1"/>
+          </p:cNvSpPr>
+          <p:nvPr/>
+        </p:nvSpPr>
+        <p:spPr>
+          <a:xfrm xmlns:a="http://schemas.openxmlformats.org/drawingml/2006/main">
+            <a:off x="7239000" y="5143500"/>
+            <a:ext cx="2038350" cy="723900"/>
           </a:xfrm>
           <a:prstGeom xmlns:a="http://schemas.openxmlformats.org/drawingml/2006/main" prst="rect">
             <a:avLst/>
@@ -13844,22 +13908,22 @@
       </p:sp>
       <p:sp>
         <p:nvSpPr>
-          <p:cNvPr id="19" name="">
-            <a:extLst xmlns:a="http://schemas.openxmlformats.org/drawingml/2006/main">
-              <a:ext uri="{FF2B5EF4-FFF2-40B4-BE49-F238E27FC236}">
-                <a16:creationId xmlns:a16="http://schemas.microsoft.com/office/drawing/2014/main" id="{78710F5F-AA13-4B6E-B2A4-7459CCBC1BD0}"/>
-              </a:ext>
-            </a:extLst>
-          </p:cNvPr>
-          <p:cNvSpPr>
-            <a:spLocks xmlns:a="http://schemas.openxmlformats.org/drawingml/2006/main" noGrp="1"/>
-          </p:cNvSpPr>
-          <p:nvPr/>
-        </p:nvSpPr>
-        <p:spPr>
-          <a:xfrm xmlns:a="http://schemas.openxmlformats.org/drawingml/2006/main">
-            <a:off x="3038260" y="5096454"/>
-            <a:ext cx="1752600" cy="247650"/>
+          <p:cNvPr id="20" name="">
+            <a:extLst xmlns:a="http://schemas.openxmlformats.org/drawingml/2006/main">
+              <a:ext uri="{FF2B5EF4-FFF2-40B4-BE49-F238E27FC236}">
+                <a16:creationId xmlns:a16="http://schemas.microsoft.com/office/drawing/2014/main" id="{D5641D5C-843C-42D6-AD3D-07D4030738BC}"/>
+              </a:ext>
+            </a:extLst>
+          </p:cNvPr>
+          <p:cNvSpPr>
+            <a:spLocks xmlns:a="http://schemas.openxmlformats.org/drawingml/2006/main" noGrp="1"/>
+          </p:cNvSpPr>
+          <p:nvPr/>
+        </p:nvSpPr>
+        <p:spPr>
+          <a:xfrm xmlns:a="http://schemas.openxmlformats.org/drawingml/2006/main">
+            <a:off x="7372350" y="5353050"/>
+            <a:ext cx="1771650" cy="266700"/>
           </a:xfrm>
           <a:prstGeom xmlns:a="http://schemas.openxmlformats.org/drawingml/2006/main" prst="rect">
             <a:avLst/>
@@ -13908,22 +13972,22 @@
       </p:sp>
       <p:sp>
         <p:nvSpPr>
-          <p:cNvPr id="20" name="">
-            <a:extLst xmlns:a="http://schemas.openxmlformats.org/drawingml/2006/main">
-              <a:ext uri="{FF2B5EF4-FFF2-40B4-BE49-F238E27FC236}">
-                <a16:creationId xmlns:a16="http://schemas.microsoft.com/office/drawing/2014/main" id="{ABBEA38B-E414-4B9C-8A00-BC8723DD8C8E}"/>
-              </a:ext>
-            </a:extLst>
-          </p:cNvPr>
-          <p:cNvSpPr>
-            <a:spLocks xmlns:a="http://schemas.openxmlformats.org/drawingml/2006/main" noGrp="1"/>
-          </p:cNvSpPr>
-          <p:nvPr/>
-        </p:nvSpPr>
-        <p:spPr>
-          <a:xfrm xmlns:a="http://schemas.openxmlformats.org/drawingml/2006/main">
-            <a:off x="3914560" y="4000500"/>
-            <a:ext cx="1914740" cy="19050"/>
+          <p:cNvPr id="21" name="">
+            <a:extLst xmlns:a="http://schemas.openxmlformats.org/drawingml/2006/main">
+              <a:ext uri="{FF2B5EF4-FFF2-40B4-BE49-F238E27FC236}">
+                <a16:creationId xmlns:a16="http://schemas.microsoft.com/office/drawing/2014/main" id="{19A06986-E8F6-4A2B-BC50-EAC59B1C3341}"/>
+              </a:ext>
+            </a:extLst>
+          </p:cNvPr>
+          <p:cNvSpPr>
+            <a:spLocks xmlns:a="http://schemas.openxmlformats.org/drawingml/2006/main" noGrp="1"/>
+          </p:cNvSpPr>
+          <p:nvPr/>
+        </p:nvSpPr>
+        <p:spPr>
+          <a:xfrm xmlns:a="http://schemas.openxmlformats.org/drawingml/2006/main">
+            <a:off x="8248650" y="4762500"/>
+            <a:ext cx="19050" cy="381000"/>
           </a:xfrm>
           <a:prstGeom xmlns:a="http://schemas.openxmlformats.org/drawingml/2006/main" prst="rect">
             <a:avLst/>
@@ -13941,22 +14005,22 @@
       </p:sp>
       <p:sp>
         <p:nvSpPr>
-          <p:cNvPr id="21" name="">
-            <a:extLst xmlns:a="http://schemas.openxmlformats.org/drawingml/2006/main">
-              <a:ext uri="{FF2B5EF4-FFF2-40B4-BE49-F238E27FC236}">
-                <a16:creationId xmlns:a16="http://schemas.microsoft.com/office/drawing/2014/main" id="{B3DE2B62-6789-4CE8-9164-EFFF22FAA42C}"/>
-              </a:ext>
-            </a:extLst>
-          </p:cNvPr>
-          <p:cNvSpPr>
-            <a:spLocks xmlns:a="http://schemas.openxmlformats.org/drawingml/2006/main" noGrp="1"/>
-          </p:cNvSpPr>
-          <p:nvPr/>
-        </p:nvSpPr>
-        <p:spPr>
-          <a:xfrm xmlns:a="http://schemas.openxmlformats.org/drawingml/2006/main">
-            <a:off x="1683436" y="3199821"/>
-            <a:ext cx="2095500" cy="647700"/>
+          <p:cNvPr id="22" name="">
+            <a:extLst xmlns:a="http://schemas.openxmlformats.org/drawingml/2006/main">
+              <a:ext uri="{FF2B5EF4-FFF2-40B4-BE49-F238E27FC236}">
+                <a16:creationId xmlns:a16="http://schemas.microsoft.com/office/drawing/2014/main" id="{A60765D6-0642-4935-AD5B-27F416B0E243}"/>
+              </a:ext>
+            </a:extLst>
+          </p:cNvPr>
+          <p:cNvSpPr>
+            <a:spLocks xmlns:a="http://schemas.openxmlformats.org/drawingml/2006/main" noGrp="1"/>
+          </p:cNvSpPr>
+          <p:nvPr/>
+        </p:nvSpPr>
+        <p:spPr>
+          <a:xfrm xmlns:a="http://schemas.openxmlformats.org/drawingml/2006/main">
+            <a:off x="9410700" y="5143500"/>
+            <a:ext cx="2038350" cy="723900"/>
           </a:xfrm>
           <a:prstGeom xmlns:a="http://schemas.openxmlformats.org/drawingml/2006/main" prst="rect">
             <a:avLst/>
@@ -13976,22 +14040,22 @@
       </p:sp>
       <p:sp>
         <p:nvSpPr>
-          <p:cNvPr id="22" name="">
-            <a:extLst xmlns:a="http://schemas.openxmlformats.org/drawingml/2006/main">
-              <a:ext uri="{FF2B5EF4-FFF2-40B4-BE49-F238E27FC236}">
-                <a16:creationId xmlns:a16="http://schemas.microsoft.com/office/drawing/2014/main" id="{C143BBFA-D7BB-494C-8C9F-852D1E7912BB}"/>
-              </a:ext>
-            </a:extLst>
-          </p:cNvPr>
-          <p:cNvSpPr>
-            <a:spLocks xmlns:a="http://schemas.openxmlformats.org/drawingml/2006/main" noGrp="1"/>
-          </p:cNvSpPr>
-          <p:nvPr/>
-        </p:nvSpPr>
-        <p:spPr>
-          <a:xfrm xmlns:a="http://schemas.openxmlformats.org/drawingml/2006/main">
-            <a:off x="1854886" y="3371271"/>
-            <a:ext cx="1752600" cy="247650"/>
+          <p:cNvPr id="23" name="">
+            <a:extLst xmlns:a="http://schemas.openxmlformats.org/drawingml/2006/main">
+              <a:ext uri="{FF2B5EF4-FFF2-40B4-BE49-F238E27FC236}">
+                <a16:creationId xmlns:a16="http://schemas.microsoft.com/office/drawing/2014/main" id="{CCD209AF-F354-42DF-BF82-94969DF2E1D9}"/>
+              </a:ext>
+            </a:extLst>
+          </p:cNvPr>
+          <p:cNvSpPr>
+            <a:spLocks xmlns:a="http://schemas.openxmlformats.org/drawingml/2006/main" noGrp="1"/>
+          </p:cNvSpPr>
+          <p:nvPr/>
+        </p:nvSpPr>
+        <p:spPr>
+          <a:xfrm xmlns:a="http://schemas.openxmlformats.org/drawingml/2006/main">
+            <a:off x="9544050" y="5353050"/>
+            <a:ext cx="1771650" cy="266700"/>
           </a:xfrm>
           <a:prstGeom xmlns:a="http://schemas.openxmlformats.org/drawingml/2006/main" prst="rect">
             <a:avLst/>
@@ -14040,22 +14104,22 @@
       </p:sp>
       <p:sp>
         <p:nvSpPr>
-          <p:cNvPr id="23" name="">
-            <a:extLst xmlns:a="http://schemas.openxmlformats.org/drawingml/2006/main">
-              <a:ext uri="{FF2B5EF4-FFF2-40B4-BE49-F238E27FC236}">
-                <a16:creationId xmlns:a16="http://schemas.microsoft.com/office/drawing/2014/main" id="{9AAD3BC5-78F6-4A7A-B63B-DF568F69F4FD}"/>
-              </a:ext>
-            </a:extLst>
-          </p:cNvPr>
-          <p:cNvSpPr>
-            <a:spLocks xmlns:a="http://schemas.openxmlformats.org/drawingml/2006/main" noGrp="1"/>
-          </p:cNvSpPr>
-          <p:nvPr/>
-        </p:nvSpPr>
-        <p:spPr>
-          <a:xfrm xmlns:a="http://schemas.openxmlformats.org/drawingml/2006/main">
-            <a:off x="2731186" y="3523671"/>
-            <a:ext cx="3098114" cy="19050"/>
+          <p:cNvPr id="24" name="">
+            <a:extLst xmlns:a="http://schemas.openxmlformats.org/drawingml/2006/main">
+              <a:ext uri="{FF2B5EF4-FFF2-40B4-BE49-F238E27FC236}">
+                <a16:creationId xmlns:a16="http://schemas.microsoft.com/office/drawing/2014/main" id="{49FECD98-5E25-4C96-9046-02CFFBD9D0DC}"/>
+              </a:ext>
+            </a:extLst>
+          </p:cNvPr>
+          <p:cNvSpPr>
+            <a:spLocks xmlns:a="http://schemas.openxmlformats.org/drawingml/2006/main" noGrp="1"/>
+          </p:cNvSpPr>
+          <p:nvPr/>
+        </p:nvSpPr>
+        <p:spPr>
+          <a:xfrm xmlns:a="http://schemas.openxmlformats.org/drawingml/2006/main">
+            <a:off x="10420350" y="4762500"/>
+            <a:ext cx="19050" cy="381000"/>
           </a:xfrm>
           <a:prstGeom xmlns:a="http://schemas.openxmlformats.org/drawingml/2006/main" prst="rect">
             <a:avLst/>
@@ -14073,10 +14137,43 @@
       </p:sp>
       <p:sp>
         <p:nvSpPr>
-          <p:cNvPr id="24" name="">
-            <a:extLst xmlns:a="http://schemas.openxmlformats.org/drawingml/2006/main">
-              <a:ext uri="{FF2B5EF4-FFF2-40B4-BE49-F238E27FC236}">
-                <a16:creationId xmlns:a16="http://schemas.microsoft.com/office/drawing/2014/main" id="{0CF69C9C-7A4C-4A42-9278-C9F710A1CC17}"/>
+          <p:cNvPr id="25" name="">
+            <a:extLst xmlns:a="http://schemas.openxmlformats.org/drawingml/2006/main">
+              <a:ext uri="{FF2B5EF4-FFF2-40B4-BE49-F238E27FC236}">
+                <a16:creationId xmlns:a16="http://schemas.microsoft.com/office/drawing/2014/main" id="{31735781-3CB6-4F45-A0FD-8D5942965A09}"/>
+              </a:ext>
+            </a:extLst>
+          </p:cNvPr>
+          <p:cNvSpPr>
+            <a:spLocks xmlns:a="http://schemas.openxmlformats.org/drawingml/2006/main" noGrp="1"/>
+          </p:cNvSpPr>
+          <p:nvPr/>
+        </p:nvSpPr>
+        <p:spPr>
+          <a:xfrm xmlns:a="http://schemas.openxmlformats.org/drawingml/2006/main">
+            <a:off x="1743075" y="4762500"/>
+            <a:ext cx="8686800" cy="19050"/>
+          </a:xfrm>
+          <a:prstGeom xmlns:a="http://schemas.openxmlformats.org/drawingml/2006/main" prst="rect">
+            <a:avLst/>
+          </a:prstGeom>
+          <a:solidFill xmlns:a="http://schemas.openxmlformats.org/drawingml/2006/main">
+            <a:srgbClr val="285563"/>
+          </a:solidFill>
+          <a:ln xmlns:a="http://schemas.openxmlformats.org/drawingml/2006/main" w="0">
+            <a:solidFill>
+              <a:srgbClr val="285563"/>
+            </a:solidFill>
+            <a:prstDash val="solid"/>
+          </a:ln>
+        </p:spPr>
+      </p:sp>
+      <p:sp>
+        <p:nvSpPr>
+          <p:cNvPr id="26" name="">
+            <a:extLst xmlns:a="http://schemas.openxmlformats.org/drawingml/2006/main">
+              <a:ext uri="{FF2B5EF4-FFF2-40B4-BE49-F238E27FC236}">
+                <a16:creationId xmlns:a16="http://schemas.microsoft.com/office/drawing/2014/main" id="{AF4724EC-2931-446E-8897-57CB28686F4C}"/>
               </a:ext>
             </a:extLst>
           </p:cNvPr>
@@ -14137,10 +14234,10 @@
       </p:sp>
       <p:sp>
         <p:nvSpPr>
-          <p:cNvPr id="25" name="">
-            <a:extLst xmlns:a="http://schemas.openxmlformats.org/drawingml/2006/main">
-              <a:ext uri="{FF2B5EF4-FFF2-40B4-BE49-F238E27FC236}">
-                <a16:creationId xmlns:a16="http://schemas.microsoft.com/office/drawing/2014/main" id="{F2EFE4F2-1EAD-4E6A-83C8-E26B612A9F74}"/>
+          <p:cNvPr id="27" name="">
+            <a:extLst xmlns:a="http://schemas.openxmlformats.org/drawingml/2006/main">
+              <a:ext uri="{FF2B5EF4-FFF2-40B4-BE49-F238E27FC236}">
+                <a16:creationId xmlns:a16="http://schemas.microsoft.com/office/drawing/2014/main" id="{5ED155AE-EE06-49E2-B354-C1D7F1BFE5E7}"/>
               </a:ext>
             </a:extLst>
           </p:cNvPr>
@@ -14170,10 +14267,10 @@
       </p:sp>
       <p:sp>
         <p:nvSpPr>
-          <p:cNvPr id="26" name="">
-            <a:extLst xmlns:a="http://schemas.openxmlformats.org/drawingml/2006/main">
-              <a:ext uri="{FF2B5EF4-FFF2-40B4-BE49-F238E27FC236}">
-                <a16:creationId xmlns:a16="http://schemas.microsoft.com/office/drawing/2014/main" id="{B7E52C49-45EC-4BD0-8FA9-CE595CB1C639}"/>
+          <p:cNvPr id="28" name="">
+            <a:extLst xmlns:a="http://schemas.openxmlformats.org/drawingml/2006/main">
+              <a:ext uri="{FF2B5EF4-FFF2-40B4-BE49-F238E27FC236}">
+                <a16:creationId xmlns:a16="http://schemas.microsoft.com/office/drawing/2014/main" id="{8951D9AA-972B-4E62-ADD8-48529B700301}"/>
               </a:ext>
             </a:extLst>
           </p:cNvPr>
@@ -14234,10 +14331,10 @@
       </p:sp>
       <p:sp>
         <p:nvSpPr>
-          <p:cNvPr id="27" name="">
-            <a:extLst xmlns:a="http://schemas.openxmlformats.org/drawingml/2006/main">
-              <a:ext uri="{FF2B5EF4-FFF2-40B4-BE49-F238E27FC236}">
-                <a16:creationId xmlns:a16="http://schemas.microsoft.com/office/drawing/2014/main" id="{2B7206EF-ABF3-45FA-A40D-506DDB4E6590}"/>
+          <p:cNvPr id="29" name="">
+            <a:extLst xmlns:a="http://schemas.openxmlformats.org/drawingml/2006/main">
+              <a:ext uri="{FF2B5EF4-FFF2-40B4-BE49-F238E27FC236}">
+                <a16:creationId xmlns:a16="http://schemas.microsoft.com/office/drawing/2014/main" id="{72DF70E7-5CEE-43CA-A813-D646479F3A41}"/>
               </a:ext>
             </a:extLst>
           </p:cNvPr>
@@ -14299,7 +14396,7 @@
     </p:spTree>
     <p:extLst>
       <p:ext uri="{BB962C8B-B14F-4D97-AF65-F5344CB8AC3E}">
-        <p14:creationId xmlns:p14="http://schemas.microsoft.com/office/powerpoint/2010/main" val="1349644895"/>
+        <p14:creationId xmlns:p14="http://schemas.microsoft.com/office/powerpoint/2010/main" val="861899672"/>
       </p:ext>
     </p:extLst>
   </p:cSld>
@@ -14327,7 +14424,7 @@
           <p:nvPr/>
         </p:nvPicPr>
         <p:blipFill>
-          <a:blip xmlns:r="http://schemas.openxmlformats.org/officeDocument/2006/relationships" xmlns:a="http://schemas.openxmlformats.org/drawingml/2006/main" r:embed="Rfa16bb579d614ef4"/>
+          <a:blip xmlns:r="http://schemas.openxmlformats.org/officeDocument/2006/relationships" xmlns:a="http://schemas.openxmlformats.org/drawingml/2006/main" r:embed="R2754039023044f66"/>
           <a:srcRect xmlns:a="http://schemas.openxmlformats.org/drawingml/2006/main" l="0" t="27" r="0" b="27"/>
           <a:stretch xmlns:a="http://schemas.openxmlformats.org/drawingml/2006/main">
             <a:fillRect l="0" t="0" r="0" b="0"/>
@@ -14348,7 +14445,7 @@
           <p:cNvPr id="2" name="">
             <a:extLst xmlns:a="http://schemas.openxmlformats.org/drawingml/2006/main">
               <a:ext uri="{FF2B5EF4-FFF2-40B4-BE49-F238E27FC236}">
-                <a16:creationId xmlns:a16="http://schemas.microsoft.com/office/drawing/2014/main" id="{9BC46F01-D530-4E12-A8B6-1ABB59D23858}"/>
+                <a16:creationId xmlns:a16="http://schemas.microsoft.com/office/drawing/2014/main" id="{D054C9D8-416D-4280-94E0-8E54F11E1F72}"/>
               </a:ext>
             </a:extLst>
           </p:cNvPr>
@@ -14385,7 +14482,7 @@
           <p:cNvPr id="3" name="">
             <a:extLst xmlns:a="http://schemas.openxmlformats.org/drawingml/2006/main">
               <a:ext uri="{FF2B5EF4-FFF2-40B4-BE49-F238E27FC236}">
-                <a16:creationId xmlns:a16="http://schemas.microsoft.com/office/drawing/2014/main" id="{F3A04E52-1225-4324-B7EE-4D9A7FB5DA3E}"/>
+                <a16:creationId xmlns:a16="http://schemas.microsoft.com/office/drawing/2014/main" id="{78F8F6DC-4951-4ABE-9477-2CD49F981110}"/>
               </a:ext>
             </a:extLst>
           </p:cNvPr>
@@ -14422,7 +14519,7 @@
           <p:cNvPr id="4" name="">
             <a:extLst xmlns:a="http://schemas.openxmlformats.org/drawingml/2006/main">
               <a:ext uri="{FF2B5EF4-FFF2-40B4-BE49-F238E27FC236}">
-                <a16:creationId xmlns:a16="http://schemas.microsoft.com/office/drawing/2014/main" id="{FA68A803-EE68-46AA-BCDD-9A3A8AC67BF3}"/>
+                <a16:creationId xmlns:a16="http://schemas.microsoft.com/office/drawing/2014/main" id="{42AF09BA-9BC7-400F-9B8D-14785088BE26}"/>
               </a:ext>
             </a:extLst>
           </p:cNvPr>
@@ -14486,7 +14583,7 @@
           <p:cNvPr id="5" name="">
             <a:extLst xmlns:a="http://schemas.openxmlformats.org/drawingml/2006/main">
               <a:ext uri="{FF2B5EF4-FFF2-40B4-BE49-F238E27FC236}">
-                <a16:creationId xmlns:a16="http://schemas.microsoft.com/office/drawing/2014/main" id="{11D9D579-5343-4FAC-A672-81D6597AC689}"/>
+                <a16:creationId xmlns:a16="http://schemas.microsoft.com/office/drawing/2014/main" id="{0C3847A9-60BB-422C-849C-318CD0A4B110}"/>
               </a:ext>
             </a:extLst>
           </p:cNvPr>
@@ -14550,7 +14647,7 @@
           <p:cNvPr id="6" name="">
             <a:extLst xmlns:a="http://schemas.openxmlformats.org/drawingml/2006/main">
               <a:ext uri="{FF2B5EF4-FFF2-40B4-BE49-F238E27FC236}">
-                <a16:creationId xmlns:a16="http://schemas.microsoft.com/office/drawing/2014/main" id="{ABC95F87-8FD3-4D7A-ADC2-A3F525CA8BE9}"/>
+                <a16:creationId xmlns:a16="http://schemas.microsoft.com/office/drawing/2014/main" id="{A430F653-A181-4257-B983-5F9CA3B96F23}"/>
               </a:ext>
             </a:extLst>
           </p:cNvPr>
@@ -14614,7 +14711,7 @@
           <p:cNvPr id="7" name="">
             <a:extLst xmlns:a="http://schemas.openxmlformats.org/drawingml/2006/main">
               <a:ext uri="{FF2B5EF4-FFF2-40B4-BE49-F238E27FC236}">
-                <a16:creationId xmlns:a16="http://schemas.microsoft.com/office/drawing/2014/main" id="{C57EEC12-745C-4CB2-A435-4EBA8E31BF63}"/>
+                <a16:creationId xmlns:a16="http://schemas.microsoft.com/office/drawing/2014/main" id="{64211D3B-36FB-4736-8418-6057D1ED5CC2}"/>
               </a:ext>
             </a:extLst>
           </p:cNvPr>
@@ -14649,7 +14746,7 @@
           <p:cNvPr id="8" name="">
             <a:extLst xmlns:a="http://schemas.openxmlformats.org/drawingml/2006/main">
               <a:ext uri="{FF2B5EF4-FFF2-40B4-BE49-F238E27FC236}">
-                <a16:creationId xmlns:a16="http://schemas.microsoft.com/office/drawing/2014/main" id="{00244241-B586-4877-9251-8CE65D91AE93}"/>
+                <a16:creationId xmlns:a16="http://schemas.microsoft.com/office/drawing/2014/main" id="{D4A1170D-2901-4B3A-8CDB-1179D5BBD79E}"/>
               </a:ext>
             </a:extLst>
           </p:cNvPr>
@@ -14713,7 +14810,7 @@
           <p:cNvPr id="9" name="">
             <a:extLst xmlns:a="http://schemas.openxmlformats.org/drawingml/2006/main">
               <a:ext uri="{FF2B5EF4-FFF2-40B4-BE49-F238E27FC236}">
-                <a16:creationId xmlns:a16="http://schemas.microsoft.com/office/drawing/2014/main" id="{3C38FA07-71D4-44CF-AF6E-61461A7BFC65}"/>
+                <a16:creationId xmlns:a16="http://schemas.microsoft.com/office/drawing/2014/main" id="{7D05EFE0-3543-4FC6-B4BF-6635664E7A3F}"/>
               </a:ext>
             </a:extLst>
           </p:cNvPr>
@@ -14777,7 +14874,7 @@
           <p:cNvPr id="10" name="">
             <a:extLst xmlns:a="http://schemas.openxmlformats.org/drawingml/2006/main">
               <a:ext uri="{FF2B5EF4-FFF2-40B4-BE49-F238E27FC236}">
-                <a16:creationId xmlns:a16="http://schemas.microsoft.com/office/drawing/2014/main" id="{D4A8C852-AF6D-4E10-A2CA-E4FC9F29E7D5}"/>
+                <a16:creationId xmlns:a16="http://schemas.microsoft.com/office/drawing/2014/main" id="{4316649A-8FD0-450D-AEA4-605B532DF35E}"/>
               </a:ext>
             </a:extLst>
           </p:cNvPr>
@@ -14810,7 +14907,7 @@
           <p:cNvPr id="11" name="">
             <a:extLst xmlns:a="http://schemas.openxmlformats.org/drawingml/2006/main">
               <a:ext uri="{FF2B5EF4-FFF2-40B4-BE49-F238E27FC236}">
-                <a16:creationId xmlns:a16="http://schemas.microsoft.com/office/drawing/2014/main" id="{A93C4EAC-4145-4295-835B-10753BE94BD8}"/>
+                <a16:creationId xmlns:a16="http://schemas.microsoft.com/office/drawing/2014/main" id="{1C20B3D8-F049-4D51-B60D-DC584B0D7B7E}"/>
               </a:ext>
             </a:extLst>
           </p:cNvPr>
@@ -14845,7 +14942,7 @@
           <p:cNvPr id="12" name="">
             <a:extLst xmlns:a="http://schemas.openxmlformats.org/drawingml/2006/main">
               <a:ext uri="{FF2B5EF4-FFF2-40B4-BE49-F238E27FC236}">
-                <a16:creationId xmlns:a16="http://schemas.microsoft.com/office/drawing/2014/main" id="{D6CE3C50-9ADC-4185-897E-E81168F14BD5}"/>
+                <a16:creationId xmlns:a16="http://schemas.microsoft.com/office/drawing/2014/main" id="{6CFBF833-48C3-430A-8679-02BADF72ABEF}"/>
               </a:ext>
             </a:extLst>
           </p:cNvPr>
@@ -14909,7 +15006,7 @@
           <p:cNvPr id="13" name="">
             <a:extLst xmlns:a="http://schemas.openxmlformats.org/drawingml/2006/main">
               <a:ext uri="{FF2B5EF4-FFF2-40B4-BE49-F238E27FC236}">
-                <a16:creationId xmlns:a16="http://schemas.microsoft.com/office/drawing/2014/main" id="{D291E4ED-443F-4208-9C1A-A9FB6D8CF414}"/>
+                <a16:creationId xmlns:a16="http://schemas.microsoft.com/office/drawing/2014/main" id="{4C38CBEF-D9C4-49CA-84FC-85D3CCD34297}"/>
               </a:ext>
             </a:extLst>
           </p:cNvPr>
@@ -14973,7 +15070,7 @@
           <p:cNvPr id="14" name="">
             <a:extLst xmlns:a="http://schemas.openxmlformats.org/drawingml/2006/main">
               <a:ext uri="{FF2B5EF4-FFF2-40B4-BE49-F238E27FC236}">
-                <a16:creationId xmlns:a16="http://schemas.microsoft.com/office/drawing/2014/main" id="{BDE07FBD-46CF-41AE-8B3D-7423D2A0B3C0}"/>
+                <a16:creationId xmlns:a16="http://schemas.microsoft.com/office/drawing/2014/main" id="{EE1A6B6C-2610-4142-A86B-C992AB12F3BF}"/>
               </a:ext>
             </a:extLst>
           </p:cNvPr>
@@ -15006,7 +15103,7 @@
           <p:cNvPr id="15" name="">
             <a:extLst xmlns:a="http://schemas.openxmlformats.org/drawingml/2006/main">
               <a:ext uri="{FF2B5EF4-FFF2-40B4-BE49-F238E27FC236}">
-                <a16:creationId xmlns:a16="http://schemas.microsoft.com/office/drawing/2014/main" id="{55EEF5C4-2C26-45F7-96D2-51C267F80D6C}"/>
+                <a16:creationId xmlns:a16="http://schemas.microsoft.com/office/drawing/2014/main" id="{9635AD8A-5877-4759-826D-542BBE4D42CE}"/>
               </a:ext>
             </a:extLst>
           </p:cNvPr>
@@ -15041,7 +15138,7 @@
           <p:cNvPr id="16" name="">
             <a:extLst xmlns:a="http://schemas.openxmlformats.org/drawingml/2006/main">
               <a:ext uri="{FF2B5EF4-FFF2-40B4-BE49-F238E27FC236}">
-                <a16:creationId xmlns:a16="http://schemas.microsoft.com/office/drawing/2014/main" id="{189075D0-DBD0-4511-B30F-62F82CE9D4E9}"/>
+                <a16:creationId xmlns:a16="http://schemas.microsoft.com/office/drawing/2014/main" id="{F3647BFF-A72C-466A-92B0-1D0F090C6715}"/>
               </a:ext>
             </a:extLst>
           </p:cNvPr>
@@ -15105,7 +15202,7 @@
           <p:cNvPr id="17" name="">
             <a:extLst xmlns:a="http://schemas.openxmlformats.org/drawingml/2006/main">
               <a:ext uri="{FF2B5EF4-FFF2-40B4-BE49-F238E27FC236}">
-                <a16:creationId xmlns:a16="http://schemas.microsoft.com/office/drawing/2014/main" id="{3910036C-F1B2-4553-BADF-5DAB562F57B2}"/>
+                <a16:creationId xmlns:a16="http://schemas.microsoft.com/office/drawing/2014/main" id="{715D0F11-0859-47E9-BE62-96DD4F319C88}"/>
               </a:ext>
             </a:extLst>
           </p:cNvPr>
@@ -15169,7 +15266,7 @@
           <p:cNvPr id="18" name="">
             <a:extLst xmlns:a="http://schemas.openxmlformats.org/drawingml/2006/main">
               <a:ext uri="{FF2B5EF4-FFF2-40B4-BE49-F238E27FC236}">
-                <a16:creationId xmlns:a16="http://schemas.microsoft.com/office/drawing/2014/main" id="{C321285B-4071-466A-8C1A-BE7E42826086}"/>
+                <a16:creationId xmlns:a16="http://schemas.microsoft.com/office/drawing/2014/main" id="{9E09F770-9FCE-4B21-8508-B76337CC535F}"/>
               </a:ext>
             </a:extLst>
           </p:cNvPr>
@@ -15202,7 +15299,7 @@
           <p:cNvPr id="19" name="">
             <a:extLst xmlns:a="http://schemas.openxmlformats.org/drawingml/2006/main">
               <a:ext uri="{FF2B5EF4-FFF2-40B4-BE49-F238E27FC236}">
-                <a16:creationId xmlns:a16="http://schemas.microsoft.com/office/drawing/2014/main" id="{2BD7EB36-5CF3-45E4-AD4A-BA61F1564FCB}"/>
+                <a16:creationId xmlns:a16="http://schemas.microsoft.com/office/drawing/2014/main" id="{6CE620D7-CADA-4D7F-BEA8-5B4FC5F4195E}"/>
               </a:ext>
             </a:extLst>
           </p:cNvPr>
@@ -15237,7 +15334,7 @@
           <p:cNvPr id="20" name="">
             <a:extLst xmlns:a="http://schemas.openxmlformats.org/drawingml/2006/main">
               <a:ext uri="{FF2B5EF4-FFF2-40B4-BE49-F238E27FC236}">
-                <a16:creationId xmlns:a16="http://schemas.microsoft.com/office/drawing/2014/main" id="{E90BDD3F-ABD6-4E13-B875-428179DF3AE5}"/>
+                <a16:creationId xmlns:a16="http://schemas.microsoft.com/office/drawing/2014/main" id="{59C7C3C8-6CCC-4BD6-948C-2F1B43244CFB}"/>
               </a:ext>
             </a:extLst>
           </p:cNvPr>
@@ -15301,7 +15398,7 @@
           <p:cNvPr id="21" name="">
             <a:extLst xmlns:a="http://schemas.openxmlformats.org/drawingml/2006/main">
               <a:ext uri="{FF2B5EF4-FFF2-40B4-BE49-F238E27FC236}">
-                <a16:creationId xmlns:a16="http://schemas.microsoft.com/office/drawing/2014/main" id="{010E0A84-FC8D-40F5-80FE-0DEAB6941CF8}"/>
+                <a16:creationId xmlns:a16="http://schemas.microsoft.com/office/drawing/2014/main" id="{EEDA41FF-2392-4836-93C8-34ED4D31FA6A}"/>
               </a:ext>
             </a:extLst>
           </p:cNvPr>
@@ -15365,7 +15462,7 @@
           <p:cNvPr id="22" name="">
             <a:extLst xmlns:a="http://schemas.openxmlformats.org/drawingml/2006/main">
               <a:ext uri="{FF2B5EF4-FFF2-40B4-BE49-F238E27FC236}">
-                <a16:creationId xmlns:a16="http://schemas.microsoft.com/office/drawing/2014/main" id="{0C7A2737-EAB3-4989-881D-9022A00114B1}"/>
+                <a16:creationId xmlns:a16="http://schemas.microsoft.com/office/drawing/2014/main" id="{5F7F2C0E-6057-4731-A4B9-4B1EFF38FF1D}"/>
               </a:ext>
             </a:extLst>
           </p:cNvPr>
@@ -15429,7 +15526,7 @@
           <p:cNvPr id="23" name="">
             <a:extLst xmlns:a="http://schemas.openxmlformats.org/drawingml/2006/main">
               <a:ext uri="{FF2B5EF4-FFF2-40B4-BE49-F238E27FC236}">
-                <a16:creationId xmlns:a16="http://schemas.microsoft.com/office/drawing/2014/main" id="{45778487-75CC-4FF3-A965-0D5EA5245E86}"/>
+                <a16:creationId xmlns:a16="http://schemas.microsoft.com/office/drawing/2014/main" id="{67F97819-6CA6-4AE1-B5B6-B150FFE05876}"/>
               </a:ext>
             </a:extLst>
           </p:cNvPr>
@@ -15493,7 +15590,7 @@
           <p:cNvPr id="24" name="">
             <a:extLst xmlns:a="http://schemas.openxmlformats.org/drawingml/2006/main">
               <a:ext uri="{FF2B5EF4-FFF2-40B4-BE49-F238E27FC236}">
-                <a16:creationId xmlns:a16="http://schemas.microsoft.com/office/drawing/2014/main" id="{A3BC5C2C-5A52-46D5-9E08-5A52C3C1290D}"/>
+                <a16:creationId xmlns:a16="http://schemas.microsoft.com/office/drawing/2014/main" id="{47353A60-D9C9-46F6-8880-935F5B5C3179}"/>
               </a:ext>
             </a:extLst>
           </p:cNvPr>
@@ -15526,7 +15623,7 @@
           <p:cNvPr id="25" name="">
             <a:extLst xmlns:a="http://schemas.openxmlformats.org/drawingml/2006/main">
               <a:ext uri="{FF2B5EF4-FFF2-40B4-BE49-F238E27FC236}">
-                <a16:creationId xmlns:a16="http://schemas.microsoft.com/office/drawing/2014/main" id="{C4AB8EE1-5987-4181-B5F4-0C8E35E80213}"/>
+                <a16:creationId xmlns:a16="http://schemas.microsoft.com/office/drawing/2014/main" id="{6ECBC566-F58C-4E96-8BED-4B64E54BAB99}"/>
               </a:ext>
             </a:extLst>
           </p:cNvPr>
@@ -15590,7 +15687,7 @@
           <p:cNvPr id="26" name="">
             <a:extLst xmlns:a="http://schemas.openxmlformats.org/drawingml/2006/main">
               <a:ext uri="{FF2B5EF4-FFF2-40B4-BE49-F238E27FC236}">
-                <a16:creationId xmlns:a16="http://schemas.microsoft.com/office/drawing/2014/main" id="{90C12E15-3013-4CF9-8495-2C0FC1EB35F6}"/>
+                <a16:creationId xmlns:a16="http://schemas.microsoft.com/office/drawing/2014/main" id="{BB059FD7-BA7B-46B0-821F-40E553A0C66F}"/>
               </a:ext>
             </a:extLst>
           </p:cNvPr>
@@ -15652,7 +15749,7 @@
     </p:spTree>
     <p:extLst>
       <p:ext uri="{BB962C8B-B14F-4D97-AF65-F5344CB8AC3E}">
-        <p14:creationId xmlns:p14="http://schemas.microsoft.com/office/powerpoint/2010/main" val="372256510"/>
+        <p14:creationId xmlns:p14="http://schemas.microsoft.com/office/powerpoint/2010/main" val="1357995987"/>
       </p:ext>
     </p:extLst>
   </p:cSld>
@@ -15680,7 +15777,7 @@
           <p:nvPr/>
         </p:nvPicPr>
         <p:blipFill>
-          <a:blip xmlns:r="http://schemas.openxmlformats.org/officeDocument/2006/relationships" xmlns:a="http://schemas.openxmlformats.org/drawingml/2006/main" r:embed="R9026eeb2c0dd4159"/>
+          <a:blip xmlns:r="http://schemas.openxmlformats.org/officeDocument/2006/relationships" xmlns:a="http://schemas.openxmlformats.org/drawingml/2006/main" r:embed="R36b2fc0b9eed458b"/>
           <a:srcRect xmlns:a="http://schemas.openxmlformats.org/drawingml/2006/main" l="0" t="7813" r="0" b="7813"/>
           <a:stretch xmlns:a="http://schemas.openxmlformats.org/drawingml/2006/main">
             <a:fillRect l="0" t="0" r="0" b="0"/>
@@ -15701,7 +15798,7 @@
           <p:cNvPr id="2" name="">
             <a:extLst xmlns:a="http://schemas.openxmlformats.org/drawingml/2006/main">
               <a:ext uri="{FF2B5EF4-FFF2-40B4-BE49-F238E27FC236}">
-                <a16:creationId xmlns:a16="http://schemas.microsoft.com/office/drawing/2014/main" id="{E371C177-EC43-4ECE-85D5-77EAA966FFA8}"/>
+                <a16:creationId xmlns:a16="http://schemas.microsoft.com/office/drawing/2014/main" id="{32E4096B-7273-4804-B993-75D4E3668795}"/>
               </a:ext>
             </a:extLst>
           </p:cNvPr>
@@ -15738,7 +15835,7 @@
           <p:cNvPr id="3" name="">
             <a:extLst xmlns:a="http://schemas.openxmlformats.org/drawingml/2006/main">
               <a:ext uri="{FF2B5EF4-FFF2-40B4-BE49-F238E27FC236}">
-                <a16:creationId xmlns:a16="http://schemas.microsoft.com/office/drawing/2014/main" id="{FEE66228-B2AA-470E-A77F-EB005A93D203}"/>
+                <a16:creationId xmlns:a16="http://schemas.microsoft.com/office/drawing/2014/main" id="{2F8B1AFB-2FAB-4DFA-9905-338989C29010}"/>
               </a:ext>
             </a:extLst>
           </p:cNvPr>
@@ -15775,7 +15872,7 @@
           <p:cNvPr id="4" name="">
             <a:extLst xmlns:a="http://schemas.openxmlformats.org/drawingml/2006/main">
               <a:ext uri="{FF2B5EF4-FFF2-40B4-BE49-F238E27FC236}">
-                <a16:creationId xmlns:a16="http://schemas.microsoft.com/office/drawing/2014/main" id="{8CAD362D-CA8C-43C8-A401-29F9DA20FA59}"/>
+                <a16:creationId xmlns:a16="http://schemas.microsoft.com/office/drawing/2014/main" id="{33CFE360-E07B-4E44-AE2D-5921EFA5FB66}"/>
               </a:ext>
             </a:extLst>
           </p:cNvPr>
@@ -15839,7 +15936,7 @@
           <p:cNvPr id="5" name="">
             <a:extLst xmlns:a="http://schemas.openxmlformats.org/drawingml/2006/main">
               <a:ext uri="{FF2B5EF4-FFF2-40B4-BE49-F238E27FC236}">
-                <a16:creationId xmlns:a16="http://schemas.microsoft.com/office/drawing/2014/main" id="{EC69F036-E6F9-423F-AB95-24CDEDF8E506}"/>
+                <a16:creationId xmlns:a16="http://schemas.microsoft.com/office/drawing/2014/main" id="{97CCACEE-4041-4A6A-9DF3-73F906B80862}"/>
               </a:ext>
             </a:extLst>
           </p:cNvPr>
@@ -15903,7 +16000,7 @@
           <p:cNvPr id="6" name="">
             <a:extLst xmlns:a="http://schemas.openxmlformats.org/drawingml/2006/main">
               <a:ext uri="{FF2B5EF4-FFF2-40B4-BE49-F238E27FC236}">
-                <a16:creationId xmlns:a16="http://schemas.microsoft.com/office/drawing/2014/main" id="{808DEF3E-82DF-43C7-BDB8-311A7741C602}"/>
+                <a16:creationId xmlns:a16="http://schemas.microsoft.com/office/drawing/2014/main" id="{EBCF5BF4-22DE-405C-99A2-87A1F94E5B06}"/>
               </a:ext>
             </a:extLst>
           </p:cNvPr>
@@ -15967,7 +16064,7 @@
           <p:cNvPr id="7" name="">
             <a:extLst xmlns:a="http://schemas.openxmlformats.org/drawingml/2006/main">
               <a:ext uri="{FF2B5EF4-FFF2-40B4-BE49-F238E27FC236}">
-                <a16:creationId xmlns:a16="http://schemas.microsoft.com/office/drawing/2014/main" id="{10854038-AF40-4DDC-903F-46FA1E5DDFC9}"/>
+                <a16:creationId xmlns:a16="http://schemas.microsoft.com/office/drawing/2014/main" id="{D5704550-FF88-4B3A-9F3A-D7B5E5BF0FC0}"/>
               </a:ext>
             </a:extLst>
           </p:cNvPr>
@@ -16002,7 +16099,7 @@
           <p:cNvPr id="8" name="">
             <a:extLst xmlns:a="http://schemas.openxmlformats.org/drawingml/2006/main">
               <a:ext uri="{FF2B5EF4-FFF2-40B4-BE49-F238E27FC236}">
-                <a16:creationId xmlns:a16="http://schemas.microsoft.com/office/drawing/2014/main" id="{945958DE-6649-4906-AA1D-D75173B4E5B5}"/>
+                <a16:creationId xmlns:a16="http://schemas.microsoft.com/office/drawing/2014/main" id="{682830F3-E817-4B95-B879-3136F507AEB3}"/>
               </a:ext>
             </a:extLst>
           </p:cNvPr>
@@ -16066,7 +16163,7 @@
           <p:cNvPr id="9" name="">
             <a:extLst xmlns:a="http://schemas.openxmlformats.org/drawingml/2006/main">
               <a:ext uri="{FF2B5EF4-FFF2-40B4-BE49-F238E27FC236}">
-                <a16:creationId xmlns:a16="http://schemas.microsoft.com/office/drawing/2014/main" id="{84BE24CB-F726-4F54-B8BA-3C6A11214039}"/>
+                <a16:creationId xmlns:a16="http://schemas.microsoft.com/office/drawing/2014/main" id="{68940402-F0A0-4C4D-A112-24A4FACAB786}"/>
               </a:ext>
             </a:extLst>
           </p:cNvPr>
@@ -16130,7 +16227,7 @@
           <p:cNvPr id="10" name="">
             <a:extLst xmlns:a="http://schemas.openxmlformats.org/drawingml/2006/main">
               <a:ext uri="{FF2B5EF4-FFF2-40B4-BE49-F238E27FC236}">
-                <a16:creationId xmlns:a16="http://schemas.microsoft.com/office/drawing/2014/main" id="{8385D86A-C98F-40F2-94AA-7E793AA41EC4}"/>
+                <a16:creationId xmlns:a16="http://schemas.microsoft.com/office/drawing/2014/main" id="{525059BE-45C0-41AF-B2B6-F464B775D710}"/>
               </a:ext>
             </a:extLst>
           </p:cNvPr>
@@ -16165,7 +16262,7 @@
           <p:cNvPr id="11" name="">
             <a:extLst xmlns:a="http://schemas.openxmlformats.org/drawingml/2006/main">
               <a:ext uri="{FF2B5EF4-FFF2-40B4-BE49-F238E27FC236}">
-                <a16:creationId xmlns:a16="http://schemas.microsoft.com/office/drawing/2014/main" id="{4681155C-1D64-4CBB-B498-61D48947FE08}"/>
+                <a16:creationId xmlns:a16="http://schemas.microsoft.com/office/drawing/2014/main" id="{3F3F62A9-B6DD-4E75-BA40-4C35125EB38D}"/>
               </a:ext>
             </a:extLst>
           </p:cNvPr>
@@ -16229,7 +16326,7 @@
           <p:cNvPr id="12" name="">
             <a:extLst xmlns:a="http://schemas.openxmlformats.org/drawingml/2006/main">
               <a:ext uri="{FF2B5EF4-FFF2-40B4-BE49-F238E27FC236}">
-                <a16:creationId xmlns:a16="http://schemas.microsoft.com/office/drawing/2014/main" id="{90426FFC-0F7A-4016-B02E-C323B6031886}"/>
+                <a16:creationId xmlns:a16="http://schemas.microsoft.com/office/drawing/2014/main" id="{AECB37FA-56EB-4FF8-B430-CD947AFEA468}"/>
               </a:ext>
             </a:extLst>
           </p:cNvPr>
@@ -16293,7 +16390,7 @@
           <p:cNvPr id="13" name="">
             <a:extLst xmlns:a="http://schemas.openxmlformats.org/drawingml/2006/main">
               <a:ext uri="{FF2B5EF4-FFF2-40B4-BE49-F238E27FC236}">
-                <a16:creationId xmlns:a16="http://schemas.microsoft.com/office/drawing/2014/main" id="{6C452568-52FC-4013-B529-C68D4B441763}"/>
+                <a16:creationId xmlns:a16="http://schemas.microsoft.com/office/drawing/2014/main" id="{F326121D-34B9-4FDB-B2F9-CD45BB9F2396}"/>
               </a:ext>
             </a:extLst>
           </p:cNvPr>
@@ -16328,7 +16425,7 @@
           <p:cNvPr id="14" name="">
             <a:extLst xmlns:a="http://schemas.openxmlformats.org/drawingml/2006/main">
               <a:ext uri="{FF2B5EF4-FFF2-40B4-BE49-F238E27FC236}">
-                <a16:creationId xmlns:a16="http://schemas.microsoft.com/office/drawing/2014/main" id="{2FC6B50E-FED4-46F1-8B6F-35B3B318A345}"/>
+                <a16:creationId xmlns:a16="http://schemas.microsoft.com/office/drawing/2014/main" id="{A59E513A-FB39-4856-9280-CC687EE1D449}"/>
               </a:ext>
             </a:extLst>
           </p:cNvPr>
@@ -16392,7 +16489,7 @@
           <p:cNvPr id="15" name="">
             <a:extLst xmlns:a="http://schemas.openxmlformats.org/drawingml/2006/main">
               <a:ext uri="{FF2B5EF4-FFF2-40B4-BE49-F238E27FC236}">
-                <a16:creationId xmlns:a16="http://schemas.microsoft.com/office/drawing/2014/main" id="{8358AF04-7045-4D29-8951-B2B5DEFE4656}"/>
+                <a16:creationId xmlns:a16="http://schemas.microsoft.com/office/drawing/2014/main" id="{77065263-9E36-4AE4-8078-4F9107A3AE7F}"/>
               </a:ext>
             </a:extLst>
           </p:cNvPr>
@@ -16456,7 +16553,7 @@
           <p:cNvPr id="16" name="">
             <a:extLst xmlns:a="http://schemas.openxmlformats.org/drawingml/2006/main">
               <a:ext uri="{FF2B5EF4-FFF2-40B4-BE49-F238E27FC236}">
-                <a16:creationId xmlns:a16="http://schemas.microsoft.com/office/drawing/2014/main" id="{89BBFD18-61B1-478E-94C0-7F7D4139E1A4}"/>
+                <a16:creationId xmlns:a16="http://schemas.microsoft.com/office/drawing/2014/main" id="{11B17AA8-598A-4DB7-B22A-9CAEF5585D38}"/>
               </a:ext>
             </a:extLst>
           </p:cNvPr>
@@ -16491,7 +16588,7 @@
           <p:cNvPr id="17" name="">
             <a:extLst xmlns:a="http://schemas.openxmlformats.org/drawingml/2006/main">
               <a:ext uri="{FF2B5EF4-FFF2-40B4-BE49-F238E27FC236}">
-                <a16:creationId xmlns:a16="http://schemas.microsoft.com/office/drawing/2014/main" id="{F0B44563-635D-4639-B6A4-7B89FE4C1ABB}"/>
+                <a16:creationId xmlns:a16="http://schemas.microsoft.com/office/drawing/2014/main" id="{7FEA5FC8-67E3-4564-A86C-D73413E35A2B}"/>
               </a:ext>
             </a:extLst>
           </p:cNvPr>
@@ -16555,7 +16652,7 @@
           <p:cNvPr id="18" name="">
             <a:extLst xmlns:a="http://schemas.openxmlformats.org/drawingml/2006/main">
               <a:ext uri="{FF2B5EF4-FFF2-40B4-BE49-F238E27FC236}">
-                <a16:creationId xmlns:a16="http://schemas.microsoft.com/office/drawing/2014/main" id="{D2D064F1-C4BC-4159-97DD-8E8D93711D67}"/>
+                <a16:creationId xmlns:a16="http://schemas.microsoft.com/office/drawing/2014/main" id="{8A3307A3-3B47-4AAA-91BE-C7D327A896B9}"/>
               </a:ext>
             </a:extLst>
           </p:cNvPr>
@@ -16619,7 +16716,7 @@
           <p:cNvPr id="19" name="">
             <a:extLst xmlns:a="http://schemas.openxmlformats.org/drawingml/2006/main">
               <a:ext uri="{FF2B5EF4-FFF2-40B4-BE49-F238E27FC236}">
-                <a16:creationId xmlns:a16="http://schemas.microsoft.com/office/drawing/2014/main" id="{B3052A29-66E6-49C4-A33C-E9BD2A5C989E}"/>
+                <a16:creationId xmlns:a16="http://schemas.microsoft.com/office/drawing/2014/main" id="{7644E13A-5FA8-4E08-A1FA-C84FAEAD7776}"/>
               </a:ext>
             </a:extLst>
           </p:cNvPr>
@@ -16654,7 +16751,7 @@
           <p:cNvPr id="20" name="">
             <a:extLst xmlns:a="http://schemas.openxmlformats.org/drawingml/2006/main">
               <a:ext uri="{FF2B5EF4-FFF2-40B4-BE49-F238E27FC236}">
-                <a16:creationId xmlns:a16="http://schemas.microsoft.com/office/drawing/2014/main" id="{23163A36-B9B9-4CC0-8BBC-B2430E41529C}"/>
+                <a16:creationId xmlns:a16="http://schemas.microsoft.com/office/drawing/2014/main" id="{4FEEAA2F-A746-411A-B70F-FF5344ADD1FE}"/>
               </a:ext>
             </a:extLst>
           </p:cNvPr>
@@ -16718,7 +16815,7 @@
           <p:cNvPr id="21" name="">
             <a:extLst xmlns:a="http://schemas.openxmlformats.org/drawingml/2006/main">
               <a:ext uri="{FF2B5EF4-FFF2-40B4-BE49-F238E27FC236}">
-                <a16:creationId xmlns:a16="http://schemas.microsoft.com/office/drawing/2014/main" id="{CA097F02-0201-4118-BC3C-E9E1DBC8AC23}"/>
+                <a16:creationId xmlns:a16="http://schemas.microsoft.com/office/drawing/2014/main" id="{3D77B8A8-B2C8-46D9-B95B-D23C613B52FD}"/>
               </a:ext>
             </a:extLst>
           </p:cNvPr>
@@ -16782,7 +16879,7 @@
           <p:cNvPr id="22" name="">
             <a:extLst xmlns:a="http://schemas.openxmlformats.org/drawingml/2006/main">
               <a:ext uri="{FF2B5EF4-FFF2-40B4-BE49-F238E27FC236}">
-                <a16:creationId xmlns:a16="http://schemas.microsoft.com/office/drawing/2014/main" id="{9B69876D-086A-4656-AE69-349D19D7FD74}"/>
+                <a16:creationId xmlns:a16="http://schemas.microsoft.com/office/drawing/2014/main" id="{118E5C0D-9BD5-4980-AA35-9E5ED0421222}"/>
               </a:ext>
             </a:extLst>
           </p:cNvPr>
@@ -16815,7 +16912,7 @@
           <p:cNvPr id="23" name="">
             <a:extLst xmlns:a="http://schemas.openxmlformats.org/drawingml/2006/main">
               <a:ext uri="{FF2B5EF4-FFF2-40B4-BE49-F238E27FC236}">
-                <a16:creationId xmlns:a16="http://schemas.microsoft.com/office/drawing/2014/main" id="{C378BFED-9287-41A1-9C1D-FF203F3D3C7A}"/>
+                <a16:creationId xmlns:a16="http://schemas.microsoft.com/office/drawing/2014/main" id="{5E974D34-93D1-4921-9E6D-708C09D16466}"/>
               </a:ext>
             </a:extLst>
           </p:cNvPr>
@@ -16850,7 +16947,7 @@
           <p:cNvPr id="24" name="">
             <a:extLst xmlns:a="http://schemas.openxmlformats.org/drawingml/2006/main">
               <a:ext uri="{FF2B5EF4-FFF2-40B4-BE49-F238E27FC236}">
-                <a16:creationId xmlns:a16="http://schemas.microsoft.com/office/drawing/2014/main" id="{6EE6EB44-6B16-4312-AD3B-9B4807E87CCC}"/>
+                <a16:creationId xmlns:a16="http://schemas.microsoft.com/office/drawing/2014/main" id="{90BF39C8-29DE-43A7-87DC-C4AD796CC52F}"/>
               </a:ext>
             </a:extLst>
           </p:cNvPr>
@@ -16914,7 +17011,7 @@
           <p:cNvPr id="25" name="">
             <a:extLst xmlns:a="http://schemas.openxmlformats.org/drawingml/2006/main">
               <a:ext uri="{FF2B5EF4-FFF2-40B4-BE49-F238E27FC236}">
-                <a16:creationId xmlns:a16="http://schemas.microsoft.com/office/drawing/2014/main" id="{4415340E-E077-4423-AB62-A92ED997CABF}"/>
+                <a16:creationId xmlns:a16="http://schemas.microsoft.com/office/drawing/2014/main" id="{9B9D4261-74C9-48A9-841F-8D5AF4FFD819}"/>
               </a:ext>
             </a:extLst>
           </p:cNvPr>
@@ -16978,7 +17075,7 @@
           <p:cNvPr id="26" name="">
             <a:extLst xmlns:a="http://schemas.openxmlformats.org/drawingml/2006/main">
               <a:ext uri="{FF2B5EF4-FFF2-40B4-BE49-F238E27FC236}">
-                <a16:creationId xmlns:a16="http://schemas.microsoft.com/office/drawing/2014/main" id="{0E1F9758-BF9F-4A46-BA09-87E51E3B20C6}"/>
+                <a16:creationId xmlns:a16="http://schemas.microsoft.com/office/drawing/2014/main" id="{92F0F27B-6C44-4E76-AD85-36CD3DE38560}"/>
               </a:ext>
             </a:extLst>
           </p:cNvPr>
@@ -17011,7 +17108,7 @@
           <p:cNvPr id="27" name="">
             <a:extLst xmlns:a="http://schemas.openxmlformats.org/drawingml/2006/main">
               <a:ext uri="{FF2B5EF4-FFF2-40B4-BE49-F238E27FC236}">
-                <a16:creationId xmlns:a16="http://schemas.microsoft.com/office/drawing/2014/main" id="{2757B14F-2643-4458-A95E-7B2E865EFB73}"/>
+                <a16:creationId xmlns:a16="http://schemas.microsoft.com/office/drawing/2014/main" id="{EF79BE46-474C-4875-98FA-5198C43D89B2}"/>
               </a:ext>
             </a:extLst>
           </p:cNvPr>
@@ -17046,7 +17143,7 @@
           <p:cNvPr id="28" name="">
             <a:extLst xmlns:a="http://schemas.openxmlformats.org/drawingml/2006/main">
               <a:ext uri="{FF2B5EF4-FFF2-40B4-BE49-F238E27FC236}">
-                <a16:creationId xmlns:a16="http://schemas.microsoft.com/office/drawing/2014/main" id="{BD63C5D7-0535-45D8-8FE3-0EFBAEB255BF}"/>
+                <a16:creationId xmlns:a16="http://schemas.microsoft.com/office/drawing/2014/main" id="{F2761F40-5EC8-4F07-A4E0-33FF0C3D7174}"/>
               </a:ext>
             </a:extLst>
           </p:cNvPr>
@@ -17110,7 +17207,7 @@
           <p:cNvPr id="29" name="">
             <a:extLst xmlns:a="http://schemas.openxmlformats.org/drawingml/2006/main">
               <a:ext uri="{FF2B5EF4-FFF2-40B4-BE49-F238E27FC236}">
-                <a16:creationId xmlns:a16="http://schemas.microsoft.com/office/drawing/2014/main" id="{0E8155AA-2C76-4981-B3D9-140082911D50}"/>
+                <a16:creationId xmlns:a16="http://schemas.microsoft.com/office/drawing/2014/main" id="{64C84509-699B-4215-934C-E8020DD2693B}"/>
               </a:ext>
             </a:extLst>
           </p:cNvPr>
@@ -17174,7 +17271,7 @@
           <p:cNvPr id="30" name="">
             <a:extLst xmlns:a="http://schemas.openxmlformats.org/drawingml/2006/main">
               <a:ext uri="{FF2B5EF4-FFF2-40B4-BE49-F238E27FC236}">
-                <a16:creationId xmlns:a16="http://schemas.microsoft.com/office/drawing/2014/main" id="{7C51492E-B5DD-49F6-A0A5-2FD07FEF5DAA}"/>
+                <a16:creationId xmlns:a16="http://schemas.microsoft.com/office/drawing/2014/main" id="{0D48E27C-0D20-48B9-9671-7FADEAC1304F}"/>
               </a:ext>
             </a:extLst>
           </p:cNvPr>
@@ -17207,7 +17304,7 @@
           <p:cNvPr id="31" name="">
             <a:extLst xmlns:a="http://schemas.openxmlformats.org/drawingml/2006/main">
               <a:ext uri="{FF2B5EF4-FFF2-40B4-BE49-F238E27FC236}">
-                <a16:creationId xmlns:a16="http://schemas.microsoft.com/office/drawing/2014/main" id="{34A8848D-6E1C-4384-87E6-DBDD1479E115}"/>
+                <a16:creationId xmlns:a16="http://schemas.microsoft.com/office/drawing/2014/main" id="{D63357F7-5291-4EC5-A3F8-C8699D33094E}"/>
               </a:ext>
             </a:extLst>
           </p:cNvPr>
@@ -17242,7 +17339,7 @@
           <p:cNvPr id="32" name="">
             <a:extLst xmlns:a="http://schemas.openxmlformats.org/drawingml/2006/main">
               <a:ext uri="{FF2B5EF4-FFF2-40B4-BE49-F238E27FC236}">
-                <a16:creationId xmlns:a16="http://schemas.microsoft.com/office/drawing/2014/main" id="{A8B287AD-1B23-46FB-BE6A-3EF49B5994A5}"/>
+                <a16:creationId xmlns:a16="http://schemas.microsoft.com/office/drawing/2014/main" id="{C542A06E-8DF2-4328-BD77-2079D2C41566}"/>
               </a:ext>
             </a:extLst>
           </p:cNvPr>
@@ -17306,7 +17403,7 @@
           <p:cNvPr id="33" name="">
             <a:extLst xmlns:a="http://schemas.openxmlformats.org/drawingml/2006/main">
               <a:ext uri="{FF2B5EF4-FFF2-40B4-BE49-F238E27FC236}">
-                <a16:creationId xmlns:a16="http://schemas.microsoft.com/office/drawing/2014/main" id="{606E5470-DF39-4C2B-8186-09191866F20C}"/>
+                <a16:creationId xmlns:a16="http://schemas.microsoft.com/office/drawing/2014/main" id="{F35C61FF-0FFC-4278-A4CC-B93F55DD938A}"/>
               </a:ext>
             </a:extLst>
           </p:cNvPr>
@@ -17370,7 +17467,7 @@
           <p:cNvPr id="34" name="">
             <a:extLst xmlns:a="http://schemas.openxmlformats.org/drawingml/2006/main">
               <a:ext uri="{FF2B5EF4-FFF2-40B4-BE49-F238E27FC236}">
-                <a16:creationId xmlns:a16="http://schemas.microsoft.com/office/drawing/2014/main" id="{C21FB052-64A7-49CA-8568-9F828913CAC3}"/>
+                <a16:creationId xmlns:a16="http://schemas.microsoft.com/office/drawing/2014/main" id="{6FAC222D-658A-4A8F-8C3E-DA8D5CC15EAC}"/>
               </a:ext>
             </a:extLst>
           </p:cNvPr>
@@ -17434,7 +17531,7 @@
           <p:cNvPr id="35" name="">
             <a:extLst xmlns:a="http://schemas.openxmlformats.org/drawingml/2006/main">
               <a:ext uri="{FF2B5EF4-FFF2-40B4-BE49-F238E27FC236}">
-                <a16:creationId xmlns:a16="http://schemas.microsoft.com/office/drawing/2014/main" id="{AF515FB4-59E8-42D6-8F67-922455B574C1}"/>
+                <a16:creationId xmlns:a16="http://schemas.microsoft.com/office/drawing/2014/main" id="{9274685E-1B5A-47F2-9B4F-4E1B86675F5A}"/>
               </a:ext>
             </a:extLst>
           </p:cNvPr>
@@ -17467,7 +17564,7 @@
           <p:cNvPr id="36" name="">
             <a:extLst xmlns:a="http://schemas.openxmlformats.org/drawingml/2006/main">
               <a:ext uri="{FF2B5EF4-FFF2-40B4-BE49-F238E27FC236}">
-                <a16:creationId xmlns:a16="http://schemas.microsoft.com/office/drawing/2014/main" id="{3F40F567-27FF-4FF5-B55A-B3AFBDEF49D2}"/>
+                <a16:creationId xmlns:a16="http://schemas.microsoft.com/office/drawing/2014/main" id="{9516DA5D-AED7-4FB3-91C6-8D1BCC0629BE}"/>
               </a:ext>
             </a:extLst>
           </p:cNvPr>
@@ -17531,7 +17628,7 @@
           <p:cNvPr id="37" name="">
             <a:extLst xmlns:a="http://schemas.openxmlformats.org/drawingml/2006/main">
               <a:ext uri="{FF2B5EF4-FFF2-40B4-BE49-F238E27FC236}">
-                <a16:creationId xmlns:a16="http://schemas.microsoft.com/office/drawing/2014/main" id="{7D750B65-686C-49C9-9E9E-9864A78FFE9B}"/>
+                <a16:creationId xmlns:a16="http://schemas.microsoft.com/office/drawing/2014/main" id="{E0C88837-62C9-4DA3-A6B2-2086A40B62AB}"/>
               </a:ext>
             </a:extLst>
           </p:cNvPr>
@@ -17593,7 +17690,7 @@
     </p:spTree>
     <p:extLst>
       <p:ext uri="{BB962C8B-B14F-4D97-AF65-F5344CB8AC3E}">
-        <p14:creationId xmlns:p14="http://schemas.microsoft.com/office/powerpoint/2010/main" val="329592747"/>
+        <p14:creationId xmlns:p14="http://schemas.microsoft.com/office/powerpoint/2010/main" val="558550661"/>
       </p:ext>
     </p:extLst>
   </p:cSld>

--- a/assets/investor-deck/Tecnotitan-Investor-Deck-KO.pptx
+++ b/assets/investor-deck/Tecnotitan-Investor-Deck-KO.pptx
@@ -2,24 +2,24 @@
 <file path=ppt/presentation.xml><?xml version="1.0" encoding="utf-8"?>
 <p:presentation xmlns:p="http://schemas.openxmlformats.org/presentationml/2006/main">
   <p:sldMasterIdLst>
-    <p:sldMasterId xmlns:r="http://schemas.openxmlformats.org/officeDocument/2006/relationships" id="2147483648" r:id="R57194d2c74b14d2c"/>
+    <p:sldMasterId xmlns:r="http://schemas.openxmlformats.org/officeDocument/2006/relationships" id="2147483648" r:id="Rd55cb760dbc648e2"/>
   </p:sldMasterIdLst>
   <p:notesMasterIdLst>
-    <p:notesMasterId xmlns:r="http://schemas.openxmlformats.org/officeDocument/2006/relationships" r:id="R382de55a28fc4637"/>
+    <p:notesMasterId xmlns:r="http://schemas.openxmlformats.org/officeDocument/2006/relationships" r:id="R06d9b5dfcba841d7"/>
   </p:notesMasterIdLst>
   <p:sldIdLst>
-    <p:sldId xmlns:r="http://schemas.openxmlformats.org/officeDocument/2006/relationships" id="256" r:id="Rbda48e98b8274edd"/>
-    <p:sldId xmlns:r="http://schemas.openxmlformats.org/officeDocument/2006/relationships" id="257" r:id="Rcb022141d8484572"/>
-    <p:sldId xmlns:r="http://schemas.openxmlformats.org/officeDocument/2006/relationships" id="258" r:id="Rfe0fc431e6264a77"/>
-    <p:sldId xmlns:r="http://schemas.openxmlformats.org/officeDocument/2006/relationships" id="259" r:id="R7779df00ab8e4d5d"/>
-    <p:sldId xmlns:r="http://schemas.openxmlformats.org/officeDocument/2006/relationships" id="260" r:id="R527a5b8dec6e4bd3"/>
-    <p:sldId xmlns:r="http://schemas.openxmlformats.org/officeDocument/2006/relationships" id="261" r:id="Rca5f8b0c500c4d1a"/>
-    <p:sldId xmlns:r="http://schemas.openxmlformats.org/officeDocument/2006/relationships" id="262" r:id="R739abc7e13e14c91"/>
-    <p:sldId xmlns:r="http://schemas.openxmlformats.org/officeDocument/2006/relationships" id="263" r:id="R9bfdca5f6bd54429"/>
-    <p:sldId xmlns:r="http://schemas.openxmlformats.org/officeDocument/2006/relationships" id="264" r:id="Rb49bc0eec67248dc"/>
-    <p:sldId xmlns:r="http://schemas.openxmlformats.org/officeDocument/2006/relationships" id="265" r:id="R15bd298a0647416d"/>
-    <p:sldId xmlns:r="http://schemas.openxmlformats.org/officeDocument/2006/relationships" id="266" r:id="R5b0e57856e1c4592"/>
-    <p:sldId xmlns:r="http://schemas.openxmlformats.org/officeDocument/2006/relationships" id="267" r:id="R6115c25de6e24548"/>
+    <p:sldId xmlns:r="http://schemas.openxmlformats.org/officeDocument/2006/relationships" id="256" r:id="R8ca45c87208c4b97"/>
+    <p:sldId xmlns:r="http://schemas.openxmlformats.org/officeDocument/2006/relationships" id="257" r:id="R2cb61d20a59f4585"/>
+    <p:sldId xmlns:r="http://schemas.openxmlformats.org/officeDocument/2006/relationships" id="258" r:id="R353a6b1fd01e4d4f"/>
+    <p:sldId xmlns:r="http://schemas.openxmlformats.org/officeDocument/2006/relationships" id="259" r:id="R99032bf259c94174"/>
+    <p:sldId xmlns:r="http://schemas.openxmlformats.org/officeDocument/2006/relationships" id="260" r:id="R14462e888d384874"/>
+    <p:sldId xmlns:r="http://schemas.openxmlformats.org/officeDocument/2006/relationships" id="261" r:id="Rfd5da74e74034fb2"/>
+    <p:sldId xmlns:r="http://schemas.openxmlformats.org/officeDocument/2006/relationships" id="262" r:id="R8cb05c207eff461d"/>
+    <p:sldId xmlns:r="http://schemas.openxmlformats.org/officeDocument/2006/relationships" id="263" r:id="R11df38101f424c1f"/>
+    <p:sldId xmlns:r="http://schemas.openxmlformats.org/officeDocument/2006/relationships" id="264" r:id="Rdc7183521a1847e0"/>
+    <p:sldId xmlns:r="http://schemas.openxmlformats.org/officeDocument/2006/relationships" id="265" r:id="R27efa41464f847a0"/>
+    <p:sldId xmlns:r="http://schemas.openxmlformats.org/officeDocument/2006/relationships" id="266" r:id="Rf2ebf3e966314051"/>
+    <p:sldId xmlns:r="http://schemas.openxmlformats.org/officeDocument/2006/relationships" id="267" r:id="Raebf7905227c4ed0"/>
   </p:sldIdLst>
   <p:sldSz cx="12192000" cy="6858000"/>
   <p:notesSz cx="6858000" cy="9144000"/>
@@ -1292,7 +1292,7 @@
   </p:cSld>
   <p:clrMap bg1="lt1" tx1="dk1" bg2="lt2" tx2="dk2" accent1="accent1" accent2="accent2" accent3="accent3" accent4="accent4" accent5="accent5" accent6="accent6" hlink="hlink" folHlink="folHlink"/>
   <p:sldLayoutIdLst>
-    <p:sldLayoutId xmlns:r="http://schemas.openxmlformats.org/officeDocument/2006/relationships" id="2147483649" r:id="R87aa025d33cc4798"/>
+    <p:sldLayoutId xmlns:r="http://schemas.openxmlformats.org/officeDocument/2006/relationships" id="2147483649" r:id="R7e57a49a29564890"/>
   </p:sldLayoutIdLst>
   <p:txStyles>
     <p:titleStyle>
@@ -1794,7 +1794,7 @@
           <p:nvPr/>
         </p:nvPicPr>
         <p:blipFill>
-          <a:blip xmlns:r="http://schemas.openxmlformats.org/officeDocument/2006/relationships" xmlns:a="http://schemas.openxmlformats.org/drawingml/2006/main" r:embed="Re781060f9c6547d5"/>
+          <a:blip xmlns:r="http://schemas.openxmlformats.org/officeDocument/2006/relationships" xmlns:a="http://schemas.openxmlformats.org/drawingml/2006/main" r:embed="R48e64bf7d8c64ee7"/>
           <a:srcRect xmlns:a="http://schemas.openxmlformats.org/drawingml/2006/main" l="0" t="7813" r="0" b="7813"/>
           <a:stretch xmlns:a="http://schemas.openxmlformats.org/drawingml/2006/main">
             <a:fillRect l="0" t="0" r="0" b="0"/>
@@ -1815,7 +1815,7 @@
           <p:cNvPr id="2" name="">
             <a:extLst xmlns:a="http://schemas.openxmlformats.org/drawingml/2006/main">
               <a:ext uri="{FF2B5EF4-FFF2-40B4-BE49-F238E27FC236}">
-                <a16:creationId xmlns:a16="http://schemas.microsoft.com/office/drawing/2014/main" id="{C1F1040F-6B93-4A38-AC1D-CB15FB9DA4E5}"/>
+                <a16:creationId xmlns:a16="http://schemas.microsoft.com/office/drawing/2014/main" id="{1413B95C-CB2E-4E93-9589-16F43BE87D9F}"/>
               </a:ext>
             </a:extLst>
           </p:cNvPr>
@@ -1852,7 +1852,7 @@
           <p:cNvPr id="3" name="">
             <a:extLst xmlns:a="http://schemas.openxmlformats.org/drawingml/2006/main">
               <a:ext uri="{FF2B5EF4-FFF2-40B4-BE49-F238E27FC236}">
-                <a16:creationId xmlns:a16="http://schemas.microsoft.com/office/drawing/2014/main" id="{DAA46EF3-6A90-499C-8A10-0346F902C579}"/>
+                <a16:creationId xmlns:a16="http://schemas.microsoft.com/office/drawing/2014/main" id="{671394A8-8945-4321-9338-21DBEE8B8990}"/>
               </a:ext>
             </a:extLst>
           </p:cNvPr>
@@ -1889,7 +1889,7 @@
           <p:cNvPr id="4" name="">
             <a:extLst xmlns:a="http://schemas.openxmlformats.org/drawingml/2006/main">
               <a:ext uri="{FF2B5EF4-FFF2-40B4-BE49-F238E27FC236}">
-                <a16:creationId xmlns:a16="http://schemas.microsoft.com/office/drawing/2014/main" id="{E7341719-5252-44EE-9521-C3476DCE15A6}"/>
+                <a16:creationId xmlns:a16="http://schemas.microsoft.com/office/drawing/2014/main" id="{2C178320-620C-4EEB-A6EF-C152741082B3}"/>
               </a:ext>
             </a:extLst>
           </p:cNvPr>
@@ -1953,7 +1953,7 @@
           <p:cNvPr id="5" name="">
             <a:extLst xmlns:a="http://schemas.openxmlformats.org/drawingml/2006/main">
               <a:ext uri="{FF2B5EF4-FFF2-40B4-BE49-F238E27FC236}">
-                <a16:creationId xmlns:a16="http://schemas.microsoft.com/office/drawing/2014/main" id="{8F7B46D7-52BA-4296-A843-6DB783EED748}"/>
+                <a16:creationId xmlns:a16="http://schemas.microsoft.com/office/drawing/2014/main" id="{DF94A2CF-0DBA-4E79-8CF4-DAFFDD9C0E80}"/>
               </a:ext>
             </a:extLst>
           </p:cNvPr>
@@ -2017,7 +2017,7 @@
           <p:cNvPr id="6" name="">
             <a:extLst xmlns:a="http://schemas.openxmlformats.org/drawingml/2006/main">
               <a:ext uri="{FF2B5EF4-FFF2-40B4-BE49-F238E27FC236}">
-                <a16:creationId xmlns:a16="http://schemas.microsoft.com/office/drawing/2014/main" id="{D096429B-EF73-4FB5-88EA-E9D8986636AC}"/>
+                <a16:creationId xmlns:a16="http://schemas.microsoft.com/office/drawing/2014/main" id="{9CAE6CC1-3AB8-421E-9FE2-ABDF4B079DBB}"/>
               </a:ext>
             </a:extLst>
           </p:cNvPr>
@@ -2050,7 +2050,7 @@
           <p:cNvPr id="7" name="">
             <a:extLst xmlns:a="http://schemas.openxmlformats.org/drawingml/2006/main">
               <a:ext uri="{FF2B5EF4-FFF2-40B4-BE49-F238E27FC236}">
-                <a16:creationId xmlns:a16="http://schemas.microsoft.com/office/drawing/2014/main" id="{9C0D5E9B-94A3-4FD6-A554-AA6686CF67E1}"/>
+                <a16:creationId xmlns:a16="http://schemas.microsoft.com/office/drawing/2014/main" id="{CCCB6924-16A1-4007-AA94-7E9F16419D9F}"/>
               </a:ext>
             </a:extLst>
           </p:cNvPr>
@@ -2114,7 +2114,7 @@
           <p:cNvPr id="8" name="">
             <a:extLst xmlns:a="http://schemas.openxmlformats.org/drawingml/2006/main">
               <a:ext uri="{FF2B5EF4-FFF2-40B4-BE49-F238E27FC236}">
-                <a16:creationId xmlns:a16="http://schemas.microsoft.com/office/drawing/2014/main" id="{80C1F4FA-C7DE-44E3-BEA9-45AC78E8D130}"/>
+                <a16:creationId xmlns:a16="http://schemas.microsoft.com/office/drawing/2014/main" id="{FD28E349-B31C-4153-95CA-B770BDC6D440}"/>
               </a:ext>
             </a:extLst>
           </p:cNvPr>
@@ -2178,7 +2178,7 @@
           <p:cNvPr id="9" name="">
             <a:extLst xmlns:a="http://schemas.openxmlformats.org/drawingml/2006/main">
               <a:ext uri="{FF2B5EF4-FFF2-40B4-BE49-F238E27FC236}">
-                <a16:creationId xmlns:a16="http://schemas.microsoft.com/office/drawing/2014/main" id="{AA6ACDC6-ADB7-49BB-934F-86FC2E3E5010}"/>
+                <a16:creationId xmlns:a16="http://schemas.microsoft.com/office/drawing/2014/main" id="{4C60A72D-2773-46B1-B25C-68DE6D83D5D4}"/>
               </a:ext>
             </a:extLst>
           </p:cNvPr>
@@ -2213,7 +2213,7 @@
           <p:cNvPr id="10" name="">
             <a:extLst xmlns:a="http://schemas.openxmlformats.org/drawingml/2006/main">
               <a:ext uri="{FF2B5EF4-FFF2-40B4-BE49-F238E27FC236}">
-                <a16:creationId xmlns:a16="http://schemas.microsoft.com/office/drawing/2014/main" id="{1D24086B-9227-4118-9D5D-AE6296551443}"/>
+                <a16:creationId xmlns:a16="http://schemas.microsoft.com/office/drawing/2014/main" id="{0A37532E-8F93-4395-8E70-C8A34AD4E59D}"/>
               </a:ext>
             </a:extLst>
           </p:cNvPr>
@@ -2277,7 +2277,7 @@
           <p:cNvPr id="11" name="">
             <a:extLst xmlns:a="http://schemas.openxmlformats.org/drawingml/2006/main">
               <a:ext uri="{FF2B5EF4-FFF2-40B4-BE49-F238E27FC236}">
-                <a16:creationId xmlns:a16="http://schemas.microsoft.com/office/drawing/2014/main" id="{AF4B0665-DA9C-42F5-8A9C-BD7250403DDC}"/>
+                <a16:creationId xmlns:a16="http://schemas.microsoft.com/office/drawing/2014/main" id="{D73C1254-9067-4032-BD32-BE1889A62ED6}"/>
               </a:ext>
             </a:extLst>
           </p:cNvPr>
@@ -2312,7 +2312,7 @@
           <p:cNvPr id="12" name="">
             <a:extLst xmlns:a="http://schemas.openxmlformats.org/drawingml/2006/main">
               <a:ext uri="{FF2B5EF4-FFF2-40B4-BE49-F238E27FC236}">
-                <a16:creationId xmlns:a16="http://schemas.microsoft.com/office/drawing/2014/main" id="{1D01634C-CFCA-4DD8-85FB-DDFFAF9F1ECA}"/>
+                <a16:creationId xmlns:a16="http://schemas.microsoft.com/office/drawing/2014/main" id="{037CDE2A-869B-4DDE-8B71-AEB11D1E0663}"/>
               </a:ext>
             </a:extLst>
           </p:cNvPr>
@@ -2376,7 +2376,7 @@
           <p:cNvPr id="13" name="">
             <a:extLst xmlns:a="http://schemas.openxmlformats.org/drawingml/2006/main">
               <a:ext uri="{FF2B5EF4-FFF2-40B4-BE49-F238E27FC236}">
-                <a16:creationId xmlns:a16="http://schemas.microsoft.com/office/drawing/2014/main" id="{672F298F-17E9-4DD8-871B-891AB9420609}"/>
+                <a16:creationId xmlns:a16="http://schemas.microsoft.com/office/drawing/2014/main" id="{EB938B11-C0AD-4478-B5AB-6D1606E2237F}"/>
               </a:ext>
             </a:extLst>
           </p:cNvPr>
@@ -2411,7 +2411,7 @@
           <p:cNvPr id="14" name="">
             <a:extLst xmlns:a="http://schemas.openxmlformats.org/drawingml/2006/main">
               <a:ext uri="{FF2B5EF4-FFF2-40B4-BE49-F238E27FC236}">
-                <a16:creationId xmlns:a16="http://schemas.microsoft.com/office/drawing/2014/main" id="{97DDFD91-DC42-4839-A89F-6DAE86B082D5}"/>
+                <a16:creationId xmlns:a16="http://schemas.microsoft.com/office/drawing/2014/main" id="{3FF6046D-58F1-4664-BF3A-31389E7FEDA0}"/>
               </a:ext>
             </a:extLst>
           </p:cNvPr>
@@ -2475,7 +2475,7 @@
           <p:cNvPr id="15" name="">
             <a:extLst xmlns:a="http://schemas.openxmlformats.org/drawingml/2006/main">
               <a:ext uri="{FF2B5EF4-FFF2-40B4-BE49-F238E27FC236}">
-                <a16:creationId xmlns:a16="http://schemas.microsoft.com/office/drawing/2014/main" id="{15FBA796-F7B6-4FAC-84B0-706F9DE65B28}"/>
+                <a16:creationId xmlns:a16="http://schemas.microsoft.com/office/drawing/2014/main" id="{00B50041-2ABE-4C32-B2E0-00989CC5BB2B}"/>
               </a:ext>
             </a:extLst>
           </p:cNvPr>
@@ -2529,7 +2529,7 @@
                 <a:ea typeface="Aptos"/>
                 <a:cs typeface="Aptos"/>
               </a:rPr>
-              <a:t>6개 제품 라인</a:t>
+              <a:t>US$500K pre-seed</a:t>
             </a:r>
           </a:p>
         </p:txBody>
@@ -2539,7 +2539,7 @@
           <p:cNvPr id="16" name="">
             <a:extLst xmlns:a="http://schemas.openxmlformats.org/drawingml/2006/main">
               <a:ext uri="{FF2B5EF4-FFF2-40B4-BE49-F238E27FC236}">
-                <a16:creationId xmlns:a16="http://schemas.microsoft.com/office/drawing/2014/main" id="{EEFE7257-3DD7-4866-9673-F34544B85CB8}"/>
+                <a16:creationId xmlns:a16="http://schemas.microsoft.com/office/drawing/2014/main" id="{79B61FE2-3563-4181-A5E0-5EDC385D028A}"/>
               </a:ext>
             </a:extLst>
           </p:cNvPr>
@@ -2574,7 +2574,7 @@
           <p:cNvPr id="17" name="">
             <a:extLst xmlns:a="http://schemas.openxmlformats.org/drawingml/2006/main">
               <a:ext uri="{FF2B5EF4-FFF2-40B4-BE49-F238E27FC236}">
-                <a16:creationId xmlns:a16="http://schemas.microsoft.com/office/drawing/2014/main" id="{97B02433-02D7-4D27-8A7B-82D9EE0C3106}"/>
+                <a16:creationId xmlns:a16="http://schemas.microsoft.com/office/drawing/2014/main" id="{C59E6A0A-AC50-4B14-ACEF-7C4D031C4EDD}"/>
               </a:ext>
             </a:extLst>
           </p:cNvPr>
@@ -2638,7 +2638,7 @@
           <p:cNvPr id="18" name="">
             <a:extLst xmlns:a="http://schemas.openxmlformats.org/drawingml/2006/main">
               <a:ext uri="{FF2B5EF4-FFF2-40B4-BE49-F238E27FC236}">
-                <a16:creationId xmlns:a16="http://schemas.microsoft.com/office/drawing/2014/main" id="{46C14E76-BED6-4765-AFC6-78AF0ABFB726}"/>
+                <a16:creationId xmlns:a16="http://schemas.microsoft.com/office/drawing/2014/main" id="{4959177E-95BD-4D05-AC80-469DBD8589D2}"/>
               </a:ext>
             </a:extLst>
           </p:cNvPr>
@@ -2692,7 +2692,7 @@
                 <a:ea typeface="Aptos"/>
                 <a:cs typeface="Aptos"/>
               </a:rPr>
-              <a:t>5개 기술 부문</a:t>
+              <a:t>18개월 runway</a:t>
             </a:r>
           </a:p>
         </p:txBody>
@@ -2702,7 +2702,7 @@
           <p:cNvPr id="19" name="">
             <a:extLst xmlns:a="http://schemas.openxmlformats.org/drawingml/2006/main">
               <a:ext uri="{FF2B5EF4-FFF2-40B4-BE49-F238E27FC236}">
-                <a16:creationId xmlns:a16="http://schemas.microsoft.com/office/drawing/2014/main" id="{49CF23C2-A890-4E1F-992D-44FC166EE7F1}"/>
+                <a16:creationId xmlns:a16="http://schemas.microsoft.com/office/drawing/2014/main" id="{6531631A-E46C-4D4B-B946-4C7C711CA597}"/>
               </a:ext>
             </a:extLst>
           </p:cNvPr>
@@ -2737,7 +2737,7 @@
           <p:cNvPr id="20" name="">
             <a:extLst xmlns:a="http://schemas.openxmlformats.org/drawingml/2006/main">
               <a:ext uri="{FF2B5EF4-FFF2-40B4-BE49-F238E27FC236}">
-                <a16:creationId xmlns:a16="http://schemas.microsoft.com/office/drawing/2014/main" id="{292D8794-789C-40D3-8D7E-68D05D7B8848}"/>
+                <a16:creationId xmlns:a16="http://schemas.microsoft.com/office/drawing/2014/main" id="{5BF1371E-EBD7-4280-9AA5-6BB6539CA6B5}"/>
               </a:ext>
             </a:extLst>
           </p:cNvPr>
@@ -2801,7 +2801,7 @@
           <p:cNvPr id="21" name="">
             <a:extLst xmlns:a="http://schemas.openxmlformats.org/drawingml/2006/main">
               <a:ext uri="{FF2B5EF4-FFF2-40B4-BE49-F238E27FC236}">
-                <a16:creationId xmlns:a16="http://schemas.microsoft.com/office/drawing/2014/main" id="{4AA42439-B1B9-45A1-9FDA-370CCDC08C2C}"/>
+                <a16:creationId xmlns:a16="http://schemas.microsoft.com/office/drawing/2014/main" id="{FAA912F2-DABE-4658-BB6D-288A91F949F4}"/>
               </a:ext>
             </a:extLst>
           </p:cNvPr>
@@ -2855,7 +2855,7 @@
                 <a:ea typeface="Aptos"/>
                 <a:cs typeface="Aptos"/>
               </a:rPr>
-              <a:t>실행 중심의 린 팀</a:t>
+              <a:t>6개 제품 라인</a:t>
             </a:r>
           </a:p>
         </p:txBody>
@@ -2865,7 +2865,7 @@
           <p:cNvPr id="22" name="">
             <a:extLst xmlns:a="http://schemas.openxmlformats.org/drawingml/2006/main">
               <a:ext uri="{FF2B5EF4-FFF2-40B4-BE49-F238E27FC236}">
-                <a16:creationId xmlns:a16="http://schemas.microsoft.com/office/drawing/2014/main" id="{CA4DDEFC-A31B-46B3-A3C7-F607673AC9A8}"/>
+                <a16:creationId xmlns:a16="http://schemas.microsoft.com/office/drawing/2014/main" id="{A1C3756F-8CC6-45D0-917C-9BD080B3FE64}"/>
               </a:ext>
             </a:extLst>
           </p:cNvPr>
@@ -2929,7 +2929,7 @@
           <p:cNvPr id="23" name="">
             <a:extLst xmlns:a="http://schemas.openxmlformats.org/drawingml/2006/main">
               <a:ext uri="{FF2B5EF4-FFF2-40B4-BE49-F238E27FC236}">
-                <a16:creationId xmlns:a16="http://schemas.microsoft.com/office/drawing/2014/main" id="{2C770E10-6119-4F11-B233-589D85E0CB9B}"/>
+                <a16:creationId xmlns:a16="http://schemas.microsoft.com/office/drawing/2014/main" id="{26FF4876-91CE-41CF-820E-081D92088BD2}"/>
               </a:ext>
             </a:extLst>
           </p:cNvPr>
@@ -2962,7 +2962,7 @@
           <p:cNvPr id="24" name="">
             <a:extLst xmlns:a="http://schemas.openxmlformats.org/drawingml/2006/main">
               <a:ext uri="{FF2B5EF4-FFF2-40B4-BE49-F238E27FC236}">
-                <a16:creationId xmlns:a16="http://schemas.microsoft.com/office/drawing/2014/main" id="{A859CBAF-32E7-4657-A697-FDB399CB7006}"/>
+                <a16:creationId xmlns:a16="http://schemas.microsoft.com/office/drawing/2014/main" id="{F5D874FC-AB3E-4F9B-9A6C-B6319D6B53EF}"/>
               </a:ext>
             </a:extLst>
           </p:cNvPr>
@@ -3026,7 +3026,7 @@
           <p:cNvPr id="25" name="">
             <a:extLst xmlns:a="http://schemas.openxmlformats.org/drawingml/2006/main">
               <a:ext uri="{FF2B5EF4-FFF2-40B4-BE49-F238E27FC236}">
-                <a16:creationId xmlns:a16="http://schemas.microsoft.com/office/drawing/2014/main" id="{60A6430F-95D2-4143-A10A-9EFF889ED95E}"/>
+                <a16:creationId xmlns:a16="http://schemas.microsoft.com/office/drawing/2014/main" id="{6DD926EC-5522-4369-BC4E-EA78E0ED30DA}"/>
               </a:ext>
             </a:extLst>
           </p:cNvPr>
@@ -3088,7 +3088,7 @@
     </p:spTree>
     <p:extLst>
       <p:ext uri="{BB962C8B-B14F-4D97-AF65-F5344CB8AC3E}">
-        <p14:creationId xmlns:p14="http://schemas.microsoft.com/office/powerpoint/2010/main" val="822855240"/>
+        <p14:creationId xmlns:p14="http://schemas.microsoft.com/office/powerpoint/2010/main" val="1029062951"/>
       </p:ext>
     </p:extLst>
   </p:cSld>
@@ -3116,7 +3116,7 @@
           <p:nvPr/>
         </p:nvPicPr>
         <p:blipFill>
-          <a:blip xmlns:r="http://schemas.openxmlformats.org/officeDocument/2006/relationships" xmlns:a="http://schemas.openxmlformats.org/drawingml/2006/main" r:embed="R43eca5abdf784205"/>
+          <a:blip xmlns:r="http://schemas.openxmlformats.org/officeDocument/2006/relationships" xmlns:a="http://schemas.openxmlformats.org/drawingml/2006/main" r:embed="Rc5b9bdad1c234515"/>
           <a:srcRect xmlns:a="http://schemas.openxmlformats.org/drawingml/2006/main" l="0" t="27" r="0" b="27"/>
           <a:stretch xmlns:a="http://schemas.openxmlformats.org/drawingml/2006/main">
             <a:fillRect l="0" t="0" r="0" b="0"/>
@@ -3137,7 +3137,7 @@
           <p:cNvPr id="2" name="">
             <a:extLst xmlns:a="http://schemas.openxmlformats.org/drawingml/2006/main">
               <a:ext uri="{FF2B5EF4-FFF2-40B4-BE49-F238E27FC236}">
-                <a16:creationId xmlns:a16="http://schemas.microsoft.com/office/drawing/2014/main" id="{AE8A6102-C664-408E-BBE2-B7D7114F9CB1}"/>
+                <a16:creationId xmlns:a16="http://schemas.microsoft.com/office/drawing/2014/main" id="{55A6B40A-A6E2-4265-827E-1B8FF7C9AA8B}"/>
               </a:ext>
             </a:extLst>
           </p:cNvPr>
@@ -3174,7 +3174,7 @@
           <p:cNvPr id="3" name="">
             <a:extLst xmlns:a="http://schemas.openxmlformats.org/drawingml/2006/main">
               <a:ext uri="{FF2B5EF4-FFF2-40B4-BE49-F238E27FC236}">
-                <a16:creationId xmlns:a16="http://schemas.microsoft.com/office/drawing/2014/main" id="{8C46F12D-8C9B-48CF-979D-BFA5EE81F987}"/>
+                <a16:creationId xmlns:a16="http://schemas.microsoft.com/office/drawing/2014/main" id="{3479A729-46EC-4B39-A73B-7160E73E9915}"/>
               </a:ext>
             </a:extLst>
           </p:cNvPr>
@@ -3211,7 +3211,7 @@
           <p:cNvPr id="4" name="">
             <a:extLst xmlns:a="http://schemas.openxmlformats.org/drawingml/2006/main">
               <a:ext uri="{FF2B5EF4-FFF2-40B4-BE49-F238E27FC236}">
-                <a16:creationId xmlns:a16="http://schemas.microsoft.com/office/drawing/2014/main" id="{1C1D7F00-9D92-4C06-992C-643A1FC72589}"/>
+                <a16:creationId xmlns:a16="http://schemas.microsoft.com/office/drawing/2014/main" id="{0E58ECB2-A1C2-4971-BC88-22FD4887036C}"/>
               </a:ext>
             </a:extLst>
           </p:cNvPr>
@@ -3275,7 +3275,7 @@
           <p:cNvPr id="5" name="">
             <a:extLst xmlns:a="http://schemas.openxmlformats.org/drawingml/2006/main">
               <a:ext uri="{FF2B5EF4-FFF2-40B4-BE49-F238E27FC236}">
-                <a16:creationId xmlns:a16="http://schemas.microsoft.com/office/drawing/2014/main" id="{F0A5BF7D-DE2C-4485-AE00-E0367E24EE8A}"/>
+                <a16:creationId xmlns:a16="http://schemas.microsoft.com/office/drawing/2014/main" id="{AC13F36B-0449-483D-9751-20D3AFEC3896}"/>
               </a:ext>
             </a:extLst>
           </p:cNvPr>
@@ -3339,7 +3339,7 @@
           <p:cNvPr id="6" name="">
             <a:extLst xmlns:a="http://schemas.openxmlformats.org/drawingml/2006/main">
               <a:ext uri="{FF2B5EF4-FFF2-40B4-BE49-F238E27FC236}">
-                <a16:creationId xmlns:a16="http://schemas.microsoft.com/office/drawing/2014/main" id="{D33F9CB9-A9DE-49AF-8102-666D69C9B731}"/>
+                <a16:creationId xmlns:a16="http://schemas.microsoft.com/office/drawing/2014/main" id="{76410B94-7F7A-43BB-BC3A-E5B03BBB3BA4}"/>
               </a:ext>
             </a:extLst>
           </p:cNvPr>
@@ -3403,7 +3403,7 @@
           <p:cNvPr id="7" name="">
             <a:extLst xmlns:a="http://schemas.openxmlformats.org/drawingml/2006/main">
               <a:ext uri="{FF2B5EF4-FFF2-40B4-BE49-F238E27FC236}">
-                <a16:creationId xmlns:a16="http://schemas.microsoft.com/office/drawing/2014/main" id="{DE8ADFFA-B0FE-40C7-9E7B-B3AEB1E5046B}"/>
+                <a16:creationId xmlns:a16="http://schemas.microsoft.com/office/drawing/2014/main" id="{4CA74076-A0C1-4B15-AA0C-AD2F4C8683A5}"/>
               </a:ext>
             </a:extLst>
           </p:cNvPr>
@@ -3438,7 +3438,7 @@
           <p:cNvPr id="8" name="">
             <a:extLst xmlns:a="http://schemas.openxmlformats.org/drawingml/2006/main">
               <a:ext uri="{FF2B5EF4-FFF2-40B4-BE49-F238E27FC236}">
-                <a16:creationId xmlns:a16="http://schemas.microsoft.com/office/drawing/2014/main" id="{4FBBF85F-41A1-4D17-8D9B-17A5DAA07CE0}"/>
+                <a16:creationId xmlns:a16="http://schemas.microsoft.com/office/drawing/2014/main" id="{79449DFF-70B9-4427-9D13-0C7129320165}"/>
               </a:ext>
             </a:extLst>
           </p:cNvPr>
@@ -3502,7 +3502,7 @@
           <p:cNvPr id="9" name="">
             <a:extLst xmlns:a="http://schemas.openxmlformats.org/drawingml/2006/main">
               <a:ext uri="{FF2B5EF4-FFF2-40B4-BE49-F238E27FC236}">
-                <a16:creationId xmlns:a16="http://schemas.microsoft.com/office/drawing/2014/main" id="{3DD563DE-AE21-4563-9FBE-1C89758DB6FA}"/>
+                <a16:creationId xmlns:a16="http://schemas.microsoft.com/office/drawing/2014/main" id="{C25A7A05-1D06-454E-9268-435310F7590E}"/>
               </a:ext>
             </a:extLst>
           </p:cNvPr>
@@ -3537,7 +3537,7 @@
           <p:cNvPr id="10" name="">
             <a:extLst xmlns:a="http://schemas.openxmlformats.org/drawingml/2006/main">
               <a:ext uri="{FF2B5EF4-FFF2-40B4-BE49-F238E27FC236}">
-                <a16:creationId xmlns:a16="http://schemas.microsoft.com/office/drawing/2014/main" id="{951D05DD-3FA6-4BB3-A493-5EEB262667BA}"/>
+                <a16:creationId xmlns:a16="http://schemas.microsoft.com/office/drawing/2014/main" id="{357B17DA-34CB-4B2A-B685-2D0F831763EF}"/>
               </a:ext>
             </a:extLst>
           </p:cNvPr>
@@ -3601,7 +3601,7 @@
           <p:cNvPr id="11" name="">
             <a:extLst xmlns:a="http://schemas.openxmlformats.org/drawingml/2006/main">
               <a:ext uri="{FF2B5EF4-FFF2-40B4-BE49-F238E27FC236}">
-                <a16:creationId xmlns:a16="http://schemas.microsoft.com/office/drawing/2014/main" id="{F106D484-4A60-408E-AF57-8B7589AE5015}"/>
+                <a16:creationId xmlns:a16="http://schemas.microsoft.com/office/drawing/2014/main" id="{10D1D5BB-0FAA-4B66-A598-5F9E7778A06B}"/>
               </a:ext>
             </a:extLst>
           </p:cNvPr>
@@ -3636,7 +3636,7 @@
           <p:cNvPr id="12" name="">
             <a:extLst xmlns:a="http://schemas.openxmlformats.org/drawingml/2006/main">
               <a:ext uri="{FF2B5EF4-FFF2-40B4-BE49-F238E27FC236}">
-                <a16:creationId xmlns:a16="http://schemas.microsoft.com/office/drawing/2014/main" id="{DAE70E7A-AEA7-41D5-810E-F3C4FA8C3E23}"/>
+                <a16:creationId xmlns:a16="http://schemas.microsoft.com/office/drawing/2014/main" id="{41CCA744-4017-4BDD-917A-1BC2E19F5438}"/>
               </a:ext>
             </a:extLst>
           </p:cNvPr>
@@ -3700,7 +3700,7 @@
           <p:cNvPr id="13" name="">
             <a:extLst xmlns:a="http://schemas.openxmlformats.org/drawingml/2006/main">
               <a:ext uri="{FF2B5EF4-FFF2-40B4-BE49-F238E27FC236}">
-                <a16:creationId xmlns:a16="http://schemas.microsoft.com/office/drawing/2014/main" id="{E84E0CE9-2160-44E8-BDAA-E58A61722349}"/>
+                <a16:creationId xmlns:a16="http://schemas.microsoft.com/office/drawing/2014/main" id="{F30D284E-DEA5-4E48-B4A7-100FCE9C6FA2}"/>
               </a:ext>
             </a:extLst>
           </p:cNvPr>
@@ -3735,7 +3735,7 @@
           <p:cNvPr id="14" name="">
             <a:extLst xmlns:a="http://schemas.openxmlformats.org/drawingml/2006/main">
               <a:ext uri="{FF2B5EF4-FFF2-40B4-BE49-F238E27FC236}">
-                <a16:creationId xmlns:a16="http://schemas.microsoft.com/office/drawing/2014/main" id="{1A98FD97-D5A6-4466-B578-D215526C432A}"/>
+                <a16:creationId xmlns:a16="http://schemas.microsoft.com/office/drawing/2014/main" id="{F19E7DC9-BDF6-49A7-AE67-6F96351915DA}"/>
               </a:ext>
             </a:extLst>
           </p:cNvPr>
@@ -3799,7 +3799,7 @@
           <p:cNvPr id="15" name="">
             <a:extLst xmlns:a="http://schemas.openxmlformats.org/drawingml/2006/main">
               <a:ext uri="{FF2B5EF4-FFF2-40B4-BE49-F238E27FC236}">
-                <a16:creationId xmlns:a16="http://schemas.microsoft.com/office/drawing/2014/main" id="{79D3C85B-7236-4800-BF15-428D0FD335DD}"/>
+                <a16:creationId xmlns:a16="http://schemas.microsoft.com/office/drawing/2014/main" id="{050E20C3-70A2-4EAE-A392-53611254FD4D}"/>
               </a:ext>
             </a:extLst>
           </p:cNvPr>
@@ -3863,7 +3863,7 @@
           <p:cNvPr id="16" name="">
             <a:extLst xmlns:a="http://schemas.openxmlformats.org/drawingml/2006/main">
               <a:ext uri="{FF2B5EF4-FFF2-40B4-BE49-F238E27FC236}">
-                <a16:creationId xmlns:a16="http://schemas.microsoft.com/office/drawing/2014/main" id="{736DC0FD-0B4B-4E12-9BEB-E40B5EFB059F}"/>
+                <a16:creationId xmlns:a16="http://schemas.microsoft.com/office/drawing/2014/main" id="{0F9F83D9-FD01-4B99-B4AB-362D708CD621}"/>
               </a:ext>
             </a:extLst>
           </p:cNvPr>
@@ -3927,7 +3927,7 @@
           <p:cNvPr id="17" name="">
             <a:extLst xmlns:a="http://schemas.openxmlformats.org/drawingml/2006/main">
               <a:ext uri="{FF2B5EF4-FFF2-40B4-BE49-F238E27FC236}">
-                <a16:creationId xmlns:a16="http://schemas.microsoft.com/office/drawing/2014/main" id="{3E791F7C-7FE9-489F-89C6-DADF77F8D3A1}"/>
+                <a16:creationId xmlns:a16="http://schemas.microsoft.com/office/drawing/2014/main" id="{F1CEB68C-CA95-436F-8A88-F88A54C670BB}"/>
               </a:ext>
             </a:extLst>
           </p:cNvPr>
@@ -3960,7 +3960,7 @@
           <p:cNvPr id="18" name="">
             <a:extLst xmlns:a="http://schemas.openxmlformats.org/drawingml/2006/main">
               <a:ext uri="{FF2B5EF4-FFF2-40B4-BE49-F238E27FC236}">
-                <a16:creationId xmlns:a16="http://schemas.microsoft.com/office/drawing/2014/main" id="{F050FB92-20EF-4C02-8E31-3E4847A17425}"/>
+                <a16:creationId xmlns:a16="http://schemas.microsoft.com/office/drawing/2014/main" id="{8C6B678A-3D83-44BA-AD22-991582E231DC}"/>
               </a:ext>
             </a:extLst>
           </p:cNvPr>
@@ -4024,7 +4024,7 @@
           <p:cNvPr id="19" name="">
             <a:extLst xmlns:a="http://schemas.openxmlformats.org/drawingml/2006/main">
               <a:ext uri="{FF2B5EF4-FFF2-40B4-BE49-F238E27FC236}">
-                <a16:creationId xmlns:a16="http://schemas.microsoft.com/office/drawing/2014/main" id="{F130AD55-C487-4C0C-A21A-9334007F3DC7}"/>
+                <a16:creationId xmlns:a16="http://schemas.microsoft.com/office/drawing/2014/main" id="{E41F6A00-7334-4BE1-B56B-D173B1D1857E}"/>
               </a:ext>
             </a:extLst>
           </p:cNvPr>
@@ -4086,7 +4086,7 @@
     </p:spTree>
     <p:extLst>
       <p:ext uri="{BB962C8B-B14F-4D97-AF65-F5344CB8AC3E}">
-        <p14:creationId xmlns:p14="http://schemas.microsoft.com/office/powerpoint/2010/main" val="1205603436"/>
+        <p14:creationId xmlns:p14="http://schemas.microsoft.com/office/powerpoint/2010/main" val="307389841"/>
       </p:ext>
     </p:extLst>
   </p:cSld>
@@ -4114,7 +4114,7 @@
           <p:nvPr/>
         </p:nvPicPr>
         <p:blipFill>
-          <a:blip xmlns:r="http://schemas.openxmlformats.org/officeDocument/2006/relationships" xmlns:a="http://schemas.openxmlformats.org/drawingml/2006/main" r:embed="R7a27a1f8a67f4fde"/>
+          <a:blip xmlns:r="http://schemas.openxmlformats.org/officeDocument/2006/relationships" xmlns:a="http://schemas.openxmlformats.org/drawingml/2006/main" r:embed="Rdab99ecbf9bf47bb"/>
           <a:srcRect xmlns:a="http://schemas.openxmlformats.org/drawingml/2006/main" l="0" t="27" r="0" b="27"/>
           <a:stretch xmlns:a="http://schemas.openxmlformats.org/drawingml/2006/main">
             <a:fillRect l="0" t="0" r="0" b="0"/>
@@ -4135,7 +4135,7 @@
           <p:cNvPr id="2" name="">
             <a:extLst xmlns:a="http://schemas.openxmlformats.org/drawingml/2006/main">
               <a:ext uri="{FF2B5EF4-FFF2-40B4-BE49-F238E27FC236}">
-                <a16:creationId xmlns:a16="http://schemas.microsoft.com/office/drawing/2014/main" id="{74B1A716-50D1-48D5-8DBB-8E925EBA8715}"/>
+                <a16:creationId xmlns:a16="http://schemas.microsoft.com/office/drawing/2014/main" id="{59F260A3-3EBB-4C04-B729-6DDDB26B9078}"/>
               </a:ext>
             </a:extLst>
           </p:cNvPr>
@@ -4172,7 +4172,7 @@
           <p:cNvPr id="3" name="">
             <a:extLst xmlns:a="http://schemas.openxmlformats.org/drawingml/2006/main">
               <a:ext uri="{FF2B5EF4-FFF2-40B4-BE49-F238E27FC236}">
-                <a16:creationId xmlns:a16="http://schemas.microsoft.com/office/drawing/2014/main" id="{2981D107-4D84-4751-A203-773C5F0F005D}"/>
+                <a16:creationId xmlns:a16="http://schemas.microsoft.com/office/drawing/2014/main" id="{1E36A8ED-F603-427A-BEA1-23669B036953}"/>
               </a:ext>
             </a:extLst>
           </p:cNvPr>
@@ -4209,7 +4209,7 @@
           <p:cNvPr id="4" name="">
             <a:extLst xmlns:a="http://schemas.openxmlformats.org/drawingml/2006/main">
               <a:ext uri="{FF2B5EF4-FFF2-40B4-BE49-F238E27FC236}">
-                <a16:creationId xmlns:a16="http://schemas.microsoft.com/office/drawing/2014/main" id="{F75059DF-F908-49C6-90AF-39887EB9B008}"/>
+                <a16:creationId xmlns:a16="http://schemas.microsoft.com/office/drawing/2014/main" id="{9BDB7507-5B56-451D-A0AF-AEC2625338CF}"/>
               </a:ext>
             </a:extLst>
           </p:cNvPr>
@@ -4273,7 +4273,7 @@
           <p:cNvPr id="5" name="">
             <a:extLst xmlns:a="http://schemas.openxmlformats.org/drawingml/2006/main">
               <a:ext uri="{FF2B5EF4-FFF2-40B4-BE49-F238E27FC236}">
-                <a16:creationId xmlns:a16="http://schemas.microsoft.com/office/drawing/2014/main" id="{0DE67CDF-983F-41DC-8C2D-9FAA5939C41A}"/>
+                <a16:creationId xmlns:a16="http://schemas.microsoft.com/office/drawing/2014/main" id="{FAA403B1-6043-49E5-B246-0A8647FEE86F}"/>
               </a:ext>
             </a:extLst>
           </p:cNvPr>
@@ -4337,7 +4337,7 @@
           <p:cNvPr id="6" name="">
             <a:extLst xmlns:a="http://schemas.openxmlformats.org/drawingml/2006/main">
               <a:ext uri="{FF2B5EF4-FFF2-40B4-BE49-F238E27FC236}">
-                <a16:creationId xmlns:a16="http://schemas.microsoft.com/office/drawing/2014/main" id="{06C74B0D-D87E-40DE-8847-042ECF852416}"/>
+                <a16:creationId xmlns:a16="http://schemas.microsoft.com/office/drawing/2014/main" id="{C37922DC-155C-46B3-9BC8-1E2E6DDDAA35}"/>
               </a:ext>
             </a:extLst>
           </p:cNvPr>
@@ -4401,7 +4401,7 @@
           <p:cNvPr id="7" name="">
             <a:extLst xmlns:a="http://schemas.openxmlformats.org/drawingml/2006/main">
               <a:ext uri="{FF2B5EF4-FFF2-40B4-BE49-F238E27FC236}">
-                <a16:creationId xmlns:a16="http://schemas.microsoft.com/office/drawing/2014/main" id="{EC044A92-1064-4A36-8C35-BF755A9D5AFB}"/>
+                <a16:creationId xmlns:a16="http://schemas.microsoft.com/office/drawing/2014/main" id="{A2866DC9-800D-483B-A7E8-1D697C20EFA9}"/>
               </a:ext>
             </a:extLst>
           </p:cNvPr>
@@ -4436,7 +4436,7 @@
           <p:cNvPr id="8" name="">
             <a:extLst xmlns:a="http://schemas.openxmlformats.org/drawingml/2006/main">
               <a:ext uri="{FF2B5EF4-FFF2-40B4-BE49-F238E27FC236}">
-                <a16:creationId xmlns:a16="http://schemas.microsoft.com/office/drawing/2014/main" id="{4218CB67-FD0B-439A-B862-192CD9E7DED3}"/>
+                <a16:creationId xmlns:a16="http://schemas.microsoft.com/office/drawing/2014/main" id="{54C3AF8A-CBCA-4730-B4EB-AC4A5F47B795}"/>
               </a:ext>
             </a:extLst>
           </p:cNvPr>
@@ -4500,7 +4500,7 @@
           <p:cNvPr id="9" name="">
             <a:extLst xmlns:a="http://schemas.openxmlformats.org/drawingml/2006/main">
               <a:ext uri="{FF2B5EF4-FFF2-40B4-BE49-F238E27FC236}">
-                <a16:creationId xmlns:a16="http://schemas.microsoft.com/office/drawing/2014/main" id="{013F095A-625A-449D-86FC-82BA2A55DA0E}"/>
+                <a16:creationId xmlns:a16="http://schemas.microsoft.com/office/drawing/2014/main" id="{2AE74FD8-70C0-4B02-95FF-7C81EC2C17A6}"/>
               </a:ext>
             </a:extLst>
           </p:cNvPr>
@@ -4564,7 +4564,7 @@
           <p:cNvPr id="10" name="">
             <a:extLst xmlns:a="http://schemas.openxmlformats.org/drawingml/2006/main">
               <a:ext uri="{FF2B5EF4-FFF2-40B4-BE49-F238E27FC236}">
-                <a16:creationId xmlns:a16="http://schemas.microsoft.com/office/drawing/2014/main" id="{27ADFEC2-DF38-47F3-BBBB-82375D2C036A}"/>
+                <a16:creationId xmlns:a16="http://schemas.microsoft.com/office/drawing/2014/main" id="{23C23AB9-A28F-4139-A117-093C061C2477}"/>
               </a:ext>
             </a:extLst>
           </p:cNvPr>
@@ -4597,7 +4597,7 @@
           <p:cNvPr id="11" name="">
             <a:extLst xmlns:a="http://schemas.openxmlformats.org/drawingml/2006/main">
               <a:ext uri="{FF2B5EF4-FFF2-40B4-BE49-F238E27FC236}">
-                <a16:creationId xmlns:a16="http://schemas.microsoft.com/office/drawing/2014/main" id="{34653E7A-1FDC-4A34-9598-8E33CC9E9E1E}"/>
+                <a16:creationId xmlns:a16="http://schemas.microsoft.com/office/drawing/2014/main" id="{BD301204-B87C-43A3-9BAA-DD652434C29E}"/>
               </a:ext>
             </a:extLst>
           </p:cNvPr>
@@ -4632,7 +4632,7 @@
           <p:cNvPr id="12" name="">
             <a:extLst xmlns:a="http://schemas.openxmlformats.org/drawingml/2006/main">
               <a:ext uri="{FF2B5EF4-FFF2-40B4-BE49-F238E27FC236}">
-                <a16:creationId xmlns:a16="http://schemas.microsoft.com/office/drawing/2014/main" id="{7C1DE0C9-317B-446C-9D8E-999D6EAA4B4D}"/>
+                <a16:creationId xmlns:a16="http://schemas.microsoft.com/office/drawing/2014/main" id="{D06FCF3A-0B59-4BD9-B36D-710EC340748F}"/>
               </a:ext>
             </a:extLst>
           </p:cNvPr>
@@ -4696,7 +4696,7 @@
           <p:cNvPr id="13" name="">
             <a:extLst xmlns:a="http://schemas.openxmlformats.org/drawingml/2006/main">
               <a:ext uri="{FF2B5EF4-FFF2-40B4-BE49-F238E27FC236}">
-                <a16:creationId xmlns:a16="http://schemas.microsoft.com/office/drawing/2014/main" id="{3395E585-5B9F-4C09-8936-0A5986167CD8}"/>
+                <a16:creationId xmlns:a16="http://schemas.microsoft.com/office/drawing/2014/main" id="{0940FACC-187E-4E87-B596-F15C1378E933}"/>
               </a:ext>
             </a:extLst>
           </p:cNvPr>
@@ -4760,7 +4760,7 @@
           <p:cNvPr id="14" name="">
             <a:extLst xmlns:a="http://schemas.openxmlformats.org/drawingml/2006/main">
               <a:ext uri="{FF2B5EF4-FFF2-40B4-BE49-F238E27FC236}">
-                <a16:creationId xmlns:a16="http://schemas.microsoft.com/office/drawing/2014/main" id="{9940E13C-0EEE-4650-913E-188B744B1A55}"/>
+                <a16:creationId xmlns:a16="http://schemas.microsoft.com/office/drawing/2014/main" id="{018F81C3-703E-49B2-9971-5866DBFC34FF}"/>
               </a:ext>
             </a:extLst>
           </p:cNvPr>
@@ -4793,7 +4793,7 @@
           <p:cNvPr id="15" name="">
             <a:extLst xmlns:a="http://schemas.openxmlformats.org/drawingml/2006/main">
               <a:ext uri="{FF2B5EF4-FFF2-40B4-BE49-F238E27FC236}">
-                <a16:creationId xmlns:a16="http://schemas.microsoft.com/office/drawing/2014/main" id="{F6D2767A-23D9-41FD-AAFB-18119955B00B}"/>
+                <a16:creationId xmlns:a16="http://schemas.microsoft.com/office/drawing/2014/main" id="{BDEE9015-496C-4D8D-90AE-3D4E287F52C2}"/>
               </a:ext>
             </a:extLst>
           </p:cNvPr>
@@ -4828,7 +4828,7 @@
           <p:cNvPr id="16" name="">
             <a:extLst xmlns:a="http://schemas.openxmlformats.org/drawingml/2006/main">
               <a:ext uri="{FF2B5EF4-FFF2-40B4-BE49-F238E27FC236}">
-                <a16:creationId xmlns:a16="http://schemas.microsoft.com/office/drawing/2014/main" id="{1605560A-DAC5-4F62-ACE9-A30FB6FF7697}"/>
+                <a16:creationId xmlns:a16="http://schemas.microsoft.com/office/drawing/2014/main" id="{01F64031-E736-4F45-A803-B89912C96AFB}"/>
               </a:ext>
             </a:extLst>
           </p:cNvPr>
@@ -4892,7 +4892,7 @@
           <p:cNvPr id="17" name="">
             <a:extLst xmlns:a="http://schemas.openxmlformats.org/drawingml/2006/main">
               <a:ext uri="{FF2B5EF4-FFF2-40B4-BE49-F238E27FC236}">
-                <a16:creationId xmlns:a16="http://schemas.microsoft.com/office/drawing/2014/main" id="{8869640F-DD1C-4F7E-963F-7648DE5E924A}"/>
+                <a16:creationId xmlns:a16="http://schemas.microsoft.com/office/drawing/2014/main" id="{A5981ECD-195B-4B83-92B2-D9E678951D7F}"/>
               </a:ext>
             </a:extLst>
           </p:cNvPr>
@@ -4956,7 +4956,7 @@
           <p:cNvPr id="18" name="">
             <a:extLst xmlns:a="http://schemas.openxmlformats.org/drawingml/2006/main">
               <a:ext uri="{FF2B5EF4-FFF2-40B4-BE49-F238E27FC236}">
-                <a16:creationId xmlns:a16="http://schemas.microsoft.com/office/drawing/2014/main" id="{17344DDD-5B86-4B68-8D8F-09E56A96E5A3}"/>
+                <a16:creationId xmlns:a16="http://schemas.microsoft.com/office/drawing/2014/main" id="{6A0CC429-A155-4470-8745-DD559AD69297}"/>
               </a:ext>
             </a:extLst>
           </p:cNvPr>
@@ -5020,7 +5020,7 @@
           <p:cNvPr id="19" name="">
             <a:extLst xmlns:a="http://schemas.openxmlformats.org/drawingml/2006/main">
               <a:ext uri="{FF2B5EF4-FFF2-40B4-BE49-F238E27FC236}">
-                <a16:creationId xmlns:a16="http://schemas.microsoft.com/office/drawing/2014/main" id="{03A9DE4D-17EB-4B30-96EB-DD5F3678977C}"/>
+                <a16:creationId xmlns:a16="http://schemas.microsoft.com/office/drawing/2014/main" id="{242D0AFE-5488-40B7-A620-29FDC41F89B6}"/>
               </a:ext>
             </a:extLst>
           </p:cNvPr>
@@ -5053,7 +5053,7 @@
           <p:cNvPr id="20" name="">
             <a:extLst xmlns:a="http://schemas.openxmlformats.org/drawingml/2006/main">
               <a:ext uri="{FF2B5EF4-FFF2-40B4-BE49-F238E27FC236}">
-                <a16:creationId xmlns:a16="http://schemas.microsoft.com/office/drawing/2014/main" id="{535D6D51-5C23-4494-AA44-79E50D648941}"/>
+                <a16:creationId xmlns:a16="http://schemas.microsoft.com/office/drawing/2014/main" id="{8B38BC76-0946-4E5B-B8C5-69E324E9E919}"/>
               </a:ext>
             </a:extLst>
           </p:cNvPr>
@@ -5117,7 +5117,7 @@
           <p:cNvPr id="21" name="">
             <a:extLst xmlns:a="http://schemas.openxmlformats.org/drawingml/2006/main">
               <a:ext uri="{FF2B5EF4-FFF2-40B4-BE49-F238E27FC236}">
-                <a16:creationId xmlns:a16="http://schemas.microsoft.com/office/drawing/2014/main" id="{712B32F7-98A4-475A-B013-C399A1EF6E6F}"/>
+                <a16:creationId xmlns:a16="http://schemas.microsoft.com/office/drawing/2014/main" id="{3B320F55-477E-414E-97D7-9F54D6B9F488}"/>
               </a:ext>
             </a:extLst>
           </p:cNvPr>
@@ -5179,7 +5179,7 @@
     </p:spTree>
     <p:extLst>
       <p:ext uri="{BB962C8B-B14F-4D97-AF65-F5344CB8AC3E}">
-        <p14:creationId xmlns:p14="http://schemas.microsoft.com/office/powerpoint/2010/main" val="2031153726"/>
+        <p14:creationId xmlns:p14="http://schemas.microsoft.com/office/powerpoint/2010/main" val="1428539451"/>
       </p:ext>
     </p:extLst>
   </p:cSld>
@@ -5207,7 +5207,7 @@
           <p:nvPr/>
         </p:nvPicPr>
         <p:blipFill>
-          <a:blip xmlns:r="http://schemas.openxmlformats.org/officeDocument/2006/relationships" xmlns:a="http://schemas.openxmlformats.org/drawingml/2006/main" r:embed="R7dde0bb1ed9647f6"/>
+          <a:blip xmlns:r="http://schemas.openxmlformats.org/officeDocument/2006/relationships" xmlns:a="http://schemas.openxmlformats.org/drawingml/2006/main" r:embed="R59172146839f4fb0"/>
           <a:srcRect xmlns:a="http://schemas.openxmlformats.org/drawingml/2006/main" l="0" t="27" r="0" b="27"/>
           <a:stretch xmlns:a="http://schemas.openxmlformats.org/drawingml/2006/main">
             <a:fillRect l="0" t="0" r="0" b="0"/>
@@ -5228,7 +5228,7 @@
           <p:cNvPr id="2" name="">
             <a:extLst xmlns:a="http://schemas.openxmlformats.org/drawingml/2006/main">
               <a:ext uri="{FF2B5EF4-FFF2-40B4-BE49-F238E27FC236}">
-                <a16:creationId xmlns:a16="http://schemas.microsoft.com/office/drawing/2014/main" id="{7D43B1D3-E178-4009-A4FF-A09801C60A2E}"/>
+                <a16:creationId xmlns:a16="http://schemas.microsoft.com/office/drawing/2014/main" id="{587E2BEE-EE81-42F9-9E8B-288D5A1D07ED}"/>
               </a:ext>
             </a:extLst>
           </p:cNvPr>
@@ -5265,7 +5265,7 @@
           <p:cNvPr id="3" name="">
             <a:extLst xmlns:a="http://schemas.openxmlformats.org/drawingml/2006/main">
               <a:ext uri="{FF2B5EF4-FFF2-40B4-BE49-F238E27FC236}">
-                <a16:creationId xmlns:a16="http://schemas.microsoft.com/office/drawing/2014/main" id="{4F8F2DFA-5C11-4EA7-93F3-E7DFFD23D8DF}"/>
+                <a16:creationId xmlns:a16="http://schemas.microsoft.com/office/drawing/2014/main" id="{DB6A7351-54AD-410A-AE74-082569619570}"/>
               </a:ext>
             </a:extLst>
           </p:cNvPr>
@@ -5302,7 +5302,7 @@
           <p:cNvPr id="4" name="">
             <a:extLst xmlns:a="http://schemas.openxmlformats.org/drawingml/2006/main">
               <a:ext uri="{FF2B5EF4-FFF2-40B4-BE49-F238E27FC236}">
-                <a16:creationId xmlns:a16="http://schemas.microsoft.com/office/drawing/2014/main" id="{3EC2DC85-E860-4119-80CA-03491FA364C8}"/>
+                <a16:creationId xmlns:a16="http://schemas.microsoft.com/office/drawing/2014/main" id="{39B07139-6073-44BB-8D4D-5F5851D1D205}"/>
               </a:ext>
             </a:extLst>
           </p:cNvPr>
@@ -5366,7 +5366,7 @@
           <p:cNvPr id="5" name="">
             <a:extLst xmlns:a="http://schemas.openxmlformats.org/drawingml/2006/main">
               <a:ext uri="{FF2B5EF4-FFF2-40B4-BE49-F238E27FC236}">
-                <a16:creationId xmlns:a16="http://schemas.microsoft.com/office/drawing/2014/main" id="{223B19C8-2024-4D21-ABFC-C0D2659DD005}"/>
+                <a16:creationId xmlns:a16="http://schemas.microsoft.com/office/drawing/2014/main" id="{28BD0586-22A9-4A9F-9B69-56567040EB1A}"/>
               </a:ext>
             </a:extLst>
           </p:cNvPr>
@@ -5420,7 +5420,7 @@
                 <a:ea typeface="Aptos Display"/>
                 <a:cs typeface="Aptos Display"/>
               </a:rPr>
-              <a:t>제품, 영업, 인재를 가속할 자본과 파트너를 찾습니다</a:t>
+              <a:t>유료 파일럿과 반복 가능한 제품을 위해 US$500K pre-seed를 유치합니다</a:t>
             </a:r>
           </a:p>
         </p:txBody>
@@ -5430,7 +5430,7 @@
           <p:cNvPr id="6" name="">
             <a:extLst xmlns:a="http://schemas.openxmlformats.org/drawingml/2006/main">
               <a:ext uri="{FF2B5EF4-FFF2-40B4-BE49-F238E27FC236}">
-                <a16:creationId xmlns:a16="http://schemas.microsoft.com/office/drawing/2014/main" id="{E3591135-B3DC-4C66-9969-3F084B59B1D7}"/>
+                <a16:creationId xmlns:a16="http://schemas.microsoft.com/office/drawing/2014/main" id="{2182485B-F2D8-4EE6-BE35-5D66728E215C}"/>
               </a:ext>
             </a:extLst>
           </p:cNvPr>
@@ -5484,7 +5484,7 @@
                 <a:ea typeface="Aptos"/>
                 <a:cs typeface="Aptos"/>
               </a:rPr>
-              <a:t>Tecnotitan은 라틴아메리카에서 글로벌 야망을 가진 다부문 기술 회사를 구축하고 있습니다.</a:t>
+              <a:t>이번 라운드는 18개월 동안 AI와 소프트웨어 서비스를 자체 제품, 초기 고객, 측정 가능한 사용 사례, 글로벌 상업 기반으로 전환하는 데 사용됩니다.</a:t>
             </a:r>
           </a:p>
         </p:txBody>
@@ -5494,7 +5494,7 @@
           <p:cNvPr id="7" name="">
             <a:extLst xmlns:a="http://schemas.openxmlformats.org/drawingml/2006/main">
               <a:ext uri="{FF2B5EF4-FFF2-40B4-BE49-F238E27FC236}">
-                <a16:creationId xmlns:a16="http://schemas.microsoft.com/office/drawing/2014/main" id="{7D57C7E2-141A-478C-A9EC-992F9EA07655}"/>
+                <a16:creationId xmlns:a16="http://schemas.microsoft.com/office/drawing/2014/main" id="{39F01CE3-868D-4BB2-9EFA-532FCFBBC3E2}"/>
               </a:ext>
             </a:extLst>
           </p:cNvPr>
@@ -5529,7 +5529,7 @@
           <p:cNvPr id="8" name="">
             <a:extLst xmlns:a="http://schemas.openxmlformats.org/drawingml/2006/main">
               <a:ext uri="{FF2B5EF4-FFF2-40B4-BE49-F238E27FC236}">
-                <a16:creationId xmlns:a16="http://schemas.microsoft.com/office/drawing/2014/main" id="{0CE0EF8F-41B6-4AE9-82B3-1100C5EA0008}"/>
+                <a16:creationId xmlns:a16="http://schemas.microsoft.com/office/drawing/2014/main" id="{549EEF07-E27C-459C-8B17-4A2A068C5B6B}"/>
               </a:ext>
             </a:extLst>
           </p:cNvPr>
@@ -5593,7 +5593,7 @@
           <p:cNvPr id="9" name="">
             <a:extLst xmlns:a="http://schemas.openxmlformats.org/drawingml/2006/main">
               <a:ext uri="{FF2B5EF4-FFF2-40B4-BE49-F238E27FC236}">
-                <a16:creationId xmlns:a16="http://schemas.microsoft.com/office/drawing/2014/main" id="{79EF5FB3-AC65-4032-969C-CB5CA861A82B}"/>
+                <a16:creationId xmlns:a16="http://schemas.microsoft.com/office/drawing/2014/main" id="{F15DA82E-66C4-49CF-95A9-0CBB28C03D51}"/>
               </a:ext>
             </a:extLst>
           </p:cNvPr>
@@ -5647,7 +5647,7 @@
                 <a:ea typeface="Aptos"/>
                 <a:cs typeface="Aptos"/>
               </a:rPr>
-              <a:t>제품</a:t>
+              <a:t>40% 제품 및 엔지니어링</a:t>
             </a:r>
           </a:p>
         </p:txBody>
@@ -5657,7 +5657,7 @@
           <p:cNvPr id="10" name="">
             <a:extLst xmlns:a="http://schemas.openxmlformats.org/drawingml/2006/main">
               <a:ext uri="{FF2B5EF4-FFF2-40B4-BE49-F238E27FC236}">
-                <a16:creationId xmlns:a16="http://schemas.microsoft.com/office/drawing/2014/main" id="{3E16DF1B-148F-4E46-BCBD-076E8643F0C6}"/>
+                <a16:creationId xmlns:a16="http://schemas.microsoft.com/office/drawing/2014/main" id="{790FB7E5-3BA4-4125-88DC-F1FCC7CF183F}"/>
               </a:ext>
             </a:extLst>
           </p:cNvPr>
@@ -5692,7 +5692,7 @@
           <p:cNvPr id="11" name="">
             <a:extLst xmlns:a="http://schemas.openxmlformats.org/drawingml/2006/main">
               <a:ext uri="{FF2B5EF4-FFF2-40B4-BE49-F238E27FC236}">
-                <a16:creationId xmlns:a16="http://schemas.microsoft.com/office/drawing/2014/main" id="{379BE221-505F-46DC-8996-0B9DF4E353BA}"/>
+                <a16:creationId xmlns:a16="http://schemas.microsoft.com/office/drawing/2014/main" id="{C7D2EBB2-3086-4BF6-B7E4-781BD176F91A}"/>
               </a:ext>
             </a:extLst>
           </p:cNvPr>
@@ -5756,7 +5756,7 @@
           <p:cNvPr id="12" name="">
             <a:extLst xmlns:a="http://schemas.openxmlformats.org/drawingml/2006/main">
               <a:ext uri="{FF2B5EF4-FFF2-40B4-BE49-F238E27FC236}">
-                <a16:creationId xmlns:a16="http://schemas.microsoft.com/office/drawing/2014/main" id="{BE2465C2-987A-4D75-8FD1-5F07B0BE3AE2}"/>
+                <a16:creationId xmlns:a16="http://schemas.microsoft.com/office/drawing/2014/main" id="{7AED3638-573D-4903-BE75-38309B5A6302}"/>
               </a:ext>
             </a:extLst>
           </p:cNvPr>
@@ -5810,7 +5810,7 @@
                 <a:ea typeface="Aptos"/>
                 <a:cs typeface="Aptos"/>
               </a:rPr>
-              <a:t>영업</a:t>
+              <a:t>25% 영업 및 파일럿</a:t>
             </a:r>
           </a:p>
         </p:txBody>
@@ -5820,7 +5820,7 @@
           <p:cNvPr id="13" name="">
             <a:extLst xmlns:a="http://schemas.openxmlformats.org/drawingml/2006/main">
               <a:ext uri="{FF2B5EF4-FFF2-40B4-BE49-F238E27FC236}">
-                <a16:creationId xmlns:a16="http://schemas.microsoft.com/office/drawing/2014/main" id="{44FDDCC3-DF77-4C32-9F74-C65F99FF4818}"/>
+                <a16:creationId xmlns:a16="http://schemas.microsoft.com/office/drawing/2014/main" id="{5CF47E55-0ED6-46BE-AB5C-0802BF04B08B}"/>
               </a:ext>
             </a:extLst>
           </p:cNvPr>
@@ -5855,7 +5855,7 @@
           <p:cNvPr id="14" name="">
             <a:extLst xmlns:a="http://schemas.openxmlformats.org/drawingml/2006/main">
               <a:ext uri="{FF2B5EF4-FFF2-40B4-BE49-F238E27FC236}">
-                <a16:creationId xmlns:a16="http://schemas.microsoft.com/office/drawing/2014/main" id="{A247E187-CE48-4D46-AB4E-2B3941415798}"/>
+                <a16:creationId xmlns:a16="http://schemas.microsoft.com/office/drawing/2014/main" id="{D584E07F-5028-469E-A4B3-E637656D1F21}"/>
               </a:ext>
             </a:extLst>
           </p:cNvPr>
@@ -5919,7 +5919,7 @@
           <p:cNvPr id="15" name="">
             <a:extLst xmlns:a="http://schemas.openxmlformats.org/drawingml/2006/main">
               <a:ext uri="{FF2B5EF4-FFF2-40B4-BE49-F238E27FC236}">
-                <a16:creationId xmlns:a16="http://schemas.microsoft.com/office/drawing/2014/main" id="{F5175D91-8AB6-4DB1-BAA3-20D20F5C568E}"/>
+                <a16:creationId xmlns:a16="http://schemas.microsoft.com/office/drawing/2014/main" id="{716A864B-B696-472C-B1B2-D1CEA9346444}"/>
               </a:ext>
             </a:extLst>
           </p:cNvPr>
@@ -5973,7 +5973,7 @@
                 <a:ea typeface="Aptos"/>
                 <a:cs typeface="Aptos"/>
               </a:rPr>
-              <a:t>기술 인재</a:t>
+              <a:t>20% AI 딜리버리</a:t>
             </a:r>
           </a:p>
         </p:txBody>
@@ -5983,7 +5983,7 @@
           <p:cNvPr id="16" name="">
             <a:extLst xmlns:a="http://schemas.openxmlformats.org/drawingml/2006/main">
               <a:ext uri="{FF2B5EF4-FFF2-40B4-BE49-F238E27FC236}">
-                <a16:creationId xmlns:a16="http://schemas.microsoft.com/office/drawing/2014/main" id="{095CBC52-656F-4811-9CC7-083AB5C8EF48}"/>
+                <a16:creationId xmlns:a16="http://schemas.microsoft.com/office/drawing/2014/main" id="{382297B6-B8C8-4231-B1A8-E4AF44CC2635}"/>
               </a:ext>
             </a:extLst>
           </p:cNvPr>
@@ -6018,7 +6018,7 @@
           <p:cNvPr id="17" name="">
             <a:extLst xmlns:a="http://schemas.openxmlformats.org/drawingml/2006/main">
               <a:ext uri="{FF2B5EF4-FFF2-40B4-BE49-F238E27FC236}">
-                <a16:creationId xmlns:a16="http://schemas.microsoft.com/office/drawing/2014/main" id="{38DAC104-F785-4164-980B-21880BCF6F1B}"/>
+                <a16:creationId xmlns:a16="http://schemas.microsoft.com/office/drawing/2014/main" id="{E6B90449-D0B2-448C-8E97-00E0A1F4765C}"/>
               </a:ext>
             </a:extLst>
           </p:cNvPr>
@@ -6082,7 +6082,7 @@
           <p:cNvPr id="18" name="">
             <a:extLst xmlns:a="http://schemas.openxmlformats.org/drawingml/2006/main">
               <a:ext uri="{FF2B5EF4-FFF2-40B4-BE49-F238E27FC236}">
-                <a16:creationId xmlns:a16="http://schemas.microsoft.com/office/drawing/2014/main" id="{A890D14C-D017-4C11-B789-76BCA72F136E}"/>
+                <a16:creationId xmlns:a16="http://schemas.microsoft.com/office/drawing/2014/main" id="{B4826679-D801-473E-9D16-6B341A02AA67}"/>
               </a:ext>
             </a:extLst>
           </p:cNvPr>
@@ -6136,7 +6136,7 @@
                 <a:ea typeface="Aptos"/>
                 <a:cs typeface="Aptos"/>
               </a:rPr>
-              <a:t>Data room</a:t>
+              <a:t>15% 운영 및 data room</a:t>
             </a:r>
           </a:p>
         </p:txBody>
@@ -6146,7 +6146,7 @@
           <p:cNvPr id="19" name="">
             <a:extLst xmlns:a="http://schemas.openxmlformats.org/drawingml/2006/main">
               <a:ext uri="{FF2B5EF4-FFF2-40B4-BE49-F238E27FC236}">
-                <a16:creationId xmlns:a16="http://schemas.microsoft.com/office/drawing/2014/main" id="{35784157-182C-47A1-B8AF-DB8022DD9D56}"/>
+                <a16:creationId xmlns:a16="http://schemas.microsoft.com/office/drawing/2014/main" id="{7758CCF3-035B-41CD-8B72-B18C3FD2A67F}"/>
               </a:ext>
             </a:extLst>
           </p:cNvPr>
@@ -6181,7 +6181,7 @@
           <p:cNvPr id="20" name="">
             <a:extLst xmlns:a="http://schemas.openxmlformats.org/drawingml/2006/main">
               <a:ext uri="{FF2B5EF4-FFF2-40B4-BE49-F238E27FC236}">
-                <a16:creationId xmlns:a16="http://schemas.microsoft.com/office/drawing/2014/main" id="{88E2C2E8-9E17-4346-BBC2-56AECABA4FC9}"/>
+                <a16:creationId xmlns:a16="http://schemas.microsoft.com/office/drawing/2014/main" id="{7731577A-EB9C-4CD7-91EF-606CAE183E11}"/>
               </a:ext>
             </a:extLst>
           </p:cNvPr>
@@ -6245,7 +6245,7 @@
           <p:cNvPr id="21" name="">
             <a:extLst xmlns:a="http://schemas.openxmlformats.org/drawingml/2006/main">
               <a:ext uri="{FF2B5EF4-FFF2-40B4-BE49-F238E27FC236}">
-                <a16:creationId xmlns:a16="http://schemas.microsoft.com/office/drawing/2014/main" id="{DD9FA78B-FD26-4042-8C8F-E109CCCBFD74}"/>
+                <a16:creationId xmlns:a16="http://schemas.microsoft.com/office/drawing/2014/main" id="{CEEF87E8-CEB5-49E4-85A1-094204DD1F72}"/>
               </a:ext>
             </a:extLst>
           </p:cNvPr>
@@ -6309,7 +6309,7 @@
           <p:cNvPr id="22" name="">
             <a:extLst xmlns:a="http://schemas.openxmlformats.org/drawingml/2006/main">
               <a:ext uri="{FF2B5EF4-FFF2-40B4-BE49-F238E27FC236}">
-                <a16:creationId xmlns:a16="http://schemas.microsoft.com/office/drawing/2014/main" id="{A8ACC3C6-718A-4D09-907F-1B1BD8153E87}"/>
+                <a16:creationId xmlns:a16="http://schemas.microsoft.com/office/drawing/2014/main" id="{40086359-955C-4295-BD55-0F66046EFBE5}"/>
               </a:ext>
             </a:extLst>
           </p:cNvPr>
@@ -6342,7 +6342,7 @@
           <p:cNvPr id="23" name="">
             <a:extLst xmlns:a="http://schemas.openxmlformats.org/drawingml/2006/main">
               <a:ext uri="{FF2B5EF4-FFF2-40B4-BE49-F238E27FC236}">
-                <a16:creationId xmlns:a16="http://schemas.microsoft.com/office/drawing/2014/main" id="{4A59E9E0-5401-440B-B2D2-9E89EE2A567A}"/>
+                <a16:creationId xmlns:a16="http://schemas.microsoft.com/office/drawing/2014/main" id="{8ABF91AD-8D29-4D89-9E70-3F7E2227E513}"/>
               </a:ext>
             </a:extLst>
           </p:cNvPr>
@@ -6406,7 +6406,7 @@
           <p:cNvPr id="24" name="">
             <a:extLst xmlns:a="http://schemas.openxmlformats.org/drawingml/2006/main">
               <a:ext uri="{FF2B5EF4-FFF2-40B4-BE49-F238E27FC236}">
-                <a16:creationId xmlns:a16="http://schemas.microsoft.com/office/drawing/2014/main" id="{0270EBA2-E1E2-4C1A-91E4-8369944DA9AA}"/>
+                <a16:creationId xmlns:a16="http://schemas.microsoft.com/office/drawing/2014/main" id="{389C1A4E-7D84-4B1D-B911-D2356B45320B}"/>
               </a:ext>
             </a:extLst>
           </p:cNvPr>
@@ -6468,7 +6468,7 @@
     </p:spTree>
     <p:extLst>
       <p:ext uri="{BB962C8B-B14F-4D97-AF65-F5344CB8AC3E}">
-        <p14:creationId xmlns:p14="http://schemas.microsoft.com/office/powerpoint/2010/main" val="1142707189"/>
+        <p14:creationId xmlns:p14="http://schemas.microsoft.com/office/powerpoint/2010/main" val="959016956"/>
       </p:ext>
     </p:extLst>
   </p:cSld>
@@ -6496,7 +6496,7 @@
           <p:nvPr/>
         </p:nvPicPr>
         <p:blipFill>
-          <a:blip xmlns:r="http://schemas.openxmlformats.org/officeDocument/2006/relationships" xmlns:a="http://schemas.openxmlformats.org/drawingml/2006/main" r:embed="R8bd40933d80a4861"/>
+          <a:blip xmlns:r="http://schemas.openxmlformats.org/officeDocument/2006/relationships" xmlns:a="http://schemas.openxmlformats.org/drawingml/2006/main" r:embed="R85b0711926534565"/>
           <a:srcRect xmlns:a="http://schemas.openxmlformats.org/drawingml/2006/main" l="0" t="27" r="0" b="27"/>
           <a:stretch xmlns:a="http://schemas.openxmlformats.org/drawingml/2006/main">
             <a:fillRect l="0" t="0" r="0" b="0"/>
@@ -6517,7 +6517,7 @@
           <p:cNvPr id="2" name="">
             <a:extLst xmlns:a="http://schemas.openxmlformats.org/drawingml/2006/main">
               <a:ext uri="{FF2B5EF4-FFF2-40B4-BE49-F238E27FC236}">
-                <a16:creationId xmlns:a16="http://schemas.microsoft.com/office/drawing/2014/main" id="{9309C574-6BF0-4FEF-8B13-36D1CB1B8C1A}"/>
+                <a16:creationId xmlns:a16="http://schemas.microsoft.com/office/drawing/2014/main" id="{5F6D3E6D-3BD5-41B5-AAB8-2AB64AFFAED6}"/>
               </a:ext>
             </a:extLst>
           </p:cNvPr>
@@ -6554,7 +6554,7 @@
           <p:cNvPr id="3" name="">
             <a:extLst xmlns:a="http://schemas.openxmlformats.org/drawingml/2006/main">
               <a:ext uri="{FF2B5EF4-FFF2-40B4-BE49-F238E27FC236}">
-                <a16:creationId xmlns:a16="http://schemas.microsoft.com/office/drawing/2014/main" id="{7DDC1ABD-B9B0-436D-A5AF-53EAB3CF6D58}"/>
+                <a16:creationId xmlns:a16="http://schemas.microsoft.com/office/drawing/2014/main" id="{3385968C-A308-4856-B1C4-92BE6B277847}"/>
               </a:ext>
             </a:extLst>
           </p:cNvPr>
@@ -6591,7 +6591,7 @@
           <p:cNvPr id="4" name="">
             <a:extLst xmlns:a="http://schemas.openxmlformats.org/drawingml/2006/main">
               <a:ext uri="{FF2B5EF4-FFF2-40B4-BE49-F238E27FC236}">
-                <a16:creationId xmlns:a16="http://schemas.microsoft.com/office/drawing/2014/main" id="{EAD5E305-0767-41B4-8552-8E7E2A2D4E55}"/>
+                <a16:creationId xmlns:a16="http://schemas.microsoft.com/office/drawing/2014/main" id="{A4E2CBF6-24E0-4338-B7AC-0EF3972A5A40}"/>
               </a:ext>
             </a:extLst>
           </p:cNvPr>
@@ -6645,7 +6645,7 @@
                 <a:ea typeface="Aptos"/>
                 <a:cs typeface="Aptos"/>
               </a:rPr>
-              <a:t>투자 논리</a:t>
+              <a:t>왜 지금인가</a:t>
             </a:r>
           </a:p>
         </p:txBody>
@@ -6655,7 +6655,7 @@
           <p:cNvPr id="5" name="">
             <a:extLst xmlns:a="http://schemas.openxmlformats.org/drawingml/2006/main">
               <a:ext uri="{FF2B5EF4-FFF2-40B4-BE49-F238E27FC236}">
-                <a16:creationId xmlns:a16="http://schemas.microsoft.com/office/drawing/2014/main" id="{C828E927-162A-4735-B2A2-1586A4C9080C}"/>
+                <a16:creationId xmlns:a16="http://schemas.microsoft.com/office/drawing/2014/main" id="{4637E9B4-CCD6-49EE-9EEC-B613FC9D7FAF}"/>
               </a:ext>
             </a:extLst>
           </p:cNvPr>
@@ -6709,7 +6709,7 @@
                 <a:ea typeface="Aptos Display"/>
                 <a:cs typeface="Aptos Display"/>
               </a:rPr>
-              <a:t>기업에는 조언자뿐 아니라 구축자가 필요합니다</a:t>
+              <a:t>기업에는 더 많은 발표자료가 아니라 AI 구현이 필요합니다</a:t>
             </a:r>
           </a:p>
         </p:txBody>
@@ -6719,7 +6719,7 @@
           <p:cNvPr id="6" name="">
             <a:extLst xmlns:a="http://schemas.openxmlformats.org/drawingml/2006/main">
               <a:ext uri="{FF2B5EF4-FFF2-40B4-BE49-F238E27FC236}">
-                <a16:creationId xmlns:a16="http://schemas.microsoft.com/office/drawing/2014/main" id="{0847FBAA-6E7F-45DE-BEA0-1A105A6DC4F4}"/>
+                <a16:creationId xmlns:a16="http://schemas.microsoft.com/office/drawing/2014/main" id="{FD5F308B-02C8-4C5E-83C6-90E2E4C8F4F9}"/>
               </a:ext>
             </a:extLst>
           </p:cNvPr>
@@ -6773,7 +6773,7 @@
                 <a:ea typeface="Aptos"/>
                 <a:cs typeface="Aptos"/>
               </a:rPr>
-              <a:t>진짜 AI 도입에는 진단, 소프트웨어, 데이터, 자동화, 운영 문화가 하나의 시스템으로 작동해야 합니다.</a:t>
+              <a:t>AI 도입 압박은 여전히 수작업, 흩어진 데이터, 내부 구축 역량 부족으로 운영되는 기업까지 확대되고 있습니다.</a:t>
             </a:r>
           </a:p>
         </p:txBody>
@@ -6783,7 +6783,7 @@
           <p:cNvPr id="7" name="">
             <a:extLst xmlns:a="http://schemas.openxmlformats.org/drawingml/2006/main">
               <a:ext uri="{FF2B5EF4-FFF2-40B4-BE49-F238E27FC236}">
-                <a16:creationId xmlns:a16="http://schemas.microsoft.com/office/drawing/2014/main" id="{6F661340-9655-4A09-B0A3-08F7F6FD46A0}"/>
+                <a16:creationId xmlns:a16="http://schemas.microsoft.com/office/drawing/2014/main" id="{402ABD42-7BC8-46E0-9F9F-E5A23BDC1E37}"/>
               </a:ext>
             </a:extLst>
           </p:cNvPr>
@@ -6818,7 +6818,7 @@
           <p:cNvPr id="8" name="">
             <a:extLst xmlns:a="http://schemas.openxmlformats.org/drawingml/2006/main">
               <a:ext uri="{FF2B5EF4-FFF2-40B4-BE49-F238E27FC236}">
-                <a16:creationId xmlns:a16="http://schemas.microsoft.com/office/drawing/2014/main" id="{2105EEE3-CD22-4C96-91BF-33FC6D1C0E12}"/>
+                <a16:creationId xmlns:a16="http://schemas.microsoft.com/office/drawing/2014/main" id="{CAD69ED4-189A-46FE-8877-BC87C5B177CC}"/>
               </a:ext>
             </a:extLst>
           </p:cNvPr>
@@ -6882,7 +6882,7 @@
           <p:cNvPr id="9" name="">
             <a:extLst xmlns:a="http://schemas.openxmlformats.org/drawingml/2006/main">
               <a:ext uri="{FF2B5EF4-FFF2-40B4-BE49-F238E27FC236}">
-                <a16:creationId xmlns:a16="http://schemas.microsoft.com/office/drawing/2014/main" id="{D94409B1-9D19-468F-8722-4B2F564F0B7B}"/>
+                <a16:creationId xmlns:a16="http://schemas.microsoft.com/office/drawing/2014/main" id="{C73A648B-B214-469F-BA53-4A59A6755A34}"/>
               </a:ext>
             </a:extLst>
           </p:cNvPr>
@@ -6936,7 +6936,7 @@
                 <a:ea typeface="Aptos"/>
                 <a:cs typeface="Aptos"/>
               </a:rPr>
-              <a:t>AI + 소프트웨어 코어</a:t>
+              <a:t>명확한 운영 문제</a:t>
             </a:r>
           </a:p>
         </p:txBody>
@@ -6946,7 +6946,7 @@
           <p:cNvPr id="10" name="">
             <a:extLst xmlns:a="http://schemas.openxmlformats.org/drawingml/2006/main">
               <a:ext uri="{FF2B5EF4-FFF2-40B4-BE49-F238E27FC236}">
-                <a16:creationId xmlns:a16="http://schemas.microsoft.com/office/drawing/2014/main" id="{EC3EFE05-6821-496B-84BE-47835551026C}"/>
+                <a16:creationId xmlns:a16="http://schemas.microsoft.com/office/drawing/2014/main" id="{C9071118-F985-4091-8B85-C097D25A359C}"/>
               </a:ext>
             </a:extLst>
           </p:cNvPr>
@@ -6979,7 +6979,7 @@
           <p:cNvPr id="11" name="">
             <a:extLst xmlns:a="http://schemas.openxmlformats.org/drawingml/2006/main">
               <a:ext uri="{FF2B5EF4-FFF2-40B4-BE49-F238E27FC236}">
-                <a16:creationId xmlns:a16="http://schemas.microsoft.com/office/drawing/2014/main" id="{C1C44F65-43D0-413B-BDEB-98F61E25CC88}"/>
+                <a16:creationId xmlns:a16="http://schemas.microsoft.com/office/drawing/2014/main" id="{BF92FC76-F2FA-41A3-BDA9-EC86BE0636B5}"/>
               </a:ext>
             </a:extLst>
           </p:cNvPr>
@@ -7014,7 +7014,7 @@
           <p:cNvPr id="12" name="">
             <a:extLst xmlns:a="http://schemas.openxmlformats.org/drawingml/2006/main">
               <a:ext uri="{FF2B5EF4-FFF2-40B4-BE49-F238E27FC236}">
-                <a16:creationId xmlns:a16="http://schemas.microsoft.com/office/drawing/2014/main" id="{329B7963-9A50-4153-9DAB-86FB0930344E}"/>
+                <a16:creationId xmlns:a16="http://schemas.microsoft.com/office/drawing/2014/main" id="{4F1FE9C8-E6D5-4E46-BE15-C0FE345DB6B1}"/>
               </a:ext>
             </a:extLst>
           </p:cNvPr>
@@ -7078,7 +7078,7 @@
           <p:cNvPr id="13" name="">
             <a:extLst xmlns:a="http://schemas.openxmlformats.org/drawingml/2006/main">
               <a:ext uri="{FF2B5EF4-FFF2-40B4-BE49-F238E27FC236}">
-                <a16:creationId xmlns:a16="http://schemas.microsoft.com/office/drawing/2014/main" id="{7B17F26A-DA68-4C40-B029-C7D8AC5A82E0}"/>
+                <a16:creationId xmlns:a16="http://schemas.microsoft.com/office/drawing/2014/main" id="{46EDA260-9BA3-4FF5-9BA9-3BE9974A01C4}"/>
               </a:ext>
             </a:extLst>
           </p:cNvPr>
@@ -7132,7 +7132,7 @@
                 <a:ea typeface="Aptos"/>
                 <a:cs typeface="Aptos"/>
               </a:rPr>
-              <a:t>도입을 돕는 인터랙티브 경험</a:t>
+              <a:t>증가하는 AI 수요</a:t>
             </a:r>
           </a:p>
         </p:txBody>
@@ -7142,7 +7142,7 @@
           <p:cNvPr id="14" name="">
             <a:extLst xmlns:a="http://schemas.openxmlformats.org/drawingml/2006/main">
               <a:ext uri="{FF2B5EF4-FFF2-40B4-BE49-F238E27FC236}">
-                <a16:creationId xmlns:a16="http://schemas.microsoft.com/office/drawing/2014/main" id="{66C65AF8-015B-452D-AB47-C8F89DAF7C16}"/>
+                <a16:creationId xmlns:a16="http://schemas.microsoft.com/office/drawing/2014/main" id="{8B1FBBBB-CC4F-4AB3-BA9C-AE284C822999}"/>
               </a:ext>
             </a:extLst>
           </p:cNvPr>
@@ -7175,7 +7175,7 @@
           <p:cNvPr id="15" name="">
             <a:extLst xmlns:a="http://schemas.openxmlformats.org/drawingml/2006/main">
               <a:ext uri="{FF2B5EF4-FFF2-40B4-BE49-F238E27FC236}">
-                <a16:creationId xmlns:a16="http://schemas.microsoft.com/office/drawing/2014/main" id="{A04B9DAF-9121-4373-9161-3C0B6E34E4E7}"/>
+                <a16:creationId xmlns:a16="http://schemas.microsoft.com/office/drawing/2014/main" id="{401DE343-EE79-4F69-A3FE-A326EB366AEE}"/>
               </a:ext>
             </a:extLst>
           </p:cNvPr>
@@ -7210,7 +7210,7 @@
           <p:cNvPr id="16" name="">
             <a:extLst xmlns:a="http://schemas.openxmlformats.org/drawingml/2006/main">
               <a:ext uri="{FF2B5EF4-FFF2-40B4-BE49-F238E27FC236}">
-                <a16:creationId xmlns:a16="http://schemas.microsoft.com/office/drawing/2014/main" id="{F2FFC2C1-8C07-4A09-B5E1-2EBD281FC75D}"/>
+                <a16:creationId xmlns:a16="http://schemas.microsoft.com/office/drawing/2014/main" id="{52C14B7D-9B6C-4E22-8560-FD11090AE7CC}"/>
               </a:ext>
             </a:extLst>
           </p:cNvPr>
@@ -7274,7 +7274,7 @@
           <p:cNvPr id="17" name="">
             <a:extLst xmlns:a="http://schemas.openxmlformats.org/drawingml/2006/main">
               <a:ext uri="{FF2B5EF4-FFF2-40B4-BE49-F238E27FC236}">
-                <a16:creationId xmlns:a16="http://schemas.microsoft.com/office/drawing/2014/main" id="{F03B68ED-49F3-4819-BB72-D8A49A442134}"/>
+                <a16:creationId xmlns:a16="http://schemas.microsoft.com/office/drawing/2014/main" id="{E5F95161-B51A-4F0D-B805-785D34198858}"/>
               </a:ext>
             </a:extLst>
           </p:cNvPr>
@@ -7328,7 +7328,7 @@
                 <a:ea typeface="Aptos"/>
                 <a:cs typeface="Aptos"/>
               </a:rPr>
-              <a:t>로보틱스와 자동화 프런티어</a:t>
+              <a:t>기술 실행력 필요</a:t>
             </a:r>
           </a:p>
         </p:txBody>
@@ -7338,7 +7338,7 @@
           <p:cNvPr id="18" name="">
             <a:extLst xmlns:a="http://schemas.openxmlformats.org/drawingml/2006/main">
               <a:ext uri="{FF2B5EF4-FFF2-40B4-BE49-F238E27FC236}">
-                <a16:creationId xmlns:a16="http://schemas.microsoft.com/office/drawing/2014/main" id="{430FFE4C-B371-474C-99B0-4EA2BFF32D02}"/>
+                <a16:creationId xmlns:a16="http://schemas.microsoft.com/office/drawing/2014/main" id="{6EFF87C3-AA03-4302-9C0D-9D43C219147B}"/>
               </a:ext>
             </a:extLst>
           </p:cNvPr>
@@ -7402,7 +7402,7 @@
           <p:cNvPr id="19" name="">
             <a:extLst xmlns:a="http://schemas.openxmlformats.org/drawingml/2006/main">
               <a:ext uri="{FF2B5EF4-FFF2-40B4-BE49-F238E27FC236}">
-                <a16:creationId xmlns:a16="http://schemas.microsoft.com/office/drawing/2014/main" id="{60E97B7B-3070-452F-9022-66FDA06D2EA7}"/>
+                <a16:creationId xmlns:a16="http://schemas.microsoft.com/office/drawing/2014/main" id="{424392C0-0FCC-4D24-AE0A-7AA553C750E8}"/>
               </a:ext>
             </a:extLst>
           </p:cNvPr>
@@ -7435,7 +7435,7 @@
           <p:cNvPr id="20" name="">
             <a:extLst xmlns:a="http://schemas.openxmlformats.org/drawingml/2006/main">
               <a:ext uri="{FF2B5EF4-FFF2-40B4-BE49-F238E27FC236}">
-                <a16:creationId xmlns:a16="http://schemas.microsoft.com/office/drawing/2014/main" id="{B462C927-7F46-4742-ADB9-48ECF6FCE6FE}"/>
+                <a16:creationId xmlns:a16="http://schemas.microsoft.com/office/drawing/2014/main" id="{673F2A9A-99F7-477C-8C3E-0893B2B6E687}"/>
               </a:ext>
             </a:extLst>
           </p:cNvPr>
@@ -7499,7 +7499,7 @@
           <p:cNvPr id="21" name="">
             <a:extLst xmlns:a="http://schemas.openxmlformats.org/drawingml/2006/main">
               <a:ext uri="{FF2B5EF4-FFF2-40B4-BE49-F238E27FC236}">
-                <a16:creationId xmlns:a16="http://schemas.microsoft.com/office/drawing/2014/main" id="{DF518B35-455D-4748-A6DD-0DCF9891910E}"/>
+                <a16:creationId xmlns:a16="http://schemas.microsoft.com/office/drawing/2014/main" id="{8BE51058-C1A6-4A8F-8FCB-A3715AA1D40A}"/>
               </a:ext>
             </a:extLst>
           </p:cNvPr>
@@ -7561,7 +7561,7 @@
     </p:spTree>
     <p:extLst>
       <p:ext uri="{BB962C8B-B14F-4D97-AF65-F5344CB8AC3E}">
-        <p14:creationId xmlns:p14="http://schemas.microsoft.com/office/powerpoint/2010/main" val="1730942621"/>
+        <p14:creationId xmlns:p14="http://schemas.microsoft.com/office/powerpoint/2010/main" val="1488233851"/>
       </p:ext>
     </p:extLst>
   </p:cSld>
@@ -7589,7 +7589,7 @@
           <p:nvPr/>
         </p:nvPicPr>
         <p:blipFill>
-          <a:blip xmlns:r="http://schemas.openxmlformats.org/officeDocument/2006/relationships" xmlns:a="http://schemas.openxmlformats.org/drawingml/2006/main" r:embed="R443a93137d664ac2"/>
+          <a:blip xmlns:r="http://schemas.openxmlformats.org/officeDocument/2006/relationships" xmlns:a="http://schemas.openxmlformats.org/drawingml/2006/main" r:embed="R8827be3f916d4355"/>
           <a:srcRect xmlns:a="http://schemas.openxmlformats.org/drawingml/2006/main" l="0" t="27" r="0" b="27"/>
           <a:stretch xmlns:a="http://schemas.openxmlformats.org/drawingml/2006/main">
             <a:fillRect l="0" t="0" r="0" b="0"/>
@@ -7610,7 +7610,7 @@
           <p:cNvPr id="2" name="">
             <a:extLst xmlns:a="http://schemas.openxmlformats.org/drawingml/2006/main">
               <a:ext uri="{FF2B5EF4-FFF2-40B4-BE49-F238E27FC236}">
-                <a16:creationId xmlns:a16="http://schemas.microsoft.com/office/drawing/2014/main" id="{DCE5FEB4-7DE7-47D7-963F-80BCC7706AC0}"/>
+                <a16:creationId xmlns:a16="http://schemas.microsoft.com/office/drawing/2014/main" id="{4130C032-8F39-4FD2-B438-24904B9940BD}"/>
               </a:ext>
             </a:extLst>
           </p:cNvPr>
@@ -7647,7 +7647,7 @@
           <p:cNvPr id="3" name="">
             <a:extLst xmlns:a="http://schemas.openxmlformats.org/drawingml/2006/main">
               <a:ext uri="{FF2B5EF4-FFF2-40B4-BE49-F238E27FC236}">
-                <a16:creationId xmlns:a16="http://schemas.microsoft.com/office/drawing/2014/main" id="{2F49331D-D7E9-462E-88BB-9B106837ACF8}"/>
+                <a16:creationId xmlns:a16="http://schemas.microsoft.com/office/drawing/2014/main" id="{3C14F554-F7EC-46ED-BFEC-DD050D9C6F5E}"/>
               </a:ext>
             </a:extLst>
           </p:cNvPr>
@@ -7684,7 +7684,7 @@
           <p:cNvPr id="4" name="">
             <a:extLst xmlns:a="http://schemas.openxmlformats.org/drawingml/2006/main">
               <a:ext uri="{FF2B5EF4-FFF2-40B4-BE49-F238E27FC236}">
-                <a16:creationId xmlns:a16="http://schemas.microsoft.com/office/drawing/2014/main" id="{2B3AA68A-BA53-422C-9EC3-52E36836CA69}"/>
+                <a16:creationId xmlns:a16="http://schemas.microsoft.com/office/drawing/2014/main" id="{2499191D-2C58-4E0C-BD8A-C4CB299BC2B4}"/>
               </a:ext>
             </a:extLst>
           </p:cNvPr>
@@ -7748,7 +7748,7 @@
           <p:cNvPr id="5" name="">
             <a:extLst xmlns:a="http://schemas.openxmlformats.org/drawingml/2006/main">
               <a:ext uri="{FF2B5EF4-FFF2-40B4-BE49-F238E27FC236}">
-                <a16:creationId xmlns:a16="http://schemas.microsoft.com/office/drawing/2014/main" id="{7959553B-CE3C-4969-843B-C7B055FF0CB0}"/>
+                <a16:creationId xmlns:a16="http://schemas.microsoft.com/office/drawing/2014/main" id="{07E99D0E-51E4-4DDA-879A-B5331B608564}"/>
               </a:ext>
             </a:extLst>
           </p:cNvPr>
@@ -7812,7 +7812,7 @@
           <p:cNvPr id="6" name="">
             <a:extLst xmlns:a="http://schemas.openxmlformats.org/drawingml/2006/main">
               <a:ext uri="{FF2B5EF4-FFF2-40B4-BE49-F238E27FC236}">
-                <a16:creationId xmlns:a16="http://schemas.microsoft.com/office/drawing/2014/main" id="{F6651440-DDE8-4600-9E53-D895AFE3CEE0}"/>
+                <a16:creationId xmlns:a16="http://schemas.microsoft.com/office/drawing/2014/main" id="{72551658-6F73-4458-B3A6-D7303D220726}"/>
               </a:ext>
             </a:extLst>
           </p:cNvPr>
@@ -7876,7 +7876,7 @@
           <p:cNvPr id="7" name="">
             <a:extLst xmlns:a="http://schemas.openxmlformats.org/drawingml/2006/main">
               <a:ext uri="{FF2B5EF4-FFF2-40B4-BE49-F238E27FC236}">
-                <a16:creationId xmlns:a16="http://schemas.microsoft.com/office/drawing/2014/main" id="{814C014D-BF8A-4F1C-8267-9475DDCCA0D3}"/>
+                <a16:creationId xmlns:a16="http://schemas.microsoft.com/office/drawing/2014/main" id="{B691F354-025D-48C6-8D01-B90AE1A44D66}"/>
               </a:ext>
             </a:extLst>
           </p:cNvPr>
@@ -7911,7 +7911,7 @@
           <p:cNvPr id="8" name="">
             <a:extLst xmlns:a="http://schemas.openxmlformats.org/drawingml/2006/main">
               <a:ext uri="{FF2B5EF4-FFF2-40B4-BE49-F238E27FC236}">
-                <a16:creationId xmlns:a16="http://schemas.microsoft.com/office/drawing/2014/main" id="{AEDFAC74-11FD-4400-8C10-07DD345F4D26}"/>
+                <a16:creationId xmlns:a16="http://schemas.microsoft.com/office/drawing/2014/main" id="{942FCD83-10D5-4B53-A9D4-5A30AA323E0C}"/>
               </a:ext>
             </a:extLst>
           </p:cNvPr>
@@ -7975,7 +7975,7 @@
           <p:cNvPr id="9" name="">
             <a:extLst xmlns:a="http://schemas.openxmlformats.org/drawingml/2006/main">
               <a:ext uri="{FF2B5EF4-FFF2-40B4-BE49-F238E27FC236}">
-                <a16:creationId xmlns:a16="http://schemas.microsoft.com/office/drawing/2014/main" id="{FDB1AE67-89D5-4374-9855-D7AC2A5D8B57}"/>
+                <a16:creationId xmlns:a16="http://schemas.microsoft.com/office/drawing/2014/main" id="{6BDCF97A-9EF2-489C-867F-25E952A57EEA}"/>
               </a:ext>
             </a:extLst>
           </p:cNvPr>
@@ -8039,7 +8039,7 @@
           <p:cNvPr id="10" name="">
             <a:extLst xmlns:a="http://schemas.openxmlformats.org/drawingml/2006/main">
               <a:ext uri="{FF2B5EF4-FFF2-40B4-BE49-F238E27FC236}">
-                <a16:creationId xmlns:a16="http://schemas.microsoft.com/office/drawing/2014/main" id="{DA262152-B6CD-4EAC-9E60-CAA198CEB725}"/>
+                <a16:creationId xmlns:a16="http://schemas.microsoft.com/office/drawing/2014/main" id="{57F0F05E-9905-453B-A983-0A7F57108413}"/>
               </a:ext>
             </a:extLst>
           </p:cNvPr>
@@ -8074,7 +8074,7 @@
           <p:cNvPr id="11" name="">
             <a:extLst xmlns:a="http://schemas.openxmlformats.org/drawingml/2006/main">
               <a:ext uri="{FF2B5EF4-FFF2-40B4-BE49-F238E27FC236}">
-                <a16:creationId xmlns:a16="http://schemas.microsoft.com/office/drawing/2014/main" id="{BC6D893E-ED70-4A07-BF6C-2A2ACB49E10F}"/>
+                <a16:creationId xmlns:a16="http://schemas.microsoft.com/office/drawing/2014/main" id="{44E56462-8880-4ED8-8BE5-8CE08B7C7062}"/>
               </a:ext>
             </a:extLst>
           </p:cNvPr>
@@ -8138,7 +8138,7 @@
           <p:cNvPr id="12" name="">
             <a:extLst xmlns:a="http://schemas.openxmlformats.org/drawingml/2006/main">
               <a:ext uri="{FF2B5EF4-FFF2-40B4-BE49-F238E27FC236}">
-                <a16:creationId xmlns:a16="http://schemas.microsoft.com/office/drawing/2014/main" id="{B017EDBC-FCBD-40D8-906C-D8E156C26F76}"/>
+                <a16:creationId xmlns:a16="http://schemas.microsoft.com/office/drawing/2014/main" id="{01D1AB6D-C44B-478A-BBD2-256C29646389}"/>
               </a:ext>
             </a:extLst>
           </p:cNvPr>
@@ -8202,7 +8202,7 @@
           <p:cNvPr id="13" name="">
             <a:extLst xmlns:a="http://schemas.openxmlformats.org/drawingml/2006/main">
               <a:ext uri="{FF2B5EF4-FFF2-40B4-BE49-F238E27FC236}">
-                <a16:creationId xmlns:a16="http://schemas.microsoft.com/office/drawing/2014/main" id="{4D60ADEE-E364-4A5A-8247-14B3B9D1716B}"/>
+                <a16:creationId xmlns:a16="http://schemas.microsoft.com/office/drawing/2014/main" id="{E4148126-85DB-4C07-BB7A-45B7C4081FAA}"/>
               </a:ext>
             </a:extLst>
           </p:cNvPr>
@@ -8237,7 +8237,7 @@
           <p:cNvPr id="14" name="">
             <a:extLst xmlns:a="http://schemas.openxmlformats.org/drawingml/2006/main">
               <a:ext uri="{FF2B5EF4-FFF2-40B4-BE49-F238E27FC236}">
-                <a16:creationId xmlns:a16="http://schemas.microsoft.com/office/drawing/2014/main" id="{2B7DA5D6-8ECC-4077-A7DC-AA9E2C2B529A}"/>
+                <a16:creationId xmlns:a16="http://schemas.microsoft.com/office/drawing/2014/main" id="{01BD9627-12A6-4DD4-94F1-6CC57A7A4A38}"/>
               </a:ext>
             </a:extLst>
           </p:cNvPr>
@@ -8301,7 +8301,7 @@
           <p:cNvPr id="15" name="">
             <a:extLst xmlns:a="http://schemas.openxmlformats.org/drawingml/2006/main">
               <a:ext uri="{FF2B5EF4-FFF2-40B4-BE49-F238E27FC236}">
-                <a16:creationId xmlns:a16="http://schemas.microsoft.com/office/drawing/2014/main" id="{43750D0A-A274-4532-84B4-55B2AB8462A1}"/>
+                <a16:creationId xmlns:a16="http://schemas.microsoft.com/office/drawing/2014/main" id="{C3CFB019-BF6A-40C0-8045-BDAF03587604}"/>
               </a:ext>
             </a:extLst>
           </p:cNvPr>
@@ -8365,7 +8365,7 @@
           <p:cNvPr id="16" name="">
             <a:extLst xmlns:a="http://schemas.openxmlformats.org/drawingml/2006/main">
               <a:ext uri="{FF2B5EF4-FFF2-40B4-BE49-F238E27FC236}">
-                <a16:creationId xmlns:a16="http://schemas.microsoft.com/office/drawing/2014/main" id="{8D593CFA-0084-4DBA-A9C2-11F8DE90531B}"/>
+                <a16:creationId xmlns:a16="http://schemas.microsoft.com/office/drawing/2014/main" id="{8BD0558D-8108-46EB-B0CF-32B93750C68F}"/>
               </a:ext>
             </a:extLst>
           </p:cNvPr>
@@ -8400,7 +8400,7 @@
           <p:cNvPr id="17" name="">
             <a:extLst xmlns:a="http://schemas.openxmlformats.org/drawingml/2006/main">
               <a:ext uri="{FF2B5EF4-FFF2-40B4-BE49-F238E27FC236}">
-                <a16:creationId xmlns:a16="http://schemas.microsoft.com/office/drawing/2014/main" id="{D8ED39F3-D70F-469D-8EA2-D9A7DF8F6D0A}"/>
+                <a16:creationId xmlns:a16="http://schemas.microsoft.com/office/drawing/2014/main" id="{353B3EE0-3B98-4658-BA95-70866949FCA3}"/>
               </a:ext>
             </a:extLst>
           </p:cNvPr>
@@ -8464,7 +8464,7 @@
           <p:cNvPr id="18" name="">
             <a:extLst xmlns:a="http://schemas.openxmlformats.org/drawingml/2006/main">
               <a:ext uri="{FF2B5EF4-FFF2-40B4-BE49-F238E27FC236}">
-                <a16:creationId xmlns:a16="http://schemas.microsoft.com/office/drawing/2014/main" id="{3AF509D9-87B4-40B7-A5C2-DC1140A6105A}"/>
+                <a16:creationId xmlns:a16="http://schemas.microsoft.com/office/drawing/2014/main" id="{499871A0-954A-40B5-B5C9-F0EE6C25FB29}"/>
               </a:ext>
             </a:extLst>
           </p:cNvPr>
@@ -8528,7 +8528,7 @@
           <p:cNvPr id="19" name="">
             <a:extLst xmlns:a="http://schemas.openxmlformats.org/drawingml/2006/main">
               <a:ext uri="{FF2B5EF4-FFF2-40B4-BE49-F238E27FC236}">
-                <a16:creationId xmlns:a16="http://schemas.microsoft.com/office/drawing/2014/main" id="{A0A6910F-B275-4A3E-B987-6D694232DF9F}"/>
+                <a16:creationId xmlns:a16="http://schemas.microsoft.com/office/drawing/2014/main" id="{5D5F356E-A88E-4454-8683-6A18CB746EA1}"/>
               </a:ext>
             </a:extLst>
           </p:cNvPr>
@@ -8592,7 +8592,7 @@
           <p:cNvPr id="20" name="">
             <a:extLst xmlns:a="http://schemas.openxmlformats.org/drawingml/2006/main">
               <a:ext uri="{FF2B5EF4-FFF2-40B4-BE49-F238E27FC236}">
-                <a16:creationId xmlns:a16="http://schemas.microsoft.com/office/drawing/2014/main" id="{36959628-0B4D-400A-A16D-4A8A121D8186}"/>
+                <a16:creationId xmlns:a16="http://schemas.microsoft.com/office/drawing/2014/main" id="{848C08EB-25F9-4383-8021-89C161362D0E}"/>
               </a:ext>
             </a:extLst>
           </p:cNvPr>
@@ -8625,7 +8625,7 @@
           <p:cNvPr id="21" name="">
             <a:extLst xmlns:a="http://schemas.openxmlformats.org/drawingml/2006/main">
               <a:ext uri="{FF2B5EF4-FFF2-40B4-BE49-F238E27FC236}">
-                <a16:creationId xmlns:a16="http://schemas.microsoft.com/office/drawing/2014/main" id="{E438304D-704C-4AEB-87C9-F37EB13B830A}"/>
+                <a16:creationId xmlns:a16="http://schemas.microsoft.com/office/drawing/2014/main" id="{06989C4C-9C73-4E82-92CB-C1992226D4CA}"/>
               </a:ext>
             </a:extLst>
           </p:cNvPr>
@@ -8658,7 +8658,7 @@
           <p:cNvPr id="22" name="">
             <a:extLst xmlns:a="http://schemas.openxmlformats.org/drawingml/2006/main">
               <a:ext uri="{FF2B5EF4-FFF2-40B4-BE49-F238E27FC236}">
-                <a16:creationId xmlns:a16="http://schemas.microsoft.com/office/drawing/2014/main" id="{14B08C7D-DE97-4A39-91CE-1CEA007D14F2}"/>
+                <a16:creationId xmlns:a16="http://schemas.microsoft.com/office/drawing/2014/main" id="{A890FB8F-0307-4951-AE0E-2FA1F95D5F8D}"/>
               </a:ext>
             </a:extLst>
           </p:cNvPr>
@@ -8722,7 +8722,7 @@
           <p:cNvPr id="23" name="">
             <a:extLst xmlns:a="http://schemas.openxmlformats.org/drawingml/2006/main">
               <a:ext uri="{FF2B5EF4-FFF2-40B4-BE49-F238E27FC236}">
-                <a16:creationId xmlns:a16="http://schemas.microsoft.com/office/drawing/2014/main" id="{B51EFD9E-1F22-4EEC-99F2-35E875B3B5D6}"/>
+                <a16:creationId xmlns:a16="http://schemas.microsoft.com/office/drawing/2014/main" id="{D4E2A151-FD8C-4A91-917B-F95DF35FD3DD}"/>
               </a:ext>
             </a:extLst>
           </p:cNvPr>
@@ -8755,7 +8755,7 @@
           <p:cNvPr id="24" name="">
             <a:extLst xmlns:a="http://schemas.openxmlformats.org/drawingml/2006/main">
               <a:ext uri="{FF2B5EF4-FFF2-40B4-BE49-F238E27FC236}">
-                <a16:creationId xmlns:a16="http://schemas.microsoft.com/office/drawing/2014/main" id="{433B741C-929D-4F64-98E3-42FC9CE2404F}"/>
+                <a16:creationId xmlns:a16="http://schemas.microsoft.com/office/drawing/2014/main" id="{D0972945-0A3E-4454-8CB3-153EE0D9CB6F}"/>
               </a:ext>
             </a:extLst>
           </p:cNvPr>
@@ -8788,7 +8788,7 @@
           <p:cNvPr id="25" name="">
             <a:extLst xmlns:a="http://schemas.openxmlformats.org/drawingml/2006/main">
               <a:ext uri="{FF2B5EF4-FFF2-40B4-BE49-F238E27FC236}">
-                <a16:creationId xmlns:a16="http://schemas.microsoft.com/office/drawing/2014/main" id="{C0E72C21-C180-468C-94EB-F94EB625A863}"/>
+                <a16:creationId xmlns:a16="http://schemas.microsoft.com/office/drawing/2014/main" id="{0A754BA1-D1E3-4AA8-8164-A6991AF07AB3}"/>
               </a:ext>
             </a:extLst>
           </p:cNvPr>
@@ -8852,7 +8852,7 @@
           <p:cNvPr id="26" name="">
             <a:extLst xmlns:a="http://schemas.openxmlformats.org/drawingml/2006/main">
               <a:ext uri="{FF2B5EF4-FFF2-40B4-BE49-F238E27FC236}">
-                <a16:creationId xmlns:a16="http://schemas.microsoft.com/office/drawing/2014/main" id="{E4E99C4F-D8C9-49FE-81F1-A604F516BA12}"/>
+                <a16:creationId xmlns:a16="http://schemas.microsoft.com/office/drawing/2014/main" id="{19A6399D-8599-4CF5-AF83-8453E4823DF3}"/>
               </a:ext>
             </a:extLst>
           </p:cNvPr>
@@ -8885,7 +8885,7 @@
           <p:cNvPr id="27" name="">
             <a:extLst xmlns:a="http://schemas.openxmlformats.org/drawingml/2006/main">
               <a:ext uri="{FF2B5EF4-FFF2-40B4-BE49-F238E27FC236}">
-                <a16:creationId xmlns:a16="http://schemas.microsoft.com/office/drawing/2014/main" id="{F077DEB8-CC97-4AE5-9E86-E351006D3BD0}"/>
+                <a16:creationId xmlns:a16="http://schemas.microsoft.com/office/drawing/2014/main" id="{05CD8F5F-9000-41E8-9028-EDE9CB4DF1C7}"/>
               </a:ext>
             </a:extLst>
           </p:cNvPr>
@@ -8918,7 +8918,7 @@
           <p:cNvPr id="28" name="">
             <a:extLst xmlns:a="http://schemas.openxmlformats.org/drawingml/2006/main">
               <a:ext uri="{FF2B5EF4-FFF2-40B4-BE49-F238E27FC236}">
-                <a16:creationId xmlns:a16="http://schemas.microsoft.com/office/drawing/2014/main" id="{C068473C-2418-4752-A51B-68EA98FE911F}"/>
+                <a16:creationId xmlns:a16="http://schemas.microsoft.com/office/drawing/2014/main" id="{A5968B33-EDB3-4A28-B449-E770C2BC369A}"/>
               </a:ext>
             </a:extLst>
           </p:cNvPr>
@@ -8982,7 +8982,7 @@
           <p:cNvPr id="29" name="">
             <a:extLst xmlns:a="http://schemas.openxmlformats.org/drawingml/2006/main">
               <a:ext uri="{FF2B5EF4-FFF2-40B4-BE49-F238E27FC236}">
-                <a16:creationId xmlns:a16="http://schemas.microsoft.com/office/drawing/2014/main" id="{3FD54CA7-BF89-4617-9DAE-3D8FDCD6C27F}"/>
+                <a16:creationId xmlns:a16="http://schemas.microsoft.com/office/drawing/2014/main" id="{43053DDF-E7FD-4957-AA99-D2A786DE0A12}"/>
               </a:ext>
             </a:extLst>
           </p:cNvPr>
@@ -9015,7 +9015,7 @@
           <p:cNvPr id="30" name="">
             <a:extLst xmlns:a="http://schemas.openxmlformats.org/drawingml/2006/main">
               <a:ext uri="{FF2B5EF4-FFF2-40B4-BE49-F238E27FC236}">
-                <a16:creationId xmlns:a16="http://schemas.microsoft.com/office/drawing/2014/main" id="{D09DDD23-ACDE-4220-ACD0-C87447DDC1AE}"/>
+                <a16:creationId xmlns:a16="http://schemas.microsoft.com/office/drawing/2014/main" id="{7806059E-CD4B-44E4-94D8-CC92067ED898}"/>
               </a:ext>
             </a:extLst>
           </p:cNvPr>
@@ -9079,7 +9079,7 @@
           <p:cNvPr id="31" name="">
             <a:extLst xmlns:a="http://schemas.openxmlformats.org/drawingml/2006/main">
               <a:ext uri="{FF2B5EF4-FFF2-40B4-BE49-F238E27FC236}">
-                <a16:creationId xmlns:a16="http://schemas.microsoft.com/office/drawing/2014/main" id="{62922320-9CBA-478B-8177-987A3E230ED6}"/>
+                <a16:creationId xmlns:a16="http://schemas.microsoft.com/office/drawing/2014/main" id="{D45023A2-4691-4B82-85EA-FCAC08D72CF7}"/>
               </a:ext>
             </a:extLst>
           </p:cNvPr>
@@ -9141,7 +9141,7 @@
     </p:spTree>
     <p:extLst>
       <p:ext uri="{BB962C8B-B14F-4D97-AF65-F5344CB8AC3E}">
-        <p14:creationId xmlns:p14="http://schemas.microsoft.com/office/powerpoint/2010/main" val="312912776"/>
+        <p14:creationId xmlns:p14="http://schemas.microsoft.com/office/powerpoint/2010/main" val="181461470"/>
       </p:ext>
     </p:extLst>
   </p:cSld>
@@ -9169,7 +9169,7 @@
           <p:nvPr/>
         </p:nvPicPr>
         <p:blipFill>
-          <a:blip xmlns:r="http://schemas.openxmlformats.org/officeDocument/2006/relationships" xmlns:a="http://schemas.openxmlformats.org/drawingml/2006/main" r:embed="R3e6d65ba984a41ec"/>
+          <a:blip xmlns:r="http://schemas.openxmlformats.org/officeDocument/2006/relationships" xmlns:a="http://schemas.openxmlformats.org/drawingml/2006/main" r:embed="Rd5880dddf51d443c"/>
           <a:srcRect xmlns:a="http://schemas.openxmlformats.org/drawingml/2006/main" l="0" t="7813" r="0" b="7813"/>
           <a:stretch xmlns:a="http://schemas.openxmlformats.org/drawingml/2006/main">
             <a:fillRect l="0" t="0" r="0" b="0"/>
@@ -9190,7 +9190,7 @@
           <p:cNvPr id="2" name="">
             <a:extLst xmlns:a="http://schemas.openxmlformats.org/drawingml/2006/main">
               <a:ext uri="{FF2B5EF4-FFF2-40B4-BE49-F238E27FC236}">
-                <a16:creationId xmlns:a16="http://schemas.microsoft.com/office/drawing/2014/main" id="{410344F9-F97D-4301-9288-A8743DE598CF}"/>
+                <a16:creationId xmlns:a16="http://schemas.microsoft.com/office/drawing/2014/main" id="{171ACB2A-C4D5-403A-89BF-78C9F097F29C}"/>
               </a:ext>
             </a:extLst>
           </p:cNvPr>
@@ -9227,7 +9227,7 @@
           <p:cNvPr id="3" name="">
             <a:extLst xmlns:a="http://schemas.openxmlformats.org/drawingml/2006/main">
               <a:ext uri="{FF2B5EF4-FFF2-40B4-BE49-F238E27FC236}">
-                <a16:creationId xmlns:a16="http://schemas.microsoft.com/office/drawing/2014/main" id="{7427B706-00A2-4346-8068-A43DE32F55C3}"/>
+                <a16:creationId xmlns:a16="http://schemas.microsoft.com/office/drawing/2014/main" id="{7C02A4B4-490A-4760-8F8B-5752D46058E0}"/>
               </a:ext>
             </a:extLst>
           </p:cNvPr>
@@ -9264,7 +9264,7 @@
           <p:cNvPr id="4" name="">
             <a:extLst xmlns:a="http://schemas.openxmlformats.org/drawingml/2006/main">
               <a:ext uri="{FF2B5EF4-FFF2-40B4-BE49-F238E27FC236}">
-                <a16:creationId xmlns:a16="http://schemas.microsoft.com/office/drawing/2014/main" id="{D576F53C-E357-4FDE-8523-B8D164785F8D}"/>
+                <a16:creationId xmlns:a16="http://schemas.microsoft.com/office/drawing/2014/main" id="{BD5DB464-3822-4A61-B98D-9218427126A3}"/>
               </a:ext>
             </a:extLst>
           </p:cNvPr>
@@ -9328,7 +9328,7 @@
           <p:cNvPr id="5" name="">
             <a:extLst xmlns:a="http://schemas.openxmlformats.org/drawingml/2006/main">
               <a:ext uri="{FF2B5EF4-FFF2-40B4-BE49-F238E27FC236}">
-                <a16:creationId xmlns:a16="http://schemas.microsoft.com/office/drawing/2014/main" id="{0F3AB12D-2F98-45D9-8D22-4C697ECB0306}"/>
+                <a16:creationId xmlns:a16="http://schemas.microsoft.com/office/drawing/2014/main" id="{E3F1B6A1-4FE5-4B2B-B02C-F9A986DEB602}"/>
               </a:ext>
             </a:extLst>
           </p:cNvPr>
@@ -9392,7 +9392,7 @@
           <p:cNvPr id="6" name="">
             <a:extLst xmlns:a="http://schemas.openxmlformats.org/drawingml/2006/main">
               <a:ext uri="{FF2B5EF4-FFF2-40B4-BE49-F238E27FC236}">
-                <a16:creationId xmlns:a16="http://schemas.microsoft.com/office/drawing/2014/main" id="{D0A0FEB8-5FD1-4298-B0C2-89F1591B2715}"/>
+                <a16:creationId xmlns:a16="http://schemas.microsoft.com/office/drawing/2014/main" id="{5E26385A-D56E-4FA3-B3EA-4FEA08AAD13B}"/>
               </a:ext>
             </a:extLst>
           </p:cNvPr>
@@ -9456,7 +9456,7 @@
           <p:cNvPr id="7" name="">
             <a:extLst xmlns:a="http://schemas.openxmlformats.org/drawingml/2006/main">
               <a:ext uri="{FF2B5EF4-FFF2-40B4-BE49-F238E27FC236}">
-                <a16:creationId xmlns:a16="http://schemas.microsoft.com/office/drawing/2014/main" id="{7F624435-8A92-4759-9656-AE453DB222B7}"/>
+                <a16:creationId xmlns:a16="http://schemas.microsoft.com/office/drawing/2014/main" id="{1C09BB43-F5D0-4ABD-8B8B-BF785C749625}"/>
               </a:ext>
             </a:extLst>
           </p:cNvPr>
@@ -9491,7 +9491,7 @@
           <p:cNvPr id="8" name="">
             <a:extLst xmlns:a="http://schemas.openxmlformats.org/drawingml/2006/main">
               <a:ext uri="{FF2B5EF4-FFF2-40B4-BE49-F238E27FC236}">
-                <a16:creationId xmlns:a16="http://schemas.microsoft.com/office/drawing/2014/main" id="{4DF873FE-5862-4EB5-B3C2-2044C865D9E0}"/>
+                <a16:creationId xmlns:a16="http://schemas.microsoft.com/office/drawing/2014/main" id="{9243924C-A64A-48DE-8C42-2007FBD21ECD}"/>
               </a:ext>
             </a:extLst>
           </p:cNvPr>
@@ -9555,7 +9555,7 @@
           <p:cNvPr id="9" name="">
             <a:extLst xmlns:a="http://schemas.openxmlformats.org/drawingml/2006/main">
               <a:ext uri="{FF2B5EF4-FFF2-40B4-BE49-F238E27FC236}">
-                <a16:creationId xmlns:a16="http://schemas.microsoft.com/office/drawing/2014/main" id="{6208954F-4AA1-4C56-AFE3-94B6E0E904AA}"/>
+                <a16:creationId xmlns:a16="http://schemas.microsoft.com/office/drawing/2014/main" id="{B63A9C9E-1DA4-49AB-979B-AC77A368151F}"/>
               </a:ext>
             </a:extLst>
           </p:cNvPr>
@@ -9619,7 +9619,7 @@
           <p:cNvPr id="10" name="">
             <a:extLst xmlns:a="http://schemas.openxmlformats.org/drawingml/2006/main">
               <a:ext uri="{FF2B5EF4-FFF2-40B4-BE49-F238E27FC236}">
-                <a16:creationId xmlns:a16="http://schemas.microsoft.com/office/drawing/2014/main" id="{AEC8D1EB-E20A-41A5-B900-213EE2BFAF08}"/>
+                <a16:creationId xmlns:a16="http://schemas.microsoft.com/office/drawing/2014/main" id="{2AA2DA74-57B3-4FDA-93D7-8592BFDD9642}"/>
               </a:ext>
             </a:extLst>
           </p:cNvPr>
@@ -9652,7 +9652,7 @@
           <p:cNvPr id="11" name="">
             <a:extLst xmlns:a="http://schemas.openxmlformats.org/drawingml/2006/main">
               <a:ext uri="{FF2B5EF4-FFF2-40B4-BE49-F238E27FC236}">
-                <a16:creationId xmlns:a16="http://schemas.microsoft.com/office/drawing/2014/main" id="{2676325E-2906-4C4B-9475-F97BBA966F54}"/>
+                <a16:creationId xmlns:a16="http://schemas.microsoft.com/office/drawing/2014/main" id="{C60CC72A-9D90-478F-A75D-ADCD74A2D57E}"/>
               </a:ext>
             </a:extLst>
           </p:cNvPr>
@@ -9687,7 +9687,7 @@
           <p:cNvPr id="12" name="">
             <a:extLst xmlns:a="http://schemas.openxmlformats.org/drawingml/2006/main">
               <a:ext uri="{FF2B5EF4-FFF2-40B4-BE49-F238E27FC236}">
-                <a16:creationId xmlns:a16="http://schemas.microsoft.com/office/drawing/2014/main" id="{29CD5686-6852-467A-A8BD-8ADFD734C540}"/>
+                <a16:creationId xmlns:a16="http://schemas.microsoft.com/office/drawing/2014/main" id="{7BDD06B5-FC50-440B-BADE-47D0B7A99932}"/>
               </a:ext>
             </a:extLst>
           </p:cNvPr>
@@ -9751,7 +9751,7 @@
           <p:cNvPr id="13" name="">
             <a:extLst xmlns:a="http://schemas.openxmlformats.org/drawingml/2006/main">
               <a:ext uri="{FF2B5EF4-FFF2-40B4-BE49-F238E27FC236}">
-                <a16:creationId xmlns:a16="http://schemas.microsoft.com/office/drawing/2014/main" id="{1AB3DE5F-A8DB-497F-9D7A-180110E20297}"/>
+                <a16:creationId xmlns:a16="http://schemas.microsoft.com/office/drawing/2014/main" id="{F43363E1-E1A1-4A8A-BE72-592A3B25AE93}"/>
               </a:ext>
             </a:extLst>
           </p:cNvPr>
@@ -9815,7 +9815,7 @@
           <p:cNvPr id="14" name="">
             <a:extLst xmlns:a="http://schemas.openxmlformats.org/drawingml/2006/main">
               <a:ext uri="{FF2B5EF4-FFF2-40B4-BE49-F238E27FC236}">
-                <a16:creationId xmlns:a16="http://schemas.microsoft.com/office/drawing/2014/main" id="{6F837DCD-20E8-43C3-AF92-8472D8D200D4}"/>
+                <a16:creationId xmlns:a16="http://schemas.microsoft.com/office/drawing/2014/main" id="{94C4A2A9-22FA-4532-9549-66648FDA9EC2}"/>
               </a:ext>
             </a:extLst>
           </p:cNvPr>
@@ -9848,7 +9848,7 @@
           <p:cNvPr id="15" name="">
             <a:extLst xmlns:a="http://schemas.openxmlformats.org/drawingml/2006/main">
               <a:ext uri="{FF2B5EF4-FFF2-40B4-BE49-F238E27FC236}">
-                <a16:creationId xmlns:a16="http://schemas.microsoft.com/office/drawing/2014/main" id="{9C2B8A33-026E-41CF-AEF0-17376A8F8BD4}"/>
+                <a16:creationId xmlns:a16="http://schemas.microsoft.com/office/drawing/2014/main" id="{DF703B5A-E3B0-4451-B46E-CD31F5F5E2DC}"/>
               </a:ext>
             </a:extLst>
           </p:cNvPr>
@@ -9883,7 +9883,7 @@
           <p:cNvPr id="16" name="">
             <a:extLst xmlns:a="http://schemas.openxmlformats.org/drawingml/2006/main">
               <a:ext uri="{FF2B5EF4-FFF2-40B4-BE49-F238E27FC236}">
-                <a16:creationId xmlns:a16="http://schemas.microsoft.com/office/drawing/2014/main" id="{3583B78E-6969-42AA-8066-BD6B2568FDF8}"/>
+                <a16:creationId xmlns:a16="http://schemas.microsoft.com/office/drawing/2014/main" id="{B52F8D1B-64B1-425C-8417-570EED755FA4}"/>
               </a:ext>
             </a:extLst>
           </p:cNvPr>
@@ -9947,7 +9947,7 @@
           <p:cNvPr id="17" name="">
             <a:extLst xmlns:a="http://schemas.openxmlformats.org/drawingml/2006/main">
               <a:ext uri="{FF2B5EF4-FFF2-40B4-BE49-F238E27FC236}">
-                <a16:creationId xmlns:a16="http://schemas.microsoft.com/office/drawing/2014/main" id="{24C29628-9ECE-40EF-B4C6-3B4EF3D3214B}"/>
+                <a16:creationId xmlns:a16="http://schemas.microsoft.com/office/drawing/2014/main" id="{04EC0C25-50F6-4EB4-A03F-6B99664DCE24}"/>
               </a:ext>
             </a:extLst>
           </p:cNvPr>
@@ -10011,7 +10011,7 @@
           <p:cNvPr id="18" name="">
             <a:extLst xmlns:a="http://schemas.openxmlformats.org/drawingml/2006/main">
               <a:ext uri="{FF2B5EF4-FFF2-40B4-BE49-F238E27FC236}">
-                <a16:creationId xmlns:a16="http://schemas.microsoft.com/office/drawing/2014/main" id="{CADF65F2-2A92-4E66-8DE4-19667DAFA9D1}"/>
+                <a16:creationId xmlns:a16="http://schemas.microsoft.com/office/drawing/2014/main" id="{C60D297A-24DD-4729-BF03-749AA8F031F3}"/>
               </a:ext>
             </a:extLst>
           </p:cNvPr>
@@ -10044,7 +10044,7 @@
           <p:cNvPr id="19" name="">
             <a:extLst xmlns:a="http://schemas.openxmlformats.org/drawingml/2006/main">
               <a:ext uri="{FF2B5EF4-FFF2-40B4-BE49-F238E27FC236}">
-                <a16:creationId xmlns:a16="http://schemas.microsoft.com/office/drawing/2014/main" id="{631282B3-AD5E-4B20-9765-8E1420A919C1}"/>
+                <a16:creationId xmlns:a16="http://schemas.microsoft.com/office/drawing/2014/main" id="{8DCB76F8-C784-410E-888E-49EA48127988}"/>
               </a:ext>
             </a:extLst>
           </p:cNvPr>
@@ -10079,7 +10079,7 @@
           <p:cNvPr id="20" name="">
             <a:extLst xmlns:a="http://schemas.openxmlformats.org/drawingml/2006/main">
               <a:ext uri="{FF2B5EF4-FFF2-40B4-BE49-F238E27FC236}">
-                <a16:creationId xmlns:a16="http://schemas.microsoft.com/office/drawing/2014/main" id="{5B3A178A-03FA-42F5-A888-F18B605B280E}"/>
+                <a16:creationId xmlns:a16="http://schemas.microsoft.com/office/drawing/2014/main" id="{34964F73-454A-47E8-A24D-9AD87FDAEF6F}"/>
               </a:ext>
             </a:extLst>
           </p:cNvPr>
@@ -10143,7 +10143,7 @@
           <p:cNvPr id="21" name="">
             <a:extLst xmlns:a="http://schemas.openxmlformats.org/drawingml/2006/main">
               <a:ext uri="{FF2B5EF4-FFF2-40B4-BE49-F238E27FC236}">
-                <a16:creationId xmlns:a16="http://schemas.microsoft.com/office/drawing/2014/main" id="{801451E1-0977-4948-A572-177B4BF9C137}"/>
+                <a16:creationId xmlns:a16="http://schemas.microsoft.com/office/drawing/2014/main" id="{2149DE68-31D7-4E72-8789-B6CBEA657FD9}"/>
               </a:ext>
             </a:extLst>
           </p:cNvPr>
@@ -10207,7 +10207,7 @@
           <p:cNvPr id="22" name="">
             <a:extLst xmlns:a="http://schemas.openxmlformats.org/drawingml/2006/main">
               <a:ext uri="{FF2B5EF4-FFF2-40B4-BE49-F238E27FC236}">
-                <a16:creationId xmlns:a16="http://schemas.microsoft.com/office/drawing/2014/main" id="{0B64517C-0D9E-4A19-B0E1-762F1D64F351}"/>
+                <a16:creationId xmlns:a16="http://schemas.microsoft.com/office/drawing/2014/main" id="{089DC291-4863-40F4-AA80-087AC6C46D7D}"/>
               </a:ext>
             </a:extLst>
           </p:cNvPr>
@@ -10271,7 +10271,7 @@
           <p:cNvPr id="23" name="">
             <a:extLst xmlns:a="http://schemas.openxmlformats.org/drawingml/2006/main">
               <a:ext uri="{FF2B5EF4-FFF2-40B4-BE49-F238E27FC236}">
-                <a16:creationId xmlns:a16="http://schemas.microsoft.com/office/drawing/2014/main" id="{671BCF63-C942-45CB-B627-8E78D91EB64F}"/>
+                <a16:creationId xmlns:a16="http://schemas.microsoft.com/office/drawing/2014/main" id="{BEDD390C-2840-4EE4-BF05-B4EDBF78FCB4}"/>
               </a:ext>
             </a:extLst>
           </p:cNvPr>
@@ -10335,7 +10335,7 @@
           <p:cNvPr id="24" name="">
             <a:extLst xmlns:a="http://schemas.openxmlformats.org/drawingml/2006/main">
               <a:ext uri="{FF2B5EF4-FFF2-40B4-BE49-F238E27FC236}">
-                <a16:creationId xmlns:a16="http://schemas.microsoft.com/office/drawing/2014/main" id="{6161B7B5-DF99-48CE-B959-F8B2AEED35D4}"/>
+                <a16:creationId xmlns:a16="http://schemas.microsoft.com/office/drawing/2014/main" id="{6A7992B7-9EA2-4187-A00D-CF27267DCC62}"/>
               </a:ext>
             </a:extLst>
           </p:cNvPr>
@@ -10368,7 +10368,7 @@
           <p:cNvPr id="25" name="">
             <a:extLst xmlns:a="http://schemas.openxmlformats.org/drawingml/2006/main">
               <a:ext uri="{FF2B5EF4-FFF2-40B4-BE49-F238E27FC236}">
-                <a16:creationId xmlns:a16="http://schemas.microsoft.com/office/drawing/2014/main" id="{E44125B6-ED5D-4CF1-AAA7-B752600627FF}"/>
+                <a16:creationId xmlns:a16="http://schemas.microsoft.com/office/drawing/2014/main" id="{085CAC04-6015-48C2-8A31-6FC88CAE3FB7}"/>
               </a:ext>
             </a:extLst>
           </p:cNvPr>
@@ -10432,7 +10432,7 @@
           <p:cNvPr id="26" name="">
             <a:extLst xmlns:a="http://schemas.openxmlformats.org/drawingml/2006/main">
               <a:ext uri="{FF2B5EF4-FFF2-40B4-BE49-F238E27FC236}">
-                <a16:creationId xmlns:a16="http://schemas.microsoft.com/office/drawing/2014/main" id="{21D13D8E-08D4-4EDC-B81F-6F27505599DD}"/>
+                <a16:creationId xmlns:a16="http://schemas.microsoft.com/office/drawing/2014/main" id="{A061F934-5052-4843-8F7B-D793C8125EDE}"/>
               </a:ext>
             </a:extLst>
           </p:cNvPr>
@@ -10494,7 +10494,7 @@
     </p:spTree>
     <p:extLst>
       <p:ext uri="{BB962C8B-B14F-4D97-AF65-F5344CB8AC3E}">
-        <p14:creationId xmlns:p14="http://schemas.microsoft.com/office/powerpoint/2010/main" val="1934116876"/>
+        <p14:creationId xmlns:p14="http://schemas.microsoft.com/office/powerpoint/2010/main" val="791107322"/>
       </p:ext>
     </p:extLst>
   </p:cSld>
@@ -10522,7 +10522,7 @@
           <p:nvPr/>
         </p:nvPicPr>
         <p:blipFill>
-          <a:blip xmlns:r="http://schemas.openxmlformats.org/officeDocument/2006/relationships" xmlns:a="http://schemas.openxmlformats.org/drawingml/2006/main" r:embed="R45298d8ee5e445f2"/>
+          <a:blip xmlns:r="http://schemas.openxmlformats.org/officeDocument/2006/relationships" xmlns:a="http://schemas.openxmlformats.org/drawingml/2006/main" r:embed="R726da0cd09124eb7"/>
           <a:srcRect xmlns:a="http://schemas.openxmlformats.org/drawingml/2006/main" l="0" t="7813" r="0" b="7813"/>
           <a:stretch xmlns:a="http://schemas.openxmlformats.org/drawingml/2006/main">
             <a:fillRect l="0" t="0" r="0" b="0"/>
@@ -10543,7 +10543,7 @@
           <p:cNvPr id="2" name="">
             <a:extLst xmlns:a="http://schemas.openxmlformats.org/drawingml/2006/main">
               <a:ext uri="{FF2B5EF4-FFF2-40B4-BE49-F238E27FC236}">
-                <a16:creationId xmlns:a16="http://schemas.microsoft.com/office/drawing/2014/main" id="{34EC0C8E-CCF7-4A1D-81C6-CF4DE28D1D99}"/>
+                <a16:creationId xmlns:a16="http://schemas.microsoft.com/office/drawing/2014/main" id="{D4E6880F-8494-4001-93A8-2DF76426E993}"/>
               </a:ext>
             </a:extLst>
           </p:cNvPr>
@@ -10580,7 +10580,7 @@
           <p:cNvPr id="3" name="">
             <a:extLst xmlns:a="http://schemas.openxmlformats.org/drawingml/2006/main">
               <a:ext uri="{FF2B5EF4-FFF2-40B4-BE49-F238E27FC236}">
-                <a16:creationId xmlns:a16="http://schemas.microsoft.com/office/drawing/2014/main" id="{C92EE8EE-6075-4F28-88C6-B5A22972E1BE}"/>
+                <a16:creationId xmlns:a16="http://schemas.microsoft.com/office/drawing/2014/main" id="{A2E2F587-9B4F-4A3C-9F31-AC3F18BD113C}"/>
               </a:ext>
             </a:extLst>
           </p:cNvPr>
@@ -10617,7 +10617,7 @@
           <p:cNvPr id="4" name="">
             <a:extLst xmlns:a="http://schemas.openxmlformats.org/drawingml/2006/main">
               <a:ext uri="{FF2B5EF4-FFF2-40B4-BE49-F238E27FC236}">
-                <a16:creationId xmlns:a16="http://schemas.microsoft.com/office/drawing/2014/main" id="{C4C349A5-8540-48A9-99D5-1349753C7C5D}"/>
+                <a16:creationId xmlns:a16="http://schemas.microsoft.com/office/drawing/2014/main" id="{E2A67E48-6A71-4465-9CE8-DE084552FF57}"/>
               </a:ext>
             </a:extLst>
           </p:cNvPr>
@@ -10681,7 +10681,7 @@
           <p:cNvPr id="5" name="">
             <a:extLst xmlns:a="http://schemas.openxmlformats.org/drawingml/2006/main">
               <a:ext uri="{FF2B5EF4-FFF2-40B4-BE49-F238E27FC236}">
-                <a16:creationId xmlns:a16="http://schemas.microsoft.com/office/drawing/2014/main" id="{E33255E5-788F-4C17-9448-7E83F3054A83}"/>
+                <a16:creationId xmlns:a16="http://schemas.microsoft.com/office/drawing/2014/main" id="{EFCF9F2C-3F30-460A-A496-460F84990C93}"/>
               </a:ext>
             </a:extLst>
           </p:cNvPr>
@@ -10745,7 +10745,7 @@
           <p:cNvPr id="6" name="">
             <a:extLst xmlns:a="http://schemas.openxmlformats.org/drawingml/2006/main">
               <a:ext uri="{FF2B5EF4-FFF2-40B4-BE49-F238E27FC236}">
-                <a16:creationId xmlns:a16="http://schemas.microsoft.com/office/drawing/2014/main" id="{FDD9B72E-1EB5-451D-AB82-8CEC9C4E46C1}"/>
+                <a16:creationId xmlns:a16="http://schemas.microsoft.com/office/drawing/2014/main" id="{6823D8CE-F508-4AB8-9F3A-F76F1C8FEFA1}"/>
               </a:ext>
             </a:extLst>
           </p:cNvPr>
@@ -10809,7 +10809,7 @@
           <p:cNvPr id="7" name="">
             <a:extLst xmlns:a="http://schemas.openxmlformats.org/drawingml/2006/main">
               <a:ext uri="{FF2B5EF4-FFF2-40B4-BE49-F238E27FC236}">
-                <a16:creationId xmlns:a16="http://schemas.microsoft.com/office/drawing/2014/main" id="{7F828D7A-B08A-4C57-B312-BFC69569C5AE}"/>
+                <a16:creationId xmlns:a16="http://schemas.microsoft.com/office/drawing/2014/main" id="{B9451480-811C-42C0-878C-7D67810BCF83}"/>
               </a:ext>
             </a:extLst>
           </p:cNvPr>
@@ -10844,7 +10844,7 @@
           <p:cNvPr id="8" name="">
             <a:extLst xmlns:a="http://schemas.openxmlformats.org/drawingml/2006/main">
               <a:ext uri="{FF2B5EF4-FFF2-40B4-BE49-F238E27FC236}">
-                <a16:creationId xmlns:a16="http://schemas.microsoft.com/office/drawing/2014/main" id="{D304A04A-88B9-4BD4-972A-6655CE259CA6}"/>
+                <a16:creationId xmlns:a16="http://schemas.microsoft.com/office/drawing/2014/main" id="{1E67CED7-623D-4BCD-B9C8-3090EF4E2F24}"/>
               </a:ext>
             </a:extLst>
           </p:cNvPr>
@@ -10908,7 +10908,7 @@
           <p:cNvPr id="9" name="">
             <a:extLst xmlns:a="http://schemas.openxmlformats.org/drawingml/2006/main">
               <a:ext uri="{FF2B5EF4-FFF2-40B4-BE49-F238E27FC236}">
-                <a16:creationId xmlns:a16="http://schemas.microsoft.com/office/drawing/2014/main" id="{84A1D367-F9AA-45A8-8DAE-2861F1003C67}"/>
+                <a16:creationId xmlns:a16="http://schemas.microsoft.com/office/drawing/2014/main" id="{066F0303-A1DA-4FAE-B0D1-DC821F364AAF}"/>
               </a:ext>
             </a:extLst>
           </p:cNvPr>
@@ -10943,7 +10943,7 @@
           <p:cNvPr id="10" name="">
             <a:extLst xmlns:a="http://schemas.openxmlformats.org/drawingml/2006/main">
               <a:ext uri="{FF2B5EF4-FFF2-40B4-BE49-F238E27FC236}">
-                <a16:creationId xmlns:a16="http://schemas.microsoft.com/office/drawing/2014/main" id="{C7153DEC-42D8-4625-8964-B01F5053E5B0}"/>
+                <a16:creationId xmlns:a16="http://schemas.microsoft.com/office/drawing/2014/main" id="{9E5D898E-562D-4166-A5D8-16528EE14968}"/>
               </a:ext>
             </a:extLst>
           </p:cNvPr>
@@ -11007,7 +11007,7 @@
           <p:cNvPr id="11" name="">
             <a:extLst xmlns:a="http://schemas.openxmlformats.org/drawingml/2006/main">
               <a:ext uri="{FF2B5EF4-FFF2-40B4-BE49-F238E27FC236}">
-                <a16:creationId xmlns:a16="http://schemas.microsoft.com/office/drawing/2014/main" id="{A7457599-B971-40FB-9997-00DD32C9BB9C}"/>
+                <a16:creationId xmlns:a16="http://schemas.microsoft.com/office/drawing/2014/main" id="{01ABAB1D-D0EC-4325-B892-E56D599AE5BF}"/>
               </a:ext>
             </a:extLst>
           </p:cNvPr>
@@ -11042,7 +11042,7 @@
           <p:cNvPr id="12" name="">
             <a:extLst xmlns:a="http://schemas.openxmlformats.org/drawingml/2006/main">
               <a:ext uri="{FF2B5EF4-FFF2-40B4-BE49-F238E27FC236}">
-                <a16:creationId xmlns:a16="http://schemas.microsoft.com/office/drawing/2014/main" id="{4CA16517-4430-4930-A58F-48EE1C638A43}"/>
+                <a16:creationId xmlns:a16="http://schemas.microsoft.com/office/drawing/2014/main" id="{74B7FA0F-A153-4CDD-A16C-1EDB6E91DBFA}"/>
               </a:ext>
             </a:extLst>
           </p:cNvPr>
@@ -11106,7 +11106,7 @@
           <p:cNvPr id="13" name="">
             <a:extLst xmlns:a="http://schemas.openxmlformats.org/drawingml/2006/main">
               <a:ext uri="{FF2B5EF4-FFF2-40B4-BE49-F238E27FC236}">
-                <a16:creationId xmlns:a16="http://schemas.microsoft.com/office/drawing/2014/main" id="{CB81DDE0-C7A3-486D-861E-92C03B398D2C}"/>
+                <a16:creationId xmlns:a16="http://schemas.microsoft.com/office/drawing/2014/main" id="{234F50B6-23A4-4DF3-A7E3-40B32646A2C5}"/>
               </a:ext>
             </a:extLst>
           </p:cNvPr>
@@ -11141,7 +11141,7 @@
           <p:cNvPr id="14" name="">
             <a:extLst xmlns:a="http://schemas.openxmlformats.org/drawingml/2006/main">
               <a:ext uri="{FF2B5EF4-FFF2-40B4-BE49-F238E27FC236}">
-                <a16:creationId xmlns:a16="http://schemas.microsoft.com/office/drawing/2014/main" id="{F8ECFBBF-7309-4695-9F40-D3F1C5BC19CE}"/>
+                <a16:creationId xmlns:a16="http://schemas.microsoft.com/office/drawing/2014/main" id="{B5625D7C-61CC-496C-9AB3-F555609A22A3}"/>
               </a:ext>
             </a:extLst>
           </p:cNvPr>
@@ -11205,7 +11205,7 @@
           <p:cNvPr id="15" name="">
             <a:extLst xmlns:a="http://schemas.openxmlformats.org/drawingml/2006/main">
               <a:ext uri="{FF2B5EF4-FFF2-40B4-BE49-F238E27FC236}">
-                <a16:creationId xmlns:a16="http://schemas.microsoft.com/office/drawing/2014/main" id="{1BF094E0-F51C-4BBF-9C02-949A3C699DF7}"/>
+                <a16:creationId xmlns:a16="http://schemas.microsoft.com/office/drawing/2014/main" id="{4B8CE431-19A0-495C-A4EB-797AB6C02C8A}"/>
               </a:ext>
             </a:extLst>
           </p:cNvPr>
@@ -11240,7 +11240,7 @@
           <p:cNvPr id="16" name="">
             <a:extLst xmlns:a="http://schemas.openxmlformats.org/drawingml/2006/main">
               <a:ext uri="{FF2B5EF4-FFF2-40B4-BE49-F238E27FC236}">
-                <a16:creationId xmlns:a16="http://schemas.microsoft.com/office/drawing/2014/main" id="{A4C19524-360D-4702-B256-2219FCF0D41D}"/>
+                <a16:creationId xmlns:a16="http://schemas.microsoft.com/office/drawing/2014/main" id="{7A0DF9E6-EBAC-46F7-9739-49182E0E9E74}"/>
               </a:ext>
             </a:extLst>
           </p:cNvPr>
@@ -11304,7 +11304,7 @@
           <p:cNvPr id="17" name="">
             <a:extLst xmlns:a="http://schemas.openxmlformats.org/drawingml/2006/main">
               <a:ext uri="{FF2B5EF4-FFF2-40B4-BE49-F238E27FC236}">
-                <a16:creationId xmlns:a16="http://schemas.microsoft.com/office/drawing/2014/main" id="{B92E85AC-5019-46FB-A05F-B36B7B6BA45E}"/>
+                <a16:creationId xmlns:a16="http://schemas.microsoft.com/office/drawing/2014/main" id="{A65866AB-D24A-4164-A7A5-A8B4DECC3881}"/>
               </a:ext>
             </a:extLst>
           </p:cNvPr>
@@ -11339,7 +11339,7 @@
           <p:cNvPr id="18" name="">
             <a:extLst xmlns:a="http://schemas.openxmlformats.org/drawingml/2006/main">
               <a:ext uri="{FF2B5EF4-FFF2-40B4-BE49-F238E27FC236}">
-                <a16:creationId xmlns:a16="http://schemas.microsoft.com/office/drawing/2014/main" id="{E3CCFCA2-E040-4F1A-BCD8-A69D01FFCCDE}"/>
+                <a16:creationId xmlns:a16="http://schemas.microsoft.com/office/drawing/2014/main" id="{64EE40B2-9C98-4760-9FD1-FE4FDCADFC33}"/>
               </a:ext>
             </a:extLst>
           </p:cNvPr>
@@ -11403,7 +11403,7 @@
           <p:cNvPr id="19" name="">
             <a:extLst xmlns:a="http://schemas.openxmlformats.org/drawingml/2006/main">
               <a:ext uri="{FF2B5EF4-FFF2-40B4-BE49-F238E27FC236}">
-                <a16:creationId xmlns:a16="http://schemas.microsoft.com/office/drawing/2014/main" id="{1F3229FC-3F79-4E37-AFFA-3EAE1062760A}"/>
+                <a16:creationId xmlns:a16="http://schemas.microsoft.com/office/drawing/2014/main" id="{0C19195A-C989-468F-92EC-793169EC3D5F}"/>
               </a:ext>
             </a:extLst>
           </p:cNvPr>
@@ -11467,7 +11467,7 @@
           <p:cNvPr id="20" name="">
             <a:extLst xmlns:a="http://schemas.openxmlformats.org/drawingml/2006/main">
               <a:ext uri="{FF2B5EF4-FFF2-40B4-BE49-F238E27FC236}">
-                <a16:creationId xmlns:a16="http://schemas.microsoft.com/office/drawing/2014/main" id="{8DF0EFE4-0CE5-4BB5-B7AA-158CE93805DC}"/>
+                <a16:creationId xmlns:a16="http://schemas.microsoft.com/office/drawing/2014/main" id="{D008E2C0-BDCA-45F3-A37C-D6AA851A743B}"/>
               </a:ext>
             </a:extLst>
           </p:cNvPr>
@@ -11500,7 +11500,7 @@
           <p:cNvPr id="21" name="">
             <a:extLst xmlns:a="http://schemas.openxmlformats.org/drawingml/2006/main">
               <a:ext uri="{FF2B5EF4-FFF2-40B4-BE49-F238E27FC236}">
-                <a16:creationId xmlns:a16="http://schemas.microsoft.com/office/drawing/2014/main" id="{C250BBB4-2C09-41BB-843B-969309002B26}"/>
+                <a16:creationId xmlns:a16="http://schemas.microsoft.com/office/drawing/2014/main" id="{3CA52E40-D81D-4A6C-BB1D-E6E34897EB53}"/>
               </a:ext>
             </a:extLst>
           </p:cNvPr>
@@ -11564,7 +11564,7 @@
           <p:cNvPr id="22" name="">
             <a:extLst xmlns:a="http://schemas.openxmlformats.org/drawingml/2006/main">
               <a:ext uri="{FF2B5EF4-FFF2-40B4-BE49-F238E27FC236}">
-                <a16:creationId xmlns:a16="http://schemas.microsoft.com/office/drawing/2014/main" id="{9C0D4FF4-6A0B-4B3A-9DF4-4243EA59CED4}"/>
+                <a16:creationId xmlns:a16="http://schemas.microsoft.com/office/drawing/2014/main" id="{A2F6AAB1-3C2B-4EE1-B596-B9F70FF3D0D6}"/>
               </a:ext>
             </a:extLst>
           </p:cNvPr>
@@ -11626,7 +11626,7 @@
     </p:spTree>
     <p:extLst>
       <p:ext uri="{BB962C8B-B14F-4D97-AF65-F5344CB8AC3E}">
-        <p14:creationId xmlns:p14="http://schemas.microsoft.com/office/powerpoint/2010/main" val="1983987246"/>
+        <p14:creationId xmlns:p14="http://schemas.microsoft.com/office/powerpoint/2010/main" val="1032091184"/>
       </p:ext>
     </p:extLst>
   </p:cSld>
@@ -11654,7 +11654,7 @@
           <p:nvPr/>
         </p:nvPicPr>
         <p:blipFill>
-          <a:blip xmlns:r="http://schemas.openxmlformats.org/officeDocument/2006/relationships" xmlns:a="http://schemas.openxmlformats.org/drawingml/2006/main" r:embed="Ra4a2998cd66548db"/>
+          <a:blip xmlns:r="http://schemas.openxmlformats.org/officeDocument/2006/relationships" xmlns:a="http://schemas.openxmlformats.org/drawingml/2006/main" r:embed="Rd35faf10666948d3"/>
           <a:srcRect xmlns:a="http://schemas.openxmlformats.org/drawingml/2006/main" l="0" t="27" r="0" b="27"/>
           <a:stretch xmlns:a="http://schemas.openxmlformats.org/drawingml/2006/main">
             <a:fillRect l="0" t="0" r="0" b="0"/>
@@ -11675,7 +11675,7 @@
           <p:cNvPr id="2" name="">
             <a:extLst xmlns:a="http://schemas.openxmlformats.org/drawingml/2006/main">
               <a:ext uri="{FF2B5EF4-FFF2-40B4-BE49-F238E27FC236}">
-                <a16:creationId xmlns:a16="http://schemas.microsoft.com/office/drawing/2014/main" id="{AD6DEBAD-034E-42A3-A278-2E9050F55DAE}"/>
+                <a16:creationId xmlns:a16="http://schemas.microsoft.com/office/drawing/2014/main" id="{00B88079-8FDD-47E4-933F-D145F51FFBED}"/>
               </a:ext>
             </a:extLst>
           </p:cNvPr>
@@ -11712,7 +11712,7 @@
           <p:cNvPr id="3" name="">
             <a:extLst xmlns:a="http://schemas.openxmlformats.org/drawingml/2006/main">
               <a:ext uri="{FF2B5EF4-FFF2-40B4-BE49-F238E27FC236}">
-                <a16:creationId xmlns:a16="http://schemas.microsoft.com/office/drawing/2014/main" id="{5CDC1242-DE4C-4760-98D5-257E711F558A}"/>
+                <a16:creationId xmlns:a16="http://schemas.microsoft.com/office/drawing/2014/main" id="{ADCF8792-4957-476F-978B-D1DB46DDF2FF}"/>
               </a:ext>
             </a:extLst>
           </p:cNvPr>
@@ -11749,7 +11749,7 @@
           <p:cNvPr id="4" name="">
             <a:extLst xmlns:a="http://schemas.openxmlformats.org/drawingml/2006/main">
               <a:ext uri="{FF2B5EF4-FFF2-40B4-BE49-F238E27FC236}">
-                <a16:creationId xmlns:a16="http://schemas.microsoft.com/office/drawing/2014/main" id="{A0F82E30-AE6E-403E-B007-04BAA8554D59}"/>
+                <a16:creationId xmlns:a16="http://schemas.microsoft.com/office/drawing/2014/main" id="{1107F231-4C05-4052-9F62-B8628D5A7FF8}"/>
               </a:ext>
             </a:extLst>
           </p:cNvPr>
@@ -11813,7 +11813,7 @@
           <p:cNvPr id="5" name="">
             <a:extLst xmlns:a="http://schemas.openxmlformats.org/drawingml/2006/main">
               <a:ext uri="{FF2B5EF4-FFF2-40B4-BE49-F238E27FC236}">
-                <a16:creationId xmlns:a16="http://schemas.microsoft.com/office/drawing/2014/main" id="{4BA10F91-27A4-4A6C-821A-CF27F55BA6D7}"/>
+                <a16:creationId xmlns:a16="http://schemas.microsoft.com/office/drawing/2014/main" id="{C18E08F1-D023-43E4-93CD-4E2F58D83BA5}"/>
               </a:ext>
             </a:extLst>
           </p:cNvPr>
@@ -11877,7 +11877,7 @@
           <p:cNvPr id="6" name="">
             <a:extLst xmlns:a="http://schemas.openxmlformats.org/drawingml/2006/main">
               <a:ext uri="{FF2B5EF4-FFF2-40B4-BE49-F238E27FC236}">
-                <a16:creationId xmlns:a16="http://schemas.microsoft.com/office/drawing/2014/main" id="{B3E31D2C-FF95-4BC1-9D60-899CEE2423C5}"/>
+                <a16:creationId xmlns:a16="http://schemas.microsoft.com/office/drawing/2014/main" id="{8F679DE9-140B-4501-926F-14EDED80405E}"/>
               </a:ext>
             </a:extLst>
           </p:cNvPr>
@@ -11941,7 +11941,7 @@
           <p:cNvPr id="7" name="">
             <a:extLst xmlns:a="http://schemas.openxmlformats.org/drawingml/2006/main">
               <a:ext uri="{FF2B5EF4-FFF2-40B4-BE49-F238E27FC236}">
-                <a16:creationId xmlns:a16="http://schemas.microsoft.com/office/drawing/2014/main" id="{8256F947-B58E-4DA8-9529-1411FD537226}"/>
+                <a16:creationId xmlns:a16="http://schemas.microsoft.com/office/drawing/2014/main" id="{DA64CD10-A39F-4D2C-844D-CAF04A3F3908}"/>
               </a:ext>
             </a:extLst>
           </p:cNvPr>
@@ -11976,7 +11976,7 @@
           <p:cNvPr id="8" name="">
             <a:extLst xmlns:a="http://schemas.openxmlformats.org/drawingml/2006/main">
               <a:ext uri="{FF2B5EF4-FFF2-40B4-BE49-F238E27FC236}">
-                <a16:creationId xmlns:a16="http://schemas.microsoft.com/office/drawing/2014/main" id="{B53360F3-A6FE-4C95-858A-FC2450124DA9}"/>
+                <a16:creationId xmlns:a16="http://schemas.microsoft.com/office/drawing/2014/main" id="{C5BB2E47-6C3A-47BC-A19F-878DF053B8F2}"/>
               </a:ext>
             </a:extLst>
           </p:cNvPr>
@@ -12040,7 +12040,7 @@
           <p:cNvPr id="9" name="">
             <a:extLst xmlns:a="http://schemas.openxmlformats.org/drawingml/2006/main">
               <a:ext uri="{FF2B5EF4-FFF2-40B4-BE49-F238E27FC236}">
-                <a16:creationId xmlns:a16="http://schemas.microsoft.com/office/drawing/2014/main" id="{11623A7F-92BB-49DB-A1BB-ADFB26092812}"/>
+                <a16:creationId xmlns:a16="http://schemas.microsoft.com/office/drawing/2014/main" id="{CF0F0A7E-F498-449C-8F88-F0A77F59D79F}"/>
               </a:ext>
             </a:extLst>
           </p:cNvPr>
@@ -12104,7 +12104,7 @@
           <p:cNvPr id="10" name="">
             <a:extLst xmlns:a="http://schemas.openxmlformats.org/drawingml/2006/main">
               <a:ext uri="{FF2B5EF4-FFF2-40B4-BE49-F238E27FC236}">
-                <a16:creationId xmlns:a16="http://schemas.microsoft.com/office/drawing/2014/main" id="{D7E1798A-95A5-495E-B6DB-0F88503AEDCE}"/>
+                <a16:creationId xmlns:a16="http://schemas.microsoft.com/office/drawing/2014/main" id="{4FAA07FA-6890-4B94-BF2E-38D7F5C88D46}"/>
               </a:ext>
             </a:extLst>
           </p:cNvPr>
@@ -12137,7 +12137,7 @@
           <p:cNvPr id="11" name="">
             <a:extLst xmlns:a="http://schemas.openxmlformats.org/drawingml/2006/main">
               <a:ext uri="{FF2B5EF4-FFF2-40B4-BE49-F238E27FC236}">
-                <a16:creationId xmlns:a16="http://schemas.microsoft.com/office/drawing/2014/main" id="{58A951F5-5B74-4601-90FE-FF58F14D6757}"/>
+                <a16:creationId xmlns:a16="http://schemas.microsoft.com/office/drawing/2014/main" id="{75382B47-D7C3-47D4-A532-34F7A68EAD63}"/>
               </a:ext>
             </a:extLst>
           </p:cNvPr>
@@ -12172,7 +12172,7 @@
           <p:cNvPr id="12" name="">
             <a:extLst xmlns:a="http://schemas.openxmlformats.org/drawingml/2006/main">
               <a:ext uri="{FF2B5EF4-FFF2-40B4-BE49-F238E27FC236}">
-                <a16:creationId xmlns:a16="http://schemas.microsoft.com/office/drawing/2014/main" id="{4FCBA3BF-1F79-4D40-90B8-E5699CF6B36B}"/>
+                <a16:creationId xmlns:a16="http://schemas.microsoft.com/office/drawing/2014/main" id="{14637683-7DA8-4B83-A167-9853B407B25F}"/>
               </a:ext>
             </a:extLst>
           </p:cNvPr>
@@ -12236,7 +12236,7 @@
           <p:cNvPr id="13" name="">
             <a:extLst xmlns:a="http://schemas.openxmlformats.org/drawingml/2006/main">
               <a:ext uri="{FF2B5EF4-FFF2-40B4-BE49-F238E27FC236}">
-                <a16:creationId xmlns:a16="http://schemas.microsoft.com/office/drawing/2014/main" id="{E50688F1-3CD3-4711-99D8-5BCE71F6C3D0}"/>
+                <a16:creationId xmlns:a16="http://schemas.microsoft.com/office/drawing/2014/main" id="{462EAEB8-29D7-4089-80BB-116297A823A9}"/>
               </a:ext>
             </a:extLst>
           </p:cNvPr>
@@ -12300,7 +12300,7 @@
           <p:cNvPr id="14" name="">
             <a:extLst xmlns:a="http://schemas.openxmlformats.org/drawingml/2006/main">
               <a:ext uri="{FF2B5EF4-FFF2-40B4-BE49-F238E27FC236}">
-                <a16:creationId xmlns:a16="http://schemas.microsoft.com/office/drawing/2014/main" id="{AAB8D31D-67D1-4A68-A45A-EA9F05D06A30}"/>
+                <a16:creationId xmlns:a16="http://schemas.microsoft.com/office/drawing/2014/main" id="{468F2DF1-B8CA-4230-8722-5501A3AD948A}"/>
               </a:ext>
             </a:extLst>
           </p:cNvPr>
@@ -12333,7 +12333,7 @@
           <p:cNvPr id="15" name="">
             <a:extLst xmlns:a="http://schemas.openxmlformats.org/drawingml/2006/main">
               <a:ext uri="{FF2B5EF4-FFF2-40B4-BE49-F238E27FC236}">
-                <a16:creationId xmlns:a16="http://schemas.microsoft.com/office/drawing/2014/main" id="{8226E710-BD82-4F25-9953-8B0B27D98874}"/>
+                <a16:creationId xmlns:a16="http://schemas.microsoft.com/office/drawing/2014/main" id="{3B234171-E3E5-4ADC-AF7B-0ECB7D4FACB1}"/>
               </a:ext>
             </a:extLst>
           </p:cNvPr>
@@ -12368,7 +12368,7 @@
           <p:cNvPr id="16" name="">
             <a:extLst xmlns:a="http://schemas.openxmlformats.org/drawingml/2006/main">
               <a:ext uri="{FF2B5EF4-FFF2-40B4-BE49-F238E27FC236}">
-                <a16:creationId xmlns:a16="http://schemas.microsoft.com/office/drawing/2014/main" id="{E712BE8D-6748-48A1-9C9B-3A712612338E}"/>
+                <a16:creationId xmlns:a16="http://schemas.microsoft.com/office/drawing/2014/main" id="{E10B4375-5925-4A26-8A8E-5CF7AEB9953C}"/>
               </a:ext>
             </a:extLst>
           </p:cNvPr>
@@ -12432,7 +12432,7 @@
           <p:cNvPr id="17" name="">
             <a:extLst xmlns:a="http://schemas.openxmlformats.org/drawingml/2006/main">
               <a:ext uri="{FF2B5EF4-FFF2-40B4-BE49-F238E27FC236}">
-                <a16:creationId xmlns:a16="http://schemas.microsoft.com/office/drawing/2014/main" id="{A40BE9C5-C8E7-4C51-A89B-0A53A90976C5}"/>
+                <a16:creationId xmlns:a16="http://schemas.microsoft.com/office/drawing/2014/main" id="{470C95A0-DDE5-4E91-B623-F7E70D9B1FC2}"/>
               </a:ext>
             </a:extLst>
           </p:cNvPr>
@@ -12496,7 +12496,7 @@
           <p:cNvPr id="18" name="">
             <a:extLst xmlns:a="http://schemas.openxmlformats.org/drawingml/2006/main">
               <a:ext uri="{FF2B5EF4-FFF2-40B4-BE49-F238E27FC236}">
-                <a16:creationId xmlns:a16="http://schemas.microsoft.com/office/drawing/2014/main" id="{CA31063E-29E0-4A81-969B-7CA16C48F1AD}"/>
+                <a16:creationId xmlns:a16="http://schemas.microsoft.com/office/drawing/2014/main" id="{218AA75A-72C1-4109-A954-088139B55B19}"/>
               </a:ext>
             </a:extLst>
           </p:cNvPr>
@@ -12529,7 +12529,7 @@
           <p:cNvPr id="19" name="">
             <a:extLst xmlns:a="http://schemas.openxmlformats.org/drawingml/2006/main">
               <a:ext uri="{FF2B5EF4-FFF2-40B4-BE49-F238E27FC236}">
-                <a16:creationId xmlns:a16="http://schemas.microsoft.com/office/drawing/2014/main" id="{98341CAC-5793-4C96-90C8-65E75E7FC640}"/>
+                <a16:creationId xmlns:a16="http://schemas.microsoft.com/office/drawing/2014/main" id="{32038F02-F881-4846-B54D-01FAE709421C}"/>
               </a:ext>
             </a:extLst>
           </p:cNvPr>
@@ -12564,7 +12564,7 @@
           <p:cNvPr id="20" name="">
             <a:extLst xmlns:a="http://schemas.openxmlformats.org/drawingml/2006/main">
               <a:ext uri="{FF2B5EF4-FFF2-40B4-BE49-F238E27FC236}">
-                <a16:creationId xmlns:a16="http://schemas.microsoft.com/office/drawing/2014/main" id="{6E8764ED-AE16-4C22-989B-3813437478A8}"/>
+                <a16:creationId xmlns:a16="http://schemas.microsoft.com/office/drawing/2014/main" id="{43D7399D-768F-4FAE-B6D4-42AC11F2A8BD}"/>
               </a:ext>
             </a:extLst>
           </p:cNvPr>
@@ -12628,7 +12628,7 @@
           <p:cNvPr id="21" name="">
             <a:extLst xmlns:a="http://schemas.openxmlformats.org/drawingml/2006/main">
               <a:ext uri="{FF2B5EF4-FFF2-40B4-BE49-F238E27FC236}">
-                <a16:creationId xmlns:a16="http://schemas.microsoft.com/office/drawing/2014/main" id="{A9EDFE51-309F-405A-8B95-71718915CC7C}"/>
+                <a16:creationId xmlns:a16="http://schemas.microsoft.com/office/drawing/2014/main" id="{2A2C63F4-554C-4443-88E0-97213EF29D06}"/>
               </a:ext>
             </a:extLst>
           </p:cNvPr>
@@ -12692,7 +12692,7 @@
           <p:cNvPr id="22" name="">
             <a:extLst xmlns:a="http://schemas.openxmlformats.org/drawingml/2006/main">
               <a:ext uri="{FF2B5EF4-FFF2-40B4-BE49-F238E27FC236}">
-                <a16:creationId xmlns:a16="http://schemas.microsoft.com/office/drawing/2014/main" id="{07D78254-C9CD-41D1-A22C-913F9D6994F3}"/>
+                <a16:creationId xmlns:a16="http://schemas.microsoft.com/office/drawing/2014/main" id="{07EE1C94-91A7-498C-812E-F4ECE312AB92}"/>
               </a:ext>
             </a:extLst>
           </p:cNvPr>
@@ -12756,7 +12756,7 @@
           <p:cNvPr id="23" name="">
             <a:extLst xmlns:a="http://schemas.openxmlformats.org/drawingml/2006/main">
               <a:ext uri="{FF2B5EF4-FFF2-40B4-BE49-F238E27FC236}">
-                <a16:creationId xmlns:a16="http://schemas.microsoft.com/office/drawing/2014/main" id="{27877B27-DD06-4E29-ADFD-DA6AE92CFE74}"/>
+                <a16:creationId xmlns:a16="http://schemas.microsoft.com/office/drawing/2014/main" id="{A2484494-F242-4323-B0AC-B879A28BF401}"/>
               </a:ext>
             </a:extLst>
           </p:cNvPr>
@@ -12820,7 +12820,7 @@
           <p:cNvPr id="24" name="">
             <a:extLst xmlns:a="http://schemas.openxmlformats.org/drawingml/2006/main">
               <a:ext uri="{FF2B5EF4-FFF2-40B4-BE49-F238E27FC236}">
-                <a16:creationId xmlns:a16="http://schemas.microsoft.com/office/drawing/2014/main" id="{7122C913-1BCC-46A2-9B0E-DB8C13B80E1D}"/>
+                <a16:creationId xmlns:a16="http://schemas.microsoft.com/office/drawing/2014/main" id="{3EA79DB9-6878-4473-A1DE-21B5C8E56430}"/>
               </a:ext>
             </a:extLst>
           </p:cNvPr>
@@ -12853,7 +12853,7 @@
           <p:cNvPr id="25" name="">
             <a:extLst xmlns:a="http://schemas.openxmlformats.org/drawingml/2006/main">
               <a:ext uri="{FF2B5EF4-FFF2-40B4-BE49-F238E27FC236}">
-                <a16:creationId xmlns:a16="http://schemas.microsoft.com/office/drawing/2014/main" id="{A8B4BA34-2392-485F-B9E8-8AA1F6E5C752}"/>
+                <a16:creationId xmlns:a16="http://schemas.microsoft.com/office/drawing/2014/main" id="{C4A38E19-EEF6-43D6-967B-A7D86C7D13F5}"/>
               </a:ext>
             </a:extLst>
           </p:cNvPr>
@@ -12917,7 +12917,7 @@
           <p:cNvPr id="26" name="">
             <a:extLst xmlns:a="http://schemas.openxmlformats.org/drawingml/2006/main">
               <a:ext uri="{FF2B5EF4-FFF2-40B4-BE49-F238E27FC236}">
-                <a16:creationId xmlns:a16="http://schemas.microsoft.com/office/drawing/2014/main" id="{63C3D7E2-7043-412B-B291-61C2D2F13C32}"/>
+                <a16:creationId xmlns:a16="http://schemas.microsoft.com/office/drawing/2014/main" id="{C01F5007-F524-4560-8032-4D1A1902046E}"/>
               </a:ext>
             </a:extLst>
           </p:cNvPr>
@@ -12979,7 +12979,7 @@
     </p:spTree>
     <p:extLst>
       <p:ext uri="{BB962C8B-B14F-4D97-AF65-F5344CB8AC3E}">
-        <p14:creationId xmlns:p14="http://schemas.microsoft.com/office/powerpoint/2010/main" val="160120600"/>
+        <p14:creationId xmlns:p14="http://schemas.microsoft.com/office/powerpoint/2010/main" val="1868245755"/>
       </p:ext>
     </p:extLst>
   </p:cSld>
@@ -13007,7 +13007,7 @@
           <p:nvPr/>
         </p:nvPicPr>
         <p:blipFill>
-          <a:blip xmlns:r="http://schemas.openxmlformats.org/officeDocument/2006/relationships" xmlns:a="http://schemas.openxmlformats.org/drawingml/2006/main" r:embed="R1ee988d6bdd84221"/>
+          <a:blip xmlns:r="http://schemas.openxmlformats.org/officeDocument/2006/relationships" xmlns:a="http://schemas.openxmlformats.org/drawingml/2006/main" r:embed="Ref8fee3e20804b25"/>
           <a:srcRect xmlns:a="http://schemas.openxmlformats.org/drawingml/2006/main" l="0" t="27" r="0" b="27"/>
           <a:stretch xmlns:a="http://schemas.openxmlformats.org/drawingml/2006/main">
             <a:fillRect l="0" t="0" r="0" b="0"/>
@@ -13028,7 +13028,7 @@
           <p:cNvPr id="2" name="">
             <a:extLst xmlns:a="http://schemas.openxmlformats.org/drawingml/2006/main">
               <a:ext uri="{FF2B5EF4-FFF2-40B4-BE49-F238E27FC236}">
-                <a16:creationId xmlns:a16="http://schemas.microsoft.com/office/drawing/2014/main" id="{CC92E1D2-265D-49CF-8399-EA5CFDD10DC0}"/>
+                <a16:creationId xmlns:a16="http://schemas.microsoft.com/office/drawing/2014/main" id="{D4E22FC6-58BB-4513-A851-F77491B62601}"/>
               </a:ext>
             </a:extLst>
           </p:cNvPr>
@@ -13065,7 +13065,7 @@
           <p:cNvPr id="3" name="">
             <a:extLst xmlns:a="http://schemas.openxmlformats.org/drawingml/2006/main">
               <a:ext uri="{FF2B5EF4-FFF2-40B4-BE49-F238E27FC236}">
-                <a16:creationId xmlns:a16="http://schemas.microsoft.com/office/drawing/2014/main" id="{1275CB8A-7DFA-4A8C-A88F-25A685891FD8}"/>
+                <a16:creationId xmlns:a16="http://schemas.microsoft.com/office/drawing/2014/main" id="{C0508808-83CD-4FAD-ADDA-74C1EDD0AAC9}"/>
               </a:ext>
             </a:extLst>
           </p:cNvPr>
@@ -13102,7 +13102,7 @@
           <p:cNvPr id="4" name="">
             <a:extLst xmlns:a="http://schemas.openxmlformats.org/drawingml/2006/main">
               <a:ext uri="{FF2B5EF4-FFF2-40B4-BE49-F238E27FC236}">
-                <a16:creationId xmlns:a16="http://schemas.microsoft.com/office/drawing/2014/main" id="{8B4E3332-0D86-45C4-BE1F-C86CE0D7731E}"/>
+                <a16:creationId xmlns:a16="http://schemas.microsoft.com/office/drawing/2014/main" id="{1BEB0D44-C4A5-4ADA-8116-6E4889447271}"/>
               </a:ext>
             </a:extLst>
           </p:cNvPr>
@@ -13166,7 +13166,7 @@
           <p:cNvPr id="5" name="">
             <a:extLst xmlns:a="http://schemas.openxmlformats.org/drawingml/2006/main">
               <a:ext uri="{FF2B5EF4-FFF2-40B4-BE49-F238E27FC236}">
-                <a16:creationId xmlns:a16="http://schemas.microsoft.com/office/drawing/2014/main" id="{A50D116E-3805-48CB-93E2-FB9F29999868}"/>
+                <a16:creationId xmlns:a16="http://schemas.microsoft.com/office/drawing/2014/main" id="{BB0362BB-16D8-4ADC-B6AB-B339898D5A63}"/>
               </a:ext>
             </a:extLst>
           </p:cNvPr>
@@ -13230,7 +13230,7 @@
           <p:cNvPr id="6" name="">
             <a:extLst xmlns:a="http://schemas.openxmlformats.org/drawingml/2006/main">
               <a:ext uri="{FF2B5EF4-FFF2-40B4-BE49-F238E27FC236}">
-                <a16:creationId xmlns:a16="http://schemas.microsoft.com/office/drawing/2014/main" id="{E831FD44-758C-49A6-884A-9EC9B2A67BB4}"/>
+                <a16:creationId xmlns:a16="http://schemas.microsoft.com/office/drawing/2014/main" id="{73BD4C21-6FA4-415E-B8E6-7FD10F56A243}"/>
               </a:ext>
             </a:extLst>
           </p:cNvPr>
@@ -13294,7 +13294,7 @@
           <p:cNvPr id="7" name="">
             <a:extLst xmlns:a="http://schemas.openxmlformats.org/drawingml/2006/main">
               <a:ext uri="{FF2B5EF4-FFF2-40B4-BE49-F238E27FC236}">
-                <a16:creationId xmlns:a16="http://schemas.microsoft.com/office/drawing/2014/main" id="{3E498E42-F666-42CE-8492-FB2CB00D7022}"/>
+                <a16:creationId xmlns:a16="http://schemas.microsoft.com/office/drawing/2014/main" id="{82BE2438-8E4A-40A0-9505-FEB8F56689B2}"/>
               </a:ext>
             </a:extLst>
           </p:cNvPr>
@@ -13329,7 +13329,7 @@
           <p:cNvPr id="8" name="">
             <a:extLst xmlns:a="http://schemas.openxmlformats.org/drawingml/2006/main">
               <a:ext uri="{FF2B5EF4-FFF2-40B4-BE49-F238E27FC236}">
-                <a16:creationId xmlns:a16="http://schemas.microsoft.com/office/drawing/2014/main" id="{674F588C-E1EB-473E-B85E-FF19CD0D5DC7}"/>
+                <a16:creationId xmlns:a16="http://schemas.microsoft.com/office/drawing/2014/main" id="{A7C6BB59-5FC5-4F07-90FD-6EF24CA4C02A}"/>
               </a:ext>
             </a:extLst>
           </p:cNvPr>
@@ -13416,7 +13416,7 @@
           <p:cNvPr id="9" name="">
             <a:extLst xmlns:a="http://schemas.openxmlformats.org/drawingml/2006/main">
               <a:ext uri="{FF2B5EF4-FFF2-40B4-BE49-F238E27FC236}">
-                <a16:creationId xmlns:a16="http://schemas.microsoft.com/office/drawing/2014/main" id="{01718FE4-D996-4C5C-BD50-DE06DB1A762A}"/>
+                <a16:creationId xmlns:a16="http://schemas.microsoft.com/office/drawing/2014/main" id="{743235AE-D2D0-425B-8BA1-0A50411429A9}"/>
               </a:ext>
             </a:extLst>
           </p:cNvPr>
@@ -13480,7 +13480,7 @@
           <p:cNvPr id="10" name="">
             <a:extLst xmlns:a="http://schemas.openxmlformats.org/drawingml/2006/main">
               <a:ext uri="{FF2B5EF4-FFF2-40B4-BE49-F238E27FC236}">
-                <a16:creationId xmlns:a16="http://schemas.microsoft.com/office/drawing/2014/main" id="{D1470B9F-A057-41FB-8E92-C6025B7DB1E7}"/>
+                <a16:creationId xmlns:a16="http://schemas.microsoft.com/office/drawing/2014/main" id="{3EB3D0C1-6B69-4E03-8D36-06ED14B1D6AD}"/>
               </a:ext>
             </a:extLst>
           </p:cNvPr>
@@ -13515,7 +13515,7 @@
           <p:cNvPr id="11" name="">
             <a:extLst xmlns:a="http://schemas.openxmlformats.org/drawingml/2006/main">
               <a:ext uri="{FF2B5EF4-FFF2-40B4-BE49-F238E27FC236}">
-                <a16:creationId xmlns:a16="http://schemas.microsoft.com/office/drawing/2014/main" id="{92241EC6-3058-4340-965E-BFF232B7278C}"/>
+                <a16:creationId xmlns:a16="http://schemas.microsoft.com/office/drawing/2014/main" id="{5CCD843C-C46B-4A64-AED1-B0F63B212013}"/>
               </a:ext>
             </a:extLst>
           </p:cNvPr>
@@ -13579,7 +13579,7 @@
           <p:cNvPr id="12" name="">
             <a:extLst xmlns:a="http://schemas.openxmlformats.org/drawingml/2006/main">
               <a:ext uri="{FF2B5EF4-FFF2-40B4-BE49-F238E27FC236}">
-                <a16:creationId xmlns:a16="http://schemas.microsoft.com/office/drawing/2014/main" id="{ED6D9CB9-65E6-4D99-8699-8F2D27FE683A}"/>
+                <a16:creationId xmlns:a16="http://schemas.microsoft.com/office/drawing/2014/main" id="{DD658BE2-2FE0-4199-A443-CFBCE679CFB2}"/>
               </a:ext>
             </a:extLst>
           </p:cNvPr>
@@ -13612,7 +13612,7 @@
           <p:cNvPr id="13" name="">
             <a:extLst xmlns:a="http://schemas.openxmlformats.org/drawingml/2006/main">
               <a:ext uri="{FF2B5EF4-FFF2-40B4-BE49-F238E27FC236}">
-                <a16:creationId xmlns:a16="http://schemas.microsoft.com/office/drawing/2014/main" id="{29A2784C-6E92-487D-ADE3-9DD2C20DE9D1}"/>
+                <a16:creationId xmlns:a16="http://schemas.microsoft.com/office/drawing/2014/main" id="{C90A6EEC-5025-4EAA-B0AA-0F0A1E2C7ECC}"/>
               </a:ext>
             </a:extLst>
           </p:cNvPr>
@@ -13647,7 +13647,7 @@
           <p:cNvPr id="14" name="">
             <a:extLst xmlns:a="http://schemas.openxmlformats.org/drawingml/2006/main">
               <a:ext uri="{FF2B5EF4-FFF2-40B4-BE49-F238E27FC236}">
-                <a16:creationId xmlns:a16="http://schemas.microsoft.com/office/drawing/2014/main" id="{88F29DC1-C0CB-4ECB-B8AE-BD7472029AED}"/>
+                <a16:creationId xmlns:a16="http://schemas.microsoft.com/office/drawing/2014/main" id="{841EAB3E-0C0A-4247-9FB3-718F3A11B897}"/>
               </a:ext>
             </a:extLst>
           </p:cNvPr>
@@ -13711,7 +13711,7 @@
           <p:cNvPr id="15" name="">
             <a:extLst xmlns:a="http://schemas.openxmlformats.org/drawingml/2006/main">
               <a:ext uri="{FF2B5EF4-FFF2-40B4-BE49-F238E27FC236}">
-                <a16:creationId xmlns:a16="http://schemas.microsoft.com/office/drawing/2014/main" id="{12E11ECA-A0F2-48F3-94CF-A0EE477409C0}"/>
+                <a16:creationId xmlns:a16="http://schemas.microsoft.com/office/drawing/2014/main" id="{DDD9AD33-3778-46FF-A9C3-4E2938172FD5}"/>
               </a:ext>
             </a:extLst>
           </p:cNvPr>
@@ -13744,7 +13744,7 @@
           <p:cNvPr id="16" name="">
             <a:extLst xmlns:a="http://schemas.openxmlformats.org/drawingml/2006/main">
               <a:ext uri="{FF2B5EF4-FFF2-40B4-BE49-F238E27FC236}">
-                <a16:creationId xmlns:a16="http://schemas.microsoft.com/office/drawing/2014/main" id="{28BA567A-553B-49DD-9339-4E19D019ED01}"/>
+                <a16:creationId xmlns:a16="http://schemas.microsoft.com/office/drawing/2014/main" id="{477BF083-119F-4330-8953-59C1B881320F}"/>
               </a:ext>
             </a:extLst>
           </p:cNvPr>
@@ -13779,7 +13779,7 @@
           <p:cNvPr id="17" name="">
             <a:extLst xmlns:a="http://schemas.openxmlformats.org/drawingml/2006/main">
               <a:ext uri="{FF2B5EF4-FFF2-40B4-BE49-F238E27FC236}">
-                <a16:creationId xmlns:a16="http://schemas.microsoft.com/office/drawing/2014/main" id="{E15358A0-3517-4992-BEF0-1B8333647975}"/>
+                <a16:creationId xmlns:a16="http://schemas.microsoft.com/office/drawing/2014/main" id="{C13BB663-AAC4-438E-97E3-AEDA725A8148}"/>
               </a:ext>
             </a:extLst>
           </p:cNvPr>
@@ -13843,7 +13843,7 @@
           <p:cNvPr id="18" name="">
             <a:extLst xmlns:a="http://schemas.openxmlformats.org/drawingml/2006/main">
               <a:ext uri="{FF2B5EF4-FFF2-40B4-BE49-F238E27FC236}">
-                <a16:creationId xmlns:a16="http://schemas.microsoft.com/office/drawing/2014/main" id="{D014F7DD-679B-4C40-ADD1-C99855E461A2}"/>
+                <a16:creationId xmlns:a16="http://schemas.microsoft.com/office/drawing/2014/main" id="{F88F230E-5229-4EA8-B403-BFF0AEA66EB7}"/>
               </a:ext>
             </a:extLst>
           </p:cNvPr>
@@ -13876,7 +13876,7 @@
           <p:cNvPr id="19" name="">
             <a:extLst xmlns:a="http://schemas.openxmlformats.org/drawingml/2006/main">
               <a:ext uri="{FF2B5EF4-FFF2-40B4-BE49-F238E27FC236}">
-                <a16:creationId xmlns:a16="http://schemas.microsoft.com/office/drawing/2014/main" id="{09C0BF85-34A7-4FB0-BA4D-1FC57C512EE7}"/>
+                <a16:creationId xmlns:a16="http://schemas.microsoft.com/office/drawing/2014/main" id="{FAD3A1A5-A606-4A87-879A-F3594F7E9D1C}"/>
               </a:ext>
             </a:extLst>
           </p:cNvPr>
@@ -13911,7 +13911,7 @@
           <p:cNvPr id="20" name="">
             <a:extLst xmlns:a="http://schemas.openxmlformats.org/drawingml/2006/main">
               <a:ext uri="{FF2B5EF4-FFF2-40B4-BE49-F238E27FC236}">
-                <a16:creationId xmlns:a16="http://schemas.microsoft.com/office/drawing/2014/main" id="{D5641D5C-843C-42D6-AD3D-07D4030738BC}"/>
+                <a16:creationId xmlns:a16="http://schemas.microsoft.com/office/drawing/2014/main" id="{ACBEA10B-4383-4763-AEFA-D5700D72197B}"/>
               </a:ext>
             </a:extLst>
           </p:cNvPr>
@@ -13975,7 +13975,7 @@
           <p:cNvPr id="21" name="">
             <a:extLst xmlns:a="http://schemas.openxmlformats.org/drawingml/2006/main">
               <a:ext uri="{FF2B5EF4-FFF2-40B4-BE49-F238E27FC236}">
-                <a16:creationId xmlns:a16="http://schemas.microsoft.com/office/drawing/2014/main" id="{19A06986-E8F6-4A2B-BC50-EAC59B1C3341}"/>
+                <a16:creationId xmlns:a16="http://schemas.microsoft.com/office/drawing/2014/main" id="{82F64FC3-2765-443D-A89B-C54CDB4BB101}"/>
               </a:ext>
             </a:extLst>
           </p:cNvPr>
@@ -14008,7 +14008,7 @@
           <p:cNvPr id="22" name="">
             <a:extLst xmlns:a="http://schemas.openxmlformats.org/drawingml/2006/main">
               <a:ext uri="{FF2B5EF4-FFF2-40B4-BE49-F238E27FC236}">
-                <a16:creationId xmlns:a16="http://schemas.microsoft.com/office/drawing/2014/main" id="{A60765D6-0642-4935-AD5B-27F416B0E243}"/>
+                <a16:creationId xmlns:a16="http://schemas.microsoft.com/office/drawing/2014/main" id="{02AA38DB-BCEF-48A0-895A-5E20655F42AE}"/>
               </a:ext>
             </a:extLst>
           </p:cNvPr>
@@ -14043,7 +14043,7 @@
           <p:cNvPr id="23" name="">
             <a:extLst xmlns:a="http://schemas.openxmlformats.org/drawingml/2006/main">
               <a:ext uri="{FF2B5EF4-FFF2-40B4-BE49-F238E27FC236}">
-                <a16:creationId xmlns:a16="http://schemas.microsoft.com/office/drawing/2014/main" id="{CCD209AF-F354-42DF-BF82-94969DF2E1D9}"/>
+                <a16:creationId xmlns:a16="http://schemas.microsoft.com/office/drawing/2014/main" id="{2D2EE9B7-2627-4D34-BA87-4800D84508AE}"/>
               </a:ext>
             </a:extLst>
           </p:cNvPr>
@@ -14107,7 +14107,7 @@
           <p:cNvPr id="24" name="">
             <a:extLst xmlns:a="http://schemas.openxmlformats.org/drawingml/2006/main">
               <a:ext uri="{FF2B5EF4-FFF2-40B4-BE49-F238E27FC236}">
-                <a16:creationId xmlns:a16="http://schemas.microsoft.com/office/drawing/2014/main" id="{49FECD98-5E25-4C96-9046-02CFFBD9D0DC}"/>
+                <a16:creationId xmlns:a16="http://schemas.microsoft.com/office/drawing/2014/main" id="{32ABF52B-1D1F-4C47-B17C-62557708B7F0}"/>
               </a:ext>
             </a:extLst>
           </p:cNvPr>
@@ -14140,7 +14140,7 @@
           <p:cNvPr id="25" name="">
             <a:extLst xmlns:a="http://schemas.openxmlformats.org/drawingml/2006/main">
               <a:ext uri="{FF2B5EF4-FFF2-40B4-BE49-F238E27FC236}">
-                <a16:creationId xmlns:a16="http://schemas.microsoft.com/office/drawing/2014/main" id="{31735781-3CB6-4F45-A0FD-8D5942965A09}"/>
+                <a16:creationId xmlns:a16="http://schemas.microsoft.com/office/drawing/2014/main" id="{CD65DA7A-6DEB-4DD4-8AF8-AF152DEFC41B}"/>
               </a:ext>
             </a:extLst>
           </p:cNvPr>
@@ -14173,7 +14173,7 @@
           <p:cNvPr id="26" name="">
             <a:extLst xmlns:a="http://schemas.openxmlformats.org/drawingml/2006/main">
               <a:ext uri="{FF2B5EF4-FFF2-40B4-BE49-F238E27FC236}">
-                <a16:creationId xmlns:a16="http://schemas.microsoft.com/office/drawing/2014/main" id="{AF4724EC-2931-446E-8897-57CB28686F4C}"/>
+                <a16:creationId xmlns:a16="http://schemas.microsoft.com/office/drawing/2014/main" id="{98E08744-CCD0-4D15-B195-3DDF79A68AB3}"/>
               </a:ext>
             </a:extLst>
           </p:cNvPr>
@@ -14237,7 +14237,7 @@
           <p:cNvPr id="27" name="">
             <a:extLst xmlns:a="http://schemas.openxmlformats.org/drawingml/2006/main">
               <a:ext uri="{FF2B5EF4-FFF2-40B4-BE49-F238E27FC236}">
-                <a16:creationId xmlns:a16="http://schemas.microsoft.com/office/drawing/2014/main" id="{5ED155AE-EE06-49E2-B354-C1D7F1BFE5E7}"/>
+                <a16:creationId xmlns:a16="http://schemas.microsoft.com/office/drawing/2014/main" id="{BF21D095-BA16-43BD-A3C3-7D8418707D36}"/>
               </a:ext>
             </a:extLst>
           </p:cNvPr>
@@ -14270,7 +14270,7 @@
           <p:cNvPr id="28" name="">
             <a:extLst xmlns:a="http://schemas.openxmlformats.org/drawingml/2006/main">
               <a:ext uri="{FF2B5EF4-FFF2-40B4-BE49-F238E27FC236}">
-                <a16:creationId xmlns:a16="http://schemas.microsoft.com/office/drawing/2014/main" id="{8951D9AA-972B-4E62-ADD8-48529B700301}"/>
+                <a16:creationId xmlns:a16="http://schemas.microsoft.com/office/drawing/2014/main" id="{258DEB3C-2656-4AC0-A9ED-85BF4A75FA51}"/>
               </a:ext>
             </a:extLst>
           </p:cNvPr>
@@ -14334,7 +14334,7 @@
           <p:cNvPr id="29" name="">
             <a:extLst xmlns:a="http://schemas.openxmlformats.org/drawingml/2006/main">
               <a:ext uri="{FF2B5EF4-FFF2-40B4-BE49-F238E27FC236}">
-                <a16:creationId xmlns:a16="http://schemas.microsoft.com/office/drawing/2014/main" id="{72DF70E7-5CEE-43CA-A813-D646479F3A41}"/>
+                <a16:creationId xmlns:a16="http://schemas.microsoft.com/office/drawing/2014/main" id="{BAEA1FAD-8C3F-43A2-88F0-A079FB059751}"/>
               </a:ext>
             </a:extLst>
           </p:cNvPr>
@@ -14396,7 +14396,7 @@
     </p:spTree>
     <p:extLst>
       <p:ext uri="{BB962C8B-B14F-4D97-AF65-F5344CB8AC3E}">
-        <p14:creationId xmlns:p14="http://schemas.microsoft.com/office/powerpoint/2010/main" val="861899672"/>
+        <p14:creationId xmlns:p14="http://schemas.microsoft.com/office/powerpoint/2010/main" val="135688117"/>
       </p:ext>
     </p:extLst>
   </p:cSld>
@@ -14424,7 +14424,7 @@
           <p:nvPr/>
         </p:nvPicPr>
         <p:blipFill>
-          <a:blip xmlns:r="http://schemas.openxmlformats.org/officeDocument/2006/relationships" xmlns:a="http://schemas.openxmlformats.org/drawingml/2006/main" r:embed="R2754039023044f66"/>
+          <a:blip xmlns:r="http://schemas.openxmlformats.org/officeDocument/2006/relationships" xmlns:a="http://schemas.openxmlformats.org/drawingml/2006/main" r:embed="Rae0e55a05c91419c"/>
           <a:srcRect xmlns:a="http://schemas.openxmlformats.org/drawingml/2006/main" l="0" t="27" r="0" b="27"/>
           <a:stretch xmlns:a="http://schemas.openxmlformats.org/drawingml/2006/main">
             <a:fillRect l="0" t="0" r="0" b="0"/>
@@ -14445,7 +14445,7 @@
           <p:cNvPr id="2" name="">
             <a:extLst xmlns:a="http://schemas.openxmlformats.org/drawingml/2006/main">
               <a:ext uri="{FF2B5EF4-FFF2-40B4-BE49-F238E27FC236}">
-                <a16:creationId xmlns:a16="http://schemas.microsoft.com/office/drawing/2014/main" id="{D054C9D8-416D-4280-94E0-8E54F11E1F72}"/>
+                <a16:creationId xmlns:a16="http://schemas.microsoft.com/office/drawing/2014/main" id="{21A40433-F2E1-4022-856A-9D5899B83400}"/>
               </a:ext>
             </a:extLst>
           </p:cNvPr>
@@ -14482,7 +14482,7 @@
           <p:cNvPr id="3" name="">
             <a:extLst xmlns:a="http://schemas.openxmlformats.org/drawingml/2006/main">
               <a:ext uri="{FF2B5EF4-FFF2-40B4-BE49-F238E27FC236}">
-                <a16:creationId xmlns:a16="http://schemas.microsoft.com/office/drawing/2014/main" id="{78F8F6DC-4951-4ABE-9477-2CD49F981110}"/>
+                <a16:creationId xmlns:a16="http://schemas.microsoft.com/office/drawing/2014/main" id="{EEFC7E0C-8E6C-4DFE-AF1E-38414101D3EE}"/>
               </a:ext>
             </a:extLst>
           </p:cNvPr>
@@ -14519,7 +14519,7 @@
           <p:cNvPr id="4" name="">
             <a:extLst xmlns:a="http://schemas.openxmlformats.org/drawingml/2006/main">
               <a:ext uri="{FF2B5EF4-FFF2-40B4-BE49-F238E27FC236}">
-                <a16:creationId xmlns:a16="http://schemas.microsoft.com/office/drawing/2014/main" id="{42AF09BA-9BC7-400F-9B8D-14785088BE26}"/>
+                <a16:creationId xmlns:a16="http://schemas.microsoft.com/office/drawing/2014/main" id="{7246BC67-57DB-44E0-8153-B8BC3BB255B3}"/>
               </a:ext>
             </a:extLst>
           </p:cNvPr>
@@ -14583,7 +14583,7 @@
           <p:cNvPr id="5" name="">
             <a:extLst xmlns:a="http://schemas.openxmlformats.org/drawingml/2006/main">
               <a:ext uri="{FF2B5EF4-FFF2-40B4-BE49-F238E27FC236}">
-                <a16:creationId xmlns:a16="http://schemas.microsoft.com/office/drawing/2014/main" id="{0C3847A9-60BB-422C-849C-318CD0A4B110}"/>
+                <a16:creationId xmlns:a16="http://schemas.microsoft.com/office/drawing/2014/main" id="{E5ADF395-5FDE-42D2-9D17-7F2822DC71F9}"/>
               </a:ext>
             </a:extLst>
           </p:cNvPr>
@@ -14647,7 +14647,7 @@
           <p:cNvPr id="6" name="">
             <a:extLst xmlns:a="http://schemas.openxmlformats.org/drawingml/2006/main">
               <a:ext uri="{FF2B5EF4-FFF2-40B4-BE49-F238E27FC236}">
-                <a16:creationId xmlns:a16="http://schemas.microsoft.com/office/drawing/2014/main" id="{A430F653-A181-4257-B983-5F9CA3B96F23}"/>
+                <a16:creationId xmlns:a16="http://schemas.microsoft.com/office/drawing/2014/main" id="{D0DEEB8E-9C34-4383-95E8-7B5F2E2258DD}"/>
               </a:ext>
             </a:extLst>
           </p:cNvPr>
@@ -14711,7 +14711,7 @@
           <p:cNvPr id="7" name="">
             <a:extLst xmlns:a="http://schemas.openxmlformats.org/drawingml/2006/main">
               <a:ext uri="{FF2B5EF4-FFF2-40B4-BE49-F238E27FC236}">
-                <a16:creationId xmlns:a16="http://schemas.microsoft.com/office/drawing/2014/main" id="{64211D3B-36FB-4736-8418-6057D1ED5CC2}"/>
+                <a16:creationId xmlns:a16="http://schemas.microsoft.com/office/drawing/2014/main" id="{8B06D9C0-624C-4A3B-AAB1-9A041F074D2B}"/>
               </a:ext>
             </a:extLst>
           </p:cNvPr>
@@ -14746,7 +14746,7 @@
           <p:cNvPr id="8" name="">
             <a:extLst xmlns:a="http://schemas.openxmlformats.org/drawingml/2006/main">
               <a:ext uri="{FF2B5EF4-FFF2-40B4-BE49-F238E27FC236}">
-                <a16:creationId xmlns:a16="http://schemas.microsoft.com/office/drawing/2014/main" id="{D4A1170D-2901-4B3A-8CDB-1179D5BBD79E}"/>
+                <a16:creationId xmlns:a16="http://schemas.microsoft.com/office/drawing/2014/main" id="{0D312A26-1622-4D9B-8532-325CC6474FB0}"/>
               </a:ext>
             </a:extLst>
           </p:cNvPr>
@@ -14810,7 +14810,7 @@
           <p:cNvPr id="9" name="">
             <a:extLst xmlns:a="http://schemas.openxmlformats.org/drawingml/2006/main">
               <a:ext uri="{FF2B5EF4-FFF2-40B4-BE49-F238E27FC236}">
-                <a16:creationId xmlns:a16="http://schemas.microsoft.com/office/drawing/2014/main" id="{7D05EFE0-3543-4FC6-B4BF-6635664E7A3F}"/>
+                <a16:creationId xmlns:a16="http://schemas.microsoft.com/office/drawing/2014/main" id="{570CABFC-AE86-4158-97FD-8B301672F316}"/>
               </a:ext>
             </a:extLst>
           </p:cNvPr>
@@ -14874,7 +14874,7 @@
           <p:cNvPr id="10" name="">
             <a:extLst xmlns:a="http://schemas.openxmlformats.org/drawingml/2006/main">
               <a:ext uri="{FF2B5EF4-FFF2-40B4-BE49-F238E27FC236}">
-                <a16:creationId xmlns:a16="http://schemas.microsoft.com/office/drawing/2014/main" id="{4316649A-8FD0-450D-AEA4-605B532DF35E}"/>
+                <a16:creationId xmlns:a16="http://schemas.microsoft.com/office/drawing/2014/main" id="{9FF1299B-C5E0-42B6-B6EB-E1020D80FDBA}"/>
               </a:ext>
             </a:extLst>
           </p:cNvPr>
@@ -14907,7 +14907,7 @@
           <p:cNvPr id="11" name="">
             <a:extLst xmlns:a="http://schemas.openxmlformats.org/drawingml/2006/main">
               <a:ext uri="{FF2B5EF4-FFF2-40B4-BE49-F238E27FC236}">
-                <a16:creationId xmlns:a16="http://schemas.microsoft.com/office/drawing/2014/main" id="{1C20B3D8-F049-4D51-B60D-DC584B0D7B7E}"/>
+                <a16:creationId xmlns:a16="http://schemas.microsoft.com/office/drawing/2014/main" id="{C5F289AA-8D87-4197-9870-D6B28AB1964F}"/>
               </a:ext>
             </a:extLst>
           </p:cNvPr>
@@ -14942,7 +14942,7 @@
           <p:cNvPr id="12" name="">
             <a:extLst xmlns:a="http://schemas.openxmlformats.org/drawingml/2006/main">
               <a:ext uri="{FF2B5EF4-FFF2-40B4-BE49-F238E27FC236}">
-                <a16:creationId xmlns:a16="http://schemas.microsoft.com/office/drawing/2014/main" id="{6CFBF833-48C3-430A-8679-02BADF72ABEF}"/>
+                <a16:creationId xmlns:a16="http://schemas.microsoft.com/office/drawing/2014/main" id="{CADE3737-1294-434A-B52E-E81DB7B37675}"/>
               </a:ext>
             </a:extLst>
           </p:cNvPr>
@@ -15006,7 +15006,7 @@
           <p:cNvPr id="13" name="">
             <a:extLst xmlns:a="http://schemas.openxmlformats.org/drawingml/2006/main">
               <a:ext uri="{FF2B5EF4-FFF2-40B4-BE49-F238E27FC236}">
-                <a16:creationId xmlns:a16="http://schemas.microsoft.com/office/drawing/2014/main" id="{4C38CBEF-D9C4-49CA-84FC-85D3CCD34297}"/>
+                <a16:creationId xmlns:a16="http://schemas.microsoft.com/office/drawing/2014/main" id="{3A92C74F-541C-44B1-A087-E85B0EE0A9E2}"/>
               </a:ext>
             </a:extLst>
           </p:cNvPr>
@@ -15070,7 +15070,7 @@
           <p:cNvPr id="14" name="">
             <a:extLst xmlns:a="http://schemas.openxmlformats.org/drawingml/2006/main">
               <a:ext uri="{FF2B5EF4-FFF2-40B4-BE49-F238E27FC236}">
-                <a16:creationId xmlns:a16="http://schemas.microsoft.com/office/drawing/2014/main" id="{EE1A6B6C-2610-4142-A86B-C992AB12F3BF}"/>
+                <a16:creationId xmlns:a16="http://schemas.microsoft.com/office/drawing/2014/main" id="{7F53FE21-0EC1-4FF7-9FE4-15F63752BAE3}"/>
               </a:ext>
             </a:extLst>
           </p:cNvPr>
@@ -15103,7 +15103,7 @@
           <p:cNvPr id="15" name="">
             <a:extLst xmlns:a="http://schemas.openxmlformats.org/drawingml/2006/main">
               <a:ext uri="{FF2B5EF4-FFF2-40B4-BE49-F238E27FC236}">
-                <a16:creationId xmlns:a16="http://schemas.microsoft.com/office/drawing/2014/main" id="{9635AD8A-5877-4759-826D-542BBE4D42CE}"/>
+                <a16:creationId xmlns:a16="http://schemas.microsoft.com/office/drawing/2014/main" id="{369DB16A-4BD5-4C15-843A-012EFF9A8EAE}"/>
               </a:ext>
             </a:extLst>
           </p:cNvPr>
@@ -15138,7 +15138,7 @@
           <p:cNvPr id="16" name="">
             <a:extLst xmlns:a="http://schemas.openxmlformats.org/drawingml/2006/main">
               <a:ext uri="{FF2B5EF4-FFF2-40B4-BE49-F238E27FC236}">
-                <a16:creationId xmlns:a16="http://schemas.microsoft.com/office/drawing/2014/main" id="{F3647BFF-A72C-466A-92B0-1D0F090C6715}"/>
+                <a16:creationId xmlns:a16="http://schemas.microsoft.com/office/drawing/2014/main" id="{1E0FC850-5FC5-4BED-8A7B-6A5EF53410FE}"/>
               </a:ext>
             </a:extLst>
           </p:cNvPr>
@@ -15202,7 +15202,7 @@
           <p:cNvPr id="17" name="">
             <a:extLst xmlns:a="http://schemas.openxmlformats.org/drawingml/2006/main">
               <a:ext uri="{FF2B5EF4-FFF2-40B4-BE49-F238E27FC236}">
-                <a16:creationId xmlns:a16="http://schemas.microsoft.com/office/drawing/2014/main" id="{715D0F11-0859-47E9-BE62-96DD4F319C88}"/>
+                <a16:creationId xmlns:a16="http://schemas.microsoft.com/office/drawing/2014/main" id="{39CECB03-80BC-424E-AE88-C14EC6F97E1F}"/>
               </a:ext>
             </a:extLst>
           </p:cNvPr>
@@ -15266,7 +15266,7 @@
           <p:cNvPr id="18" name="">
             <a:extLst xmlns:a="http://schemas.openxmlformats.org/drawingml/2006/main">
               <a:ext uri="{FF2B5EF4-FFF2-40B4-BE49-F238E27FC236}">
-                <a16:creationId xmlns:a16="http://schemas.microsoft.com/office/drawing/2014/main" id="{9E09F770-9FCE-4B21-8508-B76337CC535F}"/>
+                <a16:creationId xmlns:a16="http://schemas.microsoft.com/office/drawing/2014/main" id="{AB1D3BC0-CE8B-445C-AD33-43CC07F3D465}"/>
               </a:ext>
             </a:extLst>
           </p:cNvPr>
@@ -15299,7 +15299,7 @@
           <p:cNvPr id="19" name="">
             <a:extLst xmlns:a="http://schemas.openxmlformats.org/drawingml/2006/main">
               <a:ext uri="{FF2B5EF4-FFF2-40B4-BE49-F238E27FC236}">
-                <a16:creationId xmlns:a16="http://schemas.microsoft.com/office/drawing/2014/main" id="{6CE620D7-CADA-4D7F-BEA8-5B4FC5F4195E}"/>
+                <a16:creationId xmlns:a16="http://schemas.microsoft.com/office/drawing/2014/main" id="{657FBBA5-1D73-4D51-912E-E0C67A102E97}"/>
               </a:ext>
             </a:extLst>
           </p:cNvPr>
@@ -15334,7 +15334,7 @@
           <p:cNvPr id="20" name="">
             <a:extLst xmlns:a="http://schemas.openxmlformats.org/drawingml/2006/main">
               <a:ext uri="{FF2B5EF4-FFF2-40B4-BE49-F238E27FC236}">
-                <a16:creationId xmlns:a16="http://schemas.microsoft.com/office/drawing/2014/main" id="{59C7C3C8-6CCC-4BD6-948C-2F1B43244CFB}"/>
+                <a16:creationId xmlns:a16="http://schemas.microsoft.com/office/drawing/2014/main" id="{8224E301-5EF9-41BE-B146-7A7E06ACF479}"/>
               </a:ext>
             </a:extLst>
           </p:cNvPr>
@@ -15398,7 +15398,7 @@
           <p:cNvPr id="21" name="">
             <a:extLst xmlns:a="http://schemas.openxmlformats.org/drawingml/2006/main">
               <a:ext uri="{FF2B5EF4-FFF2-40B4-BE49-F238E27FC236}">
-                <a16:creationId xmlns:a16="http://schemas.microsoft.com/office/drawing/2014/main" id="{EEDA41FF-2392-4836-93C8-34ED4D31FA6A}"/>
+                <a16:creationId xmlns:a16="http://schemas.microsoft.com/office/drawing/2014/main" id="{409025F2-B536-44CE-BD68-37BDF179EB3D}"/>
               </a:ext>
             </a:extLst>
           </p:cNvPr>
@@ -15462,7 +15462,7 @@
           <p:cNvPr id="22" name="">
             <a:extLst xmlns:a="http://schemas.openxmlformats.org/drawingml/2006/main">
               <a:ext uri="{FF2B5EF4-FFF2-40B4-BE49-F238E27FC236}">
-                <a16:creationId xmlns:a16="http://schemas.microsoft.com/office/drawing/2014/main" id="{5F7F2C0E-6057-4731-A4B9-4B1EFF38FF1D}"/>
+                <a16:creationId xmlns:a16="http://schemas.microsoft.com/office/drawing/2014/main" id="{CB3EE73E-E774-4428-BBF2-41328B8A9370}"/>
               </a:ext>
             </a:extLst>
           </p:cNvPr>
@@ -15526,7 +15526,7 @@
           <p:cNvPr id="23" name="">
             <a:extLst xmlns:a="http://schemas.openxmlformats.org/drawingml/2006/main">
               <a:ext uri="{FF2B5EF4-FFF2-40B4-BE49-F238E27FC236}">
-                <a16:creationId xmlns:a16="http://schemas.microsoft.com/office/drawing/2014/main" id="{67F97819-6CA6-4AE1-B5B6-B150FFE05876}"/>
+                <a16:creationId xmlns:a16="http://schemas.microsoft.com/office/drawing/2014/main" id="{147FEC52-06D2-4AF9-9178-355D92794AFF}"/>
               </a:ext>
             </a:extLst>
           </p:cNvPr>
@@ -15590,7 +15590,7 @@
           <p:cNvPr id="24" name="">
             <a:extLst xmlns:a="http://schemas.openxmlformats.org/drawingml/2006/main">
               <a:ext uri="{FF2B5EF4-FFF2-40B4-BE49-F238E27FC236}">
-                <a16:creationId xmlns:a16="http://schemas.microsoft.com/office/drawing/2014/main" id="{47353A60-D9C9-46F6-8880-935F5B5C3179}"/>
+                <a16:creationId xmlns:a16="http://schemas.microsoft.com/office/drawing/2014/main" id="{0C5C4E38-7C14-42BF-A706-0EB315951E70}"/>
               </a:ext>
             </a:extLst>
           </p:cNvPr>
@@ -15623,7 +15623,7 @@
           <p:cNvPr id="25" name="">
             <a:extLst xmlns:a="http://schemas.openxmlformats.org/drawingml/2006/main">
               <a:ext uri="{FF2B5EF4-FFF2-40B4-BE49-F238E27FC236}">
-                <a16:creationId xmlns:a16="http://schemas.microsoft.com/office/drawing/2014/main" id="{6ECBC566-F58C-4E96-8BED-4B64E54BAB99}"/>
+                <a16:creationId xmlns:a16="http://schemas.microsoft.com/office/drawing/2014/main" id="{27E94A4F-F27F-4506-83BD-211D9EA6AED0}"/>
               </a:ext>
             </a:extLst>
           </p:cNvPr>
@@ -15687,7 +15687,7 @@
           <p:cNvPr id="26" name="">
             <a:extLst xmlns:a="http://schemas.openxmlformats.org/drawingml/2006/main">
               <a:ext uri="{FF2B5EF4-FFF2-40B4-BE49-F238E27FC236}">
-                <a16:creationId xmlns:a16="http://schemas.microsoft.com/office/drawing/2014/main" id="{BB059FD7-BA7B-46B0-821F-40E553A0C66F}"/>
+                <a16:creationId xmlns:a16="http://schemas.microsoft.com/office/drawing/2014/main" id="{7E0FE876-4217-4C01-B5F0-B57E392BDE7F}"/>
               </a:ext>
             </a:extLst>
           </p:cNvPr>
@@ -15749,7 +15749,7 @@
     </p:spTree>
     <p:extLst>
       <p:ext uri="{BB962C8B-B14F-4D97-AF65-F5344CB8AC3E}">
-        <p14:creationId xmlns:p14="http://schemas.microsoft.com/office/powerpoint/2010/main" val="1357995987"/>
+        <p14:creationId xmlns:p14="http://schemas.microsoft.com/office/powerpoint/2010/main" val="2586830"/>
       </p:ext>
     </p:extLst>
   </p:cSld>
@@ -15777,7 +15777,7 @@
           <p:nvPr/>
         </p:nvPicPr>
         <p:blipFill>
-          <a:blip xmlns:r="http://schemas.openxmlformats.org/officeDocument/2006/relationships" xmlns:a="http://schemas.openxmlformats.org/drawingml/2006/main" r:embed="R36b2fc0b9eed458b"/>
+          <a:blip xmlns:r="http://schemas.openxmlformats.org/officeDocument/2006/relationships" xmlns:a="http://schemas.openxmlformats.org/drawingml/2006/main" r:embed="R4a6ef328ff5d499b"/>
           <a:srcRect xmlns:a="http://schemas.openxmlformats.org/drawingml/2006/main" l="0" t="7813" r="0" b="7813"/>
           <a:stretch xmlns:a="http://schemas.openxmlformats.org/drawingml/2006/main">
             <a:fillRect l="0" t="0" r="0" b="0"/>
@@ -15798,7 +15798,7 @@
           <p:cNvPr id="2" name="">
             <a:extLst xmlns:a="http://schemas.openxmlformats.org/drawingml/2006/main">
               <a:ext uri="{FF2B5EF4-FFF2-40B4-BE49-F238E27FC236}">
-                <a16:creationId xmlns:a16="http://schemas.microsoft.com/office/drawing/2014/main" id="{32E4096B-7273-4804-B993-75D4E3668795}"/>
+                <a16:creationId xmlns:a16="http://schemas.microsoft.com/office/drawing/2014/main" id="{E770CAED-2EAE-415B-A503-7C96EC16B34D}"/>
               </a:ext>
             </a:extLst>
           </p:cNvPr>
@@ -15835,7 +15835,7 @@
           <p:cNvPr id="3" name="">
             <a:extLst xmlns:a="http://schemas.openxmlformats.org/drawingml/2006/main">
               <a:ext uri="{FF2B5EF4-FFF2-40B4-BE49-F238E27FC236}">
-                <a16:creationId xmlns:a16="http://schemas.microsoft.com/office/drawing/2014/main" id="{2F8B1AFB-2FAB-4DFA-9905-338989C29010}"/>
+                <a16:creationId xmlns:a16="http://schemas.microsoft.com/office/drawing/2014/main" id="{560FCC67-D332-4547-B10D-30E4C78F3853}"/>
               </a:ext>
             </a:extLst>
           </p:cNvPr>
@@ -15872,7 +15872,7 @@
           <p:cNvPr id="4" name="">
             <a:extLst xmlns:a="http://schemas.openxmlformats.org/drawingml/2006/main">
               <a:ext uri="{FF2B5EF4-FFF2-40B4-BE49-F238E27FC236}">
-                <a16:creationId xmlns:a16="http://schemas.microsoft.com/office/drawing/2014/main" id="{33CFE360-E07B-4E44-AE2D-5921EFA5FB66}"/>
+                <a16:creationId xmlns:a16="http://schemas.microsoft.com/office/drawing/2014/main" id="{8588B1B3-5EB5-4408-9A8B-31CFB234D196}"/>
               </a:ext>
             </a:extLst>
           </p:cNvPr>
@@ -15936,7 +15936,7 @@
           <p:cNvPr id="5" name="">
             <a:extLst xmlns:a="http://schemas.openxmlformats.org/drawingml/2006/main">
               <a:ext uri="{FF2B5EF4-FFF2-40B4-BE49-F238E27FC236}">
-                <a16:creationId xmlns:a16="http://schemas.microsoft.com/office/drawing/2014/main" id="{97CCACEE-4041-4A6A-9DF3-73F906B80862}"/>
+                <a16:creationId xmlns:a16="http://schemas.microsoft.com/office/drawing/2014/main" id="{EFA4EB1F-BC61-428B-AFB6-E38CA73C5F19}"/>
               </a:ext>
             </a:extLst>
           </p:cNvPr>
@@ -16000,7 +16000,7 @@
           <p:cNvPr id="6" name="">
             <a:extLst xmlns:a="http://schemas.openxmlformats.org/drawingml/2006/main">
               <a:ext uri="{FF2B5EF4-FFF2-40B4-BE49-F238E27FC236}">
-                <a16:creationId xmlns:a16="http://schemas.microsoft.com/office/drawing/2014/main" id="{EBCF5BF4-22DE-405C-99A2-87A1F94E5B06}"/>
+                <a16:creationId xmlns:a16="http://schemas.microsoft.com/office/drawing/2014/main" id="{A2F3BEA8-4C31-4862-963B-D3B401B72199}"/>
               </a:ext>
             </a:extLst>
           </p:cNvPr>
@@ -16064,7 +16064,7 @@
           <p:cNvPr id="7" name="">
             <a:extLst xmlns:a="http://schemas.openxmlformats.org/drawingml/2006/main">
               <a:ext uri="{FF2B5EF4-FFF2-40B4-BE49-F238E27FC236}">
-                <a16:creationId xmlns:a16="http://schemas.microsoft.com/office/drawing/2014/main" id="{D5704550-FF88-4B3A-9F3A-D7B5E5BF0FC0}"/>
+                <a16:creationId xmlns:a16="http://schemas.microsoft.com/office/drawing/2014/main" id="{48FF50C4-4B6B-484D-844B-08CEB838988B}"/>
               </a:ext>
             </a:extLst>
           </p:cNvPr>
@@ -16099,7 +16099,7 @@
           <p:cNvPr id="8" name="">
             <a:extLst xmlns:a="http://schemas.openxmlformats.org/drawingml/2006/main">
               <a:ext uri="{FF2B5EF4-FFF2-40B4-BE49-F238E27FC236}">
-                <a16:creationId xmlns:a16="http://schemas.microsoft.com/office/drawing/2014/main" id="{682830F3-E817-4B95-B879-3136F507AEB3}"/>
+                <a16:creationId xmlns:a16="http://schemas.microsoft.com/office/drawing/2014/main" id="{C9630D88-9485-4636-A9CD-806B89EB0CD4}"/>
               </a:ext>
             </a:extLst>
           </p:cNvPr>
@@ -16163,7 +16163,7 @@
           <p:cNvPr id="9" name="">
             <a:extLst xmlns:a="http://schemas.openxmlformats.org/drawingml/2006/main">
               <a:ext uri="{FF2B5EF4-FFF2-40B4-BE49-F238E27FC236}">
-                <a16:creationId xmlns:a16="http://schemas.microsoft.com/office/drawing/2014/main" id="{68940402-F0A0-4C4D-A112-24A4FACAB786}"/>
+                <a16:creationId xmlns:a16="http://schemas.microsoft.com/office/drawing/2014/main" id="{5DCC6169-2C49-4DA9-B56E-5EE75449D310}"/>
               </a:ext>
             </a:extLst>
           </p:cNvPr>
@@ -16227,7 +16227,7 @@
           <p:cNvPr id="10" name="">
             <a:extLst xmlns:a="http://schemas.openxmlformats.org/drawingml/2006/main">
               <a:ext uri="{FF2B5EF4-FFF2-40B4-BE49-F238E27FC236}">
-                <a16:creationId xmlns:a16="http://schemas.microsoft.com/office/drawing/2014/main" id="{525059BE-45C0-41AF-B2B6-F464B775D710}"/>
+                <a16:creationId xmlns:a16="http://schemas.microsoft.com/office/drawing/2014/main" id="{7F653DC2-168E-4862-B056-40518ADA1E52}"/>
               </a:ext>
             </a:extLst>
           </p:cNvPr>
@@ -16262,7 +16262,7 @@
           <p:cNvPr id="11" name="">
             <a:extLst xmlns:a="http://schemas.openxmlformats.org/drawingml/2006/main">
               <a:ext uri="{FF2B5EF4-FFF2-40B4-BE49-F238E27FC236}">
-                <a16:creationId xmlns:a16="http://schemas.microsoft.com/office/drawing/2014/main" id="{3F3F62A9-B6DD-4E75-BA40-4C35125EB38D}"/>
+                <a16:creationId xmlns:a16="http://schemas.microsoft.com/office/drawing/2014/main" id="{B6C644E3-1020-4B83-9C83-5571830D2C06}"/>
               </a:ext>
             </a:extLst>
           </p:cNvPr>
@@ -16326,7 +16326,7 @@
           <p:cNvPr id="12" name="">
             <a:extLst xmlns:a="http://schemas.openxmlformats.org/drawingml/2006/main">
               <a:ext uri="{FF2B5EF4-FFF2-40B4-BE49-F238E27FC236}">
-                <a16:creationId xmlns:a16="http://schemas.microsoft.com/office/drawing/2014/main" id="{AECB37FA-56EB-4FF8-B430-CD947AFEA468}"/>
+                <a16:creationId xmlns:a16="http://schemas.microsoft.com/office/drawing/2014/main" id="{94797725-F4C5-4489-987F-D9560A42BCAF}"/>
               </a:ext>
             </a:extLst>
           </p:cNvPr>
@@ -16390,7 +16390,7 @@
           <p:cNvPr id="13" name="">
             <a:extLst xmlns:a="http://schemas.openxmlformats.org/drawingml/2006/main">
               <a:ext uri="{FF2B5EF4-FFF2-40B4-BE49-F238E27FC236}">
-                <a16:creationId xmlns:a16="http://schemas.microsoft.com/office/drawing/2014/main" id="{F326121D-34B9-4FDB-B2F9-CD45BB9F2396}"/>
+                <a16:creationId xmlns:a16="http://schemas.microsoft.com/office/drawing/2014/main" id="{36E07B79-AEF5-4BF1-8D06-90F724373EE4}"/>
               </a:ext>
             </a:extLst>
           </p:cNvPr>
@@ -16425,7 +16425,7 @@
           <p:cNvPr id="14" name="">
             <a:extLst xmlns:a="http://schemas.openxmlformats.org/drawingml/2006/main">
               <a:ext uri="{FF2B5EF4-FFF2-40B4-BE49-F238E27FC236}">
-                <a16:creationId xmlns:a16="http://schemas.microsoft.com/office/drawing/2014/main" id="{A59E513A-FB39-4856-9280-CC687EE1D449}"/>
+                <a16:creationId xmlns:a16="http://schemas.microsoft.com/office/drawing/2014/main" id="{921C32B5-8AC5-40CB-A240-89C565614F8C}"/>
               </a:ext>
             </a:extLst>
           </p:cNvPr>
@@ -16489,7 +16489,7 @@
           <p:cNvPr id="15" name="">
             <a:extLst xmlns:a="http://schemas.openxmlformats.org/drawingml/2006/main">
               <a:ext uri="{FF2B5EF4-FFF2-40B4-BE49-F238E27FC236}">
-                <a16:creationId xmlns:a16="http://schemas.microsoft.com/office/drawing/2014/main" id="{77065263-9E36-4AE4-8078-4F9107A3AE7F}"/>
+                <a16:creationId xmlns:a16="http://schemas.microsoft.com/office/drawing/2014/main" id="{33ACC1B9-B42C-42D6-A7BE-69C5B7DA7E86}"/>
               </a:ext>
             </a:extLst>
           </p:cNvPr>
@@ -16553,7 +16553,7 @@
           <p:cNvPr id="16" name="">
             <a:extLst xmlns:a="http://schemas.openxmlformats.org/drawingml/2006/main">
               <a:ext uri="{FF2B5EF4-FFF2-40B4-BE49-F238E27FC236}">
-                <a16:creationId xmlns:a16="http://schemas.microsoft.com/office/drawing/2014/main" id="{11B17AA8-598A-4DB7-B22A-9CAEF5585D38}"/>
+                <a16:creationId xmlns:a16="http://schemas.microsoft.com/office/drawing/2014/main" id="{F65CFFEC-4B62-405B-BEB5-0E21935FB36E}"/>
               </a:ext>
             </a:extLst>
           </p:cNvPr>
@@ -16588,7 +16588,7 @@
           <p:cNvPr id="17" name="">
             <a:extLst xmlns:a="http://schemas.openxmlformats.org/drawingml/2006/main">
               <a:ext uri="{FF2B5EF4-FFF2-40B4-BE49-F238E27FC236}">
-                <a16:creationId xmlns:a16="http://schemas.microsoft.com/office/drawing/2014/main" id="{7FEA5FC8-67E3-4564-A86C-D73413E35A2B}"/>
+                <a16:creationId xmlns:a16="http://schemas.microsoft.com/office/drawing/2014/main" id="{942D535C-3169-4057-B454-6512784CBAAD}"/>
               </a:ext>
             </a:extLst>
           </p:cNvPr>
@@ -16652,7 +16652,7 @@
           <p:cNvPr id="18" name="">
             <a:extLst xmlns:a="http://schemas.openxmlformats.org/drawingml/2006/main">
               <a:ext uri="{FF2B5EF4-FFF2-40B4-BE49-F238E27FC236}">
-                <a16:creationId xmlns:a16="http://schemas.microsoft.com/office/drawing/2014/main" id="{8A3307A3-3B47-4AAA-91BE-C7D327A896B9}"/>
+                <a16:creationId xmlns:a16="http://schemas.microsoft.com/office/drawing/2014/main" id="{DDD4A514-2718-44F0-8EE6-AF29FFB1CC6B}"/>
               </a:ext>
             </a:extLst>
           </p:cNvPr>
@@ -16716,7 +16716,7 @@
           <p:cNvPr id="19" name="">
             <a:extLst xmlns:a="http://schemas.openxmlformats.org/drawingml/2006/main">
               <a:ext uri="{FF2B5EF4-FFF2-40B4-BE49-F238E27FC236}">
-                <a16:creationId xmlns:a16="http://schemas.microsoft.com/office/drawing/2014/main" id="{7644E13A-5FA8-4E08-A1FA-C84FAEAD7776}"/>
+                <a16:creationId xmlns:a16="http://schemas.microsoft.com/office/drawing/2014/main" id="{121D75ED-5456-4D95-A271-C55490B26D31}"/>
               </a:ext>
             </a:extLst>
           </p:cNvPr>
@@ -16751,7 +16751,7 @@
           <p:cNvPr id="20" name="">
             <a:extLst xmlns:a="http://schemas.openxmlformats.org/drawingml/2006/main">
               <a:ext uri="{FF2B5EF4-FFF2-40B4-BE49-F238E27FC236}">
-                <a16:creationId xmlns:a16="http://schemas.microsoft.com/office/drawing/2014/main" id="{4FEEAA2F-A746-411A-B70F-FF5344ADD1FE}"/>
+                <a16:creationId xmlns:a16="http://schemas.microsoft.com/office/drawing/2014/main" id="{8D89103A-D925-4349-B49C-2FFA8F791066}"/>
               </a:ext>
             </a:extLst>
           </p:cNvPr>
@@ -16815,7 +16815,7 @@
           <p:cNvPr id="21" name="">
             <a:extLst xmlns:a="http://schemas.openxmlformats.org/drawingml/2006/main">
               <a:ext uri="{FF2B5EF4-FFF2-40B4-BE49-F238E27FC236}">
-                <a16:creationId xmlns:a16="http://schemas.microsoft.com/office/drawing/2014/main" id="{3D77B8A8-B2C8-46D9-B95B-D23C613B52FD}"/>
+                <a16:creationId xmlns:a16="http://schemas.microsoft.com/office/drawing/2014/main" id="{4C2464F0-1752-4638-9783-F746368A7939}"/>
               </a:ext>
             </a:extLst>
           </p:cNvPr>
@@ -16879,7 +16879,7 @@
           <p:cNvPr id="22" name="">
             <a:extLst xmlns:a="http://schemas.openxmlformats.org/drawingml/2006/main">
               <a:ext uri="{FF2B5EF4-FFF2-40B4-BE49-F238E27FC236}">
-                <a16:creationId xmlns:a16="http://schemas.microsoft.com/office/drawing/2014/main" id="{118E5C0D-9BD5-4980-AA35-9E5ED0421222}"/>
+                <a16:creationId xmlns:a16="http://schemas.microsoft.com/office/drawing/2014/main" id="{5A8BCBA3-6C53-48B5-A7B1-5996F11B7718}"/>
               </a:ext>
             </a:extLst>
           </p:cNvPr>
@@ -16912,7 +16912,7 @@
           <p:cNvPr id="23" name="">
             <a:extLst xmlns:a="http://schemas.openxmlformats.org/drawingml/2006/main">
               <a:ext uri="{FF2B5EF4-FFF2-40B4-BE49-F238E27FC236}">
-                <a16:creationId xmlns:a16="http://schemas.microsoft.com/office/drawing/2014/main" id="{5E974D34-93D1-4921-9E6D-708C09D16466}"/>
+                <a16:creationId xmlns:a16="http://schemas.microsoft.com/office/drawing/2014/main" id="{581EB65F-D662-4499-9513-83C41B71F048}"/>
               </a:ext>
             </a:extLst>
           </p:cNvPr>
@@ -16947,7 +16947,7 @@
           <p:cNvPr id="24" name="">
             <a:extLst xmlns:a="http://schemas.openxmlformats.org/drawingml/2006/main">
               <a:ext uri="{FF2B5EF4-FFF2-40B4-BE49-F238E27FC236}">
-                <a16:creationId xmlns:a16="http://schemas.microsoft.com/office/drawing/2014/main" id="{90BF39C8-29DE-43A7-87DC-C4AD796CC52F}"/>
+                <a16:creationId xmlns:a16="http://schemas.microsoft.com/office/drawing/2014/main" id="{FD8F37AC-A416-4C6F-9545-2F2BA779E319}"/>
               </a:ext>
             </a:extLst>
           </p:cNvPr>
@@ -17011,7 +17011,7 @@
           <p:cNvPr id="25" name="">
             <a:extLst xmlns:a="http://schemas.openxmlformats.org/drawingml/2006/main">
               <a:ext uri="{FF2B5EF4-FFF2-40B4-BE49-F238E27FC236}">
-                <a16:creationId xmlns:a16="http://schemas.microsoft.com/office/drawing/2014/main" id="{9B9D4261-74C9-48A9-841F-8D5AF4FFD819}"/>
+                <a16:creationId xmlns:a16="http://schemas.microsoft.com/office/drawing/2014/main" id="{6C83EF18-627F-4572-A953-508822E3D8DE}"/>
               </a:ext>
             </a:extLst>
           </p:cNvPr>
@@ -17075,7 +17075,7 @@
           <p:cNvPr id="26" name="">
             <a:extLst xmlns:a="http://schemas.openxmlformats.org/drawingml/2006/main">
               <a:ext uri="{FF2B5EF4-FFF2-40B4-BE49-F238E27FC236}">
-                <a16:creationId xmlns:a16="http://schemas.microsoft.com/office/drawing/2014/main" id="{92F0F27B-6C44-4E76-AD85-36CD3DE38560}"/>
+                <a16:creationId xmlns:a16="http://schemas.microsoft.com/office/drawing/2014/main" id="{A73AC676-A43A-4E5F-BC0F-669405C0986F}"/>
               </a:ext>
             </a:extLst>
           </p:cNvPr>
@@ -17108,7 +17108,7 @@
           <p:cNvPr id="27" name="">
             <a:extLst xmlns:a="http://schemas.openxmlformats.org/drawingml/2006/main">
               <a:ext uri="{FF2B5EF4-FFF2-40B4-BE49-F238E27FC236}">
-                <a16:creationId xmlns:a16="http://schemas.microsoft.com/office/drawing/2014/main" id="{EF79BE46-474C-4875-98FA-5198C43D89B2}"/>
+                <a16:creationId xmlns:a16="http://schemas.microsoft.com/office/drawing/2014/main" id="{5718591A-185A-4B9A-8347-595928B0876E}"/>
               </a:ext>
             </a:extLst>
           </p:cNvPr>
@@ -17143,7 +17143,7 @@
           <p:cNvPr id="28" name="">
             <a:extLst xmlns:a="http://schemas.openxmlformats.org/drawingml/2006/main">
               <a:ext uri="{FF2B5EF4-FFF2-40B4-BE49-F238E27FC236}">
-                <a16:creationId xmlns:a16="http://schemas.microsoft.com/office/drawing/2014/main" id="{F2761F40-5EC8-4F07-A4E0-33FF0C3D7174}"/>
+                <a16:creationId xmlns:a16="http://schemas.microsoft.com/office/drawing/2014/main" id="{9DF097C8-FBB1-4042-91FD-A63F9C11CD93}"/>
               </a:ext>
             </a:extLst>
           </p:cNvPr>
@@ -17207,7 +17207,7 @@
           <p:cNvPr id="29" name="">
             <a:extLst xmlns:a="http://schemas.openxmlformats.org/drawingml/2006/main">
               <a:ext uri="{FF2B5EF4-FFF2-40B4-BE49-F238E27FC236}">
-                <a16:creationId xmlns:a16="http://schemas.microsoft.com/office/drawing/2014/main" id="{64C84509-699B-4215-934C-E8020DD2693B}"/>
+                <a16:creationId xmlns:a16="http://schemas.microsoft.com/office/drawing/2014/main" id="{B875769A-2691-4B01-B80C-C5D61D119C6D}"/>
               </a:ext>
             </a:extLst>
           </p:cNvPr>
@@ -17271,7 +17271,7 @@
           <p:cNvPr id="30" name="">
             <a:extLst xmlns:a="http://schemas.openxmlformats.org/drawingml/2006/main">
               <a:ext uri="{FF2B5EF4-FFF2-40B4-BE49-F238E27FC236}">
-                <a16:creationId xmlns:a16="http://schemas.microsoft.com/office/drawing/2014/main" id="{0D48E27C-0D20-48B9-9671-7FADEAC1304F}"/>
+                <a16:creationId xmlns:a16="http://schemas.microsoft.com/office/drawing/2014/main" id="{C33E63C5-9C4C-4CD9-8625-D81E918B6C9D}"/>
               </a:ext>
             </a:extLst>
           </p:cNvPr>
@@ -17304,7 +17304,7 @@
           <p:cNvPr id="31" name="">
             <a:extLst xmlns:a="http://schemas.openxmlformats.org/drawingml/2006/main">
               <a:ext uri="{FF2B5EF4-FFF2-40B4-BE49-F238E27FC236}">
-                <a16:creationId xmlns:a16="http://schemas.microsoft.com/office/drawing/2014/main" id="{D63357F7-5291-4EC5-A3F8-C8699D33094E}"/>
+                <a16:creationId xmlns:a16="http://schemas.microsoft.com/office/drawing/2014/main" id="{D87A5D62-FD70-438A-9CAB-71A95214BCCF}"/>
               </a:ext>
             </a:extLst>
           </p:cNvPr>
@@ -17339,7 +17339,7 @@
           <p:cNvPr id="32" name="">
             <a:extLst xmlns:a="http://schemas.openxmlformats.org/drawingml/2006/main">
               <a:ext uri="{FF2B5EF4-FFF2-40B4-BE49-F238E27FC236}">
-                <a16:creationId xmlns:a16="http://schemas.microsoft.com/office/drawing/2014/main" id="{C542A06E-8DF2-4328-BD77-2079D2C41566}"/>
+                <a16:creationId xmlns:a16="http://schemas.microsoft.com/office/drawing/2014/main" id="{A12A1094-5B28-4B85-A6AD-842517470940}"/>
               </a:ext>
             </a:extLst>
           </p:cNvPr>
@@ -17403,7 +17403,7 @@
           <p:cNvPr id="33" name="">
             <a:extLst xmlns:a="http://schemas.openxmlformats.org/drawingml/2006/main">
               <a:ext uri="{FF2B5EF4-FFF2-40B4-BE49-F238E27FC236}">
-                <a16:creationId xmlns:a16="http://schemas.microsoft.com/office/drawing/2014/main" id="{F35C61FF-0FFC-4278-A4CC-B93F55DD938A}"/>
+                <a16:creationId xmlns:a16="http://schemas.microsoft.com/office/drawing/2014/main" id="{3C91C737-99DC-4CD0-9E1D-C9ACEC638777}"/>
               </a:ext>
             </a:extLst>
           </p:cNvPr>
@@ -17467,7 +17467,7 @@
           <p:cNvPr id="34" name="">
             <a:extLst xmlns:a="http://schemas.openxmlformats.org/drawingml/2006/main">
               <a:ext uri="{FF2B5EF4-FFF2-40B4-BE49-F238E27FC236}">
-                <a16:creationId xmlns:a16="http://schemas.microsoft.com/office/drawing/2014/main" id="{6FAC222D-658A-4A8F-8C3E-DA8D5CC15EAC}"/>
+                <a16:creationId xmlns:a16="http://schemas.microsoft.com/office/drawing/2014/main" id="{664BB539-7FE4-41AE-8854-005DE46C0780}"/>
               </a:ext>
             </a:extLst>
           </p:cNvPr>
@@ -17531,7 +17531,7 @@
           <p:cNvPr id="35" name="">
             <a:extLst xmlns:a="http://schemas.openxmlformats.org/drawingml/2006/main">
               <a:ext uri="{FF2B5EF4-FFF2-40B4-BE49-F238E27FC236}">
-                <a16:creationId xmlns:a16="http://schemas.microsoft.com/office/drawing/2014/main" id="{9274685E-1B5A-47F2-9B4F-4E1B86675F5A}"/>
+                <a16:creationId xmlns:a16="http://schemas.microsoft.com/office/drawing/2014/main" id="{B3F4538E-F52E-45FE-ABB4-53579632ADF3}"/>
               </a:ext>
             </a:extLst>
           </p:cNvPr>
@@ -17564,7 +17564,7 @@
           <p:cNvPr id="36" name="">
             <a:extLst xmlns:a="http://schemas.openxmlformats.org/drawingml/2006/main">
               <a:ext uri="{FF2B5EF4-FFF2-40B4-BE49-F238E27FC236}">
-                <a16:creationId xmlns:a16="http://schemas.microsoft.com/office/drawing/2014/main" id="{9516DA5D-AED7-4FB3-91C6-8D1BCC0629BE}"/>
+                <a16:creationId xmlns:a16="http://schemas.microsoft.com/office/drawing/2014/main" id="{E82938A4-9A29-46C6-B59D-329C26FFD987}"/>
               </a:ext>
             </a:extLst>
           </p:cNvPr>
@@ -17628,7 +17628,7 @@
           <p:cNvPr id="37" name="">
             <a:extLst xmlns:a="http://schemas.openxmlformats.org/drawingml/2006/main">
               <a:ext uri="{FF2B5EF4-FFF2-40B4-BE49-F238E27FC236}">
-                <a16:creationId xmlns:a16="http://schemas.microsoft.com/office/drawing/2014/main" id="{E0C88837-62C9-4DA3-A6B2-2086A40B62AB}"/>
+                <a16:creationId xmlns:a16="http://schemas.microsoft.com/office/drawing/2014/main" id="{5157A7F0-1E72-4E8C-9903-8AF55DB8B702}"/>
               </a:ext>
             </a:extLst>
           </p:cNvPr>
@@ -17690,7 +17690,7 @@
     </p:spTree>
     <p:extLst>
       <p:ext uri="{BB962C8B-B14F-4D97-AF65-F5344CB8AC3E}">
-        <p14:creationId xmlns:p14="http://schemas.microsoft.com/office/powerpoint/2010/main" val="558550661"/>
+        <p14:creationId xmlns:p14="http://schemas.microsoft.com/office/powerpoint/2010/main" val="1518809252"/>
       </p:ext>
     </p:extLst>
   </p:cSld>
